--- a/docs/plan-crecimiento-datarev.pptx
+++ b/docs/plan-crecimiento-datarev.pptx
@@ -20,9 +20,11 @@
     <p:sldId id="268" r:id="rId14"/>
     <p:sldId id="269" r:id="rId15"/>
     <p:sldId id="270" r:id="rId16"/>
+    <p:sldId id="271" r:id="rId17"/>
+    <p:sldId id="272" r:id="rId18"/>
   </p:sldIdLst>
   <p:notesMasterIdLst>
-    <p:notesMasterId r:id="rId17"/>
+    <p:notesMasterId r:id="rId19"/>
   </p:notesMasterIdLst>
   <p:sldSz cx="12192000" cy="6858000"/>
   <p:notesSz cx="6858000" cy="12192000"/>
@@ -857,7 +859,7 @@
           <a:p>
             <a:r>
               <a:rPr lang="en-US" dirty="0"/>
-              <a:t/>
+              <a:t>Este motor se agrego tras la observacion de Dante de que el analisis original lo subestimaba. Es correcto: estaba como una linea de la Fase 3.</a:t>
             </a:r>
             <a:endParaRPr lang="en-US" dirty="0"/>
           </a:p>
@@ -1321,6 +1323,182 @@
             <a:fld id="{F7021451-1387-4CA6-816F-3879F97B5CBC}" type="slidenum">
               <a:rPr lang="en-US"/>
               <a:t>15</a:t>
+            </a:fld>
+            <a:endParaRPr lang="en-US"/>
+          </a:p>
+        </p:txBody>
+      </p:sp>
+    </p:spTree>
+    <p:extLst>
+      <p:ext uri="{BB962C8B-B14F-4D97-AF65-F5344CB8AC3E}">
+        <p14:creationId xmlns:p14="http://schemas.microsoft.com/office/powerpoint/2010/main" val="1024086991"/>
+      </p:ext>
+    </p:extLst>
+  </p:cSld>
+  <p:clrMapOvr>
+    <a:masterClrMapping/>
+  </p:clrMapOvr>
+</p:notes>
+</file>
+
+<file path=ppt/notesSlides/notesSlide16.xml><?xml version="1.0" encoding="utf-8"?>
+<p:notes xmlns:a="http://schemas.openxmlformats.org/drawingml/2006/main" xmlns:r="http://schemas.openxmlformats.org/officeDocument/2006/relationships" xmlns:p="http://schemas.openxmlformats.org/presentationml/2006/main">
+  <p:cSld>
+    <p:spTree>
+      <p:nvGrpSpPr>
+        <p:cNvPr id="1" name=""/>
+        <p:cNvGrpSpPr/>
+        <p:nvPr/>
+      </p:nvGrpSpPr>
+      <p:grpSpPr>
+        <a:xfrm>
+          <a:off x="0" y="0"/>
+          <a:ext cx="0" cy="0"/>
+          <a:chOff x="0" y="0"/>
+          <a:chExt cx="0" cy="0"/>
+        </a:xfrm>
+      </p:grpSpPr>
+      <p:sp>
+        <p:nvSpPr>
+          <p:cNvPr id="2" name="Slide Image Placeholder 1"/>
+          <p:cNvSpPr>
+            <a:spLocks noGrp="1" noRot="1" noChangeAspect="1"/>
+          </p:cNvSpPr>
+          <p:nvPr>
+            <p:ph type="sldImg"/>
+          </p:nvPr>
+        </p:nvSpPr>
+        <p:spPr/>
+      </p:sp>
+      <p:sp>
+        <p:nvSpPr>
+          <p:cNvPr id="3" name="Notes Placeholder 2"/>
+          <p:cNvSpPr>
+            <a:spLocks noGrp="1"/>
+          </p:cNvSpPr>
+          <p:nvPr>
+            <p:ph type="body" idx="1"/>
+          </p:nvPr>
+        </p:nvSpPr>
+        <p:spPr/>
+        <p:txBody>
+          <a:bodyPr/>
+          <a:lstStyle/>
+          <a:p>
+            <a:r>
+              <a:rPr lang="en-US" dirty="0"/>
+              <a:t/>
+            </a:r>
+            <a:endParaRPr lang="en-US" dirty="0"/>
+          </a:p>
+        </p:txBody>
+      </p:sp>
+      <p:sp>
+        <p:nvSpPr>
+          <p:cNvPr id="4" name="Slide Number Placeholder 3"/>
+          <p:cNvSpPr>
+            <a:spLocks noGrp="1"/>
+          </p:cNvSpPr>
+          <p:nvPr>
+            <p:ph type="sldNum" sz="quarter" idx="10"/>
+          </p:nvPr>
+        </p:nvSpPr>
+        <p:spPr/>
+        <p:txBody>
+          <a:bodyPr/>
+          <a:lstStyle/>
+          <a:p>
+            <a:fld id="{F7021451-1387-4CA6-816F-3879F97B5CBC}" type="slidenum">
+              <a:rPr lang="en-US"/>
+              <a:t>16</a:t>
+            </a:fld>
+            <a:endParaRPr lang="en-US"/>
+          </a:p>
+        </p:txBody>
+      </p:sp>
+    </p:spTree>
+    <p:extLst>
+      <p:ext uri="{BB962C8B-B14F-4D97-AF65-F5344CB8AC3E}">
+        <p14:creationId xmlns:p14="http://schemas.microsoft.com/office/powerpoint/2010/main" val="1024086991"/>
+      </p:ext>
+    </p:extLst>
+  </p:cSld>
+  <p:clrMapOvr>
+    <a:masterClrMapping/>
+  </p:clrMapOvr>
+</p:notes>
+</file>
+
+<file path=ppt/notesSlides/notesSlide17.xml><?xml version="1.0" encoding="utf-8"?>
+<p:notes xmlns:a="http://schemas.openxmlformats.org/drawingml/2006/main" xmlns:r="http://schemas.openxmlformats.org/officeDocument/2006/relationships" xmlns:p="http://schemas.openxmlformats.org/presentationml/2006/main">
+  <p:cSld>
+    <p:spTree>
+      <p:nvGrpSpPr>
+        <p:cNvPr id="1" name=""/>
+        <p:cNvGrpSpPr/>
+        <p:nvPr/>
+      </p:nvGrpSpPr>
+      <p:grpSpPr>
+        <a:xfrm>
+          <a:off x="0" y="0"/>
+          <a:ext cx="0" cy="0"/>
+          <a:chOff x="0" y="0"/>
+          <a:chExt cx="0" cy="0"/>
+        </a:xfrm>
+      </p:grpSpPr>
+      <p:sp>
+        <p:nvSpPr>
+          <p:cNvPr id="2" name="Slide Image Placeholder 1"/>
+          <p:cNvSpPr>
+            <a:spLocks noGrp="1" noRot="1" noChangeAspect="1"/>
+          </p:cNvSpPr>
+          <p:nvPr>
+            <p:ph type="sldImg"/>
+          </p:nvPr>
+        </p:nvSpPr>
+        <p:spPr/>
+      </p:sp>
+      <p:sp>
+        <p:nvSpPr>
+          <p:cNvPr id="3" name="Notes Placeholder 2"/>
+          <p:cNvSpPr>
+            <a:spLocks noGrp="1"/>
+          </p:cNvSpPr>
+          <p:nvPr>
+            <p:ph type="body" idx="1"/>
+          </p:nvPr>
+        </p:nvSpPr>
+        <p:spPr/>
+        <p:txBody>
+          <a:bodyPr/>
+          <a:lstStyle/>
+          <a:p>
+            <a:r>
+              <a:rPr lang="en-US" dirty="0"/>
+              <a:t/>
+            </a:r>
+            <a:endParaRPr lang="en-US" dirty="0"/>
+          </a:p>
+        </p:txBody>
+      </p:sp>
+      <p:sp>
+        <p:nvSpPr>
+          <p:cNvPr id="4" name="Slide Number Placeholder 3"/>
+          <p:cNvSpPr>
+            <a:spLocks noGrp="1"/>
+          </p:cNvSpPr>
+          <p:nvPr>
+            <p:ph type="sldNum" sz="quarter" idx="10"/>
+          </p:nvPr>
+        </p:nvSpPr>
+        <p:spPr/>
+        <p:txBody>
+          <a:bodyPr/>
+          <a:lstStyle/>
+          <a:p>
+            <a:fld id="{F7021451-1387-4CA6-816F-3879F97B5CBC}" type="slidenum">
+              <a:rPr lang="en-US"/>
+              <a:t>17</a:t>
             </a:fld>
             <a:endParaRPr lang="en-US"/>
           </a:p>
@@ -2927,7 +3105,7 @@
                 <a:ea typeface="Calibri" pitchFamily="34" charset="-122"/>
                 <a:cs typeface="Calibri" pitchFamily="34" charset="-120"/>
               </a:rPr>
-              <a:t>ROADMAP</a:t>
+              <a:t>MOTOR 03 · EL CANAL QUE NO ES MARKETING</a:t>
             </a:r>
             <a:endParaRPr lang="en-US" sz="1100" dirty="0"/>
           </a:p>
@@ -2966,58 +3144,13 @@
                 <a:ea typeface="Calibri" pitchFamily="34" charset="-122"/>
                 <a:cs typeface="Calibri" pitchFamily="34" charset="-120"/>
               </a:rPr>
-              <a:t>Cuatro fases, 18 meses</a:t>
-            </a:r>
-            <a:endParaRPr lang="en-US" sz="3400" dirty="0"/>
-          </a:p>
-        </p:txBody>
-      </p:sp>
-      <p:sp>
-        <p:nvSpPr>
-          <p:cNvPr id="4" name="Shape 2"/>
-          <p:cNvSpPr/>
-          <p:nvPr/>
-        </p:nvSpPr>
-        <p:spPr>
-          <a:xfrm>
-            <a:off x="566928" y="1746504"/>
-            <a:ext cx="201168" cy="201168"/>
-          </a:xfrm>
-          <a:prstGeom prst="ellipse">
-            <a:avLst/>
-          </a:prstGeom>
-          <a:solidFill>
-            <a:srgbClr val="00C2FF"/>
-          </a:solidFill>
-          <a:ln/>
-        </p:spPr>
-      </p:sp>
-      <p:sp>
-        <p:nvSpPr>
-          <p:cNvPr id="5" name="Text 3"/>
-          <p:cNvSpPr/>
-          <p:nvPr/>
-        </p:nvSpPr>
-        <p:spPr>
-          <a:xfrm>
-            <a:off x="950976" y="1691640"/>
-            <a:ext cx="10515600" cy="274320"/>
-          </a:xfrm>
-          <a:prstGeom prst="rect">
-            <a:avLst/>
-          </a:prstGeom>
-          <a:noFill/>
-          <a:ln/>
-        </p:spPr>
-        <p:txBody>
-          <a:bodyPr wrap="square" lIns="0" tIns="0" rIns="0" bIns="0" rtlCol="0" anchor="ctr"/>
-          <a:lstStyle/>
-          <a:p>
+              <a:t>Certificarse hace que el proveedor </a:t>
+            </a:r>
             <a:pPr indent="0" marL="0">
               <a:buNone/>
             </a:pPr>
             <a:r>
-              <a:rPr lang="en-US" sz="1100" b="1" spc="110" kern="0" dirty="0">
+              <a:rPr lang="en-US" sz="3400" b="1" dirty="0">
                 <a:solidFill>
                   <a:srgbClr val="00C2FF"/>
                 </a:solidFill>
@@ -3025,22 +3158,22 @@
                 <a:ea typeface="Calibri" pitchFamily="34" charset="-122"/>
                 <a:cs typeface="Calibri" pitchFamily="34" charset="-120"/>
               </a:rPr>
-              <a:t>FASE 0 · SEMANAS 1–4 · FUNDAMENTOS</a:t>
-            </a:r>
-            <a:endParaRPr lang="en-US" sz="1100" dirty="0"/>
+              <a:t>te asigne casos</a:t>
+            </a:r>
+            <a:endParaRPr lang="en-US" sz="3400" dirty="0"/>
           </a:p>
         </p:txBody>
       </p:sp>
       <p:sp>
         <p:nvSpPr>
-          <p:cNvPr id="6" name="Text 4"/>
-          <p:cNvSpPr/>
-          <p:nvPr/>
-        </p:nvSpPr>
-        <p:spPr>
-          <a:xfrm>
-            <a:off x="950976" y="1993392"/>
-            <a:ext cx="10515600" cy="713232"/>
+          <p:cNvPr id="4" name="Text 2"/>
+          <p:cNvSpPr/>
+          <p:nvPr/>
+        </p:nvSpPr>
+        <p:spPr>
+          <a:xfrm>
+            <a:off x="566928" y="1444752"/>
+            <a:ext cx="11027664" cy="566928"/>
           </a:xfrm>
           <a:prstGeom prst="rect">
             <a:avLst/>
@@ -3054,12 +3187,12 @@
           <a:p>
             <a:pPr indent="0" marL="0">
               <a:lnSpc>
-                <a:spcPts val="2000"/>
+                <a:spcPts val="2100"/>
               </a:lnSpc>
               <a:buNone/>
             </a:pPr>
             <a:r>
-              <a:rPr lang="en-US" sz="1250" dirty="0">
+              <a:rPr lang="en-US" sz="1350" dirty="0">
                 <a:solidFill>
                   <a:srgbClr val="AAB4D4"/>
                 </a:solidFill>
@@ -3067,42 +3200,49 @@
                 <a:ea typeface="Calibri" pitchFamily="34" charset="-122"/>
                 <a:cs typeface="Calibri" pitchFamily="34" charset="-120"/>
               </a:rPr>
-              <a:t>Elegir un nicho declarado (recomendación: manufactura y consumo en México, donde el equipo ya tiene Nemak y AB InBev). Empaquetar 3 ofertas con precio cerrado. Publicar 3 casos de éxito con cifras. Instrumentar el CRM.</a:t>
-            </a:r>
-            <a:endParaRPr lang="en-US" sz="1250" dirty="0"/>
+              <a:t>AWS, Microsoft y Google tienen vendedores con cuota que necesitan socios certificados a quién referir la implementación. Estar en esa lista no se compra con pauta: se gana con certificaciones y casos entregados.</a:t>
+            </a:r>
+            <a:endParaRPr lang="en-US" sz="1350" dirty="0"/>
           </a:p>
         </p:txBody>
       </p:sp>
       <p:sp>
         <p:nvSpPr>
-          <p:cNvPr id="7" name="Shape 5"/>
-          <p:cNvSpPr/>
-          <p:nvPr/>
-        </p:nvSpPr>
-        <p:spPr>
-          <a:xfrm>
-            <a:off x="566928" y="2880360"/>
-            <a:ext cx="201168" cy="201168"/>
-          </a:xfrm>
-          <a:prstGeom prst="ellipse">
-            <a:avLst/>
+          <p:cNvPr id="5" name="Shape 3"/>
+          <p:cNvSpPr/>
+          <p:nvPr/>
+        </p:nvSpPr>
+        <p:spPr>
+          <a:xfrm>
+            <a:off x="566928" y="2139696"/>
+            <a:ext cx="3493008" cy="2286000"/>
+          </a:xfrm>
+          <a:prstGeom prst="roundRect">
+            <a:avLst>
+              <a:gd name="adj" fmla="val 4000"/>
+            </a:avLst>
           </a:prstGeom>
           <a:solidFill>
-            <a:srgbClr val="00C2FF"/>
+            <a:srgbClr val="0B1C57"/>
           </a:solidFill>
-          <a:ln/>
-        </p:spPr>
-      </p:sp>
-      <p:sp>
-        <p:nvSpPr>
-          <p:cNvPr id="8" name="Text 6"/>
-          <p:cNvSpPr/>
-          <p:nvPr/>
-        </p:nvSpPr>
-        <p:spPr>
-          <a:xfrm>
-            <a:off x="950976" y="2825496"/>
-            <a:ext cx="10515600" cy="274320"/>
+          <a:ln w="15875">
+            <a:solidFill>
+              <a:srgbClr val="00C2FF"/>
+            </a:solidFill>
+            <a:prstDash val="solid"/>
+          </a:ln>
+        </p:spPr>
+      </p:sp>
+      <p:sp>
+        <p:nvSpPr>
+          <p:cNvPr id="6" name="Text 4"/>
+          <p:cNvSpPr/>
+          <p:nvPr/>
+        </p:nvSpPr>
+        <p:spPr>
+          <a:xfrm>
+            <a:off x="804672" y="2304288"/>
+            <a:ext cx="3017520" cy="237744"/>
           </a:xfrm>
           <a:prstGeom prst="rect">
             <a:avLst/>
@@ -3118,7 +3258,7 @@
               <a:buNone/>
             </a:pPr>
             <a:r>
-              <a:rPr lang="en-US" sz="1100" b="1" spc="110" kern="0" dirty="0">
+              <a:rPr lang="en-US" sz="1000" b="1" spc="120" kern="0" dirty="0">
                 <a:solidFill>
                   <a:srgbClr val="00C2FF"/>
                 </a:solidFill>
@@ -3126,22 +3266,22 @@
                 <a:ea typeface="Calibri" pitchFamily="34" charset="-122"/>
                 <a:cs typeface="Calibri" pitchFamily="34" charset="-120"/>
               </a:rPr>
-              <a:t>FASE 1 · MESES 2–4 · REFERENCIAS Y VISIBILIDAD</a:t>
-            </a:r>
-            <a:endParaRPr lang="en-US" sz="1100" dirty="0"/>
+              <a:t>AWS</a:t>
+            </a:r>
+            <a:endParaRPr lang="en-US" sz="1000" dirty="0"/>
           </a:p>
         </p:txBody>
       </p:sp>
       <p:sp>
         <p:nvSpPr>
-          <p:cNvPr id="9" name="Text 7"/>
-          <p:cNvSpPr/>
-          <p:nvPr/>
-        </p:nvSpPr>
-        <p:spPr>
-          <a:xfrm>
-            <a:off x="950976" y="3127248"/>
-            <a:ext cx="10515600" cy="713232"/>
+          <p:cNvPr id="7" name="Text 5"/>
+          <p:cNvSpPr/>
+          <p:nvPr/>
+        </p:nvSpPr>
+        <p:spPr>
+          <a:xfrm>
+            <a:off x="804672" y="2578608"/>
+            <a:ext cx="3017520" cy="475488"/>
           </a:xfrm>
           <a:prstGeom prst="rect">
             <a:avLst/>
@@ -3154,13 +3294,49 @@
           <a:lstStyle/>
           <a:p>
             <a:pPr indent="0" marL="0">
-              <a:lnSpc>
-                <a:spcPts val="2000"/>
-              </a:lnSpc>
               <a:buNone/>
             </a:pPr>
             <a:r>
-              <a:rPr lang="en-US" sz="1250" dirty="0">
+              <a:rPr lang="en-US" sz="1350" b="1" dirty="0">
+                <a:solidFill>
+                  <a:srgbClr val="EAF1FF"/>
+                </a:solidFill>
+                <a:latin typeface="Calibri" pitchFamily="34" charset="0"/>
+                <a:ea typeface="Calibri" pitchFamily="34" charset="-122"/>
+                <a:cs typeface="Calibri" pitchFamily="34" charset="-120"/>
+              </a:rPr>
+              <a:t>ACE — APN Customer Engagements</a:t>
+            </a:r>
+            <a:endParaRPr lang="en-US" sz="1350" dirty="0"/>
+          </a:p>
+        </p:txBody>
+      </p:sp>
+      <p:sp>
+        <p:nvSpPr>
+          <p:cNvPr id="8" name="Text 6"/>
+          <p:cNvSpPr/>
+          <p:nvPr/>
+        </p:nvSpPr>
+        <p:spPr>
+          <a:xfrm>
+            <a:off x="804672" y="3090672"/>
+            <a:ext cx="3035808" cy="1207008"/>
+          </a:xfrm>
+          <a:prstGeom prst="rect">
+            <a:avLst/>
+          </a:prstGeom>
+          <a:noFill/>
+          <a:ln/>
+        </p:spPr>
+        <p:txBody>
+          <a:bodyPr wrap="square" lIns="0" tIns="0" rIns="0" bIns="0" rtlCol="0" anchor="ctr"/>
+          <a:lstStyle/>
+          <a:p>
+            <a:pPr indent="0" marL="0">
+              <a:buNone/>
+            </a:pPr>
+            <a:r>
+              <a:rPr lang="en-US" sz="1050" dirty="0">
                 <a:solidFill>
                   <a:srgbClr val="AAB4D4"/>
                 </a:solidFill>
@@ -3168,42 +3344,49 @@
                 <a:ea typeface="Calibri" pitchFamily="34" charset="-122"/>
                 <a:cs typeface="Calibri" pitchFamily="34" charset="-120"/>
               </a:rPr>
-              <a:t>Lista de 100 fuentes de referencia. Rutina semanal de referir primero. Los 5 socios publicando en LinkedIn con cadencia fija. Reactivar la red con el diagnóstico como excusa.</a:t>
-            </a:r>
-            <a:endParaRPr lang="en-US" sz="1250" dirty="0"/>
+              <a:t>Plataforma de co-venta donde no sólo compartes oportunidades: recibes las que origina AWS. Tu actividad alimenta un co-sell score que decide qué tan visible eres para sus vendedores.</a:t>
+            </a:r>
+            <a:endParaRPr lang="en-US" sz="1050" dirty="0"/>
           </a:p>
         </p:txBody>
       </p:sp>
       <p:sp>
         <p:nvSpPr>
-          <p:cNvPr id="10" name="Shape 8"/>
-          <p:cNvSpPr/>
-          <p:nvPr/>
-        </p:nvSpPr>
-        <p:spPr>
-          <a:xfrm>
-            <a:off x="566928" y="4014216"/>
-            <a:ext cx="201168" cy="201168"/>
-          </a:xfrm>
-          <a:prstGeom prst="ellipse">
-            <a:avLst/>
+          <p:cNvPr id="9" name="Shape 7"/>
+          <p:cNvSpPr/>
+          <p:nvPr/>
+        </p:nvSpPr>
+        <p:spPr>
+          <a:xfrm>
+            <a:off x="4279392" y="2139696"/>
+            <a:ext cx="3493008" cy="2286000"/>
+          </a:xfrm>
+          <a:prstGeom prst="roundRect">
+            <a:avLst>
+              <a:gd name="adj" fmla="val 4000"/>
+            </a:avLst>
           </a:prstGeom>
           <a:solidFill>
-            <a:srgbClr val="00C2FF"/>
+            <a:srgbClr val="08123A"/>
           </a:solidFill>
-          <a:ln/>
-        </p:spPr>
-      </p:sp>
-      <p:sp>
-        <p:nvSpPr>
-          <p:cNvPr id="11" name="Text 9"/>
-          <p:cNvSpPr/>
-          <p:nvPr/>
-        </p:nvSpPr>
-        <p:spPr>
-          <a:xfrm>
-            <a:off x="950976" y="3959352"/>
-            <a:ext cx="10515600" cy="274320"/>
+          <a:ln w="12700">
+            <a:solidFill>
+              <a:srgbClr val="172A5E"/>
+            </a:solidFill>
+            <a:prstDash val="solid"/>
+          </a:ln>
+        </p:spPr>
+      </p:sp>
+      <p:sp>
+        <p:nvSpPr>
+          <p:cNvPr id="10" name="Text 8"/>
+          <p:cNvSpPr/>
+          <p:nvPr/>
+        </p:nvSpPr>
+        <p:spPr>
+          <a:xfrm>
+            <a:off x="4517136" y="2304288"/>
+            <a:ext cx="3017520" cy="237744"/>
           </a:xfrm>
           <a:prstGeom prst="rect">
             <a:avLst/>
@@ -3219,7 +3402,7 @@
               <a:buNone/>
             </a:pPr>
             <a:r>
-              <a:rPr lang="en-US" sz="1100" b="1" spc="110" kern="0" dirty="0">
+              <a:rPr lang="en-US" sz="1000" b="1" spc="120" kern="0" dirty="0">
                 <a:solidFill>
                   <a:srgbClr val="00C2FF"/>
                 </a:solidFill>
@@ -3227,22 +3410,22 @@
                 <a:ea typeface="Calibri" pitchFamily="34" charset="-122"/>
                 <a:cs typeface="Calibri" pitchFamily="34" charset="-120"/>
               </a:rPr>
-              <a:t>FASE 2 · MESES 4–8 · INVESTIGACIÓN Y EVENTOS</a:t>
-            </a:r>
-            <a:endParaRPr lang="en-US" sz="1100" dirty="0"/>
+              <a:t>MICROSOFT</a:t>
+            </a:r>
+            <a:endParaRPr lang="en-US" sz="1000" dirty="0"/>
           </a:p>
         </p:txBody>
       </p:sp>
       <p:sp>
         <p:nvSpPr>
-          <p:cNvPr id="12" name="Text 10"/>
-          <p:cNvSpPr/>
-          <p:nvPr/>
-        </p:nvSpPr>
-        <p:spPr>
-          <a:xfrm>
-            <a:off x="950976" y="4261104"/>
-            <a:ext cx="10515600" cy="713232"/>
+          <p:cNvPr id="11" name="Text 9"/>
+          <p:cNvSpPr/>
+          <p:nvPr/>
+        </p:nvSpPr>
+        <p:spPr>
+          <a:xfrm>
+            <a:off x="4517136" y="2578608"/>
+            <a:ext cx="3017520" cy="475488"/>
           </a:xfrm>
           <a:prstGeom prst="rect">
             <a:avLst/>
@@ -3255,13 +3438,49 @@
           <a:lstStyle/>
           <a:p>
             <a:pPr indent="0" marL="0">
-              <a:lnSpc>
-                <a:spcPts val="2000"/>
-              </a:lnSpc>
               <a:buNone/>
             </a:pPr>
             <a:r>
-              <a:rPr lang="en-US" sz="1250" dirty="0">
+              <a:rPr lang="en-US" sz="1350" b="1" dirty="0">
+                <a:solidFill>
+                  <a:srgbClr val="EAF1FF"/>
+                </a:solidFill>
+                <a:latin typeface="Calibri" pitchFamily="34" charset="0"/>
+                <a:ea typeface="Calibri" pitchFamily="34" charset="-122"/>
+                <a:cs typeface="Calibri" pitchFamily="34" charset="-120"/>
+              </a:rPr>
+              <a:t>Solutions Partner Data &amp; AI</a:t>
+            </a:r>
+            <a:endParaRPr lang="en-US" sz="1350" dirty="0"/>
+          </a:p>
+        </p:txBody>
+      </p:sp>
+      <p:sp>
+        <p:nvSpPr>
+          <p:cNvPr id="12" name="Text 10"/>
+          <p:cNvSpPr/>
+          <p:nvPr/>
+        </p:nvSpPr>
+        <p:spPr>
+          <a:xfrm>
+            <a:off x="4517136" y="3090672"/>
+            <a:ext cx="3035808" cy="1207008"/>
+          </a:xfrm>
+          <a:prstGeom prst="rect">
+            <a:avLst/>
+          </a:prstGeom>
+          <a:noFill/>
+          <a:ln/>
+        </p:spPr>
+        <p:txBody>
+          <a:bodyPr wrap="square" lIns="0" tIns="0" rIns="0" bIns="0" rtlCol="0" anchor="ctr"/>
+          <a:lstStyle/>
+          <a:p>
+            <a:pPr indent="0" marL="0">
+              <a:buNone/>
+            </a:pPr>
+            <a:r>
+              <a:rPr lang="en-US" sz="1050" dirty="0">
                 <a:solidFill>
                   <a:srgbClr val="AAB4D4"/>
                 </a:solidFill>
@@ -3269,9 +3488,9 @@
                 <a:ea typeface="Calibri" pitchFamily="34" charset="-122"/>
                 <a:cs typeface="Calibri" pitchFamily="34" charset="-120"/>
               </a:rPr>
-              <a:t>Levantar 200+ diagnósticos. Publicar el primer estudio de madurez de datos e IA en México. Presentarlo en un evento propio y en 3 conferencias de industria.</a:t>
-            </a:r>
-            <a:endParaRPr lang="en-US" sz="1250" dirty="0"/>
+              <a:t>Gratis entrar, sin mínimo de facturación. 40 de los 100 puntos vienen de certificaciones — la parte que no depende de tener clientes todavía.</a:t>
+            </a:r>
+            <a:endParaRPr lang="en-US" sz="1050" dirty="0"/>
           </a:p>
         </p:txBody>
       </p:sp>
@@ -3283,16 +3502,23 @@
         </p:nvSpPr>
         <p:spPr>
           <a:xfrm>
-            <a:off x="566928" y="5148072"/>
-            <a:ext cx="201168" cy="201168"/>
-          </a:xfrm>
-          <a:prstGeom prst="ellipse">
-            <a:avLst/>
+            <a:off x="7991856" y="2139696"/>
+            <a:ext cx="3493008" cy="2286000"/>
+          </a:xfrm>
+          <a:prstGeom prst="roundRect">
+            <a:avLst>
+              <a:gd name="adj" fmla="val 4000"/>
+            </a:avLst>
           </a:prstGeom>
           <a:solidFill>
-            <a:srgbClr val="00C2FF"/>
+            <a:srgbClr val="08123A"/>
           </a:solidFill>
-          <a:ln/>
+          <a:ln w="12700">
+            <a:solidFill>
+              <a:srgbClr val="172A5E"/>
+            </a:solidFill>
+            <a:prstDash val="solid"/>
+          </a:ln>
         </p:spPr>
       </p:sp>
       <p:sp>
@@ -3303,8 +3529,8 @@
         </p:nvSpPr>
         <p:spPr>
           <a:xfrm>
-            <a:off x="950976" y="5093208"/>
-            <a:ext cx="10515600" cy="274320"/>
+            <a:off x="8229600" y="2304288"/>
+            <a:ext cx="3017520" cy="237744"/>
           </a:xfrm>
           <a:prstGeom prst="rect">
             <a:avLst/>
@@ -3320,7 +3546,7 @@
               <a:buNone/>
             </a:pPr>
             <a:r>
-              <a:rPr lang="en-US" sz="1100" b="1" spc="110" kern="0" dirty="0">
+              <a:rPr lang="en-US" sz="1000" b="1" spc="120" kern="0" dirty="0">
                 <a:solidFill>
                   <a:srgbClr val="00C2FF"/>
                 </a:solidFill>
@@ -3328,9 +3554,9 @@
                 <a:ea typeface="Calibri" pitchFamily="34" charset="-122"/>
                 <a:cs typeface="Calibri" pitchFamily="34" charset="-120"/>
               </a:rPr>
-              <a:t>FASE 3 · MESES 8–18 · ESCALA</a:t>
-            </a:r>
-            <a:endParaRPr lang="en-US" sz="1100" dirty="0"/>
+              <a:t>GOOGLE CLOUD</a:t>
+            </a:r>
+            <a:endParaRPr lang="en-US" sz="1000" dirty="0"/>
           </a:p>
         </p:txBody>
       </p:sp>
@@ -3342,8 +3568,8 @@
         </p:nvSpPr>
         <p:spPr>
           <a:xfrm>
-            <a:off x="950976" y="5394960"/>
-            <a:ext cx="10515600" cy="713232"/>
+            <a:off x="8229600" y="2578608"/>
+            <a:ext cx="3017520" cy="475488"/>
           </a:xfrm>
           <a:prstGeom prst="rect">
             <a:avLst/>
@@ -3356,13 +3582,49 @@
           <a:lstStyle/>
           <a:p>
             <a:pPr indent="0" marL="0">
-              <a:lnSpc>
-                <a:spcPts val="2000"/>
-              </a:lnSpc>
               <a:buNone/>
             </a:pPr>
             <a:r>
-              <a:rPr lang="en-US" sz="1250" dirty="0">
+              <a:rPr lang="en-US" sz="1350" b="1" dirty="0">
+                <a:solidFill>
+                  <a:srgbClr val="EAF1FF"/>
+                </a:solidFill>
+                <a:latin typeface="Calibri" pitchFamily="34" charset="0"/>
+                <a:ea typeface="Calibri" pitchFamily="34" charset="-122"/>
+                <a:cs typeface="Calibri" pitchFamily="34" charset="-120"/>
+              </a:rPr>
+              <a:t>Partner Network (nuevo, Q1 2026)</a:t>
+            </a:r>
+            <a:endParaRPr lang="en-US" sz="1350" dirty="0"/>
+          </a:p>
+        </p:txBody>
+      </p:sp>
+      <p:sp>
+        <p:nvSpPr>
+          <p:cNvPr id="16" name="Text 14"/>
+          <p:cNvSpPr/>
+          <p:nvPr/>
+        </p:nvSpPr>
+        <p:spPr>
+          <a:xfrm>
+            <a:off x="8229600" y="3090672"/>
+            <a:ext cx="3035808" cy="1207008"/>
+          </a:xfrm>
+          <a:prstGeom prst="rect">
+            <a:avLst/>
+          </a:prstGeom>
+          <a:noFill/>
+          <a:ln/>
+        </p:spPr>
+        <p:txBody>
+          <a:bodyPr wrap="square" lIns="0" tIns="0" rIns="0" bIns="0" rtlCol="0" anchor="ctr"/>
+          <a:lstStyle/>
+          <a:p>
+            <a:pPr indent="0" marL="0">
+              <a:buNone/>
+            </a:pPr>
+            <a:r>
+              <a:rPr lang="en-US" sz="1050" dirty="0">
                 <a:solidFill>
                   <a:srgbClr val="AAB4D4"/>
                 </a:solidFill>
@@ -3370,7 +3632,101 @@
                 <a:ea typeface="Calibri" pitchFamily="34" charset="-122"/>
                 <a:cs typeface="Calibri" pitchFamily="34" charset="-120"/>
               </a:rPr>
-              <a:t>Primer SDR. Alianzas con AWS, Microsoft y Snowflake (co-venta y referidos). Cuentas enterprise multi-año. Segunda edición del estudio.</a:t>
+              <a:t>La originación del lado del proveedor es proporcionalmente más común que en AWS o Microsoft, sobre todo en cargas de datos e IA.</a:t>
+            </a:r>
+            <a:endParaRPr lang="en-US" sz="1050" dirty="0"/>
+          </a:p>
+        </p:txBody>
+      </p:sp>
+      <p:sp>
+        <p:nvSpPr>
+          <p:cNvPr id="17" name="Shape 15"/>
+          <p:cNvSpPr/>
+          <p:nvPr/>
+        </p:nvSpPr>
+        <p:spPr>
+          <a:xfrm>
+            <a:off x="566928" y="4590288"/>
+            <a:ext cx="11027664" cy="960120"/>
+          </a:xfrm>
+          <a:prstGeom prst="roundRect">
+            <a:avLst>
+              <a:gd name="adj" fmla="val 9524"/>
+            </a:avLst>
+          </a:prstGeom>
+          <a:solidFill>
+            <a:srgbClr val="0B1C57"/>
+          </a:solidFill>
+          <a:ln w="15875">
+            <a:solidFill>
+              <a:srgbClr val="00C2FF"/>
+            </a:solidFill>
+            <a:prstDash val="solid"/>
+          </a:ln>
+        </p:spPr>
+      </p:sp>
+      <p:sp>
+        <p:nvSpPr>
+          <p:cNvPr id="18" name="Text 16"/>
+          <p:cNvSpPr/>
+          <p:nvPr/>
+        </p:nvSpPr>
+        <p:spPr>
+          <a:xfrm>
+            <a:off x="841248" y="4773168"/>
+            <a:ext cx="10424160" cy="621792"/>
+          </a:xfrm>
+          <a:prstGeom prst="rect">
+            <a:avLst/>
+          </a:prstGeom>
+          <a:noFill/>
+          <a:ln/>
+        </p:spPr>
+        <p:txBody>
+          <a:bodyPr wrap="square" lIns="0" tIns="0" rIns="0" bIns="0" rtlCol="0" anchor="ctr"/>
+          <a:lstStyle/>
+          <a:p>
+            <a:pPr indent="0" marL="0">
+              <a:buNone/>
+            </a:pPr>
+            <a:r>
+              <a:rPr lang="en-US" sz="1250" b="1" dirty="0">
+                <a:solidFill>
+                  <a:srgbClr val="00C2FF"/>
+                </a:solidFill>
+                <a:latin typeface="Calibri" pitchFamily="34" charset="0"/>
+                <a:ea typeface="Calibri" pitchFamily="34" charset="-122"/>
+                <a:cs typeface="Calibri" pitchFamily="34" charset="-120"/>
+              </a:rPr>
+              <a:t>Por qué encaja: </a:t>
+            </a:r>
+            <a:pPr indent="0" marL="0">
+              <a:buNone/>
+            </a:pPr>
+            <a:r>
+              <a:rPr lang="en-US" sz="1250" dirty="0">
+                <a:solidFill>
+                  <a:srgbClr val="EAF1FF"/>
+                </a:solidFill>
+                <a:latin typeface="Calibri" pitchFamily="34" charset="0"/>
+                <a:ea typeface="Calibri" pitchFamily="34" charset="-122"/>
+                <a:cs typeface="Calibri" pitchFamily="34" charset="-120"/>
+              </a:rPr>
+              <a:t>es el único canal que ataca directamente el hallazgo del 94% — estar en el directorio de socios y en el radar de los vendedores del hiperescalador </a:t>
+            </a:r>
+            <a:pPr indent="0" marL="0">
+              <a:buNone/>
+            </a:pPr>
+            <a:r>
+              <a:rPr lang="en-US" sz="1250" b="1" dirty="0">
+                <a:solidFill>
+                  <a:srgbClr val="EAF1FF"/>
+                </a:solidFill>
+                <a:latin typeface="Calibri" pitchFamily="34" charset="0"/>
+                <a:ea typeface="Calibri" pitchFamily="34" charset="-122"/>
+                <a:cs typeface="Calibri" pitchFamily="34" charset="-120"/>
+              </a:rPr>
+              <a:t>es literalmente estar en la lista corta antes de que exista el RFP.</a:t>
             </a:r>
             <a:endParaRPr lang="en-US" sz="1250" dirty="0"/>
           </a:p>
@@ -3441,6 +3797,2758 @@
                 <a:ea typeface="Calibri" pitchFamily="34" charset="-122"/>
                 <a:cs typeface="Calibri" pitchFamily="34" charset="-120"/>
               </a:rPr>
+              <a:t>MOTOR 03 · LO CONCRETO</a:t>
+            </a:r>
+            <a:endParaRPr lang="en-US" sz="1100" dirty="0"/>
+          </a:p>
+        </p:txBody>
+      </p:sp>
+      <p:sp>
+        <p:nvSpPr>
+          <p:cNvPr id="3" name="Text 1"/>
+          <p:cNvSpPr/>
+          <p:nvPr/>
+        </p:nvSpPr>
+        <p:spPr>
+          <a:xfrm>
+            <a:off x="566928" y="658368"/>
+            <a:ext cx="11027664" cy="658368"/>
+          </a:xfrm>
+          <a:prstGeom prst="rect">
+            <a:avLst/>
+          </a:prstGeom>
+          <a:noFill/>
+          <a:ln/>
+        </p:spPr>
+        <p:txBody>
+          <a:bodyPr wrap="square" lIns="0" tIns="0" rIns="0" bIns="0" rtlCol="0" anchor="ctr"/>
+          <a:lstStyle/>
+          <a:p>
+            <a:pPr indent="0" marL="0">
+              <a:buNone/>
+            </a:pPr>
+            <a:r>
+              <a:rPr lang="en-US" sz="3400" b="1" dirty="0">
+                <a:solidFill>
+                  <a:srgbClr val="EAF1FF"/>
+                </a:solidFill>
+                <a:latin typeface="Calibri" pitchFamily="34" charset="0"/>
+                <a:ea typeface="Calibri" pitchFamily="34" charset="-122"/>
+                <a:cs typeface="Calibri" pitchFamily="34" charset="-120"/>
+              </a:rPr>
+              <a:t>AWS Select está a semanas, no a años</a:t>
+            </a:r>
+            <a:endParaRPr lang="en-US" sz="3400" dirty="0"/>
+          </a:p>
+        </p:txBody>
+      </p:sp>
+      <p:graphicFrame>
+        <p:nvGraphicFramePr>
+          <p:cNvPr id="12" name="Table 0"/>
+          <p:cNvGraphicFramePr>
+            <a:graphicFrameLocks noGrp="1"/>
+          </p:cNvGraphicFramePr>
+          <p:nvPr>
+            <p:extLst>
+              <p:ext uri="{D42A27DB-BD31-4B8C-83A1-F6EECF244321}">
+                <p14:modId xmlns:p14="http://schemas.microsoft.com/office/powerpoint/2010/main" val="1579011935"/>
+              </p:ext>
+            </p:extLst>
+          </p:nvPr>
+        </p:nvGraphicFramePr>
+        <p:xfrm>
+          <a:off x="566928" y="1664208"/>
+          <a:ext cx="11027664" cy="914400"/>
+        </p:xfrm>
+        <a:graphic>
+          <a:graphicData uri="http://schemas.openxmlformats.org/drawingml/2006/table">
+            <a:tbl>
+              <a:tblPr/>
+              <a:tblGrid>
+                <a:gridCol w="3566160"/>
+                <a:gridCol w="2487168"/>
+                <a:gridCol w="2487168"/>
+                <a:gridCol w="2487168"/>
+              </a:tblGrid>
+              <a:tr h="329184">
+                <a:tc>
+                  <a:txBody>
+                    <a:bodyPr/>
+                    <a:lstStyle/>
+                    <a:p>
+                      <a:pPr indent="0" marL="0">
+                        <a:buNone/>
+                      </a:pPr>
+                      <a:r>
+                        <a:rPr lang="en-US" sz="1150" b="1" dirty="0">
+                          <a:solidFill>
+                            <a:srgbClr val="AAB4D4"/>
+                          </a:solidFill>
+                          <a:latin typeface="Calibri" pitchFamily="34" charset="0"/>
+                          <a:ea typeface="Calibri" pitchFamily="34" charset="-122"/>
+                          <a:cs typeface="Calibri" pitchFamily="34" charset="-120"/>
+                        </a:rPr>
+                        <a:t>REQUISITO AWS</a:t>
+                      </a:r>
+                      <a:endParaRPr lang="en-US" sz="1150" dirty="0">
+                        <a:latin typeface="Calibri" charset="0"/>
+                        <a:ea typeface="Calibri" charset="0"/>
+                        <a:cs typeface="Calibri" charset="0"/>
+                      </a:endParaRPr>
+                    </a:p>
+                  </a:txBody>
+                  <a:tcPr marL="101600" marR="101600" marT="38100" marB="38100" anchor="ctr">
+                    <a:lnL w="12700" cap="flat" cmpd="sng" algn="ctr">
+                      <a:solidFill>
+                        <a:srgbClr val="172A5E"/>
+                      </a:solidFill>
+                      <a:prstDash val="solid"/>
+                      <a:round/>
+                      <a:headEnd type="none" w="med" len="med"/>
+                      <a:tailEnd type="none" w="med" len="med"/>
+                    </a:lnL>
+                    <a:lnR w="12700" cap="flat" cmpd="sng" algn="ctr">
+                      <a:solidFill>
+                        <a:srgbClr val="172A5E"/>
+                      </a:solidFill>
+                      <a:prstDash val="solid"/>
+                      <a:round/>
+                      <a:headEnd type="none" w="med" len="med"/>
+                      <a:tailEnd type="none" w="med" len="med"/>
+                    </a:lnR>
+                    <a:lnT w="12700" cap="flat" cmpd="sng" algn="ctr">
+                      <a:solidFill>
+                        <a:srgbClr val="172A5E"/>
+                      </a:solidFill>
+                      <a:prstDash val="solid"/>
+                      <a:round/>
+                      <a:headEnd type="none" w="med" len="med"/>
+                      <a:tailEnd type="none" w="med" len="med"/>
+                    </a:lnT>
+                    <a:lnB w="12700" cap="flat" cmpd="sng" algn="ctr">
+                      <a:solidFill>
+                        <a:srgbClr val="172A5E"/>
+                      </a:solidFill>
+                      <a:prstDash val="solid"/>
+                      <a:round/>
+                      <a:headEnd type="none" w="med" len="med"/>
+                      <a:tailEnd type="none" w="med" len="med"/>
+                    </a:lnB>
+                    <a:solidFill>
+                      <a:srgbClr val="04081F"/>
+                    </a:solidFill>
+                  </a:tcPr>
+                </a:tc>
+                <a:tc>
+                  <a:txBody>
+                    <a:bodyPr/>
+                    <a:lstStyle/>
+                    <a:p>
+                      <a:pPr indent="0" marL="0">
+                        <a:buNone/>
+                      </a:pPr>
+                      <a:r>
+                        <a:rPr lang="en-US" sz="1150" b="1" dirty="0">
+                          <a:solidFill>
+                            <a:srgbClr val="AAB4D4"/>
+                          </a:solidFill>
+                          <a:latin typeface="Calibri" pitchFamily="34" charset="0"/>
+                          <a:ea typeface="Calibri" pitchFamily="34" charset="-122"/>
+                          <a:cs typeface="Calibri" pitchFamily="34" charset="-120"/>
+                        </a:rPr>
+                        <a:t>SELECT</a:t>
+                      </a:r>
+                      <a:endParaRPr lang="en-US" sz="1150" dirty="0">
+                        <a:latin typeface="Calibri" charset="0"/>
+                        <a:ea typeface="Calibri" charset="0"/>
+                        <a:cs typeface="Calibri" charset="0"/>
+                      </a:endParaRPr>
+                    </a:p>
+                  </a:txBody>
+                  <a:tcPr marL="101600" marR="101600" marT="38100" marB="38100" anchor="ctr">
+                    <a:lnL w="12700" cap="flat" cmpd="sng" algn="ctr">
+                      <a:solidFill>
+                        <a:srgbClr val="172A5E"/>
+                      </a:solidFill>
+                      <a:prstDash val="solid"/>
+                      <a:round/>
+                      <a:headEnd type="none" w="med" len="med"/>
+                      <a:tailEnd type="none" w="med" len="med"/>
+                    </a:lnL>
+                    <a:lnR w="12700" cap="flat" cmpd="sng" algn="ctr">
+                      <a:solidFill>
+                        <a:srgbClr val="172A5E"/>
+                      </a:solidFill>
+                      <a:prstDash val="solid"/>
+                      <a:round/>
+                      <a:headEnd type="none" w="med" len="med"/>
+                      <a:tailEnd type="none" w="med" len="med"/>
+                    </a:lnR>
+                    <a:lnT w="12700" cap="flat" cmpd="sng" algn="ctr">
+                      <a:solidFill>
+                        <a:srgbClr val="172A5E"/>
+                      </a:solidFill>
+                      <a:prstDash val="solid"/>
+                      <a:round/>
+                      <a:headEnd type="none" w="med" len="med"/>
+                      <a:tailEnd type="none" w="med" len="med"/>
+                    </a:lnT>
+                    <a:lnB w="12700" cap="flat" cmpd="sng" algn="ctr">
+                      <a:solidFill>
+                        <a:srgbClr val="172A5E"/>
+                      </a:solidFill>
+                      <a:prstDash val="solid"/>
+                      <a:round/>
+                      <a:headEnd type="none" w="med" len="med"/>
+                      <a:tailEnd type="none" w="med" len="med"/>
+                    </a:lnB>
+                    <a:solidFill>
+                      <a:srgbClr val="04081F"/>
+                    </a:solidFill>
+                  </a:tcPr>
+                </a:tc>
+                <a:tc>
+                  <a:txBody>
+                    <a:bodyPr/>
+                    <a:lstStyle/>
+                    <a:p>
+                      <a:pPr indent="0" marL="0">
+                        <a:buNone/>
+                      </a:pPr>
+                      <a:r>
+                        <a:rPr lang="en-US" sz="1150" b="1" dirty="0">
+                          <a:solidFill>
+                            <a:srgbClr val="AAB4D4"/>
+                          </a:solidFill>
+                          <a:latin typeface="Calibri" pitchFamily="34" charset="0"/>
+                          <a:ea typeface="Calibri" pitchFamily="34" charset="-122"/>
+                          <a:cs typeface="Calibri" pitchFamily="34" charset="-120"/>
+                        </a:rPr>
+                        <a:t>ADVANCED</a:t>
+                      </a:r>
+                      <a:endParaRPr lang="en-US" sz="1150" dirty="0">
+                        <a:latin typeface="Calibri" charset="0"/>
+                        <a:ea typeface="Calibri" charset="0"/>
+                        <a:cs typeface="Calibri" charset="0"/>
+                      </a:endParaRPr>
+                    </a:p>
+                  </a:txBody>
+                  <a:tcPr marL="101600" marR="101600" marT="38100" marB="38100" anchor="ctr">
+                    <a:lnL w="12700" cap="flat" cmpd="sng" algn="ctr">
+                      <a:solidFill>
+                        <a:srgbClr val="172A5E"/>
+                      </a:solidFill>
+                      <a:prstDash val="solid"/>
+                      <a:round/>
+                      <a:headEnd type="none" w="med" len="med"/>
+                      <a:tailEnd type="none" w="med" len="med"/>
+                    </a:lnL>
+                    <a:lnR w="12700" cap="flat" cmpd="sng" algn="ctr">
+                      <a:solidFill>
+                        <a:srgbClr val="172A5E"/>
+                      </a:solidFill>
+                      <a:prstDash val="solid"/>
+                      <a:round/>
+                      <a:headEnd type="none" w="med" len="med"/>
+                      <a:tailEnd type="none" w="med" len="med"/>
+                    </a:lnR>
+                    <a:lnT w="12700" cap="flat" cmpd="sng" algn="ctr">
+                      <a:solidFill>
+                        <a:srgbClr val="172A5E"/>
+                      </a:solidFill>
+                      <a:prstDash val="solid"/>
+                      <a:round/>
+                      <a:headEnd type="none" w="med" len="med"/>
+                      <a:tailEnd type="none" w="med" len="med"/>
+                    </a:lnT>
+                    <a:lnB w="12700" cap="flat" cmpd="sng" algn="ctr">
+                      <a:solidFill>
+                        <a:srgbClr val="172A5E"/>
+                      </a:solidFill>
+                      <a:prstDash val="solid"/>
+                      <a:round/>
+                      <a:headEnd type="none" w="med" len="med"/>
+                      <a:tailEnd type="none" w="med" len="med"/>
+                    </a:lnB>
+                    <a:solidFill>
+                      <a:srgbClr val="04081F"/>
+                    </a:solidFill>
+                  </a:tcPr>
+                </a:tc>
+                <a:tc>
+                  <a:txBody>
+                    <a:bodyPr/>
+                    <a:lstStyle/>
+                    <a:p>
+                      <a:pPr indent="0" marL="0">
+                        <a:buNone/>
+                      </a:pPr>
+                      <a:r>
+                        <a:rPr lang="en-US" sz="1150" b="1" dirty="0">
+                          <a:solidFill>
+                            <a:srgbClr val="AAB4D4"/>
+                          </a:solidFill>
+                          <a:latin typeface="Calibri" pitchFamily="34" charset="0"/>
+                          <a:ea typeface="Calibri" pitchFamily="34" charset="-122"/>
+                          <a:cs typeface="Calibri" pitchFamily="34" charset="-120"/>
+                        </a:rPr>
+                        <a:t>PREMIER</a:t>
+                      </a:r>
+                      <a:endParaRPr lang="en-US" sz="1150" dirty="0">
+                        <a:latin typeface="Calibri" charset="0"/>
+                        <a:ea typeface="Calibri" charset="0"/>
+                        <a:cs typeface="Calibri" charset="0"/>
+                      </a:endParaRPr>
+                    </a:p>
+                  </a:txBody>
+                  <a:tcPr marL="101600" marR="101600" marT="38100" marB="38100" anchor="ctr">
+                    <a:lnL w="12700" cap="flat" cmpd="sng" algn="ctr">
+                      <a:solidFill>
+                        <a:srgbClr val="172A5E"/>
+                      </a:solidFill>
+                      <a:prstDash val="solid"/>
+                      <a:round/>
+                      <a:headEnd type="none" w="med" len="med"/>
+                      <a:tailEnd type="none" w="med" len="med"/>
+                    </a:lnL>
+                    <a:lnR w="12700" cap="flat" cmpd="sng" algn="ctr">
+                      <a:solidFill>
+                        <a:srgbClr val="172A5E"/>
+                      </a:solidFill>
+                      <a:prstDash val="solid"/>
+                      <a:round/>
+                      <a:headEnd type="none" w="med" len="med"/>
+                      <a:tailEnd type="none" w="med" len="med"/>
+                    </a:lnR>
+                    <a:lnT w="12700" cap="flat" cmpd="sng" algn="ctr">
+                      <a:solidFill>
+                        <a:srgbClr val="172A5E"/>
+                      </a:solidFill>
+                      <a:prstDash val="solid"/>
+                      <a:round/>
+                      <a:headEnd type="none" w="med" len="med"/>
+                      <a:tailEnd type="none" w="med" len="med"/>
+                    </a:lnT>
+                    <a:lnB w="12700" cap="flat" cmpd="sng" algn="ctr">
+                      <a:solidFill>
+                        <a:srgbClr val="172A5E"/>
+                      </a:solidFill>
+                      <a:prstDash val="solid"/>
+                      <a:round/>
+                      <a:headEnd type="none" w="med" len="med"/>
+                      <a:tailEnd type="none" w="med" len="med"/>
+                    </a:lnB>
+                    <a:solidFill>
+                      <a:srgbClr val="04081F"/>
+                    </a:solidFill>
+                  </a:tcPr>
+                </a:tc>
+              </a:tr>
+              <a:tr h="329184">
+                <a:tc>
+                  <a:txBody>
+                    <a:bodyPr/>
+                    <a:lstStyle/>
+                    <a:p>
+                      <a:pPr indent="0" marL="0">
+                        <a:buNone/>
+                      </a:pPr>
+                      <a:r>
+                        <a:rPr lang="en-US" sz="1150" dirty="0">
+                          <a:solidFill>
+                            <a:srgbClr val="AAB4D4"/>
+                          </a:solidFill>
+                          <a:latin typeface="Calibri" pitchFamily="34" charset="0"/>
+                          <a:ea typeface="Calibri" pitchFamily="34" charset="-122"/>
+                          <a:cs typeface="Calibri" pitchFamily="34" charset="-120"/>
+                        </a:rPr>
+                        <a:t>Cuota anual APN (USD)</a:t>
+                      </a:r>
+                      <a:endParaRPr lang="en-US" sz="1150" dirty="0">
+                        <a:latin typeface="Calibri" charset="0"/>
+                        <a:ea typeface="Calibri" charset="0"/>
+                        <a:cs typeface="Calibri" charset="0"/>
+                      </a:endParaRPr>
+                    </a:p>
+                  </a:txBody>
+                  <a:tcPr marL="101600" marR="101600" marT="38100" marB="38100" anchor="ctr">
+                    <a:lnL w="12700" cap="flat" cmpd="sng" algn="ctr">
+                      <a:solidFill>
+                        <a:srgbClr val="172A5E"/>
+                      </a:solidFill>
+                      <a:prstDash val="solid"/>
+                      <a:round/>
+                      <a:headEnd type="none" w="med" len="med"/>
+                      <a:tailEnd type="none" w="med" len="med"/>
+                    </a:lnL>
+                    <a:lnR w="12700" cap="flat" cmpd="sng" algn="ctr">
+                      <a:solidFill>
+                        <a:srgbClr val="172A5E"/>
+                      </a:solidFill>
+                      <a:prstDash val="solid"/>
+                      <a:round/>
+                      <a:headEnd type="none" w="med" len="med"/>
+                      <a:tailEnd type="none" w="med" len="med"/>
+                    </a:lnR>
+                    <a:lnT w="12700" cap="flat" cmpd="sng" algn="ctr">
+                      <a:solidFill>
+                        <a:srgbClr val="172A5E"/>
+                      </a:solidFill>
+                      <a:prstDash val="solid"/>
+                      <a:round/>
+                      <a:headEnd type="none" w="med" len="med"/>
+                      <a:tailEnd type="none" w="med" len="med"/>
+                    </a:lnT>
+                    <a:lnB w="12700" cap="flat" cmpd="sng" algn="ctr">
+                      <a:solidFill>
+                        <a:srgbClr val="172A5E"/>
+                      </a:solidFill>
+                      <a:prstDash val="solid"/>
+                      <a:round/>
+                      <a:headEnd type="none" w="med" len="med"/>
+                      <a:tailEnd type="none" w="med" len="med"/>
+                    </a:lnB>
+                    <a:solidFill>
+                      <a:srgbClr val="04081F"/>
+                    </a:solidFill>
+                  </a:tcPr>
+                </a:tc>
+                <a:tc>
+                  <a:txBody>
+                    <a:bodyPr/>
+                    <a:lstStyle/>
+                    <a:p>
+                      <a:pPr indent="0" marL="0">
+                        <a:buNone/>
+                      </a:pPr>
+                      <a:r>
+                        <a:rPr lang="en-US" sz="1150" dirty="0">
+                          <a:solidFill>
+                            <a:srgbClr val="AAB4D4"/>
+                          </a:solidFill>
+                          <a:latin typeface="Calibri" pitchFamily="34" charset="0"/>
+                          <a:ea typeface="Calibri" pitchFamily="34" charset="-122"/>
+                          <a:cs typeface="Calibri" pitchFamily="34" charset="-120"/>
+                        </a:rPr>
+                        <a:t>2,500</a:t>
+                      </a:r>
+                      <a:endParaRPr lang="en-US" sz="1150" dirty="0">
+                        <a:latin typeface="Calibri" charset="0"/>
+                        <a:ea typeface="Calibri" charset="0"/>
+                        <a:cs typeface="Calibri" charset="0"/>
+                      </a:endParaRPr>
+                    </a:p>
+                  </a:txBody>
+                  <a:tcPr marL="101600" marR="101600" marT="38100" marB="38100" anchor="ctr">
+                    <a:lnL w="12700" cap="flat" cmpd="sng" algn="ctr">
+                      <a:solidFill>
+                        <a:srgbClr val="172A5E"/>
+                      </a:solidFill>
+                      <a:prstDash val="solid"/>
+                      <a:round/>
+                      <a:headEnd type="none" w="med" len="med"/>
+                      <a:tailEnd type="none" w="med" len="med"/>
+                    </a:lnL>
+                    <a:lnR w="12700" cap="flat" cmpd="sng" algn="ctr">
+                      <a:solidFill>
+                        <a:srgbClr val="172A5E"/>
+                      </a:solidFill>
+                      <a:prstDash val="solid"/>
+                      <a:round/>
+                      <a:headEnd type="none" w="med" len="med"/>
+                      <a:tailEnd type="none" w="med" len="med"/>
+                    </a:lnR>
+                    <a:lnT w="12700" cap="flat" cmpd="sng" algn="ctr">
+                      <a:solidFill>
+                        <a:srgbClr val="172A5E"/>
+                      </a:solidFill>
+                      <a:prstDash val="solid"/>
+                      <a:round/>
+                      <a:headEnd type="none" w="med" len="med"/>
+                      <a:tailEnd type="none" w="med" len="med"/>
+                    </a:lnT>
+                    <a:lnB w="12700" cap="flat" cmpd="sng" algn="ctr">
+                      <a:solidFill>
+                        <a:srgbClr val="172A5E"/>
+                      </a:solidFill>
+                      <a:prstDash val="solid"/>
+                      <a:round/>
+                      <a:headEnd type="none" w="med" len="med"/>
+                      <a:tailEnd type="none" w="med" len="med"/>
+                    </a:lnB>
+                    <a:solidFill>
+                      <a:srgbClr val="04081F"/>
+                    </a:solidFill>
+                  </a:tcPr>
+                </a:tc>
+                <a:tc>
+                  <a:txBody>
+                    <a:bodyPr/>
+                    <a:lstStyle/>
+                    <a:p>
+                      <a:pPr indent="0" marL="0">
+                        <a:buNone/>
+                      </a:pPr>
+                      <a:r>
+                        <a:rPr lang="en-US" sz="1150" dirty="0">
+                          <a:solidFill>
+                            <a:srgbClr val="AAB4D4"/>
+                          </a:solidFill>
+                          <a:latin typeface="Calibri" pitchFamily="34" charset="0"/>
+                          <a:ea typeface="Calibri" pitchFamily="34" charset="-122"/>
+                          <a:cs typeface="Calibri" pitchFamily="34" charset="-120"/>
+                        </a:rPr>
+                        <a:t>2,500</a:t>
+                      </a:r>
+                      <a:endParaRPr lang="en-US" sz="1150" dirty="0">
+                        <a:latin typeface="Calibri" charset="0"/>
+                        <a:ea typeface="Calibri" charset="0"/>
+                        <a:cs typeface="Calibri" charset="0"/>
+                      </a:endParaRPr>
+                    </a:p>
+                  </a:txBody>
+                  <a:tcPr marL="101600" marR="101600" marT="38100" marB="38100" anchor="ctr">
+                    <a:lnL w="12700" cap="flat" cmpd="sng" algn="ctr">
+                      <a:solidFill>
+                        <a:srgbClr val="172A5E"/>
+                      </a:solidFill>
+                      <a:prstDash val="solid"/>
+                      <a:round/>
+                      <a:headEnd type="none" w="med" len="med"/>
+                      <a:tailEnd type="none" w="med" len="med"/>
+                    </a:lnL>
+                    <a:lnR w="12700" cap="flat" cmpd="sng" algn="ctr">
+                      <a:solidFill>
+                        <a:srgbClr val="172A5E"/>
+                      </a:solidFill>
+                      <a:prstDash val="solid"/>
+                      <a:round/>
+                      <a:headEnd type="none" w="med" len="med"/>
+                      <a:tailEnd type="none" w="med" len="med"/>
+                    </a:lnR>
+                    <a:lnT w="12700" cap="flat" cmpd="sng" algn="ctr">
+                      <a:solidFill>
+                        <a:srgbClr val="172A5E"/>
+                      </a:solidFill>
+                      <a:prstDash val="solid"/>
+                      <a:round/>
+                      <a:headEnd type="none" w="med" len="med"/>
+                      <a:tailEnd type="none" w="med" len="med"/>
+                    </a:lnT>
+                    <a:lnB w="12700" cap="flat" cmpd="sng" algn="ctr">
+                      <a:solidFill>
+                        <a:srgbClr val="172A5E"/>
+                      </a:solidFill>
+                      <a:prstDash val="solid"/>
+                      <a:round/>
+                      <a:headEnd type="none" w="med" len="med"/>
+                      <a:tailEnd type="none" w="med" len="med"/>
+                    </a:lnB>
+                    <a:solidFill>
+                      <a:srgbClr val="04081F"/>
+                    </a:solidFill>
+                  </a:tcPr>
+                </a:tc>
+                <a:tc>
+                  <a:txBody>
+                    <a:bodyPr/>
+                    <a:lstStyle/>
+                    <a:p>
+                      <a:pPr indent="0" marL="0">
+                        <a:buNone/>
+                      </a:pPr>
+                      <a:r>
+                        <a:rPr lang="en-US" sz="1150" dirty="0">
+                          <a:solidFill>
+                            <a:srgbClr val="AAB4D4"/>
+                          </a:solidFill>
+                          <a:latin typeface="Calibri" pitchFamily="34" charset="0"/>
+                          <a:ea typeface="Calibri" pitchFamily="34" charset="-122"/>
+                          <a:cs typeface="Calibri" pitchFamily="34" charset="-120"/>
+                        </a:rPr>
+                        <a:t>2,500</a:t>
+                      </a:r>
+                      <a:endParaRPr lang="en-US" sz="1150" dirty="0">
+                        <a:latin typeface="Calibri" charset="0"/>
+                        <a:ea typeface="Calibri" charset="0"/>
+                        <a:cs typeface="Calibri" charset="0"/>
+                      </a:endParaRPr>
+                    </a:p>
+                  </a:txBody>
+                  <a:tcPr marL="101600" marR="101600" marT="38100" marB="38100" anchor="ctr">
+                    <a:lnL w="12700" cap="flat" cmpd="sng" algn="ctr">
+                      <a:solidFill>
+                        <a:srgbClr val="172A5E"/>
+                      </a:solidFill>
+                      <a:prstDash val="solid"/>
+                      <a:round/>
+                      <a:headEnd type="none" w="med" len="med"/>
+                      <a:tailEnd type="none" w="med" len="med"/>
+                    </a:lnL>
+                    <a:lnR w="12700" cap="flat" cmpd="sng" algn="ctr">
+                      <a:solidFill>
+                        <a:srgbClr val="172A5E"/>
+                      </a:solidFill>
+                      <a:prstDash val="solid"/>
+                      <a:round/>
+                      <a:headEnd type="none" w="med" len="med"/>
+                      <a:tailEnd type="none" w="med" len="med"/>
+                    </a:lnR>
+                    <a:lnT w="12700" cap="flat" cmpd="sng" algn="ctr">
+                      <a:solidFill>
+                        <a:srgbClr val="172A5E"/>
+                      </a:solidFill>
+                      <a:prstDash val="solid"/>
+                      <a:round/>
+                      <a:headEnd type="none" w="med" len="med"/>
+                      <a:tailEnd type="none" w="med" len="med"/>
+                    </a:lnT>
+                    <a:lnB w="12700" cap="flat" cmpd="sng" algn="ctr">
+                      <a:solidFill>
+                        <a:srgbClr val="172A5E"/>
+                      </a:solidFill>
+                      <a:prstDash val="solid"/>
+                      <a:round/>
+                      <a:headEnd type="none" w="med" len="med"/>
+                      <a:tailEnd type="none" w="med" len="med"/>
+                    </a:lnB>
+                    <a:solidFill>
+                      <a:srgbClr val="04081F"/>
+                    </a:solidFill>
+                  </a:tcPr>
+                </a:tc>
+              </a:tr>
+              <a:tr h="329184">
+                <a:tc>
+                  <a:txBody>
+                    <a:bodyPr/>
+                    <a:lstStyle/>
+                    <a:p>
+                      <a:pPr indent="0" marL="0">
+                        <a:buNone/>
+                      </a:pPr>
+                      <a:r>
+                        <a:rPr lang="en-US" sz="1150" dirty="0">
+                          <a:solidFill>
+                            <a:srgbClr val="AAB4D4"/>
+                          </a:solidFill>
+                          <a:latin typeface="Calibri" pitchFamily="34" charset="0"/>
+                          <a:ea typeface="Calibri" pitchFamily="34" charset="-122"/>
+                          <a:cs typeface="Calibri" pitchFamily="34" charset="-120"/>
+                        </a:rPr>
+                        <a:t>Individuos acreditados</a:t>
+                      </a:r>
+                      <a:endParaRPr lang="en-US" sz="1150" dirty="0">
+                        <a:latin typeface="Calibri" charset="0"/>
+                        <a:ea typeface="Calibri" charset="0"/>
+                        <a:cs typeface="Calibri" charset="0"/>
+                      </a:endParaRPr>
+                    </a:p>
+                  </a:txBody>
+                  <a:tcPr marL="101600" marR="101600" marT="38100" marB="38100" anchor="ctr">
+                    <a:lnL w="12700" cap="flat" cmpd="sng" algn="ctr">
+                      <a:solidFill>
+                        <a:srgbClr val="172A5E"/>
+                      </a:solidFill>
+                      <a:prstDash val="solid"/>
+                      <a:round/>
+                      <a:headEnd type="none" w="med" len="med"/>
+                      <a:tailEnd type="none" w="med" len="med"/>
+                    </a:lnL>
+                    <a:lnR w="12700" cap="flat" cmpd="sng" algn="ctr">
+                      <a:solidFill>
+                        <a:srgbClr val="172A5E"/>
+                      </a:solidFill>
+                      <a:prstDash val="solid"/>
+                      <a:round/>
+                      <a:headEnd type="none" w="med" len="med"/>
+                      <a:tailEnd type="none" w="med" len="med"/>
+                    </a:lnR>
+                    <a:lnT w="12700" cap="flat" cmpd="sng" algn="ctr">
+                      <a:solidFill>
+                        <a:srgbClr val="172A5E"/>
+                      </a:solidFill>
+                      <a:prstDash val="solid"/>
+                      <a:round/>
+                      <a:headEnd type="none" w="med" len="med"/>
+                      <a:tailEnd type="none" w="med" len="med"/>
+                    </a:lnT>
+                    <a:lnB w="12700" cap="flat" cmpd="sng" algn="ctr">
+                      <a:solidFill>
+                        <a:srgbClr val="172A5E"/>
+                      </a:solidFill>
+                      <a:prstDash val="solid"/>
+                      <a:round/>
+                      <a:headEnd type="none" w="med" len="med"/>
+                      <a:tailEnd type="none" w="med" len="med"/>
+                    </a:lnB>
+                    <a:solidFill>
+                      <a:srgbClr val="04081F"/>
+                    </a:solidFill>
+                  </a:tcPr>
+                </a:tc>
+                <a:tc>
+                  <a:txBody>
+                    <a:bodyPr/>
+                    <a:lstStyle/>
+                    <a:p>
+                      <a:pPr indent="0" marL="0">
+                        <a:buNone/>
+                      </a:pPr>
+                      <a:r>
+                        <a:rPr lang="en-US" sz="1150" dirty="0">
+                          <a:solidFill>
+                            <a:srgbClr val="AAB4D4"/>
+                          </a:solidFill>
+                          <a:latin typeface="Calibri" pitchFamily="34" charset="0"/>
+                          <a:ea typeface="Calibri" pitchFamily="34" charset="-122"/>
+                          <a:cs typeface="Calibri" pitchFamily="34" charset="-120"/>
+                        </a:rPr>
+                        <a:t>4  (2 téc + 2 neg)</a:t>
+                      </a:r>
+                      <a:endParaRPr lang="en-US" sz="1150" dirty="0">
+                        <a:latin typeface="Calibri" charset="0"/>
+                        <a:ea typeface="Calibri" charset="0"/>
+                        <a:cs typeface="Calibri" charset="0"/>
+                      </a:endParaRPr>
+                    </a:p>
+                  </a:txBody>
+                  <a:tcPr marL="101600" marR="101600" marT="38100" marB="38100" anchor="ctr">
+                    <a:lnL w="12700" cap="flat" cmpd="sng" algn="ctr">
+                      <a:solidFill>
+                        <a:srgbClr val="172A5E"/>
+                      </a:solidFill>
+                      <a:prstDash val="solid"/>
+                      <a:round/>
+                      <a:headEnd type="none" w="med" len="med"/>
+                      <a:tailEnd type="none" w="med" len="med"/>
+                    </a:lnL>
+                    <a:lnR w="12700" cap="flat" cmpd="sng" algn="ctr">
+                      <a:solidFill>
+                        <a:srgbClr val="172A5E"/>
+                      </a:solidFill>
+                      <a:prstDash val="solid"/>
+                      <a:round/>
+                      <a:headEnd type="none" w="med" len="med"/>
+                      <a:tailEnd type="none" w="med" len="med"/>
+                    </a:lnR>
+                    <a:lnT w="12700" cap="flat" cmpd="sng" algn="ctr">
+                      <a:solidFill>
+                        <a:srgbClr val="172A5E"/>
+                      </a:solidFill>
+                      <a:prstDash val="solid"/>
+                      <a:round/>
+                      <a:headEnd type="none" w="med" len="med"/>
+                      <a:tailEnd type="none" w="med" len="med"/>
+                    </a:lnT>
+                    <a:lnB w="12700" cap="flat" cmpd="sng" algn="ctr">
+                      <a:solidFill>
+                        <a:srgbClr val="172A5E"/>
+                      </a:solidFill>
+                      <a:prstDash val="solid"/>
+                      <a:round/>
+                      <a:headEnd type="none" w="med" len="med"/>
+                      <a:tailEnd type="none" w="med" len="med"/>
+                    </a:lnB>
+                    <a:solidFill>
+                      <a:srgbClr val="04081F"/>
+                    </a:solidFill>
+                  </a:tcPr>
+                </a:tc>
+                <a:tc>
+                  <a:txBody>
+                    <a:bodyPr/>
+                    <a:lstStyle/>
+                    <a:p>
+                      <a:pPr indent="0" marL="0">
+                        <a:buNone/>
+                      </a:pPr>
+                      <a:r>
+                        <a:rPr lang="en-US" sz="1150" dirty="0">
+                          <a:solidFill>
+                            <a:srgbClr val="AAB4D4"/>
+                          </a:solidFill>
+                          <a:latin typeface="Calibri" pitchFamily="34" charset="0"/>
+                          <a:ea typeface="Calibri" pitchFamily="34" charset="-122"/>
+                          <a:cs typeface="Calibri" pitchFamily="34" charset="-120"/>
+                        </a:rPr>
+                        <a:t>8  (4 + 4)</a:t>
+                      </a:r>
+                      <a:endParaRPr lang="en-US" sz="1150" dirty="0">
+                        <a:latin typeface="Calibri" charset="0"/>
+                        <a:ea typeface="Calibri" charset="0"/>
+                        <a:cs typeface="Calibri" charset="0"/>
+                      </a:endParaRPr>
+                    </a:p>
+                  </a:txBody>
+                  <a:tcPr marL="101600" marR="101600" marT="38100" marB="38100" anchor="ctr">
+                    <a:lnL w="12700" cap="flat" cmpd="sng" algn="ctr">
+                      <a:solidFill>
+                        <a:srgbClr val="172A5E"/>
+                      </a:solidFill>
+                      <a:prstDash val="solid"/>
+                      <a:round/>
+                      <a:headEnd type="none" w="med" len="med"/>
+                      <a:tailEnd type="none" w="med" len="med"/>
+                    </a:lnL>
+                    <a:lnR w="12700" cap="flat" cmpd="sng" algn="ctr">
+                      <a:solidFill>
+                        <a:srgbClr val="172A5E"/>
+                      </a:solidFill>
+                      <a:prstDash val="solid"/>
+                      <a:round/>
+                      <a:headEnd type="none" w="med" len="med"/>
+                      <a:tailEnd type="none" w="med" len="med"/>
+                    </a:lnR>
+                    <a:lnT w="12700" cap="flat" cmpd="sng" algn="ctr">
+                      <a:solidFill>
+                        <a:srgbClr val="172A5E"/>
+                      </a:solidFill>
+                      <a:prstDash val="solid"/>
+                      <a:round/>
+                      <a:headEnd type="none" w="med" len="med"/>
+                      <a:tailEnd type="none" w="med" len="med"/>
+                    </a:lnT>
+                    <a:lnB w="12700" cap="flat" cmpd="sng" algn="ctr">
+                      <a:solidFill>
+                        <a:srgbClr val="172A5E"/>
+                      </a:solidFill>
+                      <a:prstDash val="solid"/>
+                      <a:round/>
+                      <a:headEnd type="none" w="med" len="med"/>
+                      <a:tailEnd type="none" w="med" len="med"/>
+                    </a:lnB>
+                    <a:solidFill>
+                      <a:srgbClr val="04081F"/>
+                    </a:solidFill>
+                  </a:tcPr>
+                </a:tc>
+                <a:tc>
+                  <a:txBody>
+                    <a:bodyPr/>
+                    <a:lstStyle/>
+                    <a:p>
+                      <a:pPr indent="0" marL="0">
+                        <a:buNone/>
+                      </a:pPr>
+                      <a:r>
+                        <a:rPr lang="en-US" sz="1150" dirty="0">
+                          <a:solidFill>
+                            <a:srgbClr val="AAB4D4"/>
+                          </a:solidFill>
+                          <a:latin typeface="Calibri" pitchFamily="34" charset="0"/>
+                          <a:ea typeface="Calibri" pitchFamily="34" charset="-122"/>
+                          <a:cs typeface="Calibri" pitchFamily="34" charset="-120"/>
+                        </a:rPr>
+                        <a:t>20  (10 + 10)</a:t>
+                      </a:r>
+                      <a:endParaRPr lang="en-US" sz="1150" dirty="0">
+                        <a:latin typeface="Calibri" charset="0"/>
+                        <a:ea typeface="Calibri" charset="0"/>
+                        <a:cs typeface="Calibri" charset="0"/>
+                      </a:endParaRPr>
+                    </a:p>
+                  </a:txBody>
+                  <a:tcPr marL="101600" marR="101600" marT="38100" marB="38100" anchor="ctr">
+                    <a:lnL w="12700" cap="flat" cmpd="sng" algn="ctr">
+                      <a:solidFill>
+                        <a:srgbClr val="172A5E"/>
+                      </a:solidFill>
+                      <a:prstDash val="solid"/>
+                      <a:round/>
+                      <a:headEnd type="none" w="med" len="med"/>
+                      <a:tailEnd type="none" w="med" len="med"/>
+                    </a:lnL>
+                    <a:lnR w="12700" cap="flat" cmpd="sng" algn="ctr">
+                      <a:solidFill>
+                        <a:srgbClr val="172A5E"/>
+                      </a:solidFill>
+                      <a:prstDash val="solid"/>
+                      <a:round/>
+                      <a:headEnd type="none" w="med" len="med"/>
+                      <a:tailEnd type="none" w="med" len="med"/>
+                    </a:lnR>
+                    <a:lnT w="12700" cap="flat" cmpd="sng" algn="ctr">
+                      <a:solidFill>
+                        <a:srgbClr val="172A5E"/>
+                      </a:solidFill>
+                      <a:prstDash val="solid"/>
+                      <a:round/>
+                      <a:headEnd type="none" w="med" len="med"/>
+                      <a:tailEnd type="none" w="med" len="med"/>
+                    </a:lnT>
+                    <a:lnB w="12700" cap="flat" cmpd="sng" algn="ctr">
+                      <a:solidFill>
+                        <a:srgbClr val="172A5E"/>
+                      </a:solidFill>
+                      <a:prstDash val="solid"/>
+                      <a:round/>
+                      <a:headEnd type="none" w="med" len="med"/>
+                      <a:tailEnd type="none" w="med" len="med"/>
+                    </a:lnB>
+                    <a:solidFill>
+                      <a:srgbClr val="04081F"/>
+                    </a:solidFill>
+                  </a:tcPr>
+                </a:tc>
+              </a:tr>
+              <a:tr h="329184">
+                <a:tc>
+                  <a:txBody>
+                    <a:bodyPr/>
+                    <a:lstStyle/>
+                    <a:p>
+                      <a:pPr indent="0" marL="0">
+                        <a:buNone/>
+                      </a:pPr>
+                      <a:r>
+                        <a:rPr lang="en-US" sz="1150" dirty="0">
+                          <a:solidFill>
+                            <a:srgbClr val="AAB4D4"/>
+                          </a:solidFill>
+                          <a:latin typeface="Calibri" pitchFamily="34" charset="0"/>
+                          <a:ea typeface="Calibri" pitchFamily="34" charset="-122"/>
+                          <a:cs typeface="Calibri" pitchFamily="34" charset="-120"/>
+                        </a:rPr>
+                        <a:t>Certificados fundacionales</a:t>
+                      </a:r>
+                      <a:endParaRPr lang="en-US" sz="1150" dirty="0">
+                        <a:latin typeface="Calibri" charset="0"/>
+                        <a:ea typeface="Calibri" charset="0"/>
+                        <a:cs typeface="Calibri" charset="0"/>
+                      </a:endParaRPr>
+                    </a:p>
+                  </a:txBody>
+                  <a:tcPr marL="101600" marR="101600" marT="38100" marB="38100" anchor="ctr">
+                    <a:lnL w="12700" cap="flat" cmpd="sng" algn="ctr">
+                      <a:solidFill>
+                        <a:srgbClr val="172A5E"/>
+                      </a:solidFill>
+                      <a:prstDash val="solid"/>
+                      <a:round/>
+                      <a:headEnd type="none" w="med" len="med"/>
+                      <a:tailEnd type="none" w="med" len="med"/>
+                    </a:lnL>
+                    <a:lnR w="12700" cap="flat" cmpd="sng" algn="ctr">
+                      <a:solidFill>
+                        <a:srgbClr val="172A5E"/>
+                      </a:solidFill>
+                      <a:prstDash val="solid"/>
+                      <a:round/>
+                      <a:headEnd type="none" w="med" len="med"/>
+                      <a:tailEnd type="none" w="med" len="med"/>
+                    </a:lnR>
+                    <a:lnT w="12700" cap="flat" cmpd="sng" algn="ctr">
+                      <a:solidFill>
+                        <a:srgbClr val="172A5E"/>
+                      </a:solidFill>
+                      <a:prstDash val="solid"/>
+                      <a:round/>
+                      <a:headEnd type="none" w="med" len="med"/>
+                      <a:tailEnd type="none" w="med" len="med"/>
+                    </a:lnT>
+                    <a:lnB w="12700" cap="flat" cmpd="sng" algn="ctr">
+                      <a:solidFill>
+                        <a:srgbClr val="172A5E"/>
+                      </a:solidFill>
+                      <a:prstDash val="solid"/>
+                      <a:round/>
+                      <a:headEnd type="none" w="med" len="med"/>
+                      <a:tailEnd type="none" w="med" len="med"/>
+                    </a:lnB>
+                    <a:solidFill>
+                      <a:srgbClr val="04081F"/>
+                    </a:solidFill>
+                  </a:tcPr>
+                </a:tc>
+                <a:tc>
+                  <a:txBody>
+                    <a:bodyPr/>
+                    <a:lstStyle/>
+                    <a:p>
+                      <a:pPr indent="0" marL="0">
+                        <a:buNone/>
+                      </a:pPr>
+                      <a:r>
+                        <a:rPr lang="en-US" sz="1150" dirty="0">
+                          <a:solidFill>
+                            <a:srgbClr val="AAB4D4"/>
+                          </a:solidFill>
+                          <a:latin typeface="Calibri" pitchFamily="34" charset="0"/>
+                          <a:ea typeface="Calibri" pitchFamily="34" charset="-122"/>
+                          <a:cs typeface="Calibri" pitchFamily="34" charset="-120"/>
+                        </a:rPr>
+                        <a:t>2</a:t>
+                      </a:r>
+                      <a:endParaRPr lang="en-US" sz="1150" dirty="0">
+                        <a:latin typeface="Calibri" charset="0"/>
+                        <a:ea typeface="Calibri" charset="0"/>
+                        <a:cs typeface="Calibri" charset="0"/>
+                      </a:endParaRPr>
+                    </a:p>
+                  </a:txBody>
+                  <a:tcPr marL="101600" marR="101600" marT="38100" marB="38100" anchor="ctr">
+                    <a:lnL w="12700" cap="flat" cmpd="sng" algn="ctr">
+                      <a:solidFill>
+                        <a:srgbClr val="172A5E"/>
+                      </a:solidFill>
+                      <a:prstDash val="solid"/>
+                      <a:round/>
+                      <a:headEnd type="none" w="med" len="med"/>
+                      <a:tailEnd type="none" w="med" len="med"/>
+                    </a:lnL>
+                    <a:lnR w="12700" cap="flat" cmpd="sng" algn="ctr">
+                      <a:solidFill>
+                        <a:srgbClr val="172A5E"/>
+                      </a:solidFill>
+                      <a:prstDash val="solid"/>
+                      <a:round/>
+                      <a:headEnd type="none" w="med" len="med"/>
+                      <a:tailEnd type="none" w="med" len="med"/>
+                    </a:lnR>
+                    <a:lnT w="12700" cap="flat" cmpd="sng" algn="ctr">
+                      <a:solidFill>
+                        <a:srgbClr val="172A5E"/>
+                      </a:solidFill>
+                      <a:prstDash val="solid"/>
+                      <a:round/>
+                      <a:headEnd type="none" w="med" len="med"/>
+                      <a:tailEnd type="none" w="med" len="med"/>
+                    </a:lnT>
+                    <a:lnB w="12700" cap="flat" cmpd="sng" algn="ctr">
+                      <a:solidFill>
+                        <a:srgbClr val="172A5E"/>
+                      </a:solidFill>
+                      <a:prstDash val="solid"/>
+                      <a:round/>
+                      <a:headEnd type="none" w="med" len="med"/>
+                      <a:tailEnd type="none" w="med" len="med"/>
+                    </a:lnB>
+                    <a:solidFill>
+                      <a:srgbClr val="04081F"/>
+                    </a:solidFill>
+                  </a:tcPr>
+                </a:tc>
+                <a:tc>
+                  <a:txBody>
+                    <a:bodyPr/>
+                    <a:lstStyle/>
+                    <a:p>
+                      <a:pPr indent="0" marL="0">
+                        <a:buNone/>
+                      </a:pPr>
+                      <a:r>
+                        <a:rPr lang="en-US" sz="1150" dirty="0">
+                          <a:solidFill>
+                            <a:srgbClr val="AAB4D4"/>
+                          </a:solidFill>
+                          <a:latin typeface="Calibri" pitchFamily="34" charset="0"/>
+                          <a:ea typeface="Calibri" pitchFamily="34" charset="-122"/>
+                          <a:cs typeface="Calibri" pitchFamily="34" charset="-120"/>
+                        </a:rPr>
+                        <a:t>4</a:t>
+                      </a:r>
+                      <a:endParaRPr lang="en-US" sz="1150" dirty="0">
+                        <a:latin typeface="Calibri" charset="0"/>
+                        <a:ea typeface="Calibri" charset="0"/>
+                        <a:cs typeface="Calibri" charset="0"/>
+                      </a:endParaRPr>
+                    </a:p>
+                  </a:txBody>
+                  <a:tcPr marL="101600" marR="101600" marT="38100" marB="38100" anchor="ctr">
+                    <a:lnL w="12700" cap="flat" cmpd="sng" algn="ctr">
+                      <a:solidFill>
+                        <a:srgbClr val="172A5E"/>
+                      </a:solidFill>
+                      <a:prstDash val="solid"/>
+                      <a:round/>
+                      <a:headEnd type="none" w="med" len="med"/>
+                      <a:tailEnd type="none" w="med" len="med"/>
+                    </a:lnL>
+                    <a:lnR w="12700" cap="flat" cmpd="sng" algn="ctr">
+                      <a:solidFill>
+                        <a:srgbClr val="172A5E"/>
+                      </a:solidFill>
+                      <a:prstDash val="solid"/>
+                      <a:round/>
+                      <a:headEnd type="none" w="med" len="med"/>
+                      <a:tailEnd type="none" w="med" len="med"/>
+                    </a:lnR>
+                    <a:lnT w="12700" cap="flat" cmpd="sng" algn="ctr">
+                      <a:solidFill>
+                        <a:srgbClr val="172A5E"/>
+                      </a:solidFill>
+                      <a:prstDash val="solid"/>
+                      <a:round/>
+                      <a:headEnd type="none" w="med" len="med"/>
+                      <a:tailEnd type="none" w="med" len="med"/>
+                    </a:lnT>
+                    <a:lnB w="12700" cap="flat" cmpd="sng" algn="ctr">
+                      <a:solidFill>
+                        <a:srgbClr val="172A5E"/>
+                      </a:solidFill>
+                      <a:prstDash val="solid"/>
+                      <a:round/>
+                      <a:headEnd type="none" w="med" len="med"/>
+                      <a:tailEnd type="none" w="med" len="med"/>
+                    </a:lnB>
+                    <a:solidFill>
+                      <a:srgbClr val="04081F"/>
+                    </a:solidFill>
+                  </a:tcPr>
+                </a:tc>
+                <a:tc>
+                  <a:txBody>
+                    <a:bodyPr/>
+                    <a:lstStyle/>
+                    <a:p>
+                      <a:pPr indent="0" marL="0">
+                        <a:buNone/>
+                      </a:pPr>
+                      <a:r>
+                        <a:rPr lang="en-US" sz="1150" dirty="0">
+                          <a:solidFill>
+                            <a:srgbClr val="AAB4D4"/>
+                          </a:solidFill>
+                          <a:latin typeface="Calibri" pitchFamily="34" charset="0"/>
+                          <a:ea typeface="Calibri" pitchFamily="34" charset="-122"/>
+                          <a:cs typeface="Calibri" pitchFamily="34" charset="-120"/>
+                        </a:rPr>
+                        <a:t>10</a:t>
+                      </a:r>
+                      <a:endParaRPr lang="en-US" sz="1150" dirty="0">
+                        <a:latin typeface="Calibri" charset="0"/>
+                        <a:ea typeface="Calibri" charset="0"/>
+                        <a:cs typeface="Calibri" charset="0"/>
+                      </a:endParaRPr>
+                    </a:p>
+                  </a:txBody>
+                  <a:tcPr marL="101600" marR="101600" marT="38100" marB="38100" anchor="ctr">
+                    <a:lnL w="12700" cap="flat" cmpd="sng" algn="ctr">
+                      <a:solidFill>
+                        <a:srgbClr val="172A5E"/>
+                      </a:solidFill>
+                      <a:prstDash val="solid"/>
+                      <a:round/>
+                      <a:headEnd type="none" w="med" len="med"/>
+                      <a:tailEnd type="none" w="med" len="med"/>
+                    </a:lnL>
+                    <a:lnR w="12700" cap="flat" cmpd="sng" algn="ctr">
+                      <a:solidFill>
+                        <a:srgbClr val="172A5E"/>
+                      </a:solidFill>
+                      <a:prstDash val="solid"/>
+                      <a:round/>
+                      <a:headEnd type="none" w="med" len="med"/>
+                      <a:tailEnd type="none" w="med" len="med"/>
+                    </a:lnR>
+                    <a:lnT w="12700" cap="flat" cmpd="sng" algn="ctr">
+                      <a:solidFill>
+                        <a:srgbClr val="172A5E"/>
+                      </a:solidFill>
+                      <a:prstDash val="solid"/>
+                      <a:round/>
+                      <a:headEnd type="none" w="med" len="med"/>
+                      <a:tailEnd type="none" w="med" len="med"/>
+                    </a:lnT>
+                    <a:lnB w="12700" cap="flat" cmpd="sng" algn="ctr">
+                      <a:solidFill>
+                        <a:srgbClr val="172A5E"/>
+                      </a:solidFill>
+                      <a:prstDash val="solid"/>
+                      <a:round/>
+                      <a:headEnd type="none" w="med" len="med"/>
+                      <a:tailEnd type="none" w="med" len="med"/>
+                    </a:lnB>
+                    <a:solidFill>
+                      <a:srgbClr val="04081F"/>
+                    </a:solidFill>
+                  </a:tcPr>
+                </a:tc>
+              </a:tr>
+              <a:tr h="329184">
+                <a:tc>
+                  <a:txBody>
+                    <a:bodyPr/>
+                    <a:lstStyle/>
+                    <a:p>
+                      <a:pPr indent="0" marL="0">
+                        <a:buNone/>
+                      </a:pPr>
+                      <a:r>
+                        <a:rPr lang="en-US" sz="1150" dirty="0">
+                          <a:solidFill>
+                            <a:srgbClr val="AAB4D4"/>
+                          </a:solidFill>
+                          <a:latin typeface="Calibri" pitchFamily="34" charset="0"/>
+                          <a:ea typeface="Calibri" pitchFamily="34" charset="-122"/>
+                          <a:cs typeface="Calibri" pitchFamily="34" charset="-120"/>
+                        </a:rPr>
+                        <a:t>Certificados técnicos</a:t>
+                      </a:r>
+                      <a:endParaRPr lang="en-US" sz="1150" dirty="0">
+                        <a:latin typeface="Calibri" charset="0"/>
+                        <a:ea typeface="Calibri" charset="0"/>
+                        <a:cs typeface="Calibri" charset="0"/>
+                      </a:endParaRPr>
+                    </a:p>
+                  </a:txBody>
+                  <a:tcPr marL="101600" marR="101600" marT="38100" marB="38100" anchor="ctr">
+                    <a:lnL w="12700" cap="flat" cmpd="sng" algn="ctr">
+                      <a:solidFill>
+                        <a:srgbClr val="172A5E"/>
+                      </a:solidFill>
+                      <a:prstDash val="solid"/>
+                      <a:round/>
+                      <a:headEnd type="none" w="med" len="med"/>
+                      <a:tailEnd type="none" w="med" len="med"/>
+                    </a:lnL>
+                    <a:lnR w="12700" cap="flat" cmpd="sng" algn="ctr">
+                      <a:solidFill>
+                        <a:srgbClr val="172A5E"/>
+                      </a:solidFill>
+                      <a:prstDash val="solid"/>
+                      <a:round/>
+                      <a:headEnd type="none" w="med" len="med"/>
+                      <a:tailEnd type="none" w="med" len="med"/>
+                    </a:lnR>
+                    <a:lnT w="12700" cap="flat" cmpd="sng" algn="ctr">
+                      <a:solidFill>
+                        <a:srgbClr val="172A5E"/>
+                      </a:solidFill>
+                      <a:prstDash val="solid"/>
+                      <a:round/>
+                      <a:headEnd type="none" w="med" len="med"/>
+                      <a:tailEnd type="none" w="med" len="med"/>
+                    </a:lnT>
+                    <a:lnB w="12700" cap="flat" cmpd="sng" algn="ctr">
+                      <a:solidFill>
+                        <a:srgbClr val="172A5E"/>
+                      </a:solidFill>
+                      <a:prstDash val="solid"/>
+                      <a:round/>
+                      <a:headEnd type="none" w="med" len="med"/>
+                      <a:tailEnd type="none" w="med" len="med"/>
+                    </a:lnB>
+                    <a:solidFill>
+                      <a:srgbClr val="04081F"/>
+                    </a:solidFill>
+                  </a:tcPr>
+                </a:tc>
+                <a:tc>
+                  <a:txBody>
+                    <a:bodyPr/>
+                    <a:lstStyle/>
+                    <a:p>
+                      <a:pPr indent="0" marL="0">
+                        <a:buNone/>
+                      </a:pPr>
+                      <a:r>
+                        <a:rPr lang="en-US" sz="1150" dirty="0">
+                          <a:solidFill>
+                            <a:srgbClr val="AAB4D4"/>
+                          </a:solidFill>
+                          <a:latin typeface="Calibri" pitchFamily="34" charset="0"/>
+                          <a:ea typeface="Calibri" pitchFamily="34" charset="-122"/>
+                          <a:cs typeface="Calibri" pitchFamily="34" charset="-120"/>
+                        </a:rPr>
+                        <a:t>2</a:t>
+                      </a:r>
+                      <a:endParaRPr lang="en-US" sz="1150" dirty="0">
+                        <a:latin typeface="Calibri" charset="0"/>
+                        <a:ea typeface="Calibri" charset="0"/>
+                        <a:cs typeface="Calibri" charset="0"/>
+                      </a:endParaRPr>
+                    </a:p>
+                  </a:txBody>
+                  <a:tcPr marL="101600" marR="101600" marT="38100" marB="38100" anchor="ctr">
+                    <a:lnL w="12700" cap="flat" cmpd="sng" algn="ctr">
+                      <a:solidFill>
+                        <a:srgbClr val="172A5E"/>
+                      </a:solidFill>
+                      <a:prstDash val="solid"/>
+                      <a:round/>
+                      <a:headEnd type="none" w="med" len="med"/>
+                      <a:tailEnd type="none" w="med" len="med"/>
+                    </a:lnL>
+                    <a:lnR w="12700" cap="flat" cmpd="sng" algn="ctr">
+                      <a:solidFill>
+                        <a:srgbClr val="172A5E"/>
+                      </a:solidFill>
+                      <a:prstDash val="solid"/>
+                      <a:round/>
+                      <a:headEnd type="none" w="med" len="med"/>
+                      <a:tailEnd type="none" w="med" len="med"/>
+                    </a:lnR>
+                    <a:lnT w="12700" cap="flat" cmpd="sng" algn="ctr">
+                      <a:solidFill>
+                        <a:srgbClr val="172A5E"/>
+                      </a:solidFill>
+                      <a:prstDash val="solid"/>
+                      <a:round/>
+                      <a:headEnd type="none" w="med" len="med"/>
+                      <a:tailEnd type="none" w="med" len="med"/>
+                    </a:lnT>
+                    <a:lnB w="12700" cap="flat" cmpd="sng" algn="ctr">
+                      <a:solidFill>
+                        <a:srgbClr val="172A5E"/>
+                      </a:solidFill>
+                      <a:prstDash val="solid"/>
+                      <a:round/>
+                      <a:headEnd type="none" w="med" len="med"/>
+                      <a:tailEnd type="none" w="med" len="med"/>
+                    </a:lnB>
+                    <a:solidFill>
+                      <a:srgbClr val="04081F"/>
+                    </a:solidFill>
+                  </a:tcPr>
+                </a:tc>
+                <a:tc>
+                  <a:txBody>
+                    <a:bodyPr/>
+                    <a:lstStyle/>
+                    <a:p>
+                      <a:pPr indent="0" marL="0">
+                        <a:buNone/>
+                      </a:pPr>
+                      <a:r>
+                        <a:rPr lang="en-US" sz="1150" dirty="0">
+                          <a:solidFill>
+                            <a:srgbClr val="AAB4D4"/>
+                          </a:solidFill>
+                          <a:latin typeface="Calibri" pitchFamily="34" charset="0"/>
+                          <a:ea typeface="Calibri" pitchFamily="34" charset="-122"/>
+                          <a:cs typeface="Calibri" pitchFamily="34" charset="-120"/>
+                        </a:rPr>
+                        <a:t>6  (mín 3 prof.)</a:t>
+                      </a:r>
+                      <a:endParaRPr lang="en-US" sz="1150" dirty="0">
+                        <a:latin typeface="Calibri" charset="0"/>
+                        <a:ea typeface="Calibri" charset="0"/>
+                        <a:cs typeface="Calibri" charset="0"/>
+                      </a:endParaRPr>
+                    </a:p>
+                  </a:txBody>
+                  <a:tcPr marL="101600" marR="101600" marT="38100" marB="38100" anchor="ctr">
+                    <a:lnL w="12700" cap="flat" cmpd="sng" algn="ctr">
+                      <a:solidFill>
+                        <a:srgbClr val="172A5E"/>
+                      </a:solidFill>
+                      <a:prstDash val="solid"/>
+                      <a:round/>
+                      <a:headEnd type="none" w="med" len="med"/>
+                      <a:tailEnd type="none" w="med" len="med"/>
+                    </a:lnL>
+                    <a:lnR w="12700" cap="flat" cmpd="sng" algn="ctr">
+                      <a:solidFill>
+                        <a:srgbClr val="172A5E"/>
+                      </a:solidFill>
+                      <a:prstDash val="solid"/>
+                      <a:round/>
+                      <a:headEnd type="none" w="med" len="med"/>
+                      <a:tailEnd type="none" w="med" len="med"/>
+                    </a:lnR>
+                    <a:lnT w="12700" cap="flat" cmpd="sng" algn="ctr">
+                      <a:solidFill>
+                        <a:srgbClr val="172A5E"/>
+                      </a:solidFill>
+                      <a:prstDash val="solid"/>
+                      <a:round/>
+                      <a:headEnd type="none" w="med" len="med"/>
+                      <a:tailEnd type="none" w="med" len="med"/>
+                    </a:lnT>
+                    <a:lnB w="12700" cap="flat" cmpd="sng" algn="ctr">
+                      <a:solidFill>
+                        <a:srgbClr val="172A5E"/>
+                      </a:solidFill>
+                      <a:prstDash val="solid"/>
+                      <a:round/>
+                      <a:headEnd type="none" w="med" len="med"/>
+                      <a:tailEnd type="none" w="med" len="med"/>
+                    </a:lnB>
+                    <a:solidFill>
+                      <a:srgbClr val="04081F"/>
+                    </a:solidFill>
+                  </a:tcPr>
+                </a:tc>
+                <a:tc>
+                  <a:txBody>
+                    <a:bodyPr/>
+                    <a:lstStyle/>
+                    <a:p>
+                      <a:pPr indent="0" marL="0">
+                        <a:buNone/>
+                      </a:pPr>
+                      <a:r>
+                        <a:rPr lang="en-US" sz="1150" dirty="0">
+                          <a:solidFill>
+                            <a:srgbClr val="AAB4D4"/>
+                          </a:solidFill>
+                          <a:latin typeface="Calibri" pitchFamily="34" charset="0"/>
+                          <a:ea typeface="Calibri" pitchFamily="34" charset="-122"/>
+                          <a:cs typeface="Calibri" pitchFamily="34" charset="-120"/>
+                        </a:rPr>
+                        <a:t>25  (mín 10 prof.)</a:t>
+                      </a:r>
+                      <a:endParaRPr lang="en-US" sz="1150" dirty="0">
+                        <a:latin typeface="Calibri" charset="0"/>
+                        <a:ea typeface="Calibri" charset="0"/>
+                        <a:cs typeface="Calibri" charset="0"/>
+                      </a:endParaRPr>
+                    </a:p>
+                  </a:txBody>
+                  <a:tcPr marL="101600" marR="101600" marT="38100" marB="38100" anchor="ctr">
+                    <a:lnL w="12700" cap="flat" cmpd="sng" algn="ctr">
+                      <a:solidFill>
+                        <a:srgbClr val="172A5E"/>
+                      </a:solidFill>
+                      <a:prstDash val="solid"/>
+                      <a:round/>
+                      <a:headEnd type="none" w="med" len="med"/>
+                      <a:tailEnd type="none" w="med" len="med"/>
+                    </a:lnL>
+                    <a:lnR w="12700" cap="flat" cmpd="sng" algn="ctr">
+                      <a:solidFill>
+                        <a:srgbClr val="172A5E"/>
+                      </a:solidFill>
+                      <a:prstDash val="solid"/>
+                      <a:round/>
+                      <a:headEnd type="none" w="med" len="med"/>
+                      <a:tailEnd type="none" w="med" len="med"/>
+                    </a:lnR>
+                    <a:lnT w="12700" cap="flat" cmpd="sng" algn="ctr">
+                      <a:solidFill>
+                        <a:srgbClr val="172A5E"/>
+                      </a:solidFill>
+                      <a:prstDash val="solid"/>
+                      <a:round/>
+                      <a:headEnd type="none" w="med" len="med"/>
+                      <a:tailEnd type="none" w="med" len="med"/>
+                    </a:lnT>
+                    <a:lnB w="12700" cap="flat" cmpd="sng" algn="ctr">
+                      <a:solidFill>
+                        <a:srgbClr val="172A5E"/>
+                      </a:solidFill>
+                      <a:prstDash val="solid"/>
+                      <a:round/>
+                      <a:headEnd type="none" w="med" len="med"/>
+                      <a:tailEnd type="none" w="med" len="med"/>
+                    </a:lnB>
+                    <a:solidFill>
+                      <a:srgbClr val="04081F"/>
+                    </a:solidFill>
+                  </a:tcPr>
+                </a:tc>
+              </a:tr>
+              <a:tr h="329184">
+                <a:tc>
+                  <a:txBody>
+                    <a:bodyPr/>
+                    <a:lstStyle/>
+                    <a:p>
+                      <a:pPr indent="0" marL="0">
+                        <a:buNone/>
+                      </a:pPr>
+                      <a:r>
+                        <a:rPr lang="en-US" sz="1150" dirty="0">
+                          <a:solidFill>
+                            <a:srgbClr val="AAB4D4"/>
+                          </a:solidFill>
+                          <a:latin typeface="Calibri" pitchFamily="34" charset="0"/>
+                          <a:ea typeface="Calibri" pitchFamily="34" charset="-122"/>
+                          <a:cs typeface="Calibri" pitchFamily="34" charset="-120"/>
+                        </a:rPr>
+                        <a:t>Oportunidades lanzadas</a:t>
+                      </a:r>
+                      <a:endParaRPr lang="en-US" sz="1150" dirty="0">
+                        <a:latin typeface="Calibri" charset="0"/>
+                        <a:ea typeface="Calibri" charset="0"/>
+                        <a:cs typeface="Calibri" charset="0"/>
+                      </a:endParaRPr>
+                    </a:p>
+                  </a:txBody>
+                  <a:tcPr marL="101600" marR="101600" marT="38100" marB="38100" anchor="ctr">
+                    <a:lnL w="12700" cap="flat" cmpd="sng" algn="ctr">
+                      <a:solidFill>
+                        <a:srgbClr val="172A5E"/>
+                      </a:solidFill>
+                      <a:prstDash val="solid"/>
+                      <a:round/>
+                      <a:headEnd type="none" w="med" len="med"/>
+                      <a:tailEnd type="none" w="med" len="med"/>
+                    </a:lnL>
+                    <a:lnR w="12700" cap="flat" cmpd="sng" algn="ctr">
+                      <a:solidFill>
+                        <a:srgbClr val="172A5E"/>
+                      </a:solidFill>
+                      <a:prstDash val="solid"/>
+                      <a:round/>
+                      <a:headEnd type="none" w="med" len="med"/>
+                      <a:tailEnd type="none" w="med" len="med"/>
+                    </a:lnR>
+                    <a:lnT w="12700" cap="flat" cmpd="sng" algn="ctr">
+                      <a:solidFill>
+                        <a:srgbClr val="172A5E"/>
+                      </a:solidFill>
+                      <a:prstDash val="solid"/>
+                      <a:round/>
+                      <a:headEnd type="none" w="med" len="med"/>
+                      <a:tailEnd type="none" w="med" len="med"/>
+                    </a:lnT>
+                    <a:lnB w="12700" cap="flat" cmpd="sng" algn="ctr">
+                      <a:solidFill>
+                        <a:srgbClr val="172A5E"/>
+                      </a:solidFill>
+                      <a:prstDash val="solid"/>
+                      <a:round/>
+                      <a:headEnd type="none" w="med" len="med"/>
+                      <a:tailEnd type="none" w="med" len="med"/>
+                    </a:lnB>
+                    <a:solidFill>
+                      <a:srgbClr val="04081F"/>
+                    </a:solidFill>
+                  </a:tcPr>
+                </a:tc>
+                <a:tc>
+                  <a:txBody>
+                    <a:bodyPr/>
+                    <a:lstStyle/>
+                    <a:p>
+                      <a:pPr indent="0" marL="0">
+                        <a:buNone/>
+                      </a:pPr>
+                      <a:r>
+                        <a:rPr lang="en-US" sz="1150" dirty="0">
+                          <a:solidFill>
+                            <a:srgbClr val="AAB4D4"/>
+                          </a:solidFill>
+                          <a:latin typeface="Calibri" pitchFamily="34" charset="0"/>
+                          <a:ea typeface="Calibri" pitchFamily="34" charset="-122"/>
+                          <a:cs typeface="Calibri" pitchFamily="34" charset="-120"/>
+                        </a:rPr>
+                        <a:t>3  (MRR ≥ 1,500)</a:t>
+                      </a:r>
+                      <a:endParaRPr lang="en-US" sz="1150" dirty="0">
+                        <a:latin typeface="Calibri" charset="0"/>
+                        <a:ea typeface="Calibri" charset="0"/>
+                        <a:cs typeface="Calibri" charset="0"/>
+                      </a:endParaRPr>
+                    </a:p>
+                  </a:txBody>
+                  <a:tcPr marL="101600" marR="101600" marT="38100" marB="38100" anchor="ctr">
+                    <a:lnL w="12700" cap="flat" cmpd="sng" algn="ctr">
+                      <a:solidFill>
+                        <a:srgbClr val="172A5E"/>
+                      </a:solidFill>
+                      <a:prstDash val="solid"/>
+                      <a:round/>
+                      <a:headEnd type="none" w="med" len="med"/>
+                      <a:tailEnd type="none" w="med" len="med"/>
+                    </a:lnL>
+                    <a:lnR w="12700" cap="flat" cmpd="sng" algn="ctr">
+                      <a:solidFill>
+                        <a:srgbClr val="172A5E"/>
+                      </a:solidFill>
+                      <a:prstDash val="solid"/>
+                      <a:round/>
+                      <a:headEnd type="none" w="med" len="med"/>
+                      <a:tailEnd type="none" w="med" len="med"/>
+                    </a:lnR>
+                    <a:lnT w="12700" cap="flat" cmpd="sng" algn="ctr">
+                      <a:solidFill>
+                        <a:srgbClr val="172A5E"/>
+                      </a:solidFill>
+                      <a:prstDash val="solid"/>
+                      <a:round/>
+                      <a:headEnd type="none" w="med" len="med"/>
+                      <a:tailEnd type="none" w="med" len="med"/>
+                    </a:lnT>
+                    <a:lnB w="12700" cap="flat" cmpd="sng" algn="ctr">
+                      <a:solidFill>
+                        <a:srgbClr val="172A5E"/>
+                      </a:solidFill>
+                      <a:prstDash val="solid"/>
+                      <a:round/>
+                      <a:headEnd type="none" w="med" len="med"/>
+                      <a:tailEnd type="none" w="med" len="med"/>
+                    </a:lnB>
+                    <a:solidFill>
+                      <a:srgbClr val="04081F"/>
+                    </a:solidFill>
+                  </a:tcPr>
+                </a:tc>
+                <a:tc>
+                  <a:txBody>
+                    <a:bodyPr/>
+                    <a:lstStyle/>
+                    <a:p>
+                      <a:pPr indent="0" marL="0">
+                        <a:buNone/>
+                      </a:pPr>
+                      <a:r>
+                        <a:rPr lang="en-US" sz="1150" dirty="0">
+                          <a:solidFill>
+                            <a:srgbClr val="AAB4D4"/>
+                          </a:solidFill>
+                          <a:latin typeface="Calibri" pitchFamily="34" charset="0"/>
+                          <a:ea typeface="Calibri" pitchFamily="34" charset="-122"/>
+                          <a:cs typeface="Calibri" pitchFamily="34" charset="-120"/>
+                        </a:rPr>
+                        <a:t>20  (MRR ≥ 10,000)</a:t>
+                      </a:r>
+                      <a:endParaRPr lang="en-US" sz="1150" dirty="0">
+                        <a:latin typeface="Calibri" charset="0"/>
+                        <a:ea typeface="Calibri" charset="0"/>
+                        <a:cs typeface="Calibri" charset="0"/>
+                      </a:endParaRPr>
+                    </a:p>
+                  </a:txBody>
+                  <a:tcPr marL="101600" marR="101600" marT="38100" marB="38100" anchor="ctr">
+                    <a:lnL w="12700" cap="flat" cmpd="sng" algn="ctr">
+                      <a:solidFill>
+                        <a:srgbClr val="172A5E"/>
+                      </a:solidFill>
+                      <a:prstDash val="solid"/>
+                      <a:round/>
+                      <a:headEnd type="none" w="med" len="med"/>
+                      <a:tailEnd type="none" w="med" len="med"/>
+                    </a:lnL>
+                    <a:lnR w="12700" cap="flat" cmpd="sng" algn="ctr">
+                      <a:solidFill>
+                        <a:srgbClr val="172A5E"/>
+                      </a:solidFill>
+                      <a:prstDash val="solid"/>
+                      <a:round/>
+                      <a:headEnd type="none" w="med" len="med"/>
+                      <a:tailEnd type="none" w="med" len="med"/>
+                    </a:lnR>
+                    <a:lnT w="12700" cap="flat" cmpd="sng" algn="ctr">
+                      <a:solidFill>
+                        <a:srgbClr val="172A5E"/>
+                      </a:solidFill>
+                      <a:prstDash val="solid"/>
+                      <a:round/>
+                      <a:headEnd type="none" w="med" len="med"/>
+                      <a:tailEnd type="none" w="med" len="med"/>
+                    </a:lnT>
+                    <a:lnB w="12700" cap="flat" cmpd="sng" algn="ctr">
+                      <a:solidFill>
+                        <a:srgbClr val="172A5E"/>
+                      </a:solidFill>
+                      <a:prstDash val="solid"/>
+                      <a:round/>
+                      <a:headEnd type="none" w="med" len="med"/>
+                      <a:tailEnd type="none" w="med" len="med"/>
+                    </a:lnB>
+                    <a:solidFill>
+                      <a:srgbClr val="04081F"/>
+                    </a:solidFill>
+                  </a:tcPr>
+                </a:tc>
+                <a:tc>
+                  <a:txBody>
+                    <a:bodyPr/>
+                    <a:lstStyle/>
+                    <a:p>
+                      <a:pPr indent="0" marL="0">
+                        <a:buNone/>
+                      </a:pPr>
+                      <a:r>
+                        <a:rPr lang="en-US" sz="1150" dirty="0">
+                          <a:solidFill>
+                            <a:srgbClr val="AAB4D4"/>
+                          </a:solidFill>
+                          <a:latin typeface="Calibri" pitchFamily="34" charset="0"/>
+                          <a:ea typeface="Calibri" pitchFamily="34" charset="-122"/>
+                          <a:cs typeface="Calibri" pitchFamily="34" charset="-120"/>
+                        </a:rPr>
+                        <a:t>50  (MRR ≥ 50,000)</a:t>
+                      </a:r>
+                      <a:endParaRPr lang="en-US" sz="1150" dirty="0">
+                        <a:latin typeface="Calibri" charset="0"/>
+                        <a:ea typeface="Calibri" charset="0"/>
+                        <a:cs typeface="Calibri" charset="0"/>
+                      </a:endParaRPr>
+                    </a:p>
+                  </a:txBody>
+                  <a:tcPr marL="101600" marR="101600" marT="38100" marB="38100" anchor="ctr">
+                    <a:lnL w="12700" cap="flat" cmpd="sng" algn="ctr">
+                      <a:solidFill>
+                        <a:srgbClr val="172A5E"/>
+                      </a:solidFill>
+                      <a:prstDash val="solid"/>
+                      <a:round/>
+                      <a:headEnd type="none" w="med" len="med"/>
+                      <a:tailEnd type="none" w="med" len="med"/>
+                    </a:lnL>
+                    <a:lnR w="12700" cap="flat" cmpd="sng" algn="ctr">
+                      <a:solidFill>
+                        <a:srgbClr val="172A5E"/>
+                      </a:solidFill>
+                      <a:prstDash val="solid"/>
+                      <a:round/>
+                      <a:headEnd type="none" w="med" len="med"/>
+                      <a:tailEnd type="none" w="med" len="med"/>
+                    </a:lnR>
+                    <a:lnT w="12700" cap="flat" cmpd="sng" algn="ctr">
+                      <a:solidFill>
+                        <a:srgbClr val="172A5E"/>
+                      </a:solidFill>
+                      <a:prstDash val="solid"/>
+                      <a:round/>
+                      <a:headEnd type="none" w="med" len="med"/>
+                      <a:tailEnd type="none" w="med" len="med"/>
+                    </a:lnT>
+                    <a:lnB w="12700" cap="flat" cmpd="sng" algn="ctr">
+                      <a:solidFill>
+                        <a:srgbClr val="172A5E"/>
+                      </a:solidFill>
+                      <a:prstDash val="solid"/>
+                      <a:round/>
+                      <a:headEnd type="none" w="med" len="med"/>
+                      <a:tailEnd type="none" w="med" len="med"/>
+                    </a:lnB>
+                    <a:solidFill>
+                      <a:srgbClr val="04081F"/>
+                    </a:solidFill>
+                  </a:tcPr>
+                </a:tc>
+              </a:tr>
+              <a:tr h="329184">
+                <a:tc>
+                  <a:txBody>
+                    <a:bodyPr/>
+                    <a:lstStyle/>
+                    <a:p>
+                      <a:pPr indent="0" marL="0">
+                        <a:buNone/>
+                      </a:pPr>
+                      <a:r>
+                        <a:rPr lang="en-US" sz="1150" dirty="0">
+                          <a:solidFill>
+                            <a:srgbClr val="AAB4D4"/>
+                          </a:solidFill>
+                          <a:latin typeface="Calibri" pitchFamily="34" charset="0"/>
+                          <a:ea typeface="Calibri" pitchFamily="34" charset="-122"/>
+                          <a:cs typeface="Calibri" pitchFamily="34" charset="-120"/>
+                        </a:rPr>
+                        <a:t>Competencias AWS</a:t>
+                      </a:r>
+                      <a:endParaRPr lang="en-US" sz="1150" dirty="0">
+                        <a:latin typeface="Calibri" charset="0"/>
+                        <a:ea typeface="Calibri" charset="0"/>
+                        <a:cs typeface="Calibri" charset="0"/>
+                      </a:endParaRPr>
+                    </a:p>
+                  </a:txBody>
+                  <a:tcPr marL="101600" marR="101600" marT="38100" marB="38100" anchor="ctr">
+                    <a:lnL w="12700" cap="flat" cmpd="sng" algn="ctr">
+                      <a:solidFill>
+                        <a:srgbClr val="172A5E"/>
+                      </a:solidFill>
+                      <a:prstDash val="solid"/>
+                      <a:round/>
+                      <a:headEnd type="none" w="med" len="med"/>
+                      <a:tailEnd type="none" w="med" len="med"/>
+                    </a:lnL>
+                    <a:lnR w="12700" cap="flat" cmpd="sng" algn="ctr">
+                      <a:solidFill>
+                        <a:srgbClr val="172A5E"/>
+                      </a:solidFill>
+                      <a:prstDash val="solid"/>
+                      <a:round/>
+                      <a:headEnd type="none" w="med" len="med"/>
+                      <a:tailEnd type="none" w="med" len="med"/>
+                    </a:lnR>
+                    <a:lnT w="12700" cap="flat" cmpd="sng" algn="ctr">
+                      <a:solidFill>
+                        <a:srgbClr val="172A5E"/>
+                      </a:solidFill>
+                      <a:prstDash val="solid"/>
+                      <a:round/>
+                      <a:headEnd type="none" w="med" len="med"/>
+                      <a:tailEnd type="none" w="med" len="med"/>
+                    </a:lnT>
+                    <a:lnB w="12700" cap="flat" cmpd="sng" algn="ctr">
+                      <a:solidFill>
+                        <a:srgbClr val="172A5E"/>
+                      </a:solidFill>
+                      <a:prstDash val="solid"/>
+                      <a:round/>
+                      <a:headEnd type="none" w="med" len="med"/>
+                      <a:tailEnd type="none" w="med" len="med"/>
+                    </a:lnB>
+                    <a:solidFill>
+                      <a:srgbClr val="04081F"/>
+                    </a:solidFill>
+                  </a:tcPr>
+                </a:tc>
+                <a:tc>
+                  <a:txBody>
+                    <a:bodyPr/>
+                    <a:lstStyle/>
+                    <a:p>
+                      <a:pPr indent="0" marL="0">
+                        <a:buNone/>
+                      </a:pPr>
+                      <a:r>
+                        <a:rPr lang="en-US" sz="1150" dirty="0">
+                          <a:solidFill>
+                            <a:srgbClr val="AAB4D4"/>
+                          </a:solidFill>
+                          <a:latin typeface="Calibri" pitchFamily="34" charset="0"/>
+                          <a:ea typeface="Calibri" pitchFamily="34" charset="-122"/>
+                          <a:cs typeface="Calibri" pitchFamily="34" charset="-120"/>
+                        </a:rPr>
+                        <a:t>—</a:t>
+                      </a:r>
+                      <a:endParaRPr lang="en-US" sz="1150" dirty="0">
+                        <a:latin typeface="Calibri" charset="0"/>
+                        <a:ea typeface="Calibri" charset="0"/>
+                        <a:cs typeface="Calibri" charset="0"/>
+                      </a:endParaRPr>
+                    </a:p>
+                  </a:txBody>
+                  <a:tcPr marL="101600" marR="101600" marT="38100" marB="38100" anchor="ctr">
+                    <a:lnL w="12700" cap="flat" cmpd="sng" algn="ctr">
+                      <a:solidFill>
+                        <a:srgbClr val="172A5E"/>
+                      </a:solidFill>
+                      <a:prstDash val="solid"/>
+                      <a:round/>
+                      <a:headEnd type="none" w="med" len="med"/>
+                      <a:tailEnd type="none" w="med" len="med"/>
+                    </a:lnL>
+                    <a:lnR w="12700" cap="flat" cmpd="sng" algn="ctr">
+                      <a:solidFill>
+                        <a:srgbClr val="172A5E"/>
+                      </a:solidFill>
+                      <a:prstDash val="solid"/>
+                      <a:round/>
+                      <a:headEnd type="none" w="med" len="med"/>
+                      <a:tailEnd type="none" w="med" len="med"/>
+                    </a:lnR>
+                    <a:lnT w="12700" cap="flat" cmpd="sng" algn="ctr">
+                      <a:solidFill>
+                        <a:srgbClr val="172A5E"/>
+                      </a:solidFill>
+                      <a:prstDash val="solid"/>
+                      <a:round/>
+                      <a:headEnd type="none" w="med" len="med"/>
+                      <a:tailEnd type="none" w="med" len="med"/>
+                    </a:lnT>
+                    <a:lnB w="12700" cap="flat" cmpd="sng" algn="ctr">
+                      <a:solidFill>
+                        <a:srgbClr val="172A5E"/>
+                      </a:solidFill>
+                      <a:prstDash val="solid"/>
+                      <a:round/>
+                      <a:headEnd type="none" w="med" len="med"/>
+                      <a:tailEnd type="none" w="med" len="med"/>
+                    </a:lnB>
+                    <a:solidFill>
+                      <a:srgbClr val="04081F"/>
+                    </a:solidFill>
+                  </a:tcPr>
+                </a:tc>
+                <a:tc>
+                  <a:txBody>
+                    <a:bodyPr/>
+                    <a:lstStyle/>
+                    <a:p>
+                      <a:pPr indent="0" marL="0">
+                        <a:buNone/>
+                      </a:pPr>
+                      <a:r>
+                        <a:rPr lang="en-US" sz="1150" dirty="0">
+                          <a:solidFill>
+                            <a:srgbClr val="AAB4D4"/>
+                          </a:solidFill>
+                          <a:latin typeface="Calibri" pitchFamily="34" charset="0"/>
+                          <a:ea typeface="Calibri" pitchFamily="34" charset="-122"/>
+                          <a:cs typeface="Calibri" pitchFamily="34" charset="-120"/>
+                        </a:rPr>
+                        <a:t>—</a:t>
+                      </a:r>
+                      <a:endParaRPr lang="en-US" sz="1150" dirty="0">
+                        <a:latin typeface="Calibri" charset="0"/>
+                        <a:ea typeface="Calibri" charset="0"/>
+                        <a:cs typeface="Calibri" charset="0"/>
+                      </a:endParaRPr>
+                    </a:p>
+                  </a:txBody>
+                  <a:tcPr marL="101600" marR="101600" marT="38100" marB="38100" anchor="ctr">
+                    <a:lnL w="12700" cap="flat" cmpd="sng" algn="ctr">
+                      <a:solidFill>
+                        <a:srgbClr val="172A5E"/>
+                      </a:solidFill>
+                      <a:prstDash val="solid"/>
+                      <a:round/>
+                      <a:headEnd type="none" w="med" len="med"/>
+                      <a:tailEnd type="none" w="med" len="med"/>
+                    </a:lnL>
+                    <a:lnR w="12700" cap="flat" cmpd="sng" algn="ctr">
+                      <a:solidFill>
+                        <a:srgbClr val="172A5E"/>
+                      </a:solidFill>
+                      <a:prstDash val="solid"/>
+                      <a:round/>
+                      <a:headEnd type="none" w="med" len="med"/>
+                      <a:tailEnd type="none" w="med" len="med"/>
+                    </a:lnR>
+                    <a:lnT w="12700" cap="flat" cmpd="sng" algn="ctr">
+                      <a:solidFill>
+                        <a:srgbClr val="172A5E"/>
+                      </a:solidFill>
+                      <a:prstDash val="solid"/>
+                      <a:round/>
+                      <a:headEnd type="none" w="med" len="med"/>
+                      <a:tailEnd type="none" w="med" len="med"/>
+                    </a:lnT>
+                    <a:lnB w="12700" cap="flat" cmpd="sng" algn="ctr">
+                      <a:solidFill>
+                        <a:srgbClr val="172A5E"/>
+                      </a:solidFill>
+                      <a:prstDash val="solid"/>
+                      <a:round/>
+                      <a:headEnd type="none" w="med" len="med"/>
+                      <a:tailEnd type="none" w="med" len="med"/>
+                    </a:lnB>
+                    <a:solidFill>
+                      <a:srgbClr val="04081F"/>
+                    </a:solidFill>
+                  </a:tcPr>
+                </a:tc>
+                <a:tc>
+                  <a:txBody>
+                    <a:bodyPr/>
+                    <a:lstStyle/>
+                    <a:p>
+                      <a:pPr indent="0" marL="0">
+                        <a:buNone/>
+                      </a:pPr>
+                      <a:r>
+                        <a:rPr lang="en-US" sz="1150" dirty="0">
+                          <a:solidFill>
+                            <a:srgbClr val="AAB4D4"/>
+                          </a:solidFill>
+                          <a:latin typeface="Calibri" pitchFamily="34" charset="0"/>
+                          <a:ea typeface="Calibri" pitchFamily="34" charset="-122"/>
+                          <a:cs typeface="Calibri" pitchFamily="34" charset="-120"/>
+                        </a:rPr>
+                        <a:t>3</a:t>
+                      </a:r>
+                      <a:endParaRPr lang="en-US" sz="1150" dirty="0">
+                        <a:latin typeface="Calibri" charset="0"/>
+                        <a:ea typeface="Calibri" charset="0"/>
+                        <a:cs typeface="Calibri" charset="0"/>
+                      </a:endParaRPr>
+                    </a:p>
+                  </a:txBody>
+                  <a:tcPr marL="101600" marR="101600" marT="38100" marB="38100" anchor="ctr">
+                    <a:lnL w="12700" cap="flat" cmpd="sng" algn="ctr">
+                      <a:solidFill>
+                        <a:srgbClr val="172A5E"/>
+                      </a:solidFill>
+                      <a:prstDash val="solid"/>
+                      <a:round/>
+                      <a:headEnd type="none" w="med" len="med"/>
+                      <a:tailEnd type="none" w="med" len="med"/>
+                    </a:lnL>
+                    <a:lnR w="12700" cap="flat" cmpd="sng" algn="ctr">
+                      <a:solidFill>
+                        <a:srgbClr val="172A5E"/>
+                      </a:solidFill>
+                      <a:prstDash val="solid"/>
+                      <a:round/>
+                      <a:headEnd type="none" w="med" len="med"/>
+                      <a:tailEnd type="none" w="med" len="med"/>
+                    </a:lnR>
+                    <a:lnT w="12700" cap="flat" cmpd="sng" algn="ctr">
+                      <a:solidFill>
+                        <a:srgbClr val="172A5E"/>
+                      </a:solidFill>
+                      <a:prstDash val="solid"/>
+                      <a:round/>
+                      <a:headEnd type="none" w="med" len="med"/>
+                      <a:tailEnd type="none" w="med" len="med"/>
+                    </a:lnT>
+                    <a:lnB w="12700" cap="flat" cmpd="sng" algn="ctr">
+                      <a:solidFill>
+                        <a:srgbClr val="172A5E"/>
+                      </a:solidFill>
+                      <a:prstDash val="solid"/>
+                      <a:round/>
+                      <a:headEnd type="none" w="med" len="med"/>
+                      <a:tailEnd type="none" w="med" len="med"/>
+                    </a:lnB>
+                    <a:solidFill>
+                      <a:srgbClr val="04081F"/>
+                    </a:solidFill>
+                  </a:tcPr>
+                </a:tc>
+              </a:tr>
+            </a:tbl>
+          </a:graphicData>
+        </a:graphic>
+      </p:graphicFrame>
+      <p:sp>
+        <p:nvSpPr>
+          <p:cNvPr id="5" name="Text 2"/>
+          <p:cNvSpPr/>
+          <p:nvPr/>
+        </p:nvSpPr>
+        <p:spPr>
+          <a:xfrm>
+            <a:off x="566928" y="4261104"/>
+            <a:ext cx="11027664" cy="566928"/>
+          </a:xfrm>
+          <a:prstGeom prst="rect">
+            <a:avLst/>
+          </a:prstGeom>
+          <a:noFill/>
+          <a:ln/>
+        </p:spPr>
+        <p:txBody>
+          <a:bodyPr wrap="square" lIns="0" tIns="0" rIns="0" bIns="0" rtlCol="0" anchor="ctr"/>
+          <a:lstStyle/>
+          <a:p>
+            <a:pPr indent="0" marL="0">
+              <a:lnSpc>
+                <a:spcPts val="2100"/>
+              </a:lnSpc>
+              <a:buNone/>
+            </a:pPr>
+            <a:r>
+              <a:rPr lang="en-US" sz="1300" b="1" dirty="0">
+                <a:solidFill>
+                  <a:srgbClr val="EAF1FF"/>
+                </a:solidFill>
+                <a:latin typeface="Calibri" pitchFamily="34" charset="0"/>
+                <a:ea typeface="Calibri" pitchFamily="34" charset="-122"/>
+                <a:cs typeface="Calibri" pitchFamily="34" charset="-120"/>
+              </a:rPr>
+              <a:t>Con cinco socios que ya trabajan AWS a diario, el tier Select es cuestión de presentar exámenes. </a:t>
+            </a:r>
+            <a:pPr indent="0" marL="0">
+              <a:lnSpc>
+                <a:spcPts val="2100"/>
+              </a:lnSpc>
+              <a:buNone/>
+            </a:pPr>
+            <a:r>
+              <a:rPr lang="en-US" sz="1300" dirty="0">
+                <a:solidFill>
+                  <a:srgbClr val="AAB4D4"/>
+                </a:solidFill>
+                <a:latin typeface="Calibri" pitchFamily="34" charset="0"/>
+                <a:ea typeface="Calibri" pitchFamily="34" charset="-122"/>
+                <a:cs typeface="Calibri" pitchFamily="34" charset="-120"/>
+              </a:rPr>
+              <a:t>La barrera real no son las certificaciones: son las 3 oportunidades lanzadas con MRR ≥ USD 1,500.</a:t>
+            </a:r>
+            <a:endParaRPr lang="en-US" sz="1300" dirty="0"/>
+          </a:p>
+        </p:txBody>
+      </p:sp>
+      <p:sp>
+        <p:nvSpPr>
+          <p:cNvPr id="6" name="Shape 3"/>
+          <p:cNvSpPr/>
+          <p:nvPr/>
+        </p:nvSpPr>
+        <p:spPr>
+          <a:xfrm>
+            <a:off x="566928" y="4901184"/>
+            <a:ext cx="11027664" cy="914400"/>
+          </a:xfrm>
+          <a:prstGeom prst="roundRect">
+            <a:avLst>
+              <a:gd name="adj" fmla="val 10000"/>
+            </a:avLst>
+          </a:prstGeom>
+          <a:solidFill>
+            <a:srgbClr val="2A1418"/>
+          </a:solidFill>
+          <a:ln w="15875">
+            <a:solidFill>
+              <a:srgbClr val="C98500"/>
+            </a:solidFill>
+            <a:prstDash val="solid"/>
+          </a:ln>
+        </p:spPr>
+      </p:sp>
+      <p:sp>
+        <p:nvSpPr>
+          <p:cNvPr id="7" name="Text 4"/>
+          <p:cNvSpPr/>
+          <p:nvPr/>
+        </p:nvSpPr>
+        <p:spPr>
+          <a:xfrm>
+            <a:off x="841248" y="5065776"/>
+            <a:ext cx="10424160" cy="621792"/>
+          </a:xfrm>
+          <a:prstGeom prst="rect">
+            <a:avLst/>
+          </a:prstGeom>
+          <a:noFill/>
+          <a:ln/>
+        </p:spPr>
+        <p:txBody>
+          <a:bodyPr wrap="square" lIns="0" tIns="0" rIns="0" bIns="0" rtlCol="0" anchor="ctr"/>
+          <a:lstStyle/>
+          <a:p>
+            <a:pPr indent="0" marL="0">
+              <a:buNone/>
+            </a:pPr>
+            <a:r>
+              <a:rPr lang="en-US" sz="1250" b="1" dirty="0">
+                <a:solidFill>
+                  <a:srgbClr val="C98500"/>
+                </a:solidFill>
+                <a:latin typeface="Calibri" pitchFamily="34" charset="0"/>
+                <a:ea typeface="Calibri" pitchFamily="34" charset="-122"/>
+                <a:cs typeface="Calibri" pitchFamily="34" charset="-120"/>
+              </a:rPr>
+              <a:t>La trampa: </a:t>
+            </a:r>
+            <a:pPr indent="0" marL="0">
+              <a:buNone/>
+            </a:pPr>
+            <a:r>
+              <a:rPr lang="en-US" sz="1250" dirty="0">
+                <a:solidFill>
+                  <a:srgbClr val="EAF1FF"/>
+                </a:solidFill>
+                <a:latin typeface="Calibri" pitchFamily="34" charset="0"/>
+                <a:ea typeface="Calibri" pitchFamily="34" charset="-122"/>
+                <a:cs typeface="Calibri" pitchFamily="34" charset="-120"/>
+              </a:rPr>
+              <a:t>los tres programas escalan con oportunidades cerradas, no con certificaciones. Las certificaciones abren la puerta; los tiers altos exigen negocio real. Es un motor de aceleración, no de arranque — corre en paralelo a las referencias, no en su lugar.</a:t>
+            </a:r>
+            <a:endParaRPr lang="en-US" sz="1250" dirty="0"/>
+          </a:p>
+        </p:txBody>
+      </p:sp>
+      <p:sp>
+        <p:nvSpPr>
+          <p:cNvPr id="8" name="Text 5"/>
+          <p:cNvSpPr/>
+          <p:nvPr/>
+        </p:nvSpPr>
+        <p:spPr>
+          <a:xfrm>
+            <a:off x="566928" y="6199632"/>
+            <a:ext cx="11027664" cy="310896"/>
+          </a:xfrm>
+          <a:prstGeom prst="rect">
+            <a:avLst/>
+          </a:prstGeom>
+          <a:noFill/>
+          <a:ln/>
+        </p:spPr>
+        <p:txBody>
+          <a:bodyPr wrap="square" lIns="0" tIns="0" rIns="0" bIns="0" rtlCol="0" anchor="ctr"/>
+          <a:lstStyle/>
+          <a:p>
+            <a:pPr indent="0" marL="0">
+              <a:buNone/>
+            </a:pPr>
+            <a:r>
+              <a:rPr lang="en-US" sz="1050" i="1" dirty="0">
+                <a:solidFill>
+                  <a:srgbClr val="7B87AD"/>
+                </a:solidFill>
+                <a:latin typeface="Calibri" pitchFamily="34" charset="0"/>
+                <a:ea typeface="Calibri" pitchFamily="34" charset="-122"/>
+                <a:cs typeface="Calibri" pitchFamily="34" charset="-120"/>
+              </a:rPr>
+              <a:t>Fuente: AWS Services Partner Tiers (aws.amazon.com/partners/services-tiers), consultado 6-ago-2026.</a:t>
+            </a:r>
+            <a:endParaRPr lang="en-US" sz="1050" dirty="0"/>
+          </a:p>
+        </p:txBody>
+      </p:sp>
+    </p:spTree>
+  </p:cSld>
+  <p:clrMapOvr>
+    <a:masterClrMapping/>
+  </p:clrMapOvr>
+</p:sld>
+</file>
+
+<file path=ppt/slides/slide12.xml><?xml version="1.0" encoding="utf-8"?>
+<p:sld xmlns:a="http://schemas.openxmlformats.org/drawingml/2006/main" xmlns:r="http://schemas.openxmlformats.org/officeDocument/2006/relationships" xmlns:p="http://schemas.openxmlformats.org/presentationml/2006/main">
+  <p:cSld name="Slide 12">
+    <p:bg>
+      <p:bgPr>
+        <a:solidFill>
+          <a:srgbClr val="04081F"/>
+        </a:solidFill>
+      </p:bgPr>
+    </p:bg>
+    <p:spTree>
+      <p:nvGrpSpPr>
+        <p:cNvPr id="1" name=""/>
+        <p:cNvGrpSpPr/>
+        <p:nvPr/>
+      </p:nvGrpSpPr>
+      <p:grpSpPr>
+        <a:xfrm>
+          <a:off x="0" y="0"/>
+          <a:ext cx="0" cy="0"/>
+          <a:chOff x="0" y="0"/>
+          <a:chExt cx="0" cy="0"/>
+        </a:xfrm>
+      </p:grpSpPr>
+      <p:sp>
+        <p:nvSpPr>
+          <p:cNvPr id="2" name="Text 0"/>
+          <p:cNvSpPr/>
+          <p:nvPr/>
+        </p:nvSpPr>
+        <p:spPr>
+          <a:xfrm>
+            <a:off x="566928" y="384048"/>
+            <a:ext cx="11027664" cy="237744"/>
+          </a:xfrm>
+          <a:prstGeom prst="rect">
+            <a:avLst/>
+          </a:prstGeom>
+          <a:noFill/>
+          <a:ln/>
+        </p:spPr>
+        <p:txBody>
+          <a:bodyPr wrap="square" lIns="0" tIns="0" rIns="0" bIns="0" rtlCol="0" anchor="ctr"/>
+          <a:lstStyle/>
+          <a:p>
+            <a:pPr indent="0" marL="0">
+              <a:buNone/>
+            </a:pPr>
+            <a:r>
+              <a:rPr lang="en-US" sz="1100" b="1" spc="160" kern="0" dirty="0">
+                <a:solidFill>
+                  <a:srgbClr val="00C2FF"/>
+                </a:solidFill>
+                <a:latin typeface="Calibri" pitchFamily="34" charset="0"/>
+                <a:ea typeface="Calibri" pitchFamily="34" charset="-122"/>
+                <a:cs typeface="Calibri" pitchFamily="34" charset="-120"/>
+              </a:rPr>
+              <a:t>ROADMAP</a:t>
+            </a:r>
+            <a:endParaRPr lang="en-US" sz="1100" dirty="0"/>
+          </a:p>
+        </p:txBody>
+      </p:sp>
+      <p:sp>
+        <p:nvSpPr>
+          <p:cNvPr id="3" name="Text 1"/>
+          <p:cNvSpPr/>
+          <p:nvPr/>
+        </p:nvSpPr>
+        <p:spPr>
+          <a:xfrm>
+            <a:off x="566928" y="658368"/>
+            <a:ext cx="11027664" cy="658368"/>
+          </a:xfrm>
+          <a:prstGeom prst="rect">
+            <a:avLst/>
+          </a:prstGeom>
+          <a:noFill/>
+          <a:ln/>
+        </p:spPr>
+        <p:txBody>
+          <a:bodyPr wrap="square" lIns="0" tIns="0" rIns="0" bIns="0" rtlCol="0" anchor="ctr"/>
+          <a:lstStyle/>
+          <a:p>
+            <a:pPr indent="0" marL="0">
+              <a:buNone/>
+            </a:pPr>
+            <a:r>
+              <a:rPr lang="en-US" sz="3400" b="1" dirty="0">
+                <a:solidFill>
+                  <a:srgbClr val="EAF1FF"/>
+                </a:solidFill>
+                <a:latin typeface="Calibri" pitchFamily="34" charset="0"/>
+                <a:ea typeface="Calibri" pitchFamily="34" charset="-122"/>
+                <a:cs typeface="Calibri" pitchFamily="34" charset="-120"/>
+              </a:rPr>
+              <a:t>Cuatro fases, 18 meses</a:t>
+            </a:r>
+            <a:endParaRPr lang="en-US" sz="3400" dirty="0"/>
+          </a:p>
+        </p:txBody>
+      </p:sp>
+      <p:sp>
+        <p:nvSpPr>
+          <p:cNvPr id="4" name="Shape 2"/>
+          <p:cNvSpPr/>
+          <p:nvPr/>
+        </p:nvSpPr>
+        <p:spPr>
+          <a:xfrm>
+            <a:off x="566928" y="1746504"/>
+            <a:ext cx="201168" cy="201168"/>
+          </a:xfrm>
+          <a:prstGeom prst="ellipse">
+            <a:avLst/>
+          </a:prstGeom>
+          <a:solidFill>
+            <a:srgbClr val="00C2FF"/>
+          </a:solidFill>
+          <a:ln/>
+        </p:spPr>
+      </p:sp>
+      <p:sp>
+        <p:nvSpPr>
+          <p:cNvPr id="5" name="Text 3"/>
+          <p:cNvSpPr/>
+          <p:nvPr/>
+        </p:nvSpPr>
+        <p:spPr>
+          <a:xfrm>
+            <a:off x="950976" y="1691640"/>
+            <a:ext cx="10515600" cy="274320"/>
+          </a:xfrm>
+          <a:prstGeom prst="rect">
+            <a:avLst/>
+          </a:prstGeom>
+          <a:noFill/>
+          <a:ln/>
+        </p:spPr>
+        <p:txBody>
+          <a:bodyPr wrap="square" lIns="0" tIns="0" rIns="0" bIns="0" rtlCol="0" anchor="ctr"/>
+          <a:lstStyle/>
+          <a:p>
+            <a:pPr indent="0" marL="0">
+              <a:buNone/>
+            </a:pPr>
+            <a:r>
+              <a:rPr lang="en-US" sz="1100" b="1" spc="110" kern="0" dirty="0">
+                <a:solidFill>
+                  <a:srgbClr val="00C2FF"/>
+                </a:solidFill>
+                <a:latin typeface="Calibri" pitchFamily="34" charset="0"/>
+                <a:ea typeface="Calibri" pitchFamily="34" charset="-122"/>
+                <a:cs typeface="Calibri" pitchFamily="34" charset="-120"/>
+              </a:rPr>
+              <a:t>FASE 0 · SEMANAS 1–4 · FUNDAMENTOS</a:t>
+            </a:r>
+            <a:endParaRPr lang="en-US" sz="1100" dirty="0"/>
+          </a:p>
+        </p:txBody>
+      </p:sp>
+      <p:sp>
+        <p:nvSpPr>
+          <p:cNvPr id="6" name="Text 4"/>
+          <p:cNvSpPr/>
+          <p:nvPr/>
+        </p:nvSpPr>
+        <p:spPr>
+          <a:xfrm>
+            <a:off x="950976" y="1993392"/>
+            <a:ext cx="10515600" cy="713232"/>
+          </a:xfrm>
+          <a:prstGeom prst="rect">
+            <a:avLst/>
+          </a:prstGeom>
+          <a:noFill/>
+          <a:ln/>
+        </p:spPr>
+        <p:txBody>
+          <a:bodyPr wrap="square" lIns="0" tIns="0" rIns="0" bIns="0" rtlCol="0" anchor="ctr"/>
+          <a:lstStyle/>
+          <a:p>
+            <a:pPr indent="0" marL="0">
+              <a:lnSpc>
+                <a:spcPts val="2000"/>
+              </a:lnSpc>
+              <a:buNone/>
+            </a:pPr>
+            <a:r>
+              <a:rPr lang="en-US" sz="1250" dirty="0">
+                <a:solidFill>
+                  <a:srgbClr val="AAB4D4"/>
+                </a:solidFill>
+                <a:latin typeface="Calibri" pitchFamily="34" charset="0"/>
+                <a:ea typeface="Calibri" pitchFamily="34" charset="-122"/>
+                <a:cs typeface="Calibri" pitchFamily="34" charset="-120"/>
+              </a:rPr>
+              <a:t>Elegir un nicho declarado (recomendación: manufactura y consumo en México, donde el equipo ya tiene Nemak y AB InBev). Empaquetar 3 ofertas con precio cerrado. Publicar 3 casos con cifras. Instrumentar el CRM. Inscribirse a APN, MAICPP y Google Partner Network — los tres son gratis o baratos y el reloj de certificaciones empieza a correr.</a:t>
+            </a:r>
+            <a:endParaRPr lang="en-US" sz="1250" dirty="0"/>
+          </a:p>
+        </p:txBody>
+      </p:sp>
+      <p:sp>
+        <p:nvSpPr>
+          <p:cNvPr id="7" name="Shape 5"/>
+          <p:cNvSpPr/>
+          <p:nvPr/>
+        </p:nvSpPr>
+        <p:spPr>
+          <a:xfrm>
+            <a:off x="566928" y="2880360"/>
+            <a:ext cx="201168" cy="201168"/>
+          </a:xfrm>
+          <a:prstGeom prst="ellipse">
+            <a:avLst/>
+          </a:prstGeom>
+          <a:solidFill>
+            <a:srgbClr val="00C2FF"/>
+          </a:solidFill>
+          <a:ln/>
+        </p:spPr>
+      </p:sp>
+      <p:sp>
+        <p:nvSpPr>
+          <p:cNvPr id="8" name="Text 6"/>
+          <p:cNvSpPr/>
+          <p:nvPr/>
+        </p:nvSpPr>
+        <p:spPr>
+          <a:xfrm>
+            <a:off x="950976" y="2825496"/>
+            <a:ext cx="10515600" cy="274320"/>
+          </a:xfrm>
+          <a:prstGeom prst="rect">
+            <a:avLst/>
+          </a:prstGeom>
+          <a:noFill/>
+          <a:ln/>
+        </p:spPr>
+        <p:txBody>
+          <a:bodyPr wrap="square" lIns="0" tIns="0" rIns="0" bIns="0" rtlCol="0" anchor="ctr"/>
+          <a:lstStyle/>
+          <a:p>
+            <a:pPr indent="0" marL="0">
+              <a:buNone/>
+            </a:pPr>
+            <a:r>
+              <a:rPr lang="en-US" sz="1100" b="1" spc="110" kern="0" dirty="0">
+                <a:solidFill>
+                  <a:srgbClr val="00C2FF"/>
+                </a:solidFill>
+                <a:latin typeface="Calibri" pitchFamily="34" charset="0"/>
+                <a:ea typeface="Calibri" pitchFamily="34" charset="-122"/>
+                <a:cs typeface="Calibri" pitchFamily="34" charset="-120"/>
+              </a:rPr>
+              <a:t>FASE 1 · MESES 2–4 · REFERENCIAS, VISIBILIDAD Y CERTIFICACIÓN</a:t>
+            </a:r>
+            <a:endParaRPr lang="en-US" sz="1100" dirty="0"/>
+          </a:p>
+        </p:txBody>
+      </p:sp>
+      <p:sp>
+        <p:nvSpPr>
+          <p:cNvPr id="9" name="Text 7"/>
+          <p:cNvSpPr/>
+          <p:nvPr/>
+        </p:nvSpPr>
+        <p:spPr>
+          <a:xfrm>
+            <a:off x="950976" y="3127248"/>
+            <a:ext cx="10515600" cy="713232"/>
+          </a:xfrm>
+          <a:prstGeom prst="rect">
+            <a:avLst/>
+          </a:prstGeom>
+          <a:noFill/>
+          <a:ln/>
+        </p:spPr>
+        <p:txBody>
+          <a:bodyPr wrap="square" lIns="0" tIns="0" rIns="0" bIns="0" rtlCol="0" anchor="ctr"/>
+          <a:lstStyle/>
+          <a:p>
+            <a:pPr indent="0" marL="0">
+              <a:lnSpc>
+                <a:spcPts val="2000"/>
+              </a:lnSpc>
+              <a:buNone/>
+            </a:pPr>
+            <a:r>
+              <a:rPr lang="en-US" sz="1250" dirty="0">
+                <a:solidFill>
+                  <a:srgbClr val="AAB4D4"/>
+                </a:solidFill>
+                <a:latin typeface="Calibri" pitchFamily="34" charset="0"/>
+                <a:ea typeface="Calibri" pitchFamily="34" charset="-122"/>
+                <a:cs typeface="Calibri" pitchFamily="34" charset="-120"/>
+              </a:rPr>
+              <a:t>Lista de 100 fuentes de referencia y rutina semanal de referir primero. Los 5 socios publicando en LinkedIn. Presentar exámenes: meta AWS Select y avanzar el Partner Capability Score de Microsoft. Registrar toda oportunidad en ACE desde el día uno.</a:t>
+            </a:r>
+            <a:endParaRPr lang="en-US" sz="1250" dirty="0"/>
+          </a:p>
+        </p:txBody>
+      </p:sp>
+      <p:sp>
+        <p:nvSpPr>
+          <p:cNvPr id="10" name="Shape 8"/>
+          <p:cNvSpPr/>
+          <p:nvPr/>
+        </p:nvSpPr>
+        <p:spPr>
+          <a:xfrm>
+            <a:off x="566928" y="4014216"/>
+            <a:ext cx="201168" cy="201168"/>
+          </a:xfrm>
+          <a:prstGeom prst="ellipse">
+            <a:avLst/>
+          </a:prstGeom>
+          <a:solidFill>
+            <a:srgbClr val="00C2FF"/>
+          </a:solidFill>
+          <a:ln/>
+        </p:spPr>
+      </p:sp>
+      <p:sp>
+        <p:nvSpPr>
+          <p:cNvPr id="11" name="Text 9"/>
+          <p:cNvSpPr/>
+          <p:nvPr/>
+        </p:nvSpPr>
+        <p:spPr>
+          <a:xfrm>
+            <a:off x="950976" y="3959352"/>
+            <a:ext cx="10515600" cy="274320"/>
+          </a:xfrm>
+          <a:prstGeom prst="rect">
+            <a:avLst/>
+          </a:prstGeom>
+          <a:noFill/>
+          <a:ln/>
+        </p:spPr>
+        <p:txBody>
+          <a:bodyPr wrap="square" lIns="0" tIns="0" rIns="0" bIns="0" rtlCol="0" anchor="ctr"/>
+          <a:lstStyle/>
+          <a:p>
+            <a:pPr indent="0" marL="0">
+              <a:buNone/>
+            </a:pPr>
+            <a:r>
+              <a:rPr lang="en-US" sz="1100" b="1" spc="110" kern="0" dirty="0">
+                <a:solidFill>
+                  <a:srgbClr val="00C2FF"/>
+                </a:solidFill>
+                <a:latin typeface="Calibri" pitchFamily="34" charset="0"/>
+                <a:ea typeface="Calibri" pitchFamily="34" charset="-122"/>
+                <a:cs typeface="Calibri" pitchFamily="34" charset="-120"/>
+              </a:rPr>
+              <a:t>FASE 2 · MESES 4–8 · INVESTIGACIÓN, EVENTOS Y CO-VENTA</a:t>
+            </a:r>
+            <a:endParaRPr lang="en-US" sz="1100" dirty="0"/>
+          </a:p>
+        </p:txBody>
+      </p:sp>
+      <p:sp>
+        <p:nvSpPr>
+          <p:cNvPr id="12" name="Text 10"/>
+          <p:cNvSpPr/>
+          <p:nvPr/>
+        </p:nvSpPr>
+        <p:spPr>
+          <a:xfrm>
+            <a:off x="950976" y="4261104"/>
+            <a:ext cx="10515600" cy="713232"/>
+          </a:xfrm>
+          <a:prstGeom prst="rect">
+            <a:avLst/>
+          </a:prstGeom>
+          <a:noFill/>
+          <a:ln/>
+        </p:spPr>
+        <p:txBody>
+          <a:bodyPr wrap="square" lIns="0" tIns="0" rIns="0" bIns="0" rtlCol="0" anchor="ctr"/>
+          <a:lstStyle/>
+          <a:p>
+            <a:pPr indent="0" marL="0">
+              <a:lnSpc>
+                <a:spcPts val="2000"/>
+              </a:lnSpc>
+              <a:buNone/>
+            </a:pPr>
+            <a:r>
+              <a:rPr lang="en-US" sz="1250" dirty="0">
+                <a:solidFill>
+                  <a:srgbClr val="AAB4D4"/>
+                </a:solidFill>
+                <a:latin typeface="Calibri" pitchFamily="34" charset="0"/>
+                <a:ea typeface="Calibri" pitchFamily="34" charset="-122"/>
+                <a:cs typeface="Calibri" pitchFamily="34" charset="-120"/>
+              </a:rPr>
+              <a:t>Levantar 200+ diagnósticos y publicar el primer estudio de madurez de datos e IA en México. Presentarlo en un evento propio y en 3 conferencias. Activar co-venta con los vendedores de AWS y Microsoft en la plaza.</a:t>
+            </a:r>
+            <a:endParaRPr lang="en-US" sz="1250" dirty="0"/>
+          </a:p>
+        </p:txBody>
+      </p:sp>
+      <p:sp>
+        <p:nvSpPr>
+          <p:cNvPr id="13" name="Shape 11"/>
+          <p:cNvSpPr/>
+          <p:nvPr/>
+        </p:nvSpPr>
+        <p:spPr>
+          <a:xfrm>
+            <a:off x="566928" y="5148072"/>
+            <a:ext cx="201168" cy="201168"/>
+          </a:xfrm>
+          <a:prstGeom prst="ellipse">
+            <a:avLst/>
+          </a:prstGeom>
+          <a:solidFill>
+            <a:srgbClr val="00C2FF"/>
+          </a:solidFill>
+          <a:ln/>
+        </p:spPr>
+      </p:sp>
+      <p:sp>
+        <p:nvSpPr>
+          <p:cNvPr id="14" name="Text 12"/>
+          <p:cNvSpPr/>
+          <p:nvPr/>
+        </p:nvSpPr>
+        <p:spPr>
+          <a:xfrm>
+            <a:off x="950976" y="5093208"/>
+            <a:ext cx="10515600" cy="274320"/>
+          </a:xfrm>
+          <a:prstGeom prst="rect">
+            <a:avLst/>
+          </a:prstGeom>
+          <a:noFill/>
+          <a:ln/>
+        </p:spPr>
+        <p:txBody>
+          <a:bodyPr wrap="square" lIns="0" tIns="0" rIns="0" bIns="0" rtlCol="0" anchor="ctr"/>
+          <a:lstStyle/>
+          <a:p>
+            <a:pPr indent="0" marL="0">
+              <a:buNone/>
+            </a:pPr>
+            <a:r>
+              <a:rPr lang="en-US" sz="1100" b="1" spc="110" kern="0" dirty="0">
+                <a:solidFill>
+                  <a:srgbClr val="00C2FF"/>
+                </a:solidFill>
+                <a:latin typeface="Calibri" pitchFamily="34" charset="0"/>
+                <a:ea typeface="Calibri" pitchFamily="34" charset="-122"/>
+                <a:cs typeface="Calibri" pitchFamily="34" charset="-120"/>
+              </a:rPr>
+              <a:t>FASE 3 · MESES 8–18 · ESCALA</a:t>
+            </a:r>
+            <a:endParaRPr lang="en-US" sz="1100" dirty="0"/>
+          </a:p>
+        </p:txBody>
+      </p:sp>
+      <p:sp>
+        <p:nvSpPr>
+          <p:cNvPr id="15" name="Text 13"/>
+          <p:cNvSpPr/>
+          <p:nvPr/>
+        </p:nvSpPr>
+        <p:spPr>
+          <a:xfrm>
+            <a:off x="950976" y="5394960"/>
+            <a:ext cx="10515600" cy="713232"/>
+          </a:xfrm>
+          <a:prstGeom prst="rect">
+            <a:avLst/>
+          </a:prstGeom>
+          <a:noFill/>
+          <a:ln/>
+        </p:spPr>
+        <p:txBody>
+          <a:bodyPr wrap="square" lIns="0" tIns="0" rIns="0" bIns="0" rtlCol="0" anchor="ctr"/>
+          <a:lstStyle/>
+          <a:p>
+            <a:pPr indent="0" marL="0">
+              <a:lnSpc>
+                <a:spcPts val="2000"/>
+              </a:lnSpc>
+              <a:buNone/>
+            </a:pPr>
+            <a:r>
+              <a:rPr lang="en-US" sz="1250" dirty="0">
+                <a:solidFill>
+                  <a:srgbClr val="AAB4D4"/>
+                </a:solidFill>
+                <a:latin typeface="Calibri" pitchFamily="34" charset="0"/>
+                <a:ea typeface="Calibri" pitchFamily="34" charset="-122"/>
+                <a:cs typeface="Calibri" pitchFamily="34" charset="-120"/>
+              </a:rPr>
+              <a:t>Primer SDR. Ir por AWS Advanced y una Advanced Specialization de Microsoft (desbloquea ECIF). Cuentas enterprise multi-año. Segunda edición del estudio.</a:t>
+            </a:r>
+            <a:endParaRPr lang="en-US" sz="1250" dirty="0"/>
+          </a:p>
+        </p:txBody>
+      </p:sp>
+    </p:spTree>
+  </p:cSld>
+  <p:clrMapOvr>
+    <a:masterClrMapping/>
+  </p:clrMapOvr>
+</p:sld>
+</file>
+
+<file path=ppt/slides/slide13.xml><?xml version="1.0" encoding="utf-8"?>
+<p:sld xmlns:a="http://schemas.openxmlformats.org/drawingml/2006/main" xmlns:r="http://schemas.openxmlformats.org/officeDocument/2006/relationships" xmlns:p="http://schemas.openxmlformats.org/presentationml/2006/main">
+  <p:cSld name="Slide 13">
+    <p:bg>
+      <p:bgPr>
+        <a:solidFill>
+          <a:srgbClr val="04081F"/>
+        </a:solidFill>
+      </p:bgPr>
+    </p:bg>
+    <p:spTree>
+      <p:nvGrpSpPr>
+        <p:cNvPr id="1" name=""/>
+        <p:cNvGrpSpPr/>
+        <p:nvPr/>
+      </p:nvGrpSpPr>
+      <p:grpSpPr>
+        <a:xfrm>
+          <a:off x="0" y="0"/>
+          <a:ext cx="0" cy="0"/>
+          <a:chOff x="0" y="0"/>
+          <a:chExt cx="0" cy="0"/>
+        </a:xfrm>
+      </p:grpSpPr>
+      <p:sp>
+        <p:nvSpPr>
+          <p:cNvPr id="2" name="Text 0"/>
+          <p:cNvSpPr/>
+          <p:nvPr/>
+        </p:nvSpPr>
+        <p:spPr>
+          <a:xfrm>
+            <a:off x="566928" y="384048"/>
+            <a:ext cx="11027664" cy="237744"/>
+          </a:xfrm>
+          <a:prstGeom prst="rect">
+            <a:avLst/>
+          </a:prstGeom>
+          <a:noFill/>
+          <a:ln/>
+        </p:spPr>
+        <p:txBody>
+          <a:bodyPr wrap="square" lIns="0" tIns="0" rIns="0" bIns="0" rtlCol="0" anchor="ctr"/>
+          <a:lstStyle/>
+          <a:p>
+            <a:pPr indent="0" marL="0">
+              <a:buNone/>
+            </a:pPr>
+            <a:r>
+              <a:rPr lang="en-US" sz="1100" b="1" spc="160" kern="0" dirty="0">
+                <a:solidFill>
+                  <a:srgbClr val="00C2FF"/>
+                </a:solidFill>
+                <a:latin typeface="Calibri" pitchFamily="34" charset="0"/>
+                <a:ea typeface="Calibri" pitchFamily="34" charset="-122"/>
+                <a:cs typeface="Calibri" pitchFamily="34" charset="-120"/>
+              </a:rPr>
               <a:t>RESPONSABLES</a:t>
             </a:r>
             <a:endParaRPr lang="en-US" sz="1100" dirty="0"/>
@@ -3488,7 +6596,7 @@
       </p:sp>
       <p:graphicFrame>
         <p:nvGraphicFramePr>
-          <p:cNvPr id="12" name="Table 0"/>
+          <p:cNvPr id="14" name="Table 0"/>
           <p:cNvGraphicFramePr>
             <a:graphicFrameLocks noGrp="1"/>
           </p:cNvGraphicFramePr>
@@ -5176,7 +8284,7 @@
                           <a:ea typeface="Calibri" pitchFamily="34" charset="-122"/>
                           <a:cs typeface="Calibri" pitchFamily="34" charset="-120"/>
                         </a:rPr>
-                        <a:t>Alianzas cloud</a:t>
+                        <a:t>Partner cloud y certificaciones</a:t>
                       </a:r>
                       <a:endParaRPr lang="en-US" sz="1200" dirty="0">
                         <a:latin typeface="Calibri" charset="0"/>
@@ -5312,7 +8420,7 @@
                           <a:ea typeface="Calibri" pitchFamily="34" charset="-122"/>
                           <a:cs typeface="Calibri" pitchFamily="34" charset="-120"/>
                         </a:rPr>
-                        <a:t>Jorge</a:t>
+                        <a:t>Todos (exámenes)</a:t>
                       </a:r>
                       <a:endParaRPr lang="en-US" sz="1200" dirty="0">
                         <a:latin typeface="Calibri" charset="0"/>
@@ -5380,7 +8488,281 @@
                           <a:ea typeface="Calibri" pitchFamily="34" charset="-122"/>
                           <a:cs typeface="Calibri" pitchFamily="34" charset="-120"/>
                         </a:rPr>
-                        <a:t>3 h</a:t>
+                        <a:t>5 h + exámenes</a:t>
+                      </a:r>
+                      <a:endParaRPr lang="en-US" sz="1200" dirty="0">
+                        <a:latin typeface="Calibri" charset="0"/>
+                        <a:ea typeface="Calibri" charset="0"/>
+                        <a:cs typeface="Calibri" charset="0"/>
+                      </a:endParaRPr>
+                    </a:p>
+                  </a:txBody>
+                  <a:tcPr marL="101600" marR="101600" marT="50800" marB="50800" anchor="ctr">
+                    <a:lnL w="12700" cap="flat" cmpd="sng" algn="ctr">
+                      <a:solidFill>
+                        <a:srgbClr val="172A5E"/>
+                      </a:solidFill>
+                      <a:prstDash val="solid"/>
+                      <a:round/>
+                      <a:headEnd type="none" w="med" len="med"/>
+                      <a:tailEnd type="none" w="med" len="med"/>
+                    </a:lnL>
+                    <a:lnR w="12700" cap="flat" cmpd="sng" algn="ctr">
+                      <a:solidFill>
+                        <a:srgbClr val="172A5E"/>
+                      </a:solidFill>
+                      <a:prstDash val="solid"/>
+                      <a:round/>
+                      <a:headEnd type="none" w="med" len="med"/>
+                      <a:tailEnd type="none" w="med" len="med"/>
+                    </a:lnR>
+                    <a:lnT w="12700" cap="flat" cmpd="sng" algn="ctr">
+                      <a:solidFill>
+                        <a:srgbClr val="172A5E"/>
+                      </a:solidFill>
+                      <a:prstDash val="solid"/>
+                      <a:round/>
+                      <a:headEnd type="none" w="med" len="med"/>
+                      <a:tailEnd type="none" w="med" len="med"/>
+                    </a:lnT>
+                    <a:lnB w="12700" cap="flat" cmpd="sng" algn="ctr">
+                      <a:solidFill>
+                        <a:srgbClr val="172A5E"/>
+                      </a:solidFill>
+                      <a:prstDash val="solid"/>
+                      <a:round/>
+                      <a:headEnd type="none" w="med" len="med"/>
+                      <a:tailEnd type="none" w="med" len="med"/>
+                    </a:lnB>
+                    <a:solidFill>
+                      <a:srgbClr val="04081F"/>
+                    </a:solidFill>
+                  </a:tcPr>
+                </a:tc>
+              </a:tr>
+              <a:tr h="347472">
+                <a:tc>
+                  <a:txBody>
+                    <a:bodyPr/>
+                    <a:lstStyle/>
+                    <a:p>
+                      <a:pPr indent="0" marL="0">
+                        <a:buNone/>
+                      </a:pPr>
+                      <a:r>
+                        <a:rPr lang="en-US" sz="1200" dirty="0">
+                          <a:solidFill>
+                            <a:srgbClr val="AAB4D4"/>
+                          </a:solidFill>
+                          <a:latin typeface="Calibri" pitchFamily="34" charset="0"/>
+                          <a:ea typeface="Calibri" pitchFamily="34" charset="-122"/>
+                          <a:cs typeface="Calibri" pitchFamily="34" charset="-120"/>
+                        </a:rPr>
+                        <a:t>Co-venta y registro en ACE</a:t>
+                      </a:r>
+                      <a:endParaRPr lang="en-US" sz="1200" dirty="0">
+                        <a:latin typeface="Calibri" charset="0"/>
+                        <a:ea typeface="Calibri" charset="0"/>
+                        <a:cs typeface="Calibri" charset="0"/>
+                      </a:endParaRPr>
+                    </a:p>
+                  </a:txBody>
+                  <a:tcPr marL="101600" marR="101600" marT="50800" marB="50800" anchor="ctr">
+                    <a:lnL w="12700" cap="flat" cmpd="sng" algn="ctr">
+                      <a:solidFill>
+                        <a:srgbClr val="172A5E"/>
+                      </a:solidFill>
+                      <a:prstDash val="solid"/>
+                      <a:round/>
+                      <a:headEnd type="none" w="med" len="med"/>
+                      <a:tailEnd type="none" w="med" len="med"/>
+                    </a:lnL>
+                    <a:lnR w="12700" cap="flat" cmpd="sng" algn="ctr">
+                      <a:solidFill>
+                        <a:srgbClr val="172A5E"/>
+                      </a:solidFill>
+                      <a:prstDash val="solid"/>
+                      <a:round/>
+                      <a:headEnd type="none" w="med" len="med"/>
+                      <a:tailEnd type="none" w="med" len="med"/>
+                    </a:lnR>
+                    <a:lnT w="12700" cap="flat" cmpd="sng" algn="ctr">
+                      <a:solidFill>
+                        <a:srgbClr val="172A5E"/>
+                      </a:solidFill>
+                      <a:prstDash val="solid"/>
+                      <a:round/>
+                      <a:headEnd type="none" w="med" len="med"/>
+                      <a:tailEnd type="none" w="med" len="med"/>
+                    </a:lnT>
+                    <a:lnB w="12700" cap="flat" cmpd="sng" algn="ctr">
+                      <a:solidFill>
+                        <a:srgbClr val="172A5E"/>
+                      </a:solidFill>
+                      <a:prstDash val="solid"/>
+                      <a:round/>
+                      <a:headEnd type="none" w="med" len="med"/>
+                      <a:tailEnd type="none" w="med" len="med"/>
+                    </a:lnB>
+                    <a:solidFill>
+                      <a:srgbClr val="04081F"/>
+                    </a:solidFill>
+                  </a:tcPr>
+                </a:tc>
+                <a:tc>
+                  <a:txBody>
+                    <a:bodyPr/>
+                    <a:lstStyle/>
+                    <a:p>
+                      <a:pPr indent="0" marL="0">
+                        <a:buNone/>
+                      </a:pPr>
+                      <a:r>
+                        <a:rPr lang="en-US" sz="1200" dirty="0">
+                          <a:solidFill>
+                            <a:srgbClr val="AAB4D4"/>
+                          </a:solidFill>
+                          <a:latin typeface="Calibri" pitchFamily="34" charset="0"/>
+                          <a:ea typeface="Calibri" pitchFamily="34" charset="-122"/>
+                          <a:cs typeface="Calibri" pitchFamily="34" charset="-120"/>
+                        </a:rPr>
+                        <a:t>Jorge · CEO</a:t>
+                      </a:r>
+                      <a:endParaRPr lang="en-US" sz="1200" dirty="0">
+                        <a:latin typeface="Calibri" charset="0"/>
+                        <a:ea typeface="Calibri" charset="0"/>
+                        <a:cs typeface="Calibri" charset="0"/>
+                      </a:endParaRPr>
+                    </a:p>
+                  </a:txBody>
+                  <a:tcPr marL="101600" marR="101600" marT="50800" marB="50800" anchor="ctr">
+                    <a:lnL w="12700" cap="flat" cmpd="sng" algn="ctr">
+                      <a:solidFill>
+                        <a:srgbClr val="172A5E"/>
+                      </a:solidFill>
+                      <a:prstDash val="solid"/>
+                      <a:round/>
+                      <a:headEnd type="none" w="med" len="med"/>
+                      <a:tailEnd type="none" w="med" len="med"/>
+                    </a:lnL>
+                    <a:lnR w="12700" cap="flat" cmpd="sng" algn="ctr">
+                      <a:solidFill>
+                        <a:srgbClr val="172A5E"/>
+                      </a:solidFill>
+                      <a:prstDash val="solid"/>
+                      <a:round/>
+                      <a:headEnd type="none" w="med" len="med"/>
+                      <a:tailEnd type="none" w="med" len="med"/>
+                    </a:lnR>
+                    <a:lnT w="12700" cap="flat" cmpd="sng" algn="ctr">
+                      <a:solidFill>
+                        <a:srgbClr val="172A5E"/>
+                      </a:solidFill>
+                      <a:prstDash val="solid"/>
+                      <a:round/>
+                      <a:headEnd type="none" w="med" len="med"/>
+                      <a:tailEnd type="none" w="med" len="med"/>
+                    </a:lnT>
+                    <a:lnB w="12700" cap="flat" cmpd="sng" algn="ctr">
+                      <a:solidFill>
+                        <a:srgbClr val="172A5E"/>
+                      </a:solidFill>
+                      <a:prstDash val="solid"/>
+                      <a:round/>
+                      <a:headEnd type="none" w="med" len="med"/>
+                      <a:tailEnd type="none" w="med" len="med"/>
+                    </a:lnB>
+                    <a:solidFill>
+                      <a:srgbClr val="04081F"/>
+                    </a:solidFill>
+                  </a:tcPr>
+                </a:tc>
+                <a:tc>
+                  <a:txBody>
+                    <a:bodyPr/>
+                    <a:lstStyle/>
+                    <a:p>
+                      <a:pPr indent="0" marL="0">
+                        <a:buNone/>
+                      </a:pPr>
+                      <a:r>
+                        <a:rPr lang="en-US" sz="1200" dirty="0">
+                          <a:solidFill>
+                            <a:srgbClr val="AAB4D4"/>
+                          </a:solidFill>
+                          <a:latin typeface="Calibri" pitchFamily="34" charset="0"/>
+                          <a:ea typeface="Calibri" pitchFamily="34" charset="-122"/>
+                          <a:cs typeface="Calibri" pitchFamily="34" charset="-120"/>
+                        </a:rPr>
+                        <a:t>Alonso</a:t>
+                      </a:r>
+                      <a:endParaRPr lang="en-US" sz="1200" dirty="0">
+                        <a:latin typeface="Calibri" charset="0"/>
+                        <a:ea typeface="Calibri" charset="0"/>
+                        <a:cs typeface="Calibri" charset="0"/>
+                      </a:endParaRPr>
+                    </a:p>
+                  </a:txBody>
+                  <a:tcPr marL="101600" marR="101600" marT="50800" marB="50800" anchor="ctr">
+                    <a:lnL w="12700" cap="flat" cmpd="sng" algn="ctr">
+                      <a:solidFill>
+                        <a:srgbClr val="172A5E"/>
+                      </a:solidFill>
+                      <a:prstDash val="solid"/>
+                      <a:round/>
+                      <a:headEnd type="none" w="med" len="med"/>
+                      <a:tailEnd type="none" w="med" len="med"/>
+                    </a:lnL>
+                    <a:lnR w="12700" cap="flat" cmpd="sng" algn="ctr">
+                      <a:solidFill>
+                        <a:srgbClr val="172A5E"/>
+                      </a:solidFill>
+                      <a:prstDash val="solid"/>
+                      <a:round/>
+                      <a:headEnd type="none" w="med" len="med"/>
+                      <a:tailEnd type="none" w="med" len="med"/>
+                    </a:lnR>
+                    <a:lnT w="12700" cap="flat" cmpd="sng" algn="ctr">
+                      <a:solidFill>
+                        <a:srgbClr val="172A5E"/>
+                      </a:solidFill>
+                      <a:prstDash val="solid"/>
+                      <a:round/>
+                      <a:headEnd type="none" w="med" len="med"/>
+                      <a:tailEnd type="none" w="med" len="med"/>
+                    </a:lnT>
+                    <a:lnB w="12700" cap="flat" cmpd="sng" algn="ctr">
+                      <a:solidFill>
+                        <a:srgbClr val="172A5E"/>
+                      </a:solidFill>
+                      <a:prstDash val="solid"/>
+                      <a:round/>
+                      <a:headEnd type="none" w="med" len="med"/>
+                      <a:tailEnd type="none" w="med" len="med"/>
+                    </a:lnB>
+                    <a:solidFill>
+                      <a:srgbClr val="04081F"/>
+                    </a:solidFill>
+                  </a:tcPr>
+                </a:tc>
+                <a:tc>
+                  <a:txBody>
+                    <a:bodyPr/>
+                    <a:lstStyle/>
+                    <a:p>
+                      <a:pPr indent="0" marL="0">
+                        <a:buNone/>
+                      </a:pPr>
+                      <a:r>
+                        <a:rPr lang="en-US" sz="1200" dirty="0">
+                          <a:solidFill>
+                            <a:srgbClr val="AAB4D4"/>
+                          </a:solidFill>
+                          <a:latin typeface="Calibri" pitchFamily="34" charset="0"/>
+                          <a:ea typeface="Calibri" pitchFamily="34" charset="-122"/>
+                          <a:cs typeface="Calibri" pitchFamily="34" charset="-120"/>
+                        </a:rPr>
+                        <a:t>2 h</a:t>
                       </a:r>
                       <a:endParaRPr lang="en-US" sz="1200" dirty="0">
                         <a:latin typeface="Calibri" charset="0"/>
@@ -6031,9 +9413,9 @@
 </p:sld>
 </file>
 
-<file path=ppt/slides/slide12.xml><?xml version="1.0" encoding="utf-8"?>
+<file path=ppt/slides/slide14.xml><?xml version="1.0" encoding="utf-8"?>
 <p:sld xmlns:a="http://schemas.openxmlformats.org/drawingml/2006/main" xmlns:r="http://schemas.openxmlformats.org/officeDocument/2006/relationships" xmlns:p="http://schemas.openxmlformats.org/presentationml/2006/main">
-  <p:cSld name="Slide 12">
+  <p:cSld name="Slide 14">
     <p:bg>
       <p:bgPr>
         <a:solidFill>
@@ -6135,7 +9517,7 @@
       </p:sp>
       <p:graphicFrame>
         <p:nvGraphicFramePr>
-          <p:cNvPr id="13" name="Table 0"/>
+          <p:cNvPr id="15" name="Table 0"/>
           <p:cNvGraphicFramePr>
             <a:graphicFrameLocks noGrp="1"/>
           </p:cNvGraphicFramePr>
@@ -6148,7 +9530,7 @@
           </p:nvPr>
         </p:nvGraphicFramePr>
         <p:xfrm>
-          <a:off x="566928" y="1719072"/>
+          <a:off x="566928" y="1554480"/>
           <a:ext cx="11027664" cy="914400"/>
         </p:xfrm>
         <a:graphic>
@@ -6161,7 +9543,7 @@
                 <a:gridCol w="2377440"/>
                 <a:gridCol w="2340864"/>
               </a:tblGrid>
-              <a:tr h="301752">
+              <a:tr h="272491">
                 <a:tc>
                   <a:txBody>
                     <a:bodyPr/>
@@ -6171,7 +9553,7 @@
                         <a:buNone/>
                       </a:pPr>
                       <a:r>
-                        <a:rPr lang="en-US" sz="1150" b="1" dirty="0">
+                        <a:rPr lang="en-US" sz="1050" b="1" dirty="0">
                           <a:solidFill>
                             <a:srgbClr val="AAB4D4"/>
                           </a:solidFill>
@@ -6181,14 +9563,14 @@
                         </a:rPr>
                         <a:t>CONCEPTO</a:t>
                       </a:r>
-                      <a:endParaRPr lang="en-US" sz="1150" dirty="0">
+                      <a:endParaRPr lang="en-US" sz="1050" dirty="0">
                         <a:latin typeface="Calibri" charset="0"/>
                         <a:ea typeface="Calibri" charset="0"/>
                         <a:cs typeface="Calibri" charset="0"/>
                       </a:endParaRPr>
                     </a:p>
                   </a:txBody>
-                  <a:tcPr marL="101600" marR="101600" marT="38100" marB="38100" anchor="ctr">
+                  <a:tcPr marL="76200" marR="76200" marT="38100" marB="38100" anchor="ctr">
                     <a:lnL w="12700" cap="flat" cmpd="sng" algn="ctr">
                       <a:solidFill>
                         <a:srgbClr val="172A5E"/>
@@ -6239,7 +9621,7 @@
                         <a:buNone/>
                       </a:pPr>
                       <a:r>
-                        <a:rPr lang="en-US" sz="1150" b="1" dirty="0">
+                        <a:rPr lang="en-US" sz="1050" b="1" dirty="0">
                           <a:solidFill>
                             <a:srgbClr val="AAB4D4"/>
                           </a:solidFill>
@@ -6249,14 +9631,14 @@
                         </a:rPr>
                         <a:t>FASE</a:t>
                       </a:r>
-                      <a:endParaRPr lang="en-US" sz="1150" dirty="0">
+                      <a:endParaRPr lang="en-US" sz="1050" dirty="0">
                         <a:latin typeface="Calibri" charset="0"/>
                         <a:ea typeface="Calibri" charset="0"/>
                         <a:cs typeface="Calibri" charset="0"/>
                       </a:endParaRPr>
                     </a:p>
                   </a:txBody>
-                  <a:tcPr marL="101600" marR="101600" marT="38100" marB="38100" anchor="ctr">
+                  <a:tcPr marL="76200" marR="76200" marT="38100" marB="38100" anchor="ctr">
                     <a:lnL w="12700" cap="flat" cmpd="sng" algn="ctr">
                       <a:solidFill>
                         <a:srgbClr val="172A5E"/>
@@ -6307,7 +9689,7 @@
                         <a:buNone/>
                       </a:pPr>
                       <a:r>
-                        <a:rPr lang="en-US" sz="1150" b="1" dirty="0">
+                        <a:rPr lang="en-US" sz="1050" b="1" dirty="0">
                           <a:solidFill>
                             <a:srgbClr val="AAB4D4"/>
                           </a:solidFill>
@@ -6317,14 +9699,14 @@
                         </a:rPr>
                         <a:t>USD/MES</a:t>
                       </a:r>
-                      <a:endParaRPr lang="en-US" sz="1150" dirty="0">
+                      <a:endParaRPr lang="en-US" sz="1050" dirty="0">
                         <a:latin typeface="Calibri" charset="0"/>
                         <a:ea typeface="Calibri" charset="0"/>
                         <a:cs typeface="Calibri" charset="0"/>
                       </a:endParaRPr>
                     </a:p>
                   </a:txBody>
-                  <a:tcPr marL="101600" marR="101600" marT="38100" marB="38100" anchor="ctr">
+                  <a:tcPr marL="76200" marR="76200" marT="38100" marB="38100" anchor="ctr">
                     <a:lnL w="12700" cap="flat" cmpd="sng" algn="ctr">
                       <a:solidFill>
                         <a:srgbClr val="172A5E"/>
@@ -6375,7 +9757,7 @@
                         <a:buNone/>
                       </a:pPr>
                       <a:r>
-                        <a:rPr lang="en-US" sz="1150" b="1" dirty="0">
+                        <a:rPr lang="en-US" sz="1050" b="1" dirty="0">
                           <a:solidFill>
                             <a:srgbClr val="AAB4D4"/>
                           </a:solidFill>
@@ -6385,14 +9767,14 @@
                         </a:rPr>
                         <a:t>UNA VEZ</a:t>
                       </a:r>
-                      <a:endParaRPr lang="en-US" sz="1150" dirty="0">
+                      <a:endParaRPr lang="en-US" sz="1050" dirty="0">
                         <a:latin typeface="Calibri" charset="0"/>
                         <a:ea typeface="Calibri" charset="0"/>
                         <a:cs typeface="Calibri" charset="0"/>
                       </a:endParaRPr>
                     </a:p>
                   </a:txBody>
-                  <a:tcPr marL="101600" marR="101600" marT="38100" marB="38100" anchor="ctr">
+                  <a:tcPr marL="76200" marR="76200" marT="38100" marB="38100" anchor="ctr">
                     <a:lnL w="12700" cap="flat" cmpd="sng" algn="ctr">
                       <a:solidFill>
                         <a:srgbClr val="172A5E"/>
@@ -6435,7 +9817,7 @@
                   </a:tcPr>
                 </a:tc>
               </a:tr>
-              <a:tr h="301752">
+              <a:tr h="272491">
                 <a:tc>
                   <a:txBody>
                     <a:bodyPr/>
@@ -6445,7 +9827,7 @@
                         <a:buNone/>
                       </a:pPr>
                       <a:r>
-                        <a:rPr lang="en-US" sz="1150" dirty="0">
+                        <a:rPr lang="en-US" sz="1050" dirty="0">
                           <a:solidFill>
                             <a:srgbClr val="AAB4D4"/>
                           </a:solidFill>
@@ -6455,14 +9837,14 @@
                         </a:rPr>
                         <a:t>CRM + datos de contacto</a:t>
                       </a:r>
-                      <a:endParaRPr lang="en-US" sz="1150" dirty="0">
+                      <a:endParaRPr lang="en-US" sz="1050" dirty="0">
                         <a:latin typeface="Calibri" charset="0"/>
                         <a:ea typeface="Calibri" charset="0"/>
                         <a:cs typeface="Calibri" charset="0"/>
                       </a:endParaRPr>
                     </a:p>
                   </a:txBody>
-                  <a:tcPr marL="101600" marR="101600" marT="38100" marB="38100" anchor="ctr">
+                  <a:tcPr marL="76200" marR="76200" marT="38100" marB="38100" anchor="ctr">
                     <a:lnL w="12700" cap="flat" cmpd="sng" algn="ctr">
                       <a:solidFill>
                         <a:srgbClr val="172A5E"/>
@@ -6513,7 +9895,7 @@
                         <a:buNone/>
                       </a:pPr>
                       <a:r>
-                        <a:rPr lang="en-US" sz="1150" dirty="0">
+                        <a:rPr lang="en-US" sz="1050" dirty="0">
                           <a:solidFill>
                             <a:srgbClr val="AAB4D4"/>
                           </a:solidFill>
@@ -6523,14 +9905,14 @@
                         </a:rPr>
                         <a:t>0–3</a:t>
                       </a:r>
-                      <a:endParaRPr lang="en-US" sz="1150" dirty="0">
+                      <a:endParaRPr lang="en-US" sz="1050" dirty="0">
                         <a:latin typeface="Calibri" charset="0"/>
                         <a:ea typeface="Calibri" charset="0"/>
                         <a:cs typeface="Calibri" charset="0"/>
                       </a:endParaRPr>
                     </a:p>
                   </a:txBody>
-                  <a:tcPr marL="101600" marR="101600" marT="38100" marB="38100" anchor="ctr">
+                  <a:tcPr marL="76200" marR="76200" marT="38100" marB="38100" anchor="ctr">
                     <a:lnL w="12700" cap="flat" cmpd="sng" algn="ctr">
                       <a:solidFill>
                         <a:srgbClr val="172A5E"/>
@@ -6581,7 +9963,7 @@
                         <a:buNone/>
                       </a:pPr>
                       <a:r>
-                        <a:rPr lang="en-US" sz="1150" dirty="0">
+                        <a:rPr lang="en-US" sz="1050" dirty="0">
                           <a:solidFill>
                             <a:srgbClr val="AAB4D4"/>
                           </a:solidFill>
@@ -6591,14 +9973,14 @@
                         </a:rPr>
                         <a:t>150–400</a:t>
                       </a:r>
-                      <a:endParaRPr lang="en-US" sz="1150" dirty="0">
+                      <a:endParaRPr lang="en-US" sz="1050" dirty="0">
                         <a:latin typeface="Calibri" charset="0"/>
                         <a:ea typeface="Calibri" charset="0"/>
                         <a:cs typeface="Calibri" charset="0"/>
                       </a:endParaRPr>
                     </a:p>
                   </a:txBody>
-                  <a:tcPr marL="101600" marR="101600" marT="38100" marB="38100" anchor="ctr">
+                  <a:tcPr marL="76200" marR="76200" marT="38100" marB="38100" anchor="ctr">
                     <a:lnL w="12700" cap="flat" cmpd="sng" algn="ctr">
                       <a:solidFill>
                         <a:srgbClr val="172A5E"/>
@@ -6649,7 +10031,7 @@
                         <a:buNone/>
                       </a:pPr>
                       <a:r>
-                        <a:rPr lang="en-US" sz="1150" dirty="0">
+                        <a:rPr lang="en-US" sz="1050" dirty="0">
                           <a:solidFill>
                             <a:srgbClr val="AAB4D4"/>
                           </a:solidFill>
@@ -6659,14 +10041,14 @@
                         </a:rPr>
                         <a:t>—</a:t>
                       </a:r>
-                      <a:endParaRPr lang="en-US" sz="1150" dirty="0">
+                      <a:endParaRPr lang="en-US" sz="1050" dirty="0">
                         <a:latin typeface="Calibri" charset="0"/>
                         <a:ea typeface="Calibri" charset="0"/>
                         <a:cs typeface="Calibri" charset="0"/>
                       </a:endParaRPr>
                     </a:p>
                   </a:txBody>
-                  <a:tcPr marL="101600" marR="101600" marT="38100" marB="38100" anchor="ctr">
+                  <a:tcPr marL="76200" marR="76200" marT="38100" marB="38100" anchor="ctr">
                     <a:lnL w="12700" cap="flat" cmpd="sng" algn="ctr">
                       <a:solidFill>
                         <a:srgbClr val="172A5E"/>
@@ -6709,7 +10091,7 @@
                   </a:tcPr>
                 </a:tc>
               </a:tr>
-              <a:tr h="301752">
+              <a:tr h="272491">
                 <a:tc>
                   <a:txBody>
                     <a:bodyPr/>
@@ -6719,7 +10101,7 @@
                         <a:buNone/>
                       </a:pPr>
                       <a:r>
-                        <a:rPr lang="en-US" sz="1150" dirty="0">
+                        <a:rPr lang="en-US" sz="1050" dirty="0">
                           <a:solidFill>
                             <a:srgbClr val="AAB4D4"/>
                           </a:solidFill>
@@ -6729,14 +10111,14 @@
                         </a:rPr>
                         <a:t>Diseño de casos y ofertas</a:t>
                       </a:r>
-                      <a:endParaRPr lang="en-US" sz="1150" dirty="0">
+                      <a:endParaRPr lang="en-US" sz="1050" dirty="0">
                         <a:latin typeface="Calibri" charset="0"/>
                         <a:ea typeface="Calibri" charset="0"/>
                         <a:cs typeface="Calibri" charset="0"/>
                       </a:endParaRPr>
                     </a:p>
                   </a:txBody>
-                  <a:tcPr marL="101600" marR="101600" marT="38100" marB="38100" anchor="ctr">
+                  <a:tcPr marL="76200" marR="76200" marT="38100" marB="38100" anchor="ctr">
                     <a:lnL w="12700" cap="flat" cmpd="sng" algn="ctr">
                       <a:solidFill>
                         <a:srgbClr val="172A5E"/>
@@ -6787,7 +10169,7 @@
                         <a:buNone/>
                       </a:pPr>
                       <a:r>
-                        <a:rPr lang="en-US" sz="1150" dirty="0">
+                        <a:rPr lang="en-US" sz="1050" dirty="0">
                           <a:solidFill>
                             <a:srgbClr val="AAB4D4"/>
                           </a:solidFill>
@@ -6797,14 +10179,14 @@
                         </a:rPr>
                         <a:t>0</a:t>
                       </a:r>
-                      <a:endParaRPr lang="en-US" sz="1150" dirty="0">
+                      <a:endParaRPr lang="en-US" sz="1050" dirty="0">
                         <a:latin typeface="Calibri" charset="0"/>
                         <a:ea typeface="Calibri" charset="0"/>
                         <a:cs typeface="Calibri" charset="0"/>
                       </a:endParaRPr>
                     </a:p>
                   </a:txBody>
-                  <a:tcPr marL="101600" marR="101600" marT="38100" marB="38100" anchor="ctr">
+                  <a:tcPr marL="76200" marR="76200" marT="38100" marB="38100" anchor="ctr">
                     <a:lnL w="12700" cap="flat" cmpd="sng" algn="ctr">
                       <a:solidFill>
                         <a:srgbClr val="172A5E"/>
@@ -6855,7 +10237,7 @@
                         <a:buNone/>
                       </a:pPr>
                       <a:r>
-                        <a:rPr lang="en-US" sz="1150" dirty="0">
+                        <a:rPr lang="en-US" sz="1050" dirty="0">
                           <a:solidFill>
                             <a:srgbClr val="AAB4D4"/>
                           </a:solidFill>
@@ -6865,14 +10247,14 @@
                         </a:rPr>
                         <a:t>—</a:t>
                       </a:r>
-                      <a:endParaRPr lang="en-US" sz="1150" dirty="0">
+                      <a:endParaRPr lang="en-US" sz="1050" dirty="0">
                         <a:latin typeface="Calibri" charset="0"/>
                         <a:ea typeface="Calibri" charset="0"/>
                         <a:cs typeface="Calibri" charset="0"/>
                       </a:endParaRPr>
                     </a:p>
                   </a:txBody>
-                  <a:tcPr marL="101600" marR="101600" marT="38100" marB="38100" anchor="ctr">
+                  <a:tcPr marL="76200" marR="76200" marT="38100" marB="38100" anchor="ctr">
                     <a:lnL w="12700" cap="flat" cmpd="sng" algn="ctr">
                       <a:solidFill>
                         <a:srgbClr val="172A5E"/>
@@ -6923,7 +10305,7 @@
                         <a:buNone/>
                       </a:pPr>
                       <a:r>
-                        <a:rPr lang="en-US" sz="1150" dirty="0">
+                        <a:rPr lang="en-US" sz="1050" dirty="0">
                           <a:solidFill>
                             <a:srgbClr val="AAB4D4"/>
                           </a:solidFill>
@@ -6933,14 +10315,14 @@
                         </a:rPr>
                         <a:t>1,500–3,000</a:t>
                       </a:r>
-                      <a:endParaRPr lang="en-US" sz="1150" dirty="0">
+                      <a:endParaRPr lang="en-US" sz="1050" dirty="0">
                         <a:latin typeface="Calibri" charset="0"/>
                         <a:ea typeface="Calibri" charset="0"/>
                         <a:cs typeface="Calibri" charset="0"/>
                       </a:endParaRPr>
                     </a:p>
                   </a:txBody>
-                  <a:tcPr marL="101600" marR="101600" marT="38100" marB="38100" anchor="ctr">
+                  <a:tcPr marL="76200" marR="76200" marT="38100" marB="38100" anchor="ctr">
                     <a:lnL w="12700" cap="flat" cmpd="sng" algn="ctr">
                       <a:solidFill>
                         <a:srgbClr val="172A5E"/>
@@ -6983,7 +10365,7 @@
                   </a:tcPr>
                 </a:tc>
               </a:tr>
-              <a:tr h="301752">
+              <a:tr h="272491">
                 <a:tc>
                   <a:txBody>
                     <a:bodyPr/>
@@ -6993,7 +10375,7 @@
                         <a:buNone/>
                       </a:pPr>
                       <a:r>
-                        <a:rPr lang="en-US" sz="1150" dirty="0">
+                        <a:rPr lang="en-US" sz="1050" dirty="0">
                           <a:solidFill>
                             <a:srgbClr val="AAB4D4"/>
                           </a:solidFill>
@@ -7001,16 +10383,16 @@
                           <a:ea typeface="Calibri" pitchFamily="34" charset="-122"/>
                           <a:cs typeface="Calibri" pitchFamily="34" charset="-120"/>
                         </a:rPr>
-                        <a:t>Contenido y edición de video</a:t>
+                        <a:t>Cuota anual AWS Partner Network</a:t>
                       </a:r>
-                      <a:endParaRPr lang="en-US" sz="1150" dirty="0">
+                      <a:endParaRPr lang="en-US" sz="1050" dirty="0">
                         <a:latin typeface="Calibri" charset="0"/>
                         <a:ea typeface="Calibri" charset="0"/>
                         <a:cs typeface="Calibri" charset="0"/>
                       </a:endParaRPr>
                     </a:p>
                   </a:txBody>
-                  <a:tcPr marL="101600" marR="101600" marT="38100" marB="38100" anchor="ctr">
+                  <a:tcPr marL="76200" marR="76200" marT="38100" marB="38100" anchor="ctr">
                     <a:lnL w="12700" cap="flat" cmpd="sng" algn="ctr">
                       <a:solidFill>
                         <a:srgbClr val="172A5E"/>
@@ -7061,7 +10443,7 @@
                         <a:buNone/>
                       </a:pPr>
                       <a:r>
-                        <a:rPr lang="en-US" sz="1150" dirty="0">
+                        <a:rPr lang="en-US" sz="1050" dirty="0">
                           <a:solidFill>
                             <a:srgbClr val="AAB4D4"/>
                           </a:solidFill>
@@ -7069,16 +10451,16 @@
                           <a:ea typeface="Calibri" pitchFamily="34" charset="-122"/>
                           <a:cs typeface="Calibri" pitchFamily="34" charset="-120"/>
                         </a:rPr>
-                        <a:t>1–3</a:t>
+                        <a:t>0–3</a:t>
                       </a:r>
-                      <a:endParaRPr lang="en-US" sz="1150" dirty="0">
+                      <a:endParaRPr lang="en-US" sz="1050" dirty="0">
                         <a:latin typeface="Calibri" charset="0"/>
                         <a:ea typeface="Calibri" charset="0"/>
                         <a:cs typeface="Calibri" charset="0"/>
                       </a:endParaRPr>
                     </a:p>
                   </a:txBody>
-                  <a:tcPr marL="101600" marR="101600" marT="38100" marB="38100" anchor="ctr">
+                  <a:tcPr marL="76200" marR="76200" marT="38100" marB="38100" anchor="ctr">
                     <a:lnL w="12700" cap="flat" cmpd="sng" algn="ctr">
                       <a:solidFill>
                         <a:srgbClr val="172A5E"/>
@@ -7129,7 +10511,7 @@
                         <a:buNone/>
                       </a:pPr>
                       <a:r>
-                        <a:rPr lang="en-US" sz="1150" dirty="0">
+                        <a:rPr lang="en-US" sz="1050" dirty="0">
                           <a:solidFill>
                             <a:srgbClr val="AAB4D4"/>
                           </a:solidFill>
@@ -7137,16 +10519,16 @@
                           <a:ea typeface="Calibri" pitchFamily="34" charset="-122"/>
                           <a:cs typeface="Calibri" pitchFamily="34" charset="-120"/>
                         </a:rPr>
-                        <a:t>800–1,500</a:t>
+                        <a:t>—</a:t>
                       </a:r>
-                      <a:endParaRPr lang="en-US" sz="1150" dirty="0">
+                      <a:endParaRPr lang="en-US" sz="1050" dirty="0">
                         <a:latin typeface="Calibri" charset="0"/>
                         <a:ea typeface="Calibri" charset="0"/>
                         <a:cs typeface="Calibri" charset="0"/>
                       </a:endParaRPr>
                     </a:p>
                   </a:txBody>
-                  <a:tcPr marL="101600" marR="101600" marT="38100" marB="38100" anchor="ctr">
+                  <a:tcPr marL="76200" marR="76200" marT="38100" marB="38100" anchor="ctr">
                     <a:lnL w="12700" cap="flat" cmpd="sng" algn="ctr">
                       <a:solidFill>
                         <a:srgbClr val="172A5E"/>
@@ -7197,7 +10579,7 @@
                         <a:buNone/>
                       </a:pPr>
                       <a:r>
-                        <a:rPr lang="en-US" sz="1150" dirty="0">
+                        <a:rPr lang="en-US" sz="1050" dirty="0">
                           <a:solidFill>
                             <a:srgbClr val="AAB4D4"/>
                           </a:solidFill>
@@ -7205,16 +10587,16 @@
                           <a:ea typeface="Calibri" pitchFamily="34" charset="-122"/>
                           <a:cs typeface="Calibri" pitchFamily="34" charset="-120"/>
                         </a:rPr>
-                        <a:t>—</a:t>
+                        <a:t>2,500 / año</a:t>
                       </a:r>
-                      <a:endParaRPr lang="en-US" sz="1150" dirty="0">
+                      <a:endParaRPr lang="en-US" sz="1050" dirty="0">
                         <a:latin typeface="Calibri" charset="0"/>
                         <a:ea typeface="Calibri" charset="0"/>
                         <a:cs typeface="Calibri" charset="0"/>
                       </a:endParaRPr>
                     </a:p>
                   </a:txBody>
-                  <a:tcPr marL="101600" marR="101600" marT="38100" marB="38100" anchor="ctr">
+                  <a:tcPr marL="76200" marR="76200" marT="38100" marB="38100" anchor="ctr">
                     <a:lnL w="12700" cap="flat" cmpd="sng" algn="ctr">
                       <a:solidFill>
                         <a:srgbClr val="172A5E"/>
@@ -7257,7 +10639,7 @@
                   </a:tcPr>
                 </a:tc>
               </a:tr>
-              <a:tr h="301752">
+              <a:tr h="272491">
                 <a:tc>
                   <a:txBody>
                     <a:bodyPr/>
@@ -7267,7 +10649,7 @@
                         <a:buNone/>
                       </a:pPr>
                       <a:r>
-                        <a:rPr lang="en-US" sz="1150" dirty="0">
+                        <a:rPr lang="en-US" sz="1050" dirty="0">
                           <a:solidFill>
                             <a:srgbClr val="AAB4D4"/>
                           </a:solidFill>
@@ -7275,16 +10657,16 @@
                           <a:ea typeface="Calibri" pitchFamily="34" charset="-122"/>
                           <a:cs typeface="Calibri" pitchFamily="34" charset="-120"/>
                         </a:rPr>
-                        <a:t>Estudio de madurez (campo + diseño)</a:t>
+                        <a:t>Certificaciones (12–16 exámenes)</a:t>
                       </a:r>
-                      <a:endParaRPr lang="en-US" sz="1150" dirty="0">
+                      <a:endParaRPr lang="en-US" sz="1050" dirty="0">
                         <a:latin typeface="Calibri" charset="0"/>
                         <a:ea typeface="Calibri" charset="0"/>
                         <a:cs typeface="Calibri" charset="0"/>
                       </a:endParaRPr>
                     </a:p>
                   </a:txBody>
-                  <a:tcPr marL="101600" marR="101600" marT="38100" marB="38100" anchor="ctr">
+                  <a:tcPr marL="76200" marR="76200" marT="38100" marB="38100" anchor="ctr">
                     <a:lnL w="12700" cap="flat" cmpd="sng" algn="ctr">
                       <a:solidFill>
                         <a:srgbClr val="172A5E"/>
@@ -7335,7 +10717,7 @@
                         <a:buNone/>
                       </a:pPr>
                       <a:r>
-                        <a:rPr lang="en-US" sz="1150" dirty="0">
+                        <a:rPr lang="en-US" sz="1050" dirty="0">
                           <a:solidFill>
                             <a:srgbClr val="AAB4D4"/>
                           </a:solidFill>
@@ -7343,16 +10725,16 @@
                           <a:ea typeface="Calibri" pitchFamily="34" charset="-122"/>
                           <a:cs typeface="Calibri" pitchFamily="34" charset="-120"/>
                         </a:rPr>
-                        <a:t>2</a:t>
+                        <a:t>0–2</a:t>
                       </a:r>
-                      <a:endParaRPr lang="en-US" sz="1150" dirty="0">
+                      <a:endParaRPr lang="en-US" sz="1050" dirty="0">
                         <a:latin typeface="Calibri" charset="0"/>
                         <a:ea typeface="Calibri" charset="0"/>
                         <a:cs typeface="Calibri" charset="0"/>
                       </a:endParaRPr>
                     </a:p>
                   </a:txBody>
-                  <a:tcPr marL="101600" marR="101600" marT="38100" marB="38100" anchor="ctr">
+                  <a:tcPr marL="76200" marR="76200" marT="38100" marB="38100" anchor="ctr">
                     <a:lnL w="12700" cap="flat" cmpd="sng" algn="ctr">
                       <a:solidFill>
                         <a:srgbClr val="172A5E"/>
@@ -7403,7 +10785,7 @@
                         <a:buNone/>
                       </a:pPr>
                       <a:r>
-                        <a:rPr lang="en-US" sz="1150" dirty="0">
+                        <a:rPr lang="en-US" sz="1050" dirty="0">
                           <a:solidFill>
                             <a:srgbClr val="AAB4D4"/>
                           </a:solidFill>
@@ -7413,14 +10795,14 @@
                         </a:rPr>
                         <a:t>—</a:t>
                       </a:r>
-                      <a:endParaRPr lang="en-US" sz="1150" dirty="0">
+                      <a:endParaRPr lang="en-US" sz="1050" dirty="0">
                         <a:latin typeface="Calibri" charset="0"/>
                         <a:ea typeface="Calibri" charset="0"/>
                         <a:cs typeface="Calibri" charset="0"/>
                       </a:endParaRPr>
                     </a:p>
                   </a:txBody>
-                  <a:tcPr marL="101600" marR="101600" marT="38100" marB="38100" anchor="ctr">
+                  <a:tcPr marL="76200" marR="76200" marT="38100" marB="38100" anchor="ctr">
                     <a:lnL w="12700" cap="flat" cmpd="sng" algn="ctr">
                       <a:solidFill>
                         <a:srgbClr val="172A5E"/>
@@ -7471,7 +10853,7 @@
                         <a:buNone/>
                       </a:pPr>
                       <a:r>
-                        <a:rPr lang="en-US" sz="1150" dirty="0">
+                        <a:rPr lang="en-US" sz="1050" dirty="0">
                           <a:solidFill>
                             <a:srgbClr val="AAB4D4"/>
                           </a:solidFill>
@@ -7479,16 +10861,16 @@
                           <a:ea typeface="Calibri" pitchFamily="34" charset="-122"/>
                           <a:cs typeface="Calibri" pitchFamily="34" charset="-120"/>
                         </a:rPr>
-                        <a:t>4,000–8,000</a:t>
+                        <a:t>2,000–5,300</a:t>
                       </a:r>
-                      <a:endParaRPr lang="en-US" sz="1150" dirty="0">
+                      <a:endParaRPr lang="en-US" sz="1050" dirty="0">
                         <a:latin typeface="Calibri" charset="0"/>
                         <a:ea typeface="Calibri" charset="0"/>
                         <a:cs typeface="Calibri" charset="0"/>
                       </a:endParaRPr>
                     </a:p>
                   </a:txBody>
-                  <a:tcPr marL="101600" marR="101600" marT="38100" marB="38100" anchor="ctr">
+                  <a:tcPr marL="76200" marR="76200" marT="38100" marB="38100" anchor="ctr">
                     <a:lnL w="12700" cap="flat" cmpd="sng" algn="ctr">
                       <a:solidFill>
                         <a:srgbClr val="172A5E"/>
@@ -7531,7 +10913,7 @@
                   </a:tcPr>
                 </a:tc>
               </a:tr>
-              <a:tr h="301752">
+              <a:tr h="272491">
                 <a:tc>
                   <a:txBody>
                     <a:bodyPr/>
@@ -7541,7 +10923,7 @@
                         <a:buNone/>
                       </a:pPr>
                       <a:r>
-                        <a:rPr lang="en-US" sz="1150" dirty="0">
+                        <a:rPr lang="en-US" sz="1050" dirty="0">
                           <a:solidFill>
                             <a:srgbClr val="AAB4D4"/>
                           </a:solidFill>
@@ -7549,16 +10931,16 @@
                           <a:ea typeface="Calibri" pitchFamily="34" charset="-122"/>
                           <a:cs typeface="Calibri" pitchFamily="34" charset="-120"/>
                         </a:rPr>
-                        <a:t>Evento propio (60–80 asistentes)</a:t>
+                        <a:t>Contenido y edición de video</a:t>
                       </a:r>
-                      <a:endParaRPr lang="en-US" sz="1150" dirty="0">
+                      <a:endParaRPr lang="en-US" sz="1050" dirty="0">
                         <a:latin typeface="Calibri" charset="0"/>
                         <a:ea typeface="Calibri" charset="0"/>
                         <a:cs typeface="Calibri" charset="0"/>
                       </a:endParaRPr>
                     </a:p>
                   </a:txBody>
-                  <a:tcPr marL="101600" marR="101600" marT="38100" marB="38100" anchor="ctr">
+                  <a:tcPr marL="76200" marR="76200" marT="38100" marB="38100" anchor="ctr">
                     <a:lnL w="12700" cap="flat" cmpd="sng" algn="ctr">
                       <a:solidFill>
                         <a:srgbClr val="172A5E"/>
@@ -7609,7 +10991,7 @@
                         <a:buNone/>
                       </a:pPr>
                       <a:r>
-                        <a:rPr lang="en-US" sz="1150" dirty="0">
+                        <a:rPr lang="en-US" sz="1050" dirty="0">
                           <a:solidFill>
                             <a:srgbClr val="AAB4D4"/>
                           </a:solidFill>
@@ -7617,16 +10999,16 @@
                           <a:ea typeface="Calibri" pitchFamily="34" charset="-122"/>
                           <a:cs typeface="Calibri" pitchFamily="34" charset="-120"/>
                         </a:rPr>
-                        <a:t>2</a:t>
+                        <a:t>1–3</a:t>
                       </a:r>
-                      <a:endParaRPr lang="en-US" sz="1150" dirty="0">
+                      <a:endParaRPr lang="en-US" sz="1050" dirty="0">
                         <a:latin typeface="Calibri" charset="0"/>
                         <a:ea typeface="Calibri" charset="0"/>
                         <a:cs typeface="Calibri" charset="0"/>
                       </a:endParaRPr>
                     </a:p>
                   </a:txBody>
-                  <a:tcPr marL="101600" marR="101600" marT="38100" marB="38100" anchor="ctr">
+                  <a:tcPr marL="76200" marR="76200" marT="38100" marB="38100" anchor="ctr">
                     <a:lnL w="12700" cap="flat" cmpd="sng" algn="ctr">
                       <a:solidFill>
                         <a:srgbClr val="172A5E"/>
@@ -7677,7 +11059,7 @@
                         <a:buNone/>
                       </a:pPr>
                       <a:r>
-                        <a:rPr lang="en-US" sz="1150" dirty="0">
+                        <a:rPr lang="en-US" sz="1050" dirty="0">
                           <a:solidFill>
                             <a:srgbClr val="AAB4D4"/>
                           </a:solidFill>
@@ -7685,16 +11067,16 @@
                           <a:ea typeface="Calibri" pitchFamily="34" charset="-122"/>
                           <a:cs typeface="Calibri" pitchFamily="34" charset="-120"/>
                         </a:rPr>
-                        <a:t>—</a:t>
+                        <a:t>800–1,500</a:t>
                       </a:r>
-                      <a:endParaRPr lang="en-US" sz="1150" dirty="0">
+                      <a:endParaRPr lang="en-US" sz="1050" dirty="0">
                         <a:latin typeface="Calibri" charset="0"/>
                         <a:ea typeface="Calibri" charset="0"/>
                         <a:cs typeface="Calibri" charset="0"/>
                       </a:endParaRPr>
                     </a:p>
                   </a:txBody>
-                  <a:tcPr marL="101600" marR="101600" marT="38100" marB="38100" anchor="ctr">
+                  <a:tcPr marL="76200" marR="76200" marT="38100" marB="38100" anchor="ctr">
                     <a:lnL w="12700" cap="flat" cmpd="sng" algn="ctr">
                       <a:solidFill>
                         <a:srgbClr val="172A5E"/>
@@ -7745,7 +11127,7 @@
                         <a:buNone/>
                       </a:pPr>
                       <a:r>
-                        <a:rPr lang="en-US" sz="1150" dirty="0">
+                        <a:rPr lang="en-US" sz="1050" dirty="0">
                           <a:solidFill>
                             <a:srgbClr val="AAB4D4"/>
                           </a:solidFill>
@@ -7753,16 +11135,16 @@
                           <a:ea typeface="Calibri" pitchFamily="34" charset="-122"/>
                           <a:cs typeface="Calibri" pitchFamily="34" charset="-120"/>
                         </a:rPr>
-                        <a:t>5,000–9,000</a:t>
+                        <a:t>—</a:t>
                       </a:r>
-                      <a:endParaRPr lang="en-US" sz="1150" dirty="0">
+                      <a:endParaRPr lang="en-US" sz="1050" dirty="0">
                         <a:latin typeface="Calibri" charset="0"/>
                         <a:ea typeface="Calibri" charset="0"/>
                         <a:cs typeface="Calibri" charset="0"/>
                       </a:endParaRPr>
                     </a:p>
                   </a:txBody>
-                  <a:tcPr marL="101600" marR="101600" marT="38100" marB="38100" anchor="ctr">
+                  <a:tcPr marL="76200" marR="76200" marT="38100" marB="38100" anchor="ctr">
                     <a:lnL w="12700" cap="flat" cmpd="sng" algn="ctr">
                       <a:solidFill>
                         <a:srgbClr val="172A5E"/>
@@ -7805,7 +11187,7 @@
                   </a:tcPr>
                 </a:tc>
               </a:tr>
-              <a:tr h="301752">
+              <a:tr h="272491">
                 <a:tc>
                   <a:txBody>
                     <a:bodyPr/>
@@ -7815,7 +11197,7 @@
                         <a:buNone/>
                       </a:pPr>
                       <a:r>
-                        <a:rPr lang="en-US" sz="1150" dirty="0">
+                        <a:rPr lang="en-US" sz="1050" dirty="0">
                           <a:solidFill>
                             <a:srgbClr val="AAB4D4"/>
                           </a:solidFill>
@@ -7823,16 +11205,16 @@
                           <a:ea typeface="Calibri" pitchFamily="34" charset="-122"/>
                           <a:cs typeface="Calibri" pitchFamily="34" charset="-120"/>
                         </a:rPr>
-                        <a:t>Conferencias de industria (3)</a:t>
+                        <a:t>Estudio de madurez (campo + diseño)</a:t>
                       </a:r>
-                      <a:endParaRPr lang="en-US" sz="1150" dirty="0">
+                      <a:endParaRPr lang="en-US" sz="1050" dirty="0">
                         <a:latin typeface="Calibri" charset="0"/>
                         <a:ea typeface="Calibri" charset="0"/>
                         <a:cs typeface="Calibri" charset="0"/>
                       </a:endParaRPr>
                     </a:p>
                   </a:txBody>
-                  <a:tcPr marL="101600" marR="101600" marT="38100" marB="38100" anchor="ctr">
+                  <a:tcPr marL="76200" marR="76200" marT="38100" marB="38100" anchor="ctr">
                     <a:lnL w="12700" cap="flat" cmpd="sng" algn="ctr">
                       <a:solidFill>
                         <a:srgbClr val="172A5E"/>
@@ -7883,7 +11265,7 @@
                         <a:buNone/>
                       </a:pPr>
                       <a:r>
-                        <a:rPr lang="en-US" sz="1150" dirty="0">
+                        <a:rPr lang="en-US" sz="1050" dirty="0">
                           <a:solidFill>
                             <a:srgbClr val="AAB4D4"/>
                           </a:solidFill>
@@ -7891,16 +11273,16 @@
                           <a:ea typeface="Calibri" pitchFamily="34" charset="-122"/>
                           <a:cs typeface="Calibri" pitchFamily="34" charset="-120"/>
                         </a:rPr>
-                        <a:t>2–3</a:t>
+                        <a:t>2</a:t>
                       </a:r>
-                      <a:endParaRPr lang="en-US" sz="1150" dirty="0">
+                      <a:endParaRPr lang="en-US" sz="1050" dirty="0">
                         <a:latin typeface="Calibri" charset="0"/>
                         <a:ea typeface="Calibri" charset="0"/>
                         <a:cs typeface="Calibri" charset="0"/>
                       </a:endParaRPr>
                     </a:p>
                   </a:txBody>
-                  <a:tcPr marL="101600" marR="101600" marT="38100" marB="38100" anchor="ctr">
+                  <a:tcPr marL="76200" marR="76200" marT="38100" marB="38100" anchor="ctr">
                     <a:lnL w="12700" cap="flat" cmpd="sng" algn="ctr">
                       <a:solidFill>
                         <a:srgbClr val="172A5E"/>
@@ -7951,7 +11333,7 @@
                         <a:buNone/>
                       </a:pPr>
                       <a:r>
-                        <a:rPr lang="en-US" sz="1150" dirty="0">
+                        <a:rPr lang="en-US" sz="1050" dirty="0">
                           <a:solidFill>
                             <a:srgbClr val="AAB4D4"/>
                           </a:solidFill>
@@ -7961,14 +11343,14 @@
                         </a:rPr>
                         <a:t>—</a:t>
                       </a:r>
-                      <a:endParaRPr lang="en-US" sz="1150" dirty="0">
+                      <a:endParaRPr lang="en-US" sz="1050" dirty="0">
                         <a:latin typeface="Calibri" charset="0"/>
                         <a:ea typeface="Calibri" charset="0"/>
                         <a:cs typeface="Calibri" charset="0"/>
                       </a:endParaRPr>
                     </a:p>
                   </a:txBody>
-                  <a:tcPr marL="101600" marR="101600" marT="38100" marB="38100" anchor="ctr">
+                  <a:tcPr marL="76200" marR="76200" marT="38100" marB="38100" anchor="ctr">
                     <a:lnL w="12700" cap="flat" cmpd="sng" algn="ctr">
                       <a:solidFill>
                         <a:srgbClr val="172A5E"/>
@@ -8019,7 +11401,7 @@
                         <a:buNone/>
                       </a:pPr>
                       <a:r>
-                        <a:rPr lang="en-US" sz="1150" dirty="0">
+                        <a:rPr lang="en-US" sz="1050" dirty="0">
                           <a:solidFill>
                             <a:srgbClr val="AAB4D4"/>
                           </a:solidFill>
@@ -8027,16 +11409,16 @@
                           <a:ea typeface="Calibri" pitchFamily="34" charset="-122"/>
                           <a:cs typeface="Calibri" pitchFamily="34" charset="-120"/>
                         </a:rPr>
-                        <a:t>4,000–7,000</a:t>
+                        <a:t>4,000–8,000</a:t>
                       </a:r>
-                      <a:endParaRPr lang="en-US" sz="1150" dirty="0">
+                      <a:endParaRPr lang="en-US" sz="1050" dirty="0">
                         <a:latin typeface="Calibri" charset="0"/>
                         <a:ea typeface="Calibri" charset="0"/>
                         <a:cs typeface="Calibri" charset="0"/>
                       </a:endParaRPr>
                     </a:p>
                   </a:txBody>
-                  <a:tcPr marL="101600" marR="101600" marT="38100" marB="38100" anchor="ctr">
+                  <a:tcPr marL="76200" marR="76200" marT="38100" marB="38100" anchor="ctr">
                     <a:lnL w="12700" cap="flat" cmpd="sng" algn="ctr">
                       <a:solidFill>
                         <a:srgbClr val="172A5E"/>
@@ -8079,7 +11461,7 @@
                   </a:tcPr>
                 </a:tc>
               </a:tr>
-              <a:tr h="301752">
+              <a:tr h="272491">
                 <a:tc>
                   <a:txBody>
                     <a:bodyPr/>
@@ -8089,7 +11471,7 @@
                         <a:buNone/>
                       </a:pPr>
                       <a:r>
-                        <a:rPr lang="en-US" sz="1150" dirty="0">
+                        <a:rPr lang="en-US" sz="1050" dirty="0">
                           <a:solidFill>
                             <a:srgbClr val="AAB4D4"/>
                           </a:solidFill>
@@ -8097,16 +11479,16 @@
                           <a:ea typeface="Calibri" pitchFamily="34" charset="-122"/>
                           <a:cs typeface="Calibri" pitchFamily="34" charset="-120"/>
                         </a:rPr>
-                        <a:t>Pauta LinkedIn (retargeting del estudio)</a:t>
+                        <a:t>Evento propio (60–80 asistentes)</a:t>
                       </a:r>
-                      <a:endParaRPr lang="en-US" sz="1150" dirty="0">
+                      <a:endParaRPr lang="en-US" sz="1050" dirty="0">
                         <a:latin typeface="Calibri" charset="0"/>
                         <a:ea typeface="Calibri" charset="0"/>
                         <a:cs typeface="Calibri" charset="0"/>
                       </a:endParaRPr>
                     </a:p>
                   </a:txBody>
-                  <a:tcPr marL="101600" marR="101600" marT="38100" marB="38100" anchor="ctr">
+                  <a:tcPr marL="76200" marR="76200" marT="38100" marB="38100" anchor="ctr">
                     <a:lnL w="12700" cap="flat" cmpd="sng" algn="ctr">
                       <a:solidFill>
                         <a:srgbClr val="172A5E"/>
@@ -8157,7 +11539,7 @@
                         <a:buNone/>
                       </a:pPr>
                       <a:r>
-                        <a:rPr lang="en-US" sz="1150" dirty="0">
+                        <a:rPr lang="en-US" sz="1050" dirty="0">
                           <a:solidFill>
                             <a:srgbClr val="AAB4D4"/>
                           </a:solidFill>
@@ -8165,16 +11547,16 @@
                           <a:ea typeface="Calibri" pitchFamily="34" charset="-122"/>
                           <a:cs typeface="Calibri" pitchFamily="34" charset="-120"/>
                         </a:rPr>
-                        <a:t>2–3</a:t>
+                        <a:t>2</a:t>
                       </a:r>
-                      <a:endParaRPr lang="en-US" sz="1150" dirty="0">
+                      <a:endParaRPr lang="en-US" sz="1050" dirty="0">
                         <a:latin typeface="Calibri" charset="0"/>
                         <a:ea typeface="Calibri" charset="0"/>
                         <a:cs typeface="Calibri" charset="0"/>
                       </a:endParaRPr>
                     </a:p>
                   </a:txBody>
-                  <a:tcPr marL="101600" marR="101600" marT="38100" marB="38100" anchor="ctr">
+                  <a:tcPr marL="76200" marR="76200" marT="38100" marB="38100" anchor="ctr">
                     <a:lnL w="12700" cap="flat" cmpd="sng" algn="ctr">
                       <a:solidFill>
                         <a:srgbClr val="172A5E"/>
@@ -8225,7 +11607,7 @@
                         <a:buNone/>
                       </a:pPr>
                       <a:r>
-                        <a:rPr lang="en-US" sz="1150" dirty="0">
+                        <a:rPr lang="en-US" sz="1050" dirty="0">
                           <a:solidFill>
                             <a:srgbClr val="AAB4D4"/>
                           </a:solidFill>
@@ -8233,16 +11615,16 @@
                           <a:ea typeface="Calibri" pitchFamily="34" charset="-122"/>
                           <a:cs typeface="Calibri" pitchFamily="34" charset="-120"/>
                         </a:rPr>
-                        <a:t>1,000–2,500</a:t>
+                        <a:t>—</a:t>
                       </a:r>
-                      <a:endParaRPr lang="en-US" sz="1150" dirty="0">
+                      <a:endParaRPr lang="en-US" sz="1050" dirty="0">
                         <a:latin typeface="Calibri" charset="0"/>
                         <a:ea typeface="Calibri" charset="0"/>
                         <a:cs typeface="Calibri" charset="0"/>
                       </a:endParaRPr>
                     </a:p>
                   </a:txBody>
-                  <a:tcPr marL="101600" marR="101600" marT="38100" marB="38100" anchor="ctr">
+                  <a:tcPr marL="76200" marR="76200" marT="38100" marB="38100" anchor="ctr">
                     <a:lnL w="12700" cap="flat" cmpd="sng" algn="ctr">
                       <a:solidFill>
                         <a:srgbClr val="172A5E"/>
@@ -8293,7 +11675,7 @@
                         <a:buNone/>
                       </a:pPr>
                       <a:r>
-                        <a:rPr lang="en-US" sz="1150" dirty="0">
+                        <a:rPr lang="en-US" sz="1050" dirty="0">
                           <a:solidFill>
                             <a:srgbClr val="AAB4D4"/>
                           </a:solidFill>
@@ -8301,16 +11683,16 @@
                           <a:ea typeface="Calibri" pitchFamily="34" charset="-122"/>
                           <a:cs typeface="Calibri" pitchFamily="34" charset="-120"/>
                         </a:rPr>
-                        <a:t>—</a:t>
+                        <a:t>5,000–9,000</a:t>
                       </a:r>
-                      <a:endParaRPr lang="en-US" sz="1150" dirty="0">
+                      <a:endParaRPr lang="en-US" sz="1050" dirty="0">
                         <a:latin typeface="Calibri" charset="0"/>
                         <a:ea typeface="Calibri" charset="0"/>
                         <a:cs typeface="Calibri" charset="0"/>
                       </a:endParaRPr>
                     </a:p>
                   </a:txBody>
-                  <a:tcPr marL="101600" marR="101600" marT="38100" marB="38100" anchor="ctr">
+                  <a:tcPr marL="76200" marR="76200" marT="38100" marB="38100" anchor="ctr">
                     <a:lnL w="12700" cap="flat" cmpd="sng" algn="ctr">
                       <a:solidFill>
                         <a:srgbClr val="172A5E"/>
@@ -8353,7 +11735,7 @@
                   </a:tcPr>
                 </a:tc>
               </a:tr>
-              <a:tr h="301752">
+              <a:tr h="272491">
                 <a:tc>
                   <a:txBody>
                     <a:bodyPr/>
@@ -8363,7 +11745,7 @@
                         <a:buNone/>
                       </a:pPr>
                       <a:r>
-                        <a:rPr lang="en-US" sz="1150" dirty="0">
+                        <a:rPr lang="en-US" sz="1050" dirty="0">
                           <a:solidFill>
                             <a:srgbClr val="AAB4D4"/>
                           </a:solidFill>
@@ -8371,16 +11753,16 @@
                           <a:ea typeface="Calibri" pitchFamily="34" charset="-122"/>
                           <a:cs typeface="Calibri" pitchFamily="34" charset="-120"/>
                         </a:rPr>
-                        <a:t>SDR de tiempo completo (México)</a:t>
+                        <a:t>Conferencias de industria (3)</a:t>
                       </a:r>
-                      <a:endParaRPr lang="en-US" sz="1150" dirty="0">
+                      <a:endParaRPr lang="en-US" sz="1050" dirty="0">
                         <a:latin typeface="Calibri" charset="0"/>
                         <a:ea typeface="Calibri" charset="0"/>
                         <a:cs typeface="Calibri" charset="0"/>
                       </a:endParaRPr>
                     </a:p>
                   </a:txBody>
-                  <a:tcPr marL="101600" marR="101600" marT="38100" marB="38100" anchor="ctr">
+                  <a:tcPr marL="76200" marR="76200" marT="38100" marB="38100" anchor="ctr">
                     <a:lnL w="12700" cap="flat" cmpd="sng" algn="ctr">
                       <a:solidFill>
                         <a:srgbClr val="172A5E"/>
@@ -8431,7 +11813,7 @@
                         <a:buNone/>
                       </a:pPr>
                       <a:r>
-                        <a:rPr lang="en-US" sz="1150" dirty="0">
+                        <a:rPr lang="en-US" sz="1050" dirty="0">
                           <a:solidFill>
                             <a:srgbClr val="AAB4D4"/>
                           </a:solidFill>
@@ -8439,16 +11821,16 @@
                           <a:ea typeface="Calibri" pitchFamily="34" charset="-122"/>
                           <a:cs typeface="Calibri" pitchFamily="34" charset="-120"/>
                         </a:rPr>
-                        <a:t>3</a:t>
+                        <a:t>2–3</a:t>
                       </a:r>
-                      <a:endParaRPr lang="en-US" sz="1150" dirty="0">
+                      <a:endParaRPr lang="en-US" sz="1050" dirty="0">
                         <a:latin typeface="Calibri" charset="0"/>
                         <a:ea typeface="Calibri" charset="0"/>
                         <a:cs typeface="Calibri" charset="0"/>
                       </a:endParaRPr>
                     </a:p>
                   </a:txBody>
-                  <a:tcPr marL="101600" marR="101600" marT="38100" marB="38100" anchor="ctr">
+                  <a:tcPr marL="76200" marR="76200" marT="38100" marB="38100" anchor="ctr">
                     <a:lnL w="12700" cap="flat" cmpd="sng" algn="ctr">
                       <a:solidFill>
                         <a:srgbClr val="172A5E"/>
@@ -8499,7 +11881,7 @@
                         <a:buNone/>
                       </a:pPr>
                       <a:r>
-                        <a:rPr lang="en-US" sz="1150" dirty="0">
+                        <a:rPr lang="en-US" sz="1050" dirty="0">
                           <a:solidFill>
                             <a:srgbClr val="AAB4D4"/>
                           </a:solidFill>
@@ -8507,16 +11889,16 @@
                           <a:ea typeface="Calibri" pitchFamily="34" charset="-122"/>
                           <a:cs typeface="Calibri" pitchFamily="34" charset="-120"/>
                         </a:rPr>
-                        <a:t>1,800–3,000</a:t>
+                        <a:t>—</a:t>
                       </a:r>
-                      <a:endParaRPr lang="en-US" sz="1150" dirty="0">
+                      <a:endParaRPr lang="en-US" sz="1050" dirty="0">
                         <a:latin typeface="Calibri" charset="0"/>
                         <a:ea typeface="Calibri" charset="0"/>
                         <a:cs typeface="Calibri" charset="0"/>
                       </a:endParaRPr>
                     </a:p>
                   </a:txBody>
-                  <a:tcPr marL="101600" marR="101600" marT="38100" marB="38100" anchor="ctr">
+                  <a:tcPr marL="76200" marR="76200" marT="38100" marB="38100" anchor="ctr">
                     <a:lnL w="12700" cap="flat" cmpd="sng" algn="ctr">
                       <a:solidFill>
                         <a:srgbClr val="172A5E"/>
@@ -8567,7 +11949,281 @@
                         <a:buNone/>
                       </a:pPr>
                       <a:r>
-                        <a:rPr lang="en-US" sz="1150" dirty="0">
+                        <a:rPr lang="en-US" sz="1050" dirty="0">
+                          <a:solidFill>
+                            <a:srgbClr val="AAB4D4"/>
+                          </a:solidFill>
+                          <a:latin typeface="Calibri" pitchFamily="34" charset="0"/>
+                          <a:ea typeface="Calibri" pitchFamily="34" charset="-122"/>
+                          <a:cs typeface="Calibri" pitchFamily="34" charset="-120"/>
+                        </a:rPr>
+                        <a:t>4,000–7,000</a:t>
+                      </a:r>
+                      <a:endParaRPr lang="en-US" sz="1050" dirty="0">
+                        <a:latin typeface="Calibri" charset="0"/>
+                        <a:ea typeface="Calibri" charset="0"/>
+                        <a:cs typeface="Calibri" charset="0"/>
+                      </a:endParaRPr>
+                    </a:p>
+                  </a:txBody>
+                  <a:tcPr marL="76200" marR="76200" marT="38100" marB="38100" anchor="ctr">
+                    <a:lnL w="12700" cap="flat" cmpd="sng" algn="ctr">
+                      <a:solidFill>
+                        <a:srgbClr val="172A5E"/>
+                      </a:solidFill>
+                      <a:prstDash val="solid"/>
+                      <a:round/>
+                      <a:headEnd type="none" w="med" len="med"/>
+                      <a:tailEnd type="none" w="med" len="med"/>
+                    </a:lnL>
+                    <a:lnR w="12700" cap="flat" cmpd="sng" algn="ctr">
+                      <a:solidFill>
+                        <a:srgbClr val="172A5E"/>
+                      </a:solidFill>
+                      <a:prstDash val="solid"/>
+                      <a:round/>
+                      <a:headEnd type="none" w="med" len="med"/>
+                      <a:tailEnd type="none" w="med" len="med"/>
+                    </a:lnR>
+                    <a:lnT w="12700" cap="flat" cmpd="sng" algn="ctr">
+                      <a:solidFill>
+                        <a:srgbClr val="172A5E"/>
+                      </a:solidFill>
+                      <a:prstDash val="solid"/>
+                      <a:round/>
+                      <a:headEnd type="none" w="med" len="med"/>
+                      <a:tailEnd type="none" w="med" len="med"/>
+                    </a:lnT>
+                    <a:lnB w="12700" cap="flat" cmpd="sng" algn="ctr">
+                      <a:solidFill>
+                        <a:srgbClr val="172A5E"/>
+                      </a:solidFill>
+                      <a:prstDash val="solid"/>
+                      <a:round/>
+                      <a:headEnd type="none" w="med" len="med"/>
+                      <a:tailEnd type="none" w="med" len="med"/>
+                    </a:lnB>
+                    <a:solidFill>
+                      <a:srgbClr val="04081F"/>
+                    </a:solidFill>
+                  </a:tcPr>
+                </a:tc>
+              </a:tr>
+              <a:tr h="272491">
+                <a:tc>
+                  <a:txBody>
+                    <a:bodyPr/>
+                    <a:lstStyle/>
+                    <a:p>
+                      <a:pPr indent="0" marL="0">
+                        <a:buNone/>
+                      </a:pPr>
+                      <a:r>
+                        <a:rPr lang="en-US" sz="1050" dirty="0">
+                          <a:solidFill>
+                            <a:srgbClr val="AAB4D4"/>
+                          </a:solidFill>
+                          <a:latin typeface="Calibri" pitchFamily="34" charset="0"/>
+                          <a:ea typeface="Calibri" pitchFamily="34" charset="-122"/>
+                          <a:cs typeface="Calibri" pitchFamily="34" charset="-120"/>
+                        </a:rPr>
+                        <a:t>Pauta LinkedIn (retargeting del estudio)</a:t>
+                      </a:r>
+                      <a:endParaRPr lang="en-US" sz="1050" dirty="0">
+                        <a:latin typeface="Calibri" charset="0"/>
+                        <a:ea typeface="Calibri" charset="0"/>
+                        <a:cs typeface="Calibri" charset="0"/>
+                      </a:endParaRPr>
+                    </a:p>
+                  </a:txBody>
+                  <a:tcPr marL="76200" marR="76200" marT="38100" marB="38100" anchor="ctr">
+                    <a:lnL w="12700" cap="flat" cmpd="sng" algn="ctr">
+                      <a:solidFill>
+                        <a:srgbClr val="172A5E"/>
+                      </a:solidFill>
+                      <a:prstDash val="solid"/>
+                      <a:round/>
+                      <a:headEnd type="none" w="med" len="med"/>
+                      <a:tailEnd type="none" w="med" len="med"/>
+                    </a:lnL>
+                    <a:lnR w="12700" cap="flat" cmpd="sng" algn="ctr">
+                      <a:solidFill>
+                        <a:srgbClr val="172A5E"/>
+                      </a:solidFill>
+                      <a:prstDash val="solid"/>
+                      <a:round/>
+                      <a:headEnd type="none" w="med" len="med"/>
+                      <a:tailEnd type="none" w="med" len="med"/>
+                    </a:lnR>
+                    <a:lnT w="12700" cap="flat" cmpd="sng" algn="ctr">
+                      <a:solidFill>
+                        <a:srgbClr val="172A5E"/>
+                      </a:solidFill>
+                      <a:prstDash val="solid"/>
+                      <a:round/>
+                      <a:headEnd type="none" w="med" len="med"/>
+                      <a:tailEnd type="none" w="med" len="med"/>
+                    </a:lnT>
+                    <a:lnB w="12700" cap="flat" cmpd="sng" algn="ctr">
+                      <a:solidFill>
+                        <a:srgbClr val="172A5E"/>
+                      </a:solidFill>
+                      <a:prstDash val="solid"/>
+                      <a:round/>
+                      <a:headEnd type="none" w="med" len="med"/>
+                      <a:tailEnd type="none" w="med" len="med"/>
+                    </a:lnB>
+                    <a:solidFill>
+                      <a:srgbClr val="04081F"/>
+                    </a:solidFill>
+                  </a:tcPr>
+                </a:tc>
+                <a:tc>
+                  <a:txBody>
+                    <a:bodyPr/>
+                    <a:lstStyle/>
+                    <a:p>
+                      <a:pPr indent="0" marL="0">
+                        <a:buNone/>
+                      </a:pPr>
+                      <a:r>
+                        <a:rPr lang="en-US" sz="1050" dirty="0">
+                          <a:solidFill>
+                            <a:srgbClr val="AAB4D4"/>
+                          </a:solidFill>
+                          <a:latin typeface="Calibri" pitchFamily="34" charset="0"/>
+                          <a:ea typeface="Calibri" pitchFamily="34" charset="-122"/>
+                          <a:cs typeface="Calibri" pitchFamily="34" charset="-120"/>
+                        </a:rPr>
+                        <a:t>2–3</a:t>
+                      </a:r>
+                      <a:endParaRPr lang="en-US" sz="1050" dirty="0">
+                        <a:latin typeface="Calibri" charset="0"/>
+                        <a:ea typeface="Calibri" charset="0"/>
+                        <a:cs typeface="Calibri" charset="0"/>
+                      </a:endParaRPr>
+                    </a:p>
+                  </a:txBody>
+                  <a:tcPr marL="76200" marR="76200" marT="38100" marB="38100" anchor="ctr">
+                    <a:lnL w="12700" cap="flat" cmpd="sng" algn="ctr">
+                      <a:solidFill>
+                        <a:srgbClr val="172A5E"/>
+                      </a:solidFill>
+                      <a:prstDash val="solid"/>
+                      <a:round/>
+                      <a:headEnd type="none" w="med" len="med"/>
+                      <a:tailEnd type="none" w="med" len="med"/>
+                    </a:lnL>
+                    <a:lnR w="12700" cap="flat" cmpd="sng" algn="ctr">
+                      <a:solidFill>
+                        <a:srgbClr val="172A5E"/>
+                      </a:solidFill>
+                      <a:prstDash val="solid"/>
+                      <a:round/>
+                      <a:headEnd type="none" w="med" len="med"/>
+                      <a:tailEnd type="none" w="med" len="med"/>
+                    </a:lnR>
+                    <a:lnT w="12700" cap="flat" cmpd="sng" algn="ctr">
+                      <a:solidFill>
+                        <a:srgbClr val="172A5E"/>
+                      </a:solidFill>
+                      <a:prstDash val="solid"/>
+                      <a:round/>
+                      <a:headEnd type="none" w="med" len="med"/>
+                      <a:tailEnd type="none" w="med" len="med"/>
+                    </a:lnT>
+                    <a:lnB w="12700" cap="flat" cmpd="sng" algn="ctr">
+                      <a:solidFill>
+                        <a:srgbClr val="172A5E"/>
+                      </a:solidFill>
+                      <a:prstDash val="solid"/>
+                      <a:round/>
+                      <a:headEnd type="none" w="med" len="med"/>
+                      <a:tailEnd type="none" w="med" len="med"/>
+                    </a:lnB>
+                    <a:solidFill>
+                      <a:srgbClr val="04081F"/>
+                    </a:solidFill>
+                  </a:tcPr>
+                </a:tc>
+                <a:tc>
+                  <a:txBody>
+                    <a:bodyPr/>
+                    <a:lstStyle/>
+                    <a:p>
+                      <a:pPr indent="0" marL="0">
+                        <a:buNone/>
+                      </a:pPr>
+                      <a:r>
+                        <a:rPr lang="en-US" sz="1050" dirty="0">
+                          <a:solidFill>
+                            <a:srgbClr val="AAB4D4"/>
+                          </a:solidFill>
+                          <a:latin typeface="Calibri" pitchFamily="34" charset="0"/>
+                          <a:ea typeface="Calibri" pitchFamily="34" charset="-122"/>
+                          <a:cs typeface="Calibri" pitchFamily="34" charset="-120"/>
+                        </a:rPr>
+                        <a:t>1,000–2,500</a:t>
+                      </a:r>
+                      <a:endParaRPr lang="en-US" sz="1050" dirty="0">
+                        <a:latin typeface="Calibri" charset="0"/>
+                        <a:ea typeface="Calibri" charset="0"/>
+                        <a:cs typeface="Calibri" charset="0"/>
+                      </a:endParaRPr>
+                    </a:p>
+                  </a:txBody>
+                  <a:tcPr marL="76200" marR="76200" marT="38100" marB="38100" anchor="ctr">
+                    <a:lnL w="12700" cap="flat" cmpd="sng" algn="ctr">
+                      <a:solidFill>
+                        <a:srgbClr val="172A5E"/>
+                      </a:solidFill>
+                      <a:prstDash val="solid"/>
+                      <a:round/>
+                      <a:headEnd type="none" w="med" len="med"/>
+                      <a:tailEnd type="none" w="med" len="med"/>
+                    </a:lnL>
+                    <a:lnR w="12700" cap="flat" cmpd="sng" algn="ctr">
+                      <a:solidFill>
+                        <a:srgbClr val="172A5E"/>
+                      </a:solidFill>
+                      <a:prstDash val="solid"/>
+                      <a:round/>
+                      <a:headEnd type="none" w="med" len="med"/>
+                      <a:tailEnd type="none" w="med" len="med"/>
+                    </a:lnR>
+                    <a:lnT w="12700" cap="flat" cmpd="sng" algn="ctr">
+                      <a:solidFill>
+                        <a:srgbClr val="172A5E"/>
+                      </a:solidFill>
+                      <a:prstDash val="solid"/>
+                      <a:round/>
+                      <a:headEnd type="none" w="med" len="med"/>
+                      <a:tailEnd type="none" w="med" len="med"/>
+                    </a:lnT>
+                    <a:lnB w="12700" cap="flat" cmpd="sng" algn="ctr">
+                      <a:solidFill>
+                        <a:srgbClr val="172A5E"/>
+                      </a:solidFill>
+                      <a:prstDash val="solid"/>
+                      <a:round/>
+                      <a:headEnd type="none" w="med" len="med"/>
+                      <a:tailEnd type="none" w="med" len="med"/>
+                    </a:lnB>
+                    <a:solidFill>
+                      <a:srgbClr val="04081F"/>
+                    </a:solidFill>
+                  </a:tcPr>
+                </a:tc>
+                <a:tc>
+                  <a:txBody>
+                    <a:bodyPr/>
+                    <a:lstStyle/>
+                    <a:p>
+                      <a:pPr indent="0" marL="0">
+                        <a:buNone/>
+                      </a:pPr>
+                      <a:r>
+                        <a:rPr lang="en-US" sz="1050" dirty="0">
                           <a:solidFill>
                             <a:srgbClr val="AAB4D4"/>
                           </a:solidFill>
@@ -8577,14 +12233,288 @@
                         </a:rPr>
                         <a:t>—</a:t>
                       </a:r>
-                      <a:endParaRPr lang="en-US" sz="1150" dirty="0">
+                      <a:endParaRPr lang="en-US" sz="1050" dirty="0">
                         <a:latin typeface="Calibri" charset="0"/>
                         <a:ea typeface="Calibri" charset="0"/>
                         <a:cs typeface="Calibri" charset="0"/>
                       </a:endParaRPr>
                     </a:p>
                   </a:txBody>
-                  <a:tcPr marL="101600" marR="101600" marT="38100" marB="38100" anchor="ctr">
+                  <a:tcPr marL="76200" marR="76200" marT="38100" marB="38100" anchor="ctr">
+                    <a:lnL w="12700" cap="flat" cmpd="sng" algn="ctr">
+                      <a:solidFill>
+                        <a:srgbClr val="172A5E"/>
+                      </a:solidFill>
+                      <a:prstDash val="solid"/>
+                      <a:round/>
+                      <a:headEnd type="none" w="med" len="med"/>
+                      <a:tailEnd type="none" w="med" len="med"/>
+                    </a:lnL>
+                    <a:lnR w="12700" cap="flat" cmpd="sng" algn="ctr">
+                      <a:solidFill>
+                        <a:srgbClr val="172A5E"/>
+                      </a:solidFill>
+                      <a:prstDash val="solid"/>
+                      <a:round/>
+                      <a:headEnd type="none" w="med" len="med"/>
+                      <a:tailEnd type="none" w="med" len="med"/>
+                    </a:lnR>
+                    <a:lnT w="12700" cap="flat" cmpd="sng" algn="ctr">
+                      <a:solidFill>
+                        <a:srgbClr val="172A5E"/>
+                      </a:solidFill>
+                      <a:prstDash val="solid"/>
+                      <a:round/>
+                      <a:headEnd type="none" w="med" len="med"/>
+                      <a:tailEnd type="none" w="med" len="med"/>
+                    </a:lnT>
+                    <a:lnB w="12700" cap="flat" cmpd="sng" algn="ctr">
+                      <a:solidFill>
+                        <a:srgbClr val="172A5E"/>
+                      </a:solidFill>
+                      <a:prstDash val="solid"/>
+                      <a:round/>
+                      <a:headEnd type="none" w="med" len="med"/>
+                      <a:tailEnd type="none" w="med" len="med"/>
+                    </a:lnB>
+                    <a:solidFill>
+                      <a:srgbClr val="04081F"/>
+                    </a:solidFill>
+                  </a:tcPr>
+                </a:tc>
+              </a:tr>
+              <a:tr h="272491">
+                <a:tc>
+                  <a:txBody>
+                    <a:bodyPr/>
+                    <a:lstStyle/>
+                    <a:p>
+                      <a:pPr indent="0" marL="0">
+                        <a:buNone/>
+                      </a:pPr>
+                      <a:r>
+                        <a:rPr lang="en-US" sz="1050" dirty="0">
+                          <a:solidFill>
+                            <a:srgbClr val="AAB4D4"/>
+                          </a:solidFill>
+                          <a:latin typeface="Calibri" pitchFamily="34" charset="0"/>
+                          <a:ea typeface="Calibri" pitchFamily="34" charset="-122"/>
+                          <a:cs typeface="Calibri" pitchFamily="34" charset="-120"/>
+                        </a:rPr>
+                        <a:t>SDR de tiempo completo (México)</a:t>
+                      </a:r>
+                      <a:endParaRPr lang="en-US" sz="1050" dirty="0">
+                        <a:latin typeface="Calibri" charset="0"/>
+                        <a:ea typeface="Calibri" charset="0"/>
+                        <a:cs typeface="Calibri" charset="0"/>
+                      </a:endParaRPr>
+                    </a:p>
+                  </a:txBody>
+                  <a:tcPr marL="76200" marR="76200" marT="38100" marB="38100" anchor="ctr">
+                    <a:lnL w="12700" cap="flat" cmpd="sng" algn="ctr">
+                      <a:solidFill>
+                        <a:srgbClr val="172A5E"/>
+                      </a:solidFill>
+                      <a:prstDash val="solid"/>
+                      <a:round/>
+                      <a:headEnd type="none" w="med" len="med"/>
+                      <a:tailEnd type="none" w="med" len="med"/>
+                    </a:lnL>
+                    <a:lnR w="12700" cap="flat" cmpd="sng" algn="ctr">
+                      <a:solidFill>
+                        <a:srgbClr val="172A5E"/>
+                      </a:solidFill>
+                      <a:prstDash val="solid"/>
+                      <a:round/>
+                      <a:headEnd type="none" w="med" len="med"/>
+                      <a:tailEnd type="none" w="med" len="med"/>
+                    </a:lnR>
+                    <a:lnT w="12700" cap="flat" cmpd="sng" algn="ctr">
+                      <a:solidFill>
+                        <a:srgbClr val="172A5E"/>
+                      </a:solidFill>
+                      <a:prstDash val="solid"/>
+                      <a:round/>
+                      <a:headEnd type="none" w="med" len="med"/>
+                      <a:tailEnd type="none" w="med" len="med"/>
+                    </a:lnT>
+                    <a:lnB w="12700" cap="flat" cmpd="sng" algn="ctr">
+                      <a:solidFill>
+                        <a:srgbClr val="172A5E"/>
+                      </a:solidFill>
+                      <a:prstDash val="solid"/>
+                      <a:round/>
+                      <a:headEnd type="none" w="med" len="med"/>
+                      <a:tailEnd type="none" w="med" len="med"/>
+                    </a:lnB>
+                    <a:solidFill>
+                      <a:srgbClr val="04081F"/>
+                    </a:solidFill>
+                  </a:tcPr>
+                </a:tc>
+                <a:tc>
+                  <a:txBody>
+                    <a:bodyPr/>
+                    <a:lstStyle/>
+                    <a:p>
+                      <a:pPr indent="0" marL="0">
+                        <a:buNone/>
+                      </a:pPr>
+                      <a:r>
+                        <a:rPr lang="en-US" sz="1050" dirty="0">
+                          <a:solidFill>
+                            <a:srgbClr val="AAB4D4"/>
+                          </a:solidFill>
+                          <a:latin typeface="Calibri" pitchFamily="34" charset="0"/>
+                          <a:ea typeface="Calibri" pitchFamily="34" charset="-122"/>
+                          <a:cs typeface="Calibri" pitchFamily="34" charset="-120"/>
+                        </a:rPr>
+                        <a:t>3</a:t>
+                      </a:r>
+                      <a:endParaRPr lang="en-US" sz="1050" dirty="0">
+                        <a:latin typeface="Calibri" charset="0"/>
+                        <a:ea typeface="Calibri" charset="0"/>
+                        <a:cs typeface="Calibri" charset="0"/>
+                      </a:endParaRPr>
+                    </a:p>
+                  </a:txBody>
+                  <a:tcPr marL="76200" marR="76200" marT="38100" marB="38100" anchor="ctr">
+                    <a:lnL w="12700" cap="flat" cmpd="sng" algn="ctr">
+                      <a:solidFill>
+                        <a:srgbClr val="172A5E"/>
+                      </a:solidFill>
+                      <a:prstDash val="solid"/>
+                      <a:round/>
+                      <a:headEnd type="none" w="med" len="med"/>
+                      <a:tailEnd type="none" w="med" len="med"/>
+                    </a:lnL>
+                    <a:lnR w="12700" cap="flat" cmpd="sng" algn="ctr">
+                      <a:solidFill>
+                        <a:srgbClr val="172A5E"/>
+                      </a:solidFill>
+                      <a:prstDash val="solid"/>
+                      <a:round/>
+                      <a:headEnd type="none" w="med" len="med"/>
+                      <a:tailEnd type="none" w="med" len="med"/>
+                    </a:lnR>
+                    <a:lnT w="12700" cap="flat" cmpd="sng" algn="ctr">
+                      <a:solidFill>
+                        <a:srgbClr val="172A5E"/>
+                      </a:solidFill>
+                      <a:prstDash val="solid"/>
+                      <a:round/>
+                      <a:headEnd type="none" w="med" len="med"/>
+                      <a:tailEnd type="none" w="med" len="med"/>
+                    </a:lnT>
+                    <a:lnB w="12700" cap="flat" cmpd="sng" algn="ctr">
+                      <a:solidFill>
+                        <a:srgbClr val="172A5E"/>
+                      </a:solidFill>
+                      <a:prstDash val="solid"/>
+                      <a:round/>
+                      <a:headEnd type="none" w="med" len="med"/>
+                      <a:tailEnd type="none" w="med" len="med"/>
+                    </a:lnB>
+                    <a:solidFill>
+                      <a:srgbClr val="04081F"/>
+                    </a:solidFill>
+                  </a:tcPr>
+                </a:tc>
+                <a:tc>
+                  <a:txBody>
+                    <a:bodyPr/>
+                    <a:lstStyle/>
+                    <a:p>
+                      <a:pPr indent="0" marL="0">
+                        <a:buNone/>
+                      </a:pPr>
+                      <a:r>
+                        <a:rPr lang="en-US" sz="1050" dirty="0">
+                          <a:solidFill>
+                            <a:srgbClr val="AAB4D4"/>
+                          </a:solidFill>
+                          <a:latin typeface="Calibri" pitchFamily="34" charset="0"/>
+                          <a:ea typeface="Calibri" pitchFamily="34" charset="-122"/>
+                          <a:cs typeface="Calibri" pitchFamily="34" charset="-120"/>
+                        </a:rPr>
+                        <a:t>1,800–3,000</a:t>
+                      </a:r>
+                      <a:endParaRPr lang="en-US" sz="1050" dirty="0">
+                        <a:latin typeface="Calibri" charset="0"/>
+                        <a:ea typeface="Calibri" charset="0"/>
+                        <a:cs typeface="Calibri" charset="0"/>
+                      </a:endParaRPr>
+                    </a:p>
+                  </a:txBody>
+                  <a:tcPr marL="76200" marR="76200" marT="38100" marB="38100" anchor="ctr">
+                    <a:lnL w="12700" cap="flat" cmpd="sng" algn="ctr">
+                      <a:solidFill>
+                        <a:srgbClr val="172A5E"/>
+                      </a:solidFill>
+                      <a:prstDash val="solid"/>
+                      <a:round/>
+                      <a:headEnd type="none" w="med" len="med"/>
+                      <a:tailEnd type="none" w="med" len="med"/>
+                    </a:lnL>
+                    <a:lnR w="12700" cap="flat" cmpd="sng" algn="ctr">
+                      <a:solidFill>
+                        <a:srgbClr val="172A5E"/>
+                      </a:solidFill>
+                      <a:prstDash val="solid"/>
+                      <a:round/>
+                      <a:headEnd type="none" w="med" len="med"/>
+                      <a:tailEnd type="none" w="med" len="med"/>
+                    </a:lnR>
+                    <a:lnT w="12700" cap="flat" cmpd="sng" algn="ctr">
+                      <a:solidFill>
+                        <a:srgbClr val="172A5E"/>
+                      </a:solidFill>
+                      <a:prstDash val="solid"/>
+                      <a:round/>
+                      <a:headEnd type="none" w="med" len="med"/>
+                      <a:tailEnd type="none" w="med" len="med"/>
+                    </a:lnT>
+                    <a:lnB w="12700" cap="flat" cmpd="sng" algn="ctr">
+                      <a:solidFill>
+                        <a:srgbClr val="172A5E"/>
+                      </a:solidFill>
+                      <a:prstDash val="solid"/>
+                      <a:round/>
+                      <a:headEnd type="none" w="med" len="med"/>
+                      <a:tailEnd type="none" w="med" len="med"/>
+                    </a:lnB>
+                    <a:solidFill>
+                      <a:srgbClr val="04081F"/>
+                    </a:solidFill>
+                  </a:tcPr>
+                </a:tc>
+                <a:tc>
+                  <a:txBody>
+                    <a:bodyPr/>
+                    <a:lstStyle/>
+                    <a:p>
+                      <a:pPr indent="0" marL="0">
+                        <a:buNone/>
+                      </a:pPr>
+                      <a:r>
+                        <a:rPr lang="en-US" sz="1050" dirty="0">
+                          <a:solidFill>
+                            <a:srgbClr val="AAB4D4"/>
+                          </a:solidFill>
+                          <a:latin typeface="Calibri" pitchFamily="34" charset="0"/>
+                          <a:ea typeface="Calibri" pitchFamily="34" charset="-122"/>
+                          <a:cs typeface="Calibri" pitchFamily="34" charset="-120"/>
+                        </a:rPr>
+                        <a:t>—</a:t>
+                      </a:r>
+                      <a:endParaRPr lang="en-US" sz="1050" dirty="0">
+                        <a:latin typeface="Calibri" charset="0"/>
+                        <a:ea typeface="Calibri" charset="0"/>
+                        <a:cs typeface="Calibri" charset="0"/>
+                      </a:endParaRPr>
+                    </a:p>
+                  </a:txBody>
+                  <a:tcPr marL="76200" marR="76200" marT="38100" marB="38100" anchor="ctr">
                     <a:lnL w="12700" cap="flat" cmpd="sng" algn="ctr">
                       <a:solidFill>
                         <a:srgbClr val="172A5E"/>
@@ -8639,7 +12569,7 @@
         </p:nvSpPr>
         <p:spPr>
           <a:xfrm>
-            <a:off x="566928" y="4645152"/>
+            <a:off x="566928" y="5029200"/>
             <a:ext cx="3493008" cy="1024128"/>
           </a:xfrm>
           <a:prstGeom prst="roundRect">
@@ -8666,7 +12596,7 @@
         </p:nvSpPr>
         <p:spPr>
           <a:xfrm>
-            <a:off x="786384" y="4754880"/>
+            <a:off x="786384" y="5138928"/>
             <a:ext cx="2194560" cy="237744"/>
           </a:xfrm>
           <a:prstGeom prst="rect">
@@ -8705,7 +12635,7 @@
         </p:nvSpPr>
         <p:spPr>
           <a:xfrm>
-            <a:off x="786384" y="4992624"/>
+            <a:off x="786384" y="5376672"/>
             <a:ext cx="2194560" cy="384048"/>
           </a:xfrm>
           <a:prstGeom prst="rect">
@@ -8744,7 +12674,7 @@
         </p:nvSpPr>
         <p:spPr>
           <a:xfrm>
-            <a:off x="786384" y="5394960"/>
+            <a:off x="786384" y="5779008"/>
             <a:ext cx="3108960" cy="219456"/>
           </a:xfrm>
           <a:prstGeom prst="rect">
@@ -8769,7 +12699,7 @@
                 <a:ea typeface="Calibri" pitchFamily="34" charset="-122"/>
                 <a:cs typeface="Calibri" pitchFamily="34" charset="-120"/>
               </a:rPr>
-              <a:t>USD/mes + ~$3K de arranque</a:t>
+              <a:t>USD/mes + ~$8–11K de arranque</a:t>
             </a:r>
             <a:endParaRPr lang="en-US" sz="950" dirty="0"/>
           </a:p>
@@ -8783,7 +12713,7 @@
         </p:nvSpPr>
         <p:spPr>
           <a:xfrm>
-            <a:off x="4279392" y="4645152"/>
+            <a:off x="4279392" y="5029200"/>
             <a:ext cx="3493008" cy="1024128"/>
           </a:xfrm>
           <a:prstGeom prst="roundRect">
@@ -8810,7 +12740,7 @@
         </p:nvSpPr>
         <p:spPr>
           <a:xfrm>
-            <a:off x="4498848" y="4754880"/>
+            <a:off x="4498848" y="5138928"/>
             <a:ext cx="2194560" cy="237744"/>
           </a:xfrm>
           <a:prstGeom prst="rect">
@@ -8849,7 +12779,7 @@
         </p:nvSpPr>
         <p:spPr>
           <a:xfrm>
-            <a:off x="4498848" y="4992624"/>
+            <a:off x="4498848" y="5376672"/>
             <a:ext cx="2194560" cy="384048"/>
           </a:xfrm>
           <a:prstGeom prst="rect">
@@ -8888,7 +12818,7 @@
         </p:nvSpPr>
         <p:spPr>
           <a:xfrm>
-            <a:off x="4498848" y="5394960"/>
+            <a:off x="4498848" y="5779008"/>
             <a:ext cx="3108960" cy="219456"/>
           </a:xfrm>
           <a:prstGeom prst="rect">
@@ -8927,7 +12857,7 @@
         </p:nvSpPr>
         <p:spPr>
           <a:xfrm>
-            <a:off x="7991856" y="4645152"/>
+            <a:off x="7991856" y="5029200"/>
             <a:ext cx="3493008" cy="1024128"/>
           </a:xfrm>
           <a:prstGeom prst="roundRect">
@@ -8954,7 +12884,7 @@
         </p:nvSpPr>
         <p:spPr>
           <a:xfrm>
-            <a:off x="8211312" y="4754880"/>
+            <a:off x="8211312" y="5138928"/>
             <a:ext cx="2194560" cy="237744"/>
           </a:xfrm>
           <a:prstGeom prst="rect">
@@ -8993,7 +12923,7 @@
         </p:nvSpPr>
         <p:spPr>
           <a:xfrm>
-            <a:off x="8211312" y="4992624"/>
+            <a:off x="8211312" y="5376672"/>
             <a:ext cx="2194560" cy="384048"/>
           </a:xfrm>
           <a:prstGeom prst="rect">
@@ -9032,7 +12962,7 @@
         </p:nvSpPr>
         <p:spPr>
           <a:xfrm>
-            <a:off x="8211312" y="5394960"/>
+            <a:off x="8211312" y="5779008"/>
             <a:ext cx="3108960" cy="219456"/>
           </a:xfrm>
           <a:prstGeom prst="rect">
@@ -9072,7 +13002,7 @@
         <p:spPr>
           <a:xfrm>
             <a:off x="566928" y="6199632"/>
-            <a:ext cx="11027664" cy="310896"/>
+            <a:ext cx="11027664" cy="274320"/>
           </a:xfrm>
           <a:prstGeom prst="rect">
             <a:avLst/>
@@ -9088,7 +13018,7 @@
               <a:buNone/>
             </a:pPr>
             <a:r>
-              <a:rPr lang="en-US" sz="1050" i="1" dirty="0">
+              <a:rPr lang="en-US" sz="950" i="1" dirty="0">
                 <a:solidFill>
                   <a:srgbClr val="7B87AD"/>
                 </a:solidFill>
@@ -9098,7 +13028,7 @@
               </a:rPr>
               <a:t>Referencia de Hinge 2026: las firmas de alto crecimiento invierten 12% de su facturación en marketing; las que no crecen, 5%.</a:t>
             </a:r>
-            <a:endParaRPr lang="en-US" sz="1050" dirty="0"/>
+            <a:endParaRPr lang="en-US" sz="950" dirty="0"/>
           </a:p>
         </p:txBody>
       </p:sp>
@@ -9110,9 +13040,9 @@
 </p:sld>
 </file>
 
-<file path=ppt/slides/slide13.xml><?xml version="1.0" encoding="utf-8"?>
+<file path=ppt/slides/slide15.xml><?xml version="1.0" encoding="utf-8"?>
 <p:sld xmlns:a="http://schemas.openxmlformats.org/drawingml/2006/main" xmlns:r="http://schemas.openxmlformats.org/officeDocument/2006/relationships" xmlns:p="http://schemas.openxmlformats.org/presentationml/2006/main">
-  <p:cSld name="Slide 13">
+  <p:cSld name="Slide 15">
     <p:bg>
       <p:bgPr>
         <a:solidFill>
@@ -9214,7 +13144,7 @@
       </p:sp>
       <p:graphicFrame>
         <p:nvGraphicFramePr>
-          <p:cNvPr id="14" name="Table 0"/>
+          <p:cNvPr id="16" name="Table 0"/>
           <p:cNvGraphicFramePr>
             <a:graphicFrameLocks noGrp="1"/>
           </p:cNvGraphicFramePr>
@@ -10902,7 +14832,281 @@
                           <a:ea typeface="Calibri" pitchFamily="34" charset="-122"/>
                           <a:cs typeface="Calibri" pitchFamily="34" charset="-120"/>
                         </a:rPr>
-                        <a:t>Descargas del estudio</a:t>
+                        <a:t>Certificaciones cloud del equipo</a:t>
+                      </a:r>
+                      <a:endParaRPr lang="en-US" sz="1250" dirty="0">
+                        <a:latin typeface="Calibri" charset="0"/>
+                        <a:ea typeface="Calibri" charset="0"/>
+                        <a:cs typeface="Calibri" charset="0"/>
+                      </a:endParaRPr>
+                    </a:p>
+                  </a:txBody>
+                  <a:tcPr marL="101600" marR="101600" marT="50800" marB="50800" anchor="ctr">
+                    <a:lnL w="12700" cap="flat" cmpd="sng" algn="ctr">
+                      <a:solidFill>
+                        <a:srgbClr val="172A5E"/>
+                      </a:solidFill>
+                      <a:prstDash val="solid"/>
+                      <a:round/>
+                      <a:headEnd type="none" w="med" len="med"/>
+                      <a:tailEnd type="none" w="med" len="med"/>
+                    </a:lnL>
+                    <a:lnR w="12700" cap="flat" cmpd="sng" algn="ctr">
+                      <a:solidFill>
+                        <a:srgbClr val="172A5E"/>
+                      </a:solidFill>
+                      <a:prstDash val="solid"/>
+                      <a:round/>
+                      <a:headEnd type="none" w="med" len="med"/>
+                      <a:tailEnd type="none" w="med" len="med"/>
+                    </a:lnR>
+                    <a:lnT w="12700" cap="flat" cmpd="sng" algn="ctr">
+                      <a:solidFill>
+                        <a:srgbClr val="172A5E"/>
+                      </a:solidFill>
+                      <a:prstDash val="solid"/>
+                      <a:round/>
+                      <a:headEnd type="none" w="med" len="med"/>
+                      <a:tailEnd type="none" w="med" len="med"/>
+                    </a:lnT>
+                    <a:lnB w="12700" cap="flat" cmpd="sng" algn="ctr">
+                      <a:solidFill>
+                        <a:srgbClr val="172A5E"/>
+                      </a:solidFill>
+                      <a:prstDash val="solid"/>
+                      <a:round/>
+                      <a:headEnd type="none" w="med" len="med"/>
+                      <a:tailEnd type="none" w="med" len="med"/>
+                    </a:lnB>
+                    <a:solidFill>
+                      <a:srgbClr val="04081F"/>
+                    </a:solidFill>
+                  </a:tcPr>
+                </a:tc>
+                <a:tc>
+                  <a:txBody>
+                    <a:bodyPr/>
+                    <a:lstStyle/>
+                    <a:p>
+                      <a:pPr indent="0" marL="0">
+                        <a:buNone/>
+                      </a:pPr>
+                      <a:r>
+                        <a:rPr lang="en-US" sz="1250" dirty="0">
+                          <a:solidFill>
+                            <a:srgbClr val="AAB4D4"/>
+                          </a:solidFill>
+                          <a:latin typeface="Calibri" pitchFamily="34" charset="0"/>
+                          <a:ea typeface="Calibri" pitchFamily="34" charset="-122"/>
+                          <a:cs typeface="Calibri" pitchFamily="34" charset="-120"/>
+                        </a:rPr>
+                        <a:t>?</a:t>
+                      </a:r>
+                      <a:endParaRPr lang="en-US" sz="1250" dirty="0">
+                        <a:latin typeface="Calibri" charset="0"/>
+                        <a:ea typeface="Calibri" charset="0"/>
+                        <a:cs typeface="Calibri" charset="0"/>
+                      </a:endParaRPr>
+                    </a:p>
+                  </a:txBody>
+                  <a:tcPr marL="101600" marR="101600" marT="50800" marB="50800" anchor="ctr">
+                    <a:lnL w="12700" cap="flat" cmpd="sng" algn="ctr">
+                      <a:solidFill>
+                        <a:srgbClr val="172A5E"/>
+                      </a:solidFill>
+                      <a:prstDash val="solid"/>
+                      <a:round/>
+                      <a:headEnd type="none" w="med" len="med"/>
+                      <a:tailEnd type="none" w="med" len="med"/>
+                    </a:lnL>
+                    <a:lnR w="12700" cap="flat" cmpd="sng" algn="ctr">
+                      <a:solidFill>
+                        <a:srgbClr val="172A5E"/>
+                      </a:solidFill>
+                      <a:prstDash val="solid"/>
+                      <a:round/>
+                      <a:headEnd type="none" w="med" len="med"/>
+                      <a:tailEnd type="none" w="med" len="med"/>
+                    </a:lnR>
+                    <a:lnT w="12700" cap="flat" cmpd="sng" algn="ctr">
+                      <a:solidFill>
+                        <a:srgbClr val="172A5E"/>
+                      </a:solidFill>
+                      <a:prstDash val="solid"/>
+                      <a:round/>
+                      <a:headEnd type="none" w="med" len="med"/>
+                      <a:tailEnd type="none" w="med" len="med"/>
+                    </a:lnT>
+                    <a:lnB w="12700" cap="flat" cmpd="sng" algn="ctr">
+                      <a:solidFill>
+                        <a:srgbClr val="172A5E"/>
+                      </a:solidFill>
+                      <a:prstDash val="solid"/>
+                      <a:round/>
+                      <a:headEnd type="none" w="med" len="med"/>
+                      <a:tailEnd type="none" w="med" len="med"/>
+                    </a:lnB>
+                    <a:solidFill>
+                      <a:srgbClr val="04081F"/>
+                    </a:solidFill>
+                  </a:tcPr>
+                </a:tc>
+                <a:tc>
+                  <a:txBody>
+                    <a:bodyPr/>
+                    <a:lstStyle/>
+                    <a:p>
+                      <a:pPr indent="0" marL="0">
+                        <a:buNone/>
+                      </a:pPr>
+                      <a:r>
+                        <a:rPr lang="en-US" sz="1250" dirty="0">
+                          <a:solidFill>
+                            <a:srgbClr val="AAB4D4"/>
+                          </a:solidFill>
+                          <a:latin typeface="Calibri" pitchFamily="34" charset="0"/>
+                          <a:ea typeface="Calibri" pitchFamily="34" charset="-122"/>
+                          <a:cs typeface="Calibri" pitchFamily="34" charset="-120"/>
+                        </a:rPr>
+                        <a:t>8</a:t>
+                      </a:r>
+                      <a:endParaRPr lang="en-US" sz="1250" dirty="0">
+                        <a:latin typeface="Calibri" charset="0"/>
+                        <a:ea typeface="Calibri" charset="0"/>
+                        <a:cs typeface="Calibri" charset="0"/>
+                      </a:endParaRPr>
+                    </a:p>
+                  </a:txBody>
+                  <a:tcPr marL="101600" marR="101600" marT="50800" marB="50800" anchor="ctr">
+                    <a:lnL w="12700" cap="flat" cmpd="sng" algn="ctr">
+                      <a:solidFill>
+                        <a:srgbClr val="172A5E"/>
+                      </a:solidFill>
+                      <a:prstDash val="solid"/>
+                      <a:round/>
+                      <a:headEnd type="none" w="med" len="med"/>
+                      <a:tailEnd type="none" w="med" len="med"/>
+                    </a:lnL>
+                    <a:lnR w="12700" cap="flat" cmpd="sng" algn="ctr">
+                      <a:solidFill>
+                        <a:srgbClr val="172A5E"/>
+                      </a:solidFill>
+                      <a:prstDash val="solid"/>
+                      <a:round/>
+                      <a:headEnd type="none" w="med" len="med"/>
+                      <a:tailEnd type="none" w="med" len="med"/>
+                    </a:lnR>
+                    <a:lnT w="12700" cap="flat" cmpd="sng" algn="ctr">
+                      <a:solidFill>
+                        <a:srgbClr val="172A5E"/>
+                      </a:solidFill>
+                      <a:prstDash val="solid"/>
+                      <a:round/>
+                      <a:headEnd type="none" w="med" len="med"/>
+                      <a:tailEnd type="none" w="med" len="med"/>
+                    </a:lnT>
+                    <a:lnB w="12700" cap="flat" cmpd="sng" algn="ctr">
+                      <a:solidFill>
+                        <a:srgbClr val="172A5E"/>
+                      </a:solidFill>
+                      <a:prstDash val="solid"/>
+                      <a:round/>
+                      <a:headEnd type="none" w="med" len="med"/>
+                      <a:tailEnd type="none" w="med" len="med"/>
+                    </a:lnB>
+                    <a:solidFill>
+                      <a:srgbClr val="04081F"/>
+                    </a:solidFill>
+                  </a:tcPr>
+                </a:tc>
+                <a:tc>
+                  <a:txBody>
+                    <a:bodyPr/>
+                    <a:lstStyle/>
+                    <a:p>
+                      <a:pPr indent="0" marL="0">
+                        <a:buNone/>
+                      </a:pPr>
+                      <a:r>
+                        <a:rPr lang="en-US" sz="1250" dirty="0">
+                          <a:solidFill>
+                            <a:srgbClr val="AAB4D4"/>
+                          </a:solidFill>
+                          <a:latin typeface="Calibri" pitchFamily="34" charset="0"/>
+                          <a:ea typeface="Calibri" pitchFamily="34" charset="-122"/>
+                          <a:cs typeface="Calibri" pitchFamily="34" charset="-120"/>
+                        </a:rPr>
+                        <a:t>20+</a:t>
+                      </a:r>
+                      <a:endParaRPr lang="en-US" sz="1250" dirty="0">
+                        <a:latin typeface="Calibri" charset="0"/>
+                        <a:ea typeface="Calibri" charset="0"/>
+                        <a:cs typeface="Calibri" charset="0"/>
+                      </a:endParaRPr>
+                    </a:p>
+                  </a:txBody>
+                  <a:tcPr marL="101600" marR="101600" marT="50800" marB="50800" anchor="ctr">
+                    <a:lnL w="12700" cap="flat" cmpd="sng" algn="ctr">
+                      <a:solidFill>
+                        <a:srgbClr val="172A5E"/>
+                      </a:solidFill>
+                      <a:prstDash val="solid"/>
+                      <a:round/>
+                      <a:headEnd type="none" w="med" len="med"/>
+                      <a:tailEnd type="none" w="med" len="med"/>
+                    </a:lnL>
+                    <a:lnR w="12700" cap="flat" cmpd="sng" algn="ctr">
+                      <a:solidFill>
+                        <a:srgbClr val="172A5E"/>
+                      </a:solidFill>
+                      <a:prstDash val="solid"/>
+                      <a:round/>
+                      <a:headEnd type="none" w="med" len="med"/>
+                      <a:tailEnd type="none" w="med" len="med"/>
+                    </a:lnR>
+                    <a:lnT w="12700" cap="flat" cmpd="sng" algn="ctr">
+                      <a:solidFill>
+                        <a:srgbClr val="172A5E"/>
+                      </a:solidFill>
+                      <a:prstDash val="solid"/>
+                      <a:round/>
+                      <a:headEnd type="none" w="med" len="med"/>
+                      <a:tailEnd type="none" w="med" len="med"/>
+                    </a:lnT>
+                    <a:lnB w="12700" cap="flat" cmpd="sng" algn="ctr">
+                      <a:solidFill>
+                        <a:srgbClr val="172A5E"/>
+                      </a:solidFill>
+                      <a:prstDash val="solid"/>
+                      <a:round/>
+                      <a:headEnd type="none" w="med" len="med"/>
+                      <a:tailEnd type="none" w="med" len="med"/>
+                    </a:lnB>
+                    <a:solidFill>
+                      <a:srgbClr val="04081F"/>
+                    </a:solidFill>
+                  </a:tcPr>
+                </a:tc>
+              </a:tr>
+              <a:tr h="365760">
+                <a:tc>
+                  <a:txBody>
+                    <a:bodyPr/>
+                    <a:lstStyle/>
+                    <a:p>
+                      <a:pPr indent="0" marL="0">
+                        <a:buNone/>
+                      </a:pPr>
+                      <a:r>
+                        <a:rPr lang="en-US" sz="1250" dirty="0">
+                          <a:solidFill>
+                            <a:srgbClr val="AAB4D4"/>
+                          </a:solidFill>
+                          <a:latin typeface="Calibri" pitchFamily="34" charset="0"/>
+                          <a:ea typeface="Calibri" pitchFamily="34" charset="-122"/>
+                          <a:cs typeface="Calibri" pitchFamily="34" charset="-120"/>
+                        </a:rPr>
+                        <a:t>Oportunidades registradas en ACE</a:t>
                       </a:r>
                       <a:endParaRPr lang="en-US" sz="1250" dirty="0">
                         <a:latin typeface="Calibri" charset="0"/>
@@ -11038,7 +15242,7 @@
                           <a:ea typeface="Calibri" pitchFamily="34" charset="-122"/>
                           <a:cs typeface="Calibri" pitchFamily="34" charset="-120"/>
                         </a:rPr>
-                        <a:t>500</a:t>
+                        <a:t>10</a:t>
                       </a:r>
                       <a:endParaRPr lang="en-US" sz="1250" dirty="0">
                         <a:latin typeface="Calibri" charset="0"/>
@@ -11106,7 +15310,281 @@
                           <a:ea typeface="Calibri" pitchFamily="34" charset="-122"/>
                           <a:cs typeface="Calibri" pitchFamily="34" charset="-120"/>
                         </a:rPr>
-                        <a:t>3,000</a:t>
+                        <a:t>40+</a:t>
+                      </a:r>
+                      <a:endParaRPr lang="en-US" sz="1250" dirty="0">
+                        <a:latin typeface="Calibri" charset="0"/>
+                        <a:ea typeface="Calibri" charset="0"/>
+                        <a:cs typeface="Calibri" charset="0"/>
+                      </a:endParaRPr>
+                    </a:p>
+                  </a:txBody>
+                  <a:tcPr marL="101600" marR="101600" marT="50800" marB="50800" anchor="ctr">
+                    <a:lnL w="12700" cap="flat" cmpd="sng" algn="ctr">
+                      <a:solidFill>
+                        <a:srgbClr val="172A5E"/>
+                      </a:solidFill>
+                      <a:prstDash val="solid"/>
+                      <a:round/>
+                      <a:headEnd type="none" w="med" len="med"/>
+                      <a:tailEnd type="none" w="med" len="med"/>
+                    </a:lnL>
+                    <a:lnR w="12700" cap="flat" cmpd="sng" algn="ctr">
+                      <a:solidFill>
+                        <a:srgbClr val="172A5E"/>
+                      </a:solidFill>
+                      <a:prstDash val="solid"/>
+                      <a:round/>
+                      <a:headEnd type="none" w="med" len="med"/>
+                      <a:tailEnd type="none" w="med" len="med"/>
+                    </a:lnR>
+                    <a:lnT w="12700" cap="flat" cmpd="sng" algn="ctr">
+                      <a:solidFill>
+                        <a:srgbClr val="172A5E"/>
+                      </a:solidFill>
+                      <a:prstDash val="solid"/>
+                      <a:round/>
+                      <a:headEnd type="none" w="med" len="med"/>
+                      <a:tailEnd type="none" w="med" len="med"/>
+                    </a:lnT>
+                    <a:lnB w="12700" cap="flat" cmpd="sng" algn="ctr">
+                      <a:solidFill>
+                        <a:srgbClr val="172A5E"/>
+                      </a:solidFill>
+                      <a:prstDash val="solid"/>
+                      <a:round/>
+                      <a:headEnd type="none" w="med" len="med"/>
+                      <a:tailEnd type="none" w="med" len="med"/>
+                    </a:lnB>
+                    <a:solidFill>
+                      <a:srgbClr val="04081F"/>
+                    </a:solidFill>
+                  </a:tcPr>
+                </a:tc>
+              </a:tr>
+              <a:tr h="365760">
+                <a:tc>
+                  <a:txBody>
+                    <a:bodyPr/>
+                    <a:lstStyle/>
+                    <a:p>
+                      <a:pPr indent="0" marL="0">
+                        <a:buNone/>
+                      </a:pPr>
+                      <a:r>
+                        <a:rPr lang="en-US" sz="1250" dirty="0">
+                          <a:solidFill>
+                            <a:srgbClr val="AAB4D4"/>
+                          </a:solidFill>
+                          <a:latin typeface="Calibri" pitchFamily="34" charset="0"/>
+                          <a:ea typeface="Calibri" pitchFamily="34" charset="-122"/>
+                          <a:cs typeface="Calibri" pitchFamily="34" charset="-120"/>
+                        </a:rPr>
+                        <a:t>Casos referidos por el hiperescalador</a:t>
+                      </a:r>
+                      <a:endParaRPr lang="en-US" sz="1250" dirty="0">
+                        <a:latin typeface="Calibri" charset="0"/>
+                        <a:ea typeface="Calibri" charset="0"/>
+                        <a:cs typeface="Calibri" charset="0"/>
+                      </a:endParaRPr>
+                    </a:p>
+                  </a:txBody>
+                  <a:tcPr marL="101600" marR="101600" marT="50800" marB="50800" anchor="ctr">
+                    <a:lnL w="12700" cap="flat" cmpd="sng" algn="ctr">
+                      <a:solidFill>
+                        <a:srgbClr val="172A5E"/>
+                      </a:solidFill>
+                      <a:prstDash val="solid"/>
+                      <a:round/>
+                      <a:headEnd type="none" w="med" len="med"/>
+                      <a:tailEnd type="none" w="med" len="med"/>
+                    </a:lnL>
+                    <a:lnR w="12700" cap="flat" cmpd="sng" algn="ctr">
+                      <a:solidFill>
+                        <a:srgbClr val="172A5E"/>
+                      </a:solidFill>
+                      <a:prstDash val="solid"/>
+                      <a:round/>
+                      <a:headEnd type="none" w="med" len="med"/>
+                      <a:tailEnd type="none" w="med" len="med"/>
+                    </a:lnR>
+                    <a:lnT w="12700" cap="flat" cmpd="sng" algn="ctr">
+                      <a:solidFill>
+                        <a:srgbClr val="172A5E"/>
+                      </a:solidFill>
+                      <a:prstDash val="solid"/>
+                      <a:round/>
+                      <a:headEnd type="none" w="med" len="med"/>
+                      <a:tailEnd type="none" w="med" len="med"/>
+                    </a:lnT>
+                    <a:lnB w="12700" cap="flat" cmpd="sng" algn="ctr">
+                      <a:solidFill>
+                        <a:srgbClr val="172A5E"/>
+                      </a:solidFill>
+                      <a:prstDash val="solid"/>
+                      <a:round/>
+                      <a:headEnd type="none" w="med" len="med"/>
+                      <a:tailEnd type="none" w="med" len="med"/>
+                    </a:lnB>
+                    <a:solidFill>
+                      <a:srgbClr val="04081F"/>
+                    </a:solidFill>
+                  </a:tcPr>
+                </a:tc>
+                <a:tc>
+                  <a:txBody>
+                    <a:bodyPr/>
+                    <a:lstStyle/>
+                    <a:p>
+                      <a:pPr indent="0" marL="0">
+                        <a:buNone/>
+                      </a:pPr>
+                      <a:r>
+                        <a:rPr lang="en-US" sz="1250" dirty="0">
+                          <a:solidFill>
+                            <a:srgbClr val="AAB4D4"/>
+                          </a:solidFill>
+                          <a:latin typeface="Calibri" pitchFamily="34" charset="0"/>
+                          <a:ea typeface="Calibri" pitchFamily="34" charset="-122"/>
+                          <a:cs typeface="Calibri" pitchFamily="34" charset="-120"/>
+                        </a:rPr>
+                        <a:t>0</a:t>
+                      </a:r>
+                      <a:endParaRPr lang="en-US" sz="1250" dirty="0">
+                        <a:latin typeface="Calibri" charset="0"/>
+                        <a:ea typeface="Calibri" charset="0"/>
+                        <a:cs typeface="Calibri" charset="0"/>
+                      </a:endParaRPr>
+                    </a:p>
+                  </a:txBody>
+                  <a:tcPr marL="101600" marR="101600" marT="50800" marB="50800" anchor="ctr">
+                    <a:lnL w="12700" cap="flat" cmpd="sng" algn="ctr">
+                      <a:solidFill>
+                        <a:srgbClr val="172A5E"/>
+                      </a:solidFill>
+                      <a:prstDash val="solid"/>
+                      <a:round/>
+                      <a:headEnd type="none" w="med" len="med"/>
+                      <a:tailEnd type="none" w="med" len="med"/>
+                    </a:lnL>
+                    <a:lnR w="12700" cap="flat" cmpd="sng" algn="ctr">
+                      <a:solidFill>
+                        <a:srgbClr val="172A5E"/>
+                      </a:solidFill>
+                      <a:prstDash val="solid"/>
+                      <a:round/>
+                      <a:headEnd type="none" w="med" len="med"/>
+                      <a:tailEnd type="none" w="med" len="med"/>
+                    </a:lnR>
+                    <a:lnT w="12700" cap="flat" cmpd="sng" algn="ctr">
+                      <a:solidFill>
+                        <a:srgbClr val="172A5E"/>
+                      </a:solidFill>
+                      <a:prstDash val="solid"/>
+                      <a:round/>
+                      <a:headEnd type="none" w="med" len="med"/>
+                      <a:tailEnd type="none" w="med" len="med"/>
+                    </a:lnT>
+                    <a:lnB w="12700" cap="flat" cmpd="sng" algn="ctr">
+                      <a:solidFill>
+                        <a:srgbClr val="172A5E"/>
+                      </a:solidFill>
+                      <a:prstDash val="solid"/>
+                      <a:round/>
+                      <a:headEnd type="none" w="med" len="med"/>
+                      <a:tailEnd type="none" w="med" len="med"/>
+                    </a:lnB>
+                    <a:solidFill>
+                      <a:srgbClr val="04081F"/>
+                    </a:solidFill>
+                  </a:tcPr>
+                </a:tc>
+                <a:tc>
+                  <a:txBody>
+                    <a:bodyPr/>
+                    <a:lstStyle/>
+                    <a:p>
+                      <a:pPr indent="0" marL="0">
+                        <a:buNone/>
+                      </a:pPr>
+                      <a:r>
+                        <a:rPr lang="en-US" sz="1250" dirty="0">
+                          <a:solidFill>
+                            <a:srgbClr val="AAB4D4"/>
+                          </a:solidFill>
+                          <a:latin typeface="Calibri" pitchFamily="34" charset="0"/>
+                          <a:ea typeface="Calibri" pitchFamily="34" charset="-122"/>
+                          <a:cs typeface="Calibri" pitchFamily="34" charset="-120"/>
+                        </a:rPr>
+                        <a:t>2</a:t>
+                      </a:r>
+                      <a:endParaRPr lang="en-US" sz="1250" dirty="0">
+                        <a:latin typeface="Calibri" charset="0"/>
+                        <a:ea typeface="Calibri" charset="0"/>
+                        <a:cs typeface="Calibri" charset="0"/>
+                      </a:endParaRPr>
+                    </a:p>
+                  </a:txBody>
+                  <a:tcPr marL="101600" marR="101600" marT="50800" marB="50800" anchor="ctr">
+                    <a:lnL w="12700" cap="flat" cmpd="sng" algn="ctr">
+                      <a:solidFill>
+                        <a:srgbClr val="172A5E"/>
+                      </a:solidFill>
+                      <a:prstDash val="solid"/>
+                      <a:round/>
+                      <a:headEnd type="none" w="med" len="med"/>
+                      <a:tailEnd type="none" w="med" len="med"/>
+                    </a:lnL>
+                    <a:lnR w="12700" cap="flat" cmpd="sng" algn="ctr">
+                      <a:solidFill>
+                        <a:srgbClr val="172A5E"/>
+                      </a:solidFill>
+                      <a:prstDash val="solid"/>
+                      <a:round/>
+                      <a:headEnd type="none" w="med" len="med"/>
+                      <a:tailEnd type="none" w="med" len="med"/>
+                    </a:lnR>
+                    <a:lnT w="12700" cap="flat" cmpd="sng" algn="ctr">
+                      <a:solidFill>
+                        <a:srgbClr val="172A5E"/>
+                      </a:solidFill>
+                      <a:prstDash val="solid"/>
+                      <a:round/>
+                      <a:headEnd type="none" w="med" len="med"/>
+                      <a:tailEnd type="none" w="med" len="med"/>
+                    </a:lnT>
+                    <a:lnB w="12700" cap="flat" cmpd="sng" algn="ctr">
+                      <a:solidFill>
+                        <a:srgbClr val="172A5E"/>
+                      </a:solidFill>
+                      <a:prstDash val="solid"/>
+                      <a:round/>
+                      <a:headEnd type="none" w="med" len="med"/>
+                      <a:tailEnd type="none" w="med" len="med"/>
+                    </a:lnB>
+                    <a:solidFill>
+                      <a:srgbClr val="04081F"/>
+                    </a:solidFill>
+                  </a:tcPr>
+                </a:tc>
+                <a:tc>
+                  <a:txBody>
+                    <a:bodyPr/>
+                    <a:lstStyle/>
+                    <a:p>
+                      <a:pPr indent="0" marL="0">
+                        <a:buNone/>
+                      </a:pPr>
+                      <a:r>
+                        <a:rPr lang="en-US" sz="1250" dirty="0">
+                          <a:solidFill>
+                            <a:srgbClr val="AAB4D4"/>
+                          </a:solidFill>
+                          <a:latin typeface="Calibri" pitchFamily="34" charset="0"/>
+                          <a:ea typeface="Calibri" pitchFamily="34" charset="-122"/>
+                          <a:cs typeface="Calibri" pitchFamily="34" charset="-120"/>
+                        </a:rPr>
+                        <a:t>12</a:t>
                       </a:r>
                       <a:endParaRPr lang="en-US" sz="1250" dirty="0">
                         <a:latin typeface="Calibri" charset="0"/>
@@ -11289,9 +15767,9 @@
 </p:sld>
 </file>
 
-<file path=ppt/slides/slide14.xml><?xml version="1.0" encoding="utf-8"?>
+<file path=ppt/slides/slide16.xml><?xml version="1.0" encoding="utf-8"?>
 <p:sld xmlns:a="http://schemas.openxmlformats.org/drawingml/2006/main" xmlns:r="http://schemas.openxmlformats.org/officeDocument/2006/relationships" xmlns:p="http://schemas.openxmlformats.org/presentationml/2006/main">
-  <p:cSld name="Slide 14">
+  <p:cSld name="Slide 16">
     <p:bg>
       <p:bgPr>
         <a:solidFill>
@@ -12031,9 +16509,9 @@
 </p:sld>
 </file>
 
-<file path=ppt/slides/slide15.xml><?xml version="1.0" encoding="utf-8"?>
+<file path=ppt/slides/slide17.xml><?xml version="1.0" encoding="utf-8"?>
 <p:sld xmlns:a="http://schemas.openxmlformats.org/drawingml/2006/main" xmlns:r="http://schemas.openxmlformats.org/officeDocument/2006/relationships" xmlns:p="http://schemas.openxmlformats.org/presentationml/2006/main">
-  <p:cSld name="Slide 15">
+  <p:cSld name="Slide 17">
     <p:bg>
       <p:bgPr>
         <a:solidFill>
@@ -12625,7 +17103,7 @@
                 <a:ea typeface="Calibri" pitchFamily="34" charset="-122"/>
                 <a:cs typeface="Calibri" pitchFamily="34" charset="-120"/>
               </a:rPr>
-              <a:t>4 · Tres casos con cifras</a:t>
+              <a:t>4 · Inscribirse a los tres programas</a:t>
             </a:r>
             <a:endParaRPr lang="en-US" sz="1400" dirty="0"/>
           </a:p>
@@ -12664,7 +17142,7 @@
                 <a:ea typeface="Calibri" pitchFamily="34" charset="-122"/>
                 <a:cs typeface="Calibri" pitchFamily="34" charset="-120"/>
               </a:rPr>
-              <a:t>Los proyectos ya están en el deck. Falta convertirlos en casos publicables con números.</a:t>
+              <a:t>APN de AWS, MAICPP de Microsoft y Google Partner Network. Dos son gratis. Agendar los primeros exámenes.</a:t>
             </a:r>
             <a:endParaRPr lang="en-US" sz="1150" dirty="0"/>
           </a:p>
@@ -12703,7 +17181,7 @@
                 <a:ea typeface="Calibri" pitchFamily="34" charset="-122"/>
                 <a:cs typeface="Calibri" pitchFamily="34" charset="-120"/>
               </a:rPr>
-              <a:t>Ernesto · 2 semanas</a:t>
+              <a:t>Alonso · 1 semana</a:t>
             </a:r>
             <a:endParaRPr lang="en-US" sz="1100" dirty="0"/>
           </a:p>
@@ -12734,7 +17212,7 @@
               <a:buNone/>
             </a:pPr>
             <a:r>
-              <a:rPr lang="en-US" sz="2100" b="1" dirty="0">
+              <a:rPr lang="en-US" sz="2000" b="1" dirty="0">
                 <a:solidFill>
                   <a:srgbClr val="EAF1FF"/>
                 </a:solidFill>
@@ -12742,9 +17220,9 @@
                 <a:ea typeface="Calibri" pitchFamily="34" charset="-122"/>
                 <a:cs typeface="Calibri" pitchFamily="34" charset="-120"/>
               </a:rPr>
-              <a:t>Nada de esto cuesta dinero. Cuesta decidir.</a:t>
-            </a:r>
-            <a:endParaRPr lang="en-US" sz="2100" dirty="0"/>
+              <a:t>Sólo uno de los cuatro cuesta dinero. Los otros tres cuestan decidir.</a:t>
+            </a:r>
+            <a:endParaRPr lang="en-US" sz="2000" dirty="0"/>
           </a:p>
         </p:txBody>
       </p:sp>
@@ -17223,7 +21701,7 @@
                 <a:ea typeface="Calibri" pitchFamily="34" charset="-122"/>
                 <a:cs typeface="Calibri" pitchFamily="34" charset="-120"/>
               </a:rPr>
-              <a:t>Cuatro motores, en este orden</a:t>
+              <a:t>Cinco motores, en este orden</a:t>
             </a:r>
             <a:endParaRPr lang="en-US" sz="3400" dirty="0"/>
           </a:p>
@@ -17238,11 +21716,11 @@
         <p:spPr>
           <a:xfrm>
             <a:off x="566928" y="1783080"/>
-            <a:ext cx="2578608" cy="2651760"/>
+            <a:ext cx="2048256" cy="2697480"/>
           </a:xfrm>
           <a:prstGeom prst="roundRect">
             <a:avLst>
-              <a:gd name="adj" fmla="val 3546"/>
+              <a:gd name="adj" fmla="val 4464"/>
             </a:avLst>
           </a:prstGeom>
           <a:solidFill>
@@ -17264,14 +21742,14 @@
         </p:nvSpPr>
         <p:spPr>
           <a:xfrm>
-            <a:off x="804672" y="1975104"/>
-            <a:ext cx="457200" cy="457200"/>
+            <a:off x="768096" y="1956816"/>
+            <a:ext cx="420624" cy="420624"/>
           </a:xfrm>
           <a:prstGeom prst="ellipse">
             <a:avLst/>
           </a:prstGeom>
           <a:solidFill>
-            <a:srgbClr val="00C2FF"/>
+            <a:srgbClr val="1763FF"/>
           </a:solidFill>
           <a:ln/>
         </p:spPr>
@@ -17284,8 +21762,8 @@
         </p:nvSpPr>
         <p:spPr>
           <a:xfrm>
-            <a:off x="804672" y="2057400"/>
-            <a:ext cx="457200" cy="292608"/>
+            <a:off x="768096" y="2029968"/>
+            <a:ext cx="420624" cy="274320"/>
           </a:xfrm>
           <a:prstGeom prst="rect">
             <a:avLst/>
@@ -17301,9 +21779,9 @@
               <a:buNone/>
             </a:pPr>
             <a:r>
-              <a:rPr lang="en-US" sz="1400" b="1" dirty="0">
+              <a:rPr lang="en-US" sz="1300" b="1" dirty="0">
                 <a:solidFill>
-                  <a:srgbClr val="04081F"/>
+                  <a:srgbClr val="FFFFFF"/>
                 </a:solidFill>
                 <a:latin typeface="Calibri" pitchFamily="34" charset="0"/>
                 <a:ea typeface="Calibri" pitchFamily="34" charset="-122"/>
@@ -17311,7 +21789,7 @@
               </a:rPr>
               <a:t>01</a:t>
             </a:r>
-            <a:endParaRPr lang="en-US" sz="1400" dirty="0"/>
+            <a:endParaRPr lang="en-US" sz="1300" dirty="0"/>
           </a:p>
         </p:txBody>
       </p:sp>
@@ -17323,8 +21801,8 @@
         </p:nvSpPr>
         <p:spPr>
           <a:xfrm>
-            <a:off x="804672" y="2578608"/>
-            <a:ext cx="2194560" cy="548640"/>
+            <a:off x="768096" y="2505456"/>
+            <a:ext cx="1737360" cy="603504"/>
           </a:xfrm>
           <a:prstGeom prst="rect">
             <a:avLst/>
@@ -17340,7 +21818,7 @@
               <a:buNone/>
             </a:pPr>
             <a:r>
-              <a:rPr lang="en-US" sz="1400" b="1" dirty="0">
+              <a:rPr lang="en-US" sz="1250" b="1" dirty="0">
                 <a:solidFill>
                   <a:srgbClr val="EAF1FF"/>
                 </a:solidFill>
@@ -17350,7 +21828,7 @@
               </a:rPr>
               <a:t>Expertise visible</a:t>
             </a:r>
-            <a:endParaRPr lang="en-US" sz="1400" dirty="0"/>
+            <a:endParaRPr lang="en-US" sz="1250" dirty="0"/>
           </a:p>
         </p:txBody>
       </p:sp>
@@ -17362,8 +21840,8 @@
         </p:nvSpPr>
         <p:spPr>
           <a:xfrm>
-            <a:off x="804672" y="3163824"/>
-            <a:ext cx="2212848" cy="1188720"/>
+            <a:off x="768096" y="3127248"/>
+            <a:ext cx="1755648" cy="1280160"/>
           </a:xfrm>
           <a:prstGeom prst="rect">
             <a:avLst/>
@@ -17379,7 +21857,7 @@
               <a:buNone/>
             </a:pPr>
             <a:r>
-              <a:rPr lang="en-US" sz="1100" dirty="0">
+              <a:rPr lang="en-US" sz="1000" dirty="0">
                 <a:solidFill>
                   <a:srgbClr val="AAB4D4"/>
                 </a:solidFill>
@@ -17387,9 +21865,9 @@
                 <a:ea typeface="Calibri" pitchFamily="34" charset="-122"/>
                 <a:cs typeface="Calibri" pitchFamily="34" charset="-120"/>
               </a:rPr>
-              <a:t>Amazon, Google, Santander, Nemak, AB InBev. Es el activo más desperdiciado hoy: está en un PDF, no en el mercado.</a:t>
-            </a:r>
-            <a:endParaRPr lang="en-US" sz="1100" dirty="0"/>
+              <a:t>Amazon, Google, Santander, Nemak, AB InBev. Está en un PDF, no en el mercado.</a:t>
+            </a:r>
+            <a:endParaRPr lang="en-US" sz="1000" dirty="0"/>
           </a:p>
         </p:txBody>
       </p:sp>
@@ -17401,12 +21879,12 @@
         </p:nvSpPr>
         <p:spPr>
           <a:xfrm>
-            <a:off x="3355848" y="1783080"/>
-            <a:ext cx="2578608" cy="2651760"/>
+            <a:off x="2798064" y="1783080"/>
+            <a:ext cx="2048256" cy="2697480"/>
           </a:xfrm>
           <a:prstGeom prst="roundRect">
             <a:avLst>
-              <a:gd name="adj" fmla="val 3546"/>
+              <a:gd name="adj" fmla="val 4464"/>
             </a:avLst>
           </a:prstGeom>
           <a:solidFill>
@@ -17428,14 +21906,14 @@
         </p:nvSpPr>
         <p:spPr>
           <a:xfrm>
-            <a:off x="3593592" y="1975104"/>
-            <a:ext cx="457200" cy="457200"/>
+            <a:off x="2999232" y="1956816"/>
+            <a:ext cx="420624" cy="420624"/>
           </a:xfrm>
           <a:prstGeom prst="ellipse">
             <a:avLst/>
           </a:prstGeom>
           <a:solidFill>
-            <a:srgbClr val="00C2FF"/>
+            <a:srgbClr val="1763FF"/>
           </a:solidFill>
           <a:ln/>
         </p:spPr>
@@ -17448,8 +21926,8 @@
         </p:nvSpPr>
         <p:spPr>
           <a:xfrm>
-            <a:off x="3593592" y="2057400"/>
-            <a:ext cx="457200" cy="292608"/>
+            <a:off x="2999232" y="2029968"/>
+            <a:ext cx="420624" cy="274320"/>
           </a:xfrm>
           <a:prstGeom prst="rect">
             <a:avLst/>
@@ -17465,9 +21943,9 @@
               <a:buNone/>
             </a:pPr>
             <a:r>
-              <a:rPr lang="en-US" sz="1400" b="1" dirty="0">
+              <a:rPr lang="en-US" sz="1300" b="1" dirty="0">
                 <a:solidFill>
-                  <a:srgbClr val="04081F"/>
+                  <a:srgbClr val="FFFFFF"/>
                 </a:solidFill>
                 <a:latin typeface="Calibri" pitchFamily="34" charset="0"/>
                 <a:ea typeface="Calibri" pitchFamily="34" charset="-122"/>
@@ -17475,7 +21953,7 @@
               </a:rPr>
               <a:t>02</a:t>
             </a:r>
-            <a:endParaRPr lang="en-US" sz="1400" dirty="0"/>
+            <a:endParaRPr lang="en-US" sz="1300" dirty="0"/>
           </a:p>
         </p:txBody>
       </p:sp>
@@ -17487,8 +21965,8 @@
         </p:nvSpPr>
         <p:spPr>
           <a:xfrm>
-            <a:off x="3593592" y="2578608"/>
-            <a:ext cx="2194560" cy="548640"/>
+            <a:off x="2999232" y="2505456"/>
+            <a:ext cx="1737360" cy="603504"/>
           </a:xfrm>
           <a:prstGeom prst="rect">
             <a:avLst/>
@@ -17504,7 +21982,7 @@
               <a:buNone/>
             </a:pPr>
             <a:r>
-              <a:rPr lang="en-US" sz="1400" b="1" dirty="0">
+              <a:rPr lang="en-US" sz="1250" b="1" dirty="0">
                 <a:solidFill>
                   <a:srgbClr val="EAF1FF"/>
                 </a:solidFill>
@@ -17514,7 +21992,7 @@
               </a:rPr>
               <a:t>Máquina de referencias</a:t>
             </a:r>
-            <a:endParaRPr lang="en-US" sz="1400" dirty="0"/>
+            <a:endParaRPr lang="en-US" sz="1250" dirty="0"/>
           </a:p>
         </p:txBody>
       </p:sp>
@@ -17526,8 +22004,8 @@
         </p:nvSpPr>
         <p:spPr>
           <a:xfrm>
-            <a:off x="3593592" y="3163824"/>
-            <a:ext cx="2212848" cy="1188720"/>
+            <a:off x="2999232" y="3127248"/>
+            <a:ext cx="1755648" cy="1280160"/>
           </a:xfrm>
           <a:prstGeom prst="rect">
             <a:avLst/>
@@ -17543,7 +22021,7 @@
               <a:buNone/>
             </a:pPr>
             <a:r>
-              <a:rPr lang="en-US" sz="1100" dirty="0">
+              <a:rPr lang="en-US" sz="1000" dirty="0">
                 <a:solidFill>
                   <a:srgbClr val="AAB4D4"/>
                 </a:solidFill>
@@ -17553,7 +22031,7 @@
               </a:rPr>
               <a:t>Sistema explícito de pedir y dar. Cierra la fuga del 83% → 29%.</a:t>
             </a:r>
-            <a:endParaRPr lang="en-US" sz="1100" dirty="0"/>
+            <a:endParaRPr lang="en-US" sz="1000" dirty="0"/>
           </a:p>
         </p:txBody>
       </p:sp>
@@ -17565,12 +22043,12 @@
         </p:nvSpPr>
         <p:spPr>
           <a:xfrm>
-            <a:off x="6144768" y="1783080"/>
-            <a:ext cx="2578608" cy="2651760"/>
+            <a:off x="5029200" y="1783080"/>
+            <a:ext cx="2048256" cy="2697480"/>
           </a:xfrm>
           <a:prstGeom prst="roundRect">
             <a:avLst>
-              <a:gd name="adj" fmla="val 3546"/>
+              <a:gd name="adj" fmla="val 4464"/>
             </a:avLst>
           </a:prstGeom>
           <a:solidFill>
@@ -17592,8 +22070,8 @@
         </p:nvSpPr>
         <p:spPr>
           <a:xfrm>
-            <a:off x="6382512" y="1975104"/>
-            <a:ext cx="457200" cy="457200"/>
+            <a:off x="5230368" y="1956816"/>
+            <a:ext cx="420624" cy="420624"/>
           </a:xfrm>
           <a:prstGeom prst="ellipse">
             <a:avLst/>
@@ -17612,8 +22090,8 @@
         </p:nvSpPr>
         <p:spPr>
           <a:xfrm>
-            <a:off x="6382512" y="2057400"/>
-            <a:ext cx="457200" cy="292608"/>
+            <a:off x="5230368" y="2029968"/>
+            <a:ext cx="420624" cy="274320"/>
           </a:xfrm>
           <a:prstGeom prst="rect">
             <a:avLst/>
@@ -17629,7 +22107,7 @@
               <a:buNone/>
             </a:pPr>
             <a:r>
-              <a:rPr lang="en-US" sz="1400" b="1" dirty="0">
+              <a:rPr lang="en-US" sz="1300" b="1" dirty="0">
                 <a:solidFill>
                   <a:srgbClr val="04081F"/>
                 </a:solidFill>
@@ -17639,7 +22117,7 @@
               </a:rPr>
               <a:t>03</a:t>
             </a:r>
-            <a:endParaRPr lang="en-US" sz="1400" dirty="0"/>
+            <a:endParaRPr lang="en-US" sz="1300" dirty="0"/>
           </a:p>
         </p:txBody>
       </p:sp>
@@ -17651,8 +22129,8 @@
         </p:nvSpPr>
         <p:spPr>
           <a:xfrm>
-            <a:off x="6382512" y="2578608"/>
-            <a:ext cx="2194560" cy="548640"/>
+            <a:off x="5230368" y="2505456"/>
+            <a:ext cx="1737360" cy="603504"/>
           </a:xfrm>
           <a:prstGeom prst="rect">
             <a:avLst/>
@@ -17668,7 +22146,7 @@
               <a:buNone/>
             </a:pPr>
             <a:r>
-              <a:rPr lang="en-US" sz="1400" b="1" dirty="0">
+              <a:rPr lang="en-US" sz="1250" b="1" dirty="0">
                 <a:solidFill>
                   <a:srgbClr val="EAF1FF"/>
                 </a:solidFill>
@@ -17676,9 +22154,9 @@
                 <a:ea typeface="Calibri" pitchFamily="34" charset="-122"/>
                 <a:cs typeface="Calibri" pitchFamily="34" charset="-120"/>
               </a:rPr>
-              <a:t>Investigación original</a:t>
-            </a:r>
-            <a:endParaRPr lang="en-US" sz="1400" dirty="0"/>
+              <a:t>Partner cloud certificado</a:t>
+            </a:r>
+            <a:endParaRPr lang="en-US" sz="1250" dirty="0"/>
           </a:p>
         </p:txBody>
       </p:sp>
@@ -17690,8 +22168,8 @@
         </p:nvSpPr>
         <p:spPr>
           <a:xfrm>
-            <a:off x="6382512" y="3163824"/>
-            <a:ext cx="2212848" cy="1188720"/>
+            <a:off x="5230368" y="3127248"/>
+            <a:ext cx="1755648" cy="1280160"/>
           </a:xfrm>
           <a:prstGeom prst="rect">
             <a:avLst/>
@@ -17707,7 +22185,7 @@
               <a:buNone/>
             </a:pPr>
             <a:r>
-              <a:rPr lang="en-US" sz="1100" dirty="0">
+              <a:rPr lang="en-US" sz="1000" dirty="0">
                 <a:solidFill>
                   <a:srgbClr val="AAB4D4"/>
                 </a:solidFill>
@@ -17715,9 +22193,9 @@
                 <a:ea typeface="Calibri" pitchFamily="34" charset="-122"/>
                 <a:cs typeface="Calibri" pitchFamily="34" charset="-120"/>
               </a:rPr>
-              <a:t>“Estado de la Madurez de Datos e IA en México”. El diagnóstico deja de ser lead magnet.</a:t>
-            </a:r>
-            <a:endParaRPr lang="en-US" sz="1100" dirty="0"/>
+              <a:t>AWS, Microsoft y Google asignan casos a socios certificados. Empieza ya, no en la Fase 3.</a:t>
+            </a:r>
+            <a:endParaRPr lang="en-US" sz="1000" dirty="0"/>
           </a:p>
         </p:txBody>
       </p:sp>
@@ -17729,12 +22207,12 @@
         </p:nvSpPr>
         <p:spPr>
           <a:xfrm>
-            <a:off x="8933688" y="1783080"/>
-            <a:ext cx="2578608" cy="2651760"/>
+            <a:off x="7260336" y="1783080"/>
+            <a:ext cx="2048256" cy="2697480"/>
           </a:xfrm>
           <a:prstGeom prst="roundRect">
             <a:avLst>
-              <a:gd name="adj" fmla="val 3546"/>
+              <a:gd name="adj" fmla="val 4464"/>
             </a:avLst>
           </a:prstGeom>
           <a:solidFill>
@@ -17756,14 +22234,14 @@
         </p:nvSpPr>
         <p:spPr>
           <a:xfrm>
-            <a:off x="9171432" y="1975104"/>
-            <a:ext cx="457200" cy="457200"/>
+            <a:off x="7461504" y="1956816"/>
+            <a:ext cx="420624" cy="420624"/>
           </a:xfrm>
           <a:prstGeom prst="ellipse">
             <a:avLst/>
           </a:prstGeom>
           <a:solidFill>
-            <a:srgbClr val="00C2FF"/>
+            <a:srgbClr val="1763FF"/>
           </a:solidFill>
           <a:ln/>
         </p:spPr>
@@ -17776,8 +22254,8 @@
         </p:nvSpPr>
         <p:spPr>
           <a:xfrm>
-            <a:off x="9171432" y="2057400"/>
-            <a:ext cx="457200" cy="292608"/>
+            <a:off x="7461504" y="2029968"/>
+            <a:ext cx="420624" cy="274320"/>
           </a:xfrm>
           <a:prstGeom prst="rect">
             <a:avLst/>
@@ -17793,9 +22271,9 @@
               <a:buNone/>
             </a:pPr>
             <a:r>
-              <a:rPr lang="en-US" sz="1400" b="1" dirty="0">
+              <a:rPr lang="en-US" sz="1300" b="1" dirty="0">
                 <a:solidFill>
-                  <a:srgbClr val="04081F"/>
+                  <a:srgbClr val="FFFFFF"/>
                 </a:solidFill>
                 <a:latin typeface="Calibri" pitchFamily="34" charset="0"/>
                 <a:ea typeface="Calibri" pitchFamily="34" charset="-122"/>
@@ -17803,7 +22281,7 @@
               </a:rPr>
               <a:t>04</a:t>
             </a:r>
-            <a:endParaRPr lang="en-US" sz="1400" dirty="0"/>
+            <a:endParaRPr lang="en-US" sz="1300" dirty="0"/>
           </a:p>
         </p:txBody>
       </p:sp>
@@ -17815,8 +22293,8 @@
         </p:nvSpPr>
         <p:spPr>
           <a:xfrm>
-            <a:off x="9171432" y="2578608"/>
-            <a:ext cx="2194560" cy="548640"/>
+            <a:off x="7461504" y="2505456"/>
+            <a:ext cx="1737360" cy="603504"/>
           </a:xfrm>
           <a:prstGeom prst="rect">
             <a:avLst/>
@@ -17832,7 +22310,171 @@
               <a:buNone/>
             </a:pPr>
             <a:r>
-              <a:rPr lang="en-US" sz="1400" b="1" dirty="0">
+              <a:rPr lang="en-US" sz="1250" b="1" dirty="0">
+                <a:solidFill>
+                  <a:srgbClr val="EAF1FF"/>
+                </a:solidFill>
+                <a:latin typeface="Calibri" pitchFamily="34" charset="0"/>
+                <a:ea typeface="Calibri" pitchFamily="34" charset="-122"/>
+                <a:cs typeface="Calibri" pitchFamily="34" charset="-120"/>
+              </a:rPr>
+              <a:t>Investigación original</a:t>
+            </a:r>
+            <a:endParaRPr lang="en-US" sz="1250" dirty="0"/>
+          </a:p>
+        </p:txBody>
+      </p:sp>
+      <p:sp>
+        <p:nvSpPr>
+          <p:cNvPr id="23" name="Text 21"/>
+          <p:cNvSpPr/>
+          <p:nvPr/>
+        </p:nvSpPr>
+        <p:spPr>
+          <a:xfrm>
+            <a:off x="7461504" y="3127248"/>
+            <a:ext cx="1755648" cy="1280160"/>
+          </a:xfrm>
+          <a:prstGeom prst="rect">
+            <a:avLst/>
+          </a:prstGeom>
+          <a:noFill/>
+          <a:ln/>
+        </p:spPr>
+        <p:txBody>
+          <a:bodyPr wrap="square" lIns="0" tIns="0" rIns="0" bIns="0" rtlCol="0" anchor="ctr"/>
+          <a:lstStyle/>
+          <a:p>
+            <a:pPr indent="0" marL="0">
+              <a:buNone/>
+            </a:pPr>
+            <a:r>
+              <a:rPr lang="en-US" sz="1000" dirty="0">
+                <a:solidFill>
+                  <a:srgbClr val="AAB4D4"/>
+                </a:solidFill>
+                <a:latin typeface="Calibri" pitchFamily="34" charset="0"/>
+                <a:ea typeface="Calibri" pitchFamily="34" charset="-122"/>
+                <a:cs typeface="Calibri" pitchFamily="34" charset="-120"/>
+              </a:rPr>
+              <a:t>“Estado de la Madurez de Datos e IA en México”. El diagnóstico deja de ser lead magnet.</a:t>
+            </a:r>
+            <a:endParaRPr lang="en-US" sz="1000" dirty="0"/>
+          </a:p>
+        </p:txBody>
+      </p:sp>
+      <p:sp>
+        <p:nvSpPr>
+          <p:cNvPr id="24" name="Shape 22"/>
+          <p:cNvSpPr/>
+          <p:nvPr/>
+        </p:nvSpPr>
+        <p:spPr>
+          <a:xfrm>
+            <a:off x="9491472" y="1783080"/>
+            <a:ext cx="2048256" cy="2697480"/>
+          </a:xfrm>
+          <a:prstGeom prst="roundRect">
+            <a:avLst>
+              <a:gd name="adj" fmla="val 4464"/>
+            </a:avLst>
+          </a:prstGeom>
+          <a:solidFill>
+            <a:srgbClr val="0B1C57"/>
+          </a:solidFill>
+          <a:ln w="15875">
+            <a:solidFill>
+              <a:srgbClr val="00C2FF"/>
+            </a:solidFill>
+            <a:prstDash val="solid"/>
+          </a:ln>
+        </p:spPr>
+      </p:sp>
+      <p:sp>
+        <p:nvSpPr>
+          <p:cNvPr id="25" name="Shape 23"/>
+          <p:cNvSpPr/>
+          <p:nvPr/>
+        </p:nvSpPr>
+        <p:spPr>
+          <a:xfrm>
+            <a:off x="9692640" y="1956816"/>
+            <a:ext cx="420624" cy="420624"/>
+          </a:xfrm>
+          <a:prstGeom prst="ellipse">
+            <a:avLst/>
+          </a:prstGeom>
+          <a:solidFill>
+            <a:srgbClr val="1763FF"/>
+          </a:solidFill>
+          <a:ln/>
+        </p:spPr>
+      </p:sp>
+      <p:sp>
+        <p:nvSpPr>
+          <p:cNvPr id="26" name="Text 24"/>
+          <p:cNvSpPr/>
+          <p:nvPr/>
+        </p:nvSpPr>
+        <p:spPr>
+          <a:xfrm>
+            <a:off x="9692640" y="2029968"/>
+            <a:ext cx="420624" cy="274320"/>
+          </a:xfrm>
+          <a:prstGeom prst="rect">
+            <a:avLst/>
+          </a:prstGeom>
+          <a:noFill/>
+          <a:ln/>
+        </p:spPr>
+        <p:txBody>
+          <a:bodyPr wrap="square" lIns="0" tIns="0" rIns="0" bIns="0" rtlCol="0" anchor="ctr"/>
+          <a:lstStyle/>
+          <a:p>
+            <a:pPr algn="ctr" indent="0" marL="0">
+              <a:buNone/>
+            </a:pPr>
+            <a:r>
+              <a:rPr lang="en-US" sz="1300" b="1" dirty="0">
+                <a:solidFill>
+                  <a:srgbClr val="FFFFFF"/>
+                </a:solidFill>
+                <a:latin typeface="Calibri" pitchFamily="34" charset="0"/>
+                <a:ea typeface="Calibri" pitchFamily="34" charset="-122"/>
+                <a:cs typeface="Calibri" pitchFamily="34" charset="-120"/>
+              </a:rPr>
+              <a:t>05</a:t>
+            </a:r>
+            <a:endParaRPr lang="en-US" sz="1300" dirty="0"/>
+          </a:p>
+        </p:txBody>
+      </p:sp>
+      <p:sp>
+        <p:nvSpPr>
+          <p:cNvPr id="27" name="Text 25"/>
+          <p:cNvSpPr/>
+          <p:nvPr/>
+        </p:nvSpPr>
+        <p:spPr>
+          <a:xfrm>
+            <a:off x="9692640" y="2505456"/>
+            <a:ext cx="1737360" cy="603504"/>
+          </a:xfrm>
+          <a:prstGeom prst="rect">
+            <a:avLst/>
+          </a:prstGeom>
+          <a:noFill/>
+          <a:ln/>
+        </p:spPr>
+        <p:txBody>
+          <a:bodyPr wrap="square" lIns="0" tIns="0" rIns="0" bIns="0" rtlCol="0" anchor="ctr"/>
+          <a:lstStyle/>
+          <a:p>
+            <a:pPr indent="0" marL="0">
+              <a:buNone/>
+            </a:pPr>
+            <a:r>
+              <a:rPr lang="en-US" sz="1250" b="1" dirty="0">
                 <a:solidFill>
                   <a:srgbClr val="EAF1FF"/>
                 </a:solidFill>
@@ -17842,20 +22484,20 @@
               </a:rPr>
               <a:t>Ticket y producto</a:t>
             </a:r>
-            <a:endParaRPr lang="en-US" sz="1400" dirty="0"/>
+            <a:endParaRPr lang="en-US" sz="1250" dirty="0"/>
           </a:p>
         </p:txBody>
       </p:sp>
       <p:sp>
         <p:nvSpPr>
-          <p:cNvPr id="23" name="Text 21"/>
-          <p:cNvSpPr/>
-          <p:nvPr/>
-        </p:nvSpPr>
-        <p:spPr>
-          <a:xfrm>
-            <a:off x="9171432" y="3163824"/>
-            <a:ext cx="2212848" cy="1188720"/>
+          <p:cNvPr id="28" name="Text 26"/>
+          <p:cNvSpPr/>
+          <p:nvPr/>
+        </p:nvSpPr>
+        <p:spPr>
+          <a:xfrm>
+            <a:off x="9692640" y="3127248"/>
+            <a:ext cx="1755648" cy="1280160"/>
           </a:xfrm>
           <a:prstGeom prst="rect">
             <a:avLst/>
@@ -17871,7 +22513,7 @@
               <a:buNone/>
             </a:pPr>
             <a:r>
-              <a:rPr lang="en-US" sz="1100" dirty="0">
+              <a:rPr lang="en-US" sz="1000" dirty="0">
                 <a:solidFill>
                   <a:srgbClr val="AAB4D4"/>
                 </a:solidFill>
@@ -17879,21 +22521,21 @@
                 <a:ea typeface="Calibri" pitchFamily="34" charset="-122"/>
                 <a:cs typeface="Calibri" pitchFamily="34" charset="-120"/>
               </a:rPr>
-              <a:t>Ofertas empaquetadas con precio y alcance cerrados. Sube el ticket sin subir las horas.</a:t>
-            </a:r>
-            <a:endParaRPr lang="en-US" sz="1100" dirty="0"/>
+              <a:t>Ofertas empaquetadas con precio y alcance cerrados. Sube el ticket sin subir horas.</a:t>
+            </a:r>
+            <a:endParaRPr lang="en-US" sz="1000" dirty="0"/>
           </a:p>
         </p:txBody>
       </p:sp>
       <p:sp>
         <p:nvSpPr>
-          <p:cNvPr id="24" name="Text 22"/>
-          <p:cNvSpPr/>
-          <p:nvPr/>
-        </p:nvSpPr>
-        <p:spPr>
-          <a:xfrm>
-            <a:off x="566928" y="4754880"/>
+          <p:cNvPr id="29" name="Text 27"/>
+          <p:cNvSpPr/>
+          <p:nvPr/>
+        </p:nvSpPr>
+        <p:spPr>
+          <a:xfrm>
+            <a:off x="566928" y="4800600"/>
             <a:ext cx="11027664" cy="731520"/>
           </a:xfrm>
           <a:prstGeom prst="rect">
@@ -17921,7 +22563,7 @@
                 <a:ea typeface="Calibri" pitchFamily="34" charset="-122"/>
                 <a:cs typeface="Calibri" pitchFamily="34" charset="-120"/>
               </a:rPr>
-              <a:t>El orden importa: los motores 1 y 2 producen pipeline en semanas con casi cero presupuesto. Los motores 3 y 4 son los que convierten ese pipeline en 10x, pero tardan meses en madurar.</a:t>
+              <a:t>Los motores 1, 2 y 3 producen pipeline en semanas con muy poco presupuesto. Los motores 4 y 5 son los que convierten ese pipeline en 10x, pero tardan meses en madurar.</a:t>
             </a:r>
             <a:endParaRPr lang="en-US" sz="1400" dirty="0"/>
           </a:p>

--- a/docs/plan-crecimiento-datarev.pptx
+++ b/docs/plan-crecimiento-datarev.pptx
@@ -22,9 +22,10 @@
     <p:sldId id="270" r:id="rId16"/>
     <p:sldId id="271" r:id="rId17"/>
     <p:sldId id="272" r:id="rId18"/>
+    <p:sldId id="273" r:id="rId19"/>
   </p:sldIdLst>
   <p:notesMasterIdLst>
-    <p:notesMasterId r:id="rId19"/>
+    <p:notesMasterId r:id="rId20"/>
   </p:notesMasterIdLst>
   <p:sldSz cx="12192000" cy="6858000"/>
   <p:notesSz cx="6858000" cy="12192000"/>
@@ -1499,6 +1500,94 @@
             <a:fld id="{F7021451-1387-4CA6-816F-3879F97B5CBC}" type="slidenum">
               <a:rPr lang="en-US"/>
               <a:t>17</a:t>
+            </a:fld>
+            <a:endParaRPr lang="en-US"/>
+          </a:p>
+        </p:txBody>
+      </p:sp>
+    </p:spTree>
+    <p:extLst>
+      <p:ext uri="{BB962C8B-B14F-4D97-AF65-F5344CB8AC3E}">
+        <p14:creationId xmlns:p14="http://schemas.microsoft.com/office/powerpoint/2010/main" val="1024086991"/>
+      </p:ext>
+    </p:extLst>
+  </p:cSld>
+  <p:clrMapOvr>
+    <a:masterClrMapping/>
+  </p:clrMapOvr>
+</p:notes>
+</file>
+
+<file path=ppt/notesSlides/notesSlide18.xml><?xml version="1.0" encoding="utf-8"?>
+<p:notes xmlns:a="http://schemas.openxmlformats.org/drawingml/2006/main" xmlns:r="http://schemas.openxmlformats.org/officeDocument/2006/relationships" xmlns:p="http://schemas.openxmlformats.org/presentationml/2006/main">
+  <p:cSld>
+    <p:spTree>
+      <p:nvGrpSpPr>
+        <p:cNvPr id="1" name=""/>
+        <p:cNvGrpSpPr/>
+        <p:nvPr/>
+      </p:nvGrpSpPr>
+      <p:grpSpPr>
+        <a:xfrm>
+          <a:off x="0" y="0"/>
+          <a:ext cx="0" cy="0"/>
+          <a:chOff x="0" y="0"/>
+          <a:chExt cx="0" cy="0"/>
+        </a:xfrm>
+      </p:grpSpPr>
+      <p:sp>
+        <p:nvSpPr>
+          <p:cNvPr id="2" name="Slide Image Placeholder 1"/>
+          <p:cNvSpPr>
+            <a:spLocks noGrp="1" noRot="1" noChangeAspect="1"/>
+          </p:cNvSpPr>
+          <p:nvPr>
+            <p:ph type="sldImg"/>
+          </p:nvPr>
+        </p:nvSpPr>
+        <p:spPr/>
+      </p:sp>
+      <p:sp>
+        <p:nvSpPr>
+          <p:cNvPr id="3" name="Notes Placeholder 2"/>
+          <p:cNvSpPr>
+            <a:spLocks noGrp="1"/>
+          </p:cNvSpPr>
+          <p:nvPr>
+            <p:ph type="body" idx="1"/>
+          </p:nvPr>
+        </p:nvSpPr>
+        <p:spPr/>
+        <p:txBody>
+          <a:bodyPr/>
+          <a:lstStyle/>
+          <a:p>
+            <a:r>
+              <a:rPr lang="en-US" dirty="0"/>
+              <a:t/>
+            </a:r>
+            <a:endParaRPr lang="en-US" dirty="0"/>
+          </a:p>
+        </p:txBody>
+      </p:sp>
+      <p:sp>
+        <p:nvSpPr>
+          <p:cNvPr id="4" name="Slide Number Placeholder 3"/>
+          <p:cNvSpPr>
+            <a:spLocks noGrp="1"/>
+          </p:cNvSpPr>
+          <p:nvPr>
+            <p:ph type="sldNum" sz="quarter" idx="10"/>
+          </p:nvPr>
+        </p:nvSpPr>
+        <p:spPr/>
+        <p:txBody>
+          <a:bodyPr/>
+          <a:lstStyle/>
+          <a:p>
+            <a:fld id="{F7021451-1387-4CA6-816F-3879F97B5CBC}" type="slidenum">
+              <a:rPr lang="en-US"/>
+              <a:t>18</a:t>
             </a:fld>
             <a:endParaRPr lang="en-US"/>
           </a:p>
@@ -9509,9 +9598,90 @@
                 <a:ea typeface="Calibri" pitchFamily="34" charset="-122"/>
                 <a:cs typeface="Calibri" pitchFamily="34" charset="-120"/>
               </a:rPr>
-              <a:t>Qué cuesta, en dólares</a:t>
+              <a:t>Casi todo lo crucial es gratis o casi</a:t>
             </a:r>
             <a:endParaRPr lang="en-US" sz="3400" dirty="0"/>
+          </a:p>
+        </p:txBody>
+      </p:sp>
+      <p:sp>
+        <p:nvSpPr>
+          <p:cNvPr id="4" name="Text 2"/>
+          <p:cNvSpPr/>
+          <p:nvPr/>
+        </p:nvSpPr>
+        <p:spPr>
+          <a:xfrm>
+            <a:off x="566928" y="1371600"/>
+            <a:ext cx="11027664" cy="512064"/>
+          </a:xfrm>
+          <a:prstGeom prst="rect">
+            <a:avLst/>
+          </a:prstGeom>
+          <a:noFill/>
+          <a:ln/>
+        </p:spPr>
+        <p:txBody>
+          <a:bodyPr wrap="square" lIns="0" tIns="0" rIns="0" bIns="0" rtlCol="0" anchor="ctr"/>
+          <a:lstStyle/>
+          <a:p>
+            <a:pPr indent="0" marL="0">
+              <a:lnSpc>
+                <a:spcPts val="1900"/>
+              </a:lnSpc>
+              <a:buNone/>
+            </a:pPr>
+            <a:r>
+              <a:rPr lang="en-US" sz="1250" dirty="0">
+                <a:solidFill>
+                  <a:srgbClr val="AAB4D4"/>
+                </a:solidFill>
+                <a:latin typeface="Calibri" pitchFamily="34" charset="0"/>
+                <a:ea typeface="Calibri" pitchFamily="34" charset="-122"/>
+                <a:cs typeface="Calibri" pitchFamily="34" charset="-120"/>
+              </a:rPr>
+              <a:t>Son una consultora empezando: el plan no compromete gasto que no se pueda pagar con la facturación de hoy. Lo caro se deja en $0 hasta que haya tracción para pagarlo — no se elimina, se pospone.</a:t>
+            </a:r>
+            <a:endParaRPr lang="en-US" sz="1250" dirty="0"/>
+          </a:p>
+        </p:txBody>
+      </p:sp>
+      <p:sp>
+        <p:nvSpPr>
+          <p:cNvPr id="5" name="Text 3"/>
+          <p:cNvSpPr/>
+          <p:nvPr/>
+        </p:nvSpPr>
+        <p:spPr>
+          <a:xfrm>
+            <a:off x="566928" y="1956816"/>
+            <a:ext cx="5486400" cy="237744"/>
+          </a:xfrm>
+          <a:prstGeom prst="rect">
+            <a:avLst/>
+          </a:prstGeom>
+          <a:noFill/>
+          <a:ln/>
+        </p:spPr>
+        <p:txBody>
+          <a:bodyPr wrap="square" lIns="0" tIns="0" rIns="0" bIns="0" rtlCol="0" anchor="ctr"/>
+          <a:lstStyle/>
+          <a:p>
+            <a:pPr indent="0" marL="0">
+              <a:buNone/>
+            </a:pPr>
+            <a:r>
+              <a:rPr lang="en-US" sz="1050" b="1" spc="110" kern="0" dirty="0">
+                <a:solidFill>
+                  <a:srgbClr val="00C2FF"/>
+                </a:solidFill>
+                <a:latin typeface="Calibri" pitchFamily="34" charset="0"/>
+                <a:ea typeface="Calibri" pitchFamily="34" charset="-122"/>
+                <a:cs typeface="Calibri" pitchFamily="34" charset="-120"/>
+              </a:rPr>
+              <a:t>HOY · FASES 0–1 · LO CRUCIAL</a:t>
+            </a:r>
+            <a:endParaRPr lang="en-US" sz="1050" dirty="0"/>
           </a:p>
         </p:txBody>
       </p:sp>
@@ -9530,20 +9700,18 @@
           </p:nvPr>
         </p:nvGraphicFramePr>
         <p:xfrm>
-          <a:off x="566928" y="1554480"/>
-          <a:ext cx="11027664" cy="914400"/>
+          <a:off x="566928" y="2231136"/>
+          <a:ext cx="5349240" cy="914400"/>
         </p:xfrm>
         <a:graphic>
           <a:graphicData uri="http://schemas.openxmlformats.org/drawingml/2006/table">
             <a:tbl>
               <a:tblPr/>
               <a:tblGrid>
-                <a:gridCol w="4937760"/>
-                <a:gridCol w="1371600"/>
-                <a:gridCol w="2377440"/>
-                <a:gridCol w="2340864"/>
+                <a:gridCol w="3611880"/>
+                <a:gridCol w="1737360"/>
               </a:tblGrid>
-              <a:tr h="272491">
+              <a:tr h="329184">
                 <a:tc>
                   <a:txBody>
                     <a:bodyPr/>
@@ -9553,7 +9721,7 @@
                         <a:buNone/>
                       </a:pPr>
                       <a:r>
-                        <a:rPr lang="en-US" sz="1050" b="1" dirty="0">
+                        <a:rPr lang="en-US" sz="1000" b="1" dirty="0">
                           <a:solidFill>
                             <a:srgbClr val="AAB4D4"/>
                           </a:solidFill>
@@ -9563,14 +9731,1016 @@
                         </a:rPr>
                         <a:t>CONCEPTO</a:t>
                       </a:r>
-                      <a:endParaRPr lang="en-US" sz="1050" dirty="0">
+                      <a:endParaRPr lang="en-US" sz="1000" dirty="0">
                         <a:latin typeface="Calibri" charset="0"/>
                         <a:ea typeface="Calibri" charset="0"/>
                         <a:cs typeface="Calibri" charset="0"/>
                       </a:endParaRPr>
                     </a:p>
                   </a:txBody>
-                  <a:tcPr marL="76200" marR="76200" marT="38100" marB="38100" anchor="ctr">
+                  <a:tcPr marL="76200" marR="76200" marT="50800" marB="50800" anchor="ctr">
+                    <a:lnL w="12700" cap="flat" cmpd="sng" algn="ctr">
+                      <a:solidFill>
+                        <a:srgbClr val="172A5E"/>
+                      </a:solidFill>
+                      <a:prstDash val="solid"/>
+                      <a:round/>
+                      <a:headEnd type="none" w="med" len="med"/>
+                      <a:tailEnd type="none" w="med" len="med"/>
+                    </a:lnL>
+                    <a:lnR w="12700" cap="flat" cmpd="sng" algn="ctr">
+                      <a:solidFill>
+                        <a:srgbClr val="172A5E"/>
+                      </a:solidFill>
+                      <a:prstDash val="solid"/>
+                      <a:round/>
+                      <a:headEnd type="none" w="med" len="med"/>
+                      <a:tailEnd type="none" w="med" len="med"/>
+                    </a:lnR>
+                    <a:lnT w="12700" cap="flat" cmpd="sng" algn="ctr">
+                      <a:solidFill>
+                        <a:srgbClr val="172A5E"/>
+                      </a:solidFill>
+                      <a:prstDash val="solid"/>
+                      <a:round/>
+                      <a:headEnd type="none" w="med" len="med"/>
+                      <a:tailEnd type="none" w="med" len="med"/>
+                    </a:lnT>
+                    <a:lnB w="12700" cap="flat" cmpd="sng" algn="ctr">
+                      <a:solidFill>
+                        <a:srgbClr val="172A5E"/>
+                      </a:solidFill>
+                      <a:prstDash val="solid"/>
+                      <a:round/>
+                      <a:headEnd type="none" w="med" len="med"/>
+                      <a:tailEnd type="none" w="med" len="med"/>
+                    </a:lnB>
+                    <a:solidFill>
+                      <a:srgbClr val="0B1C57"/>
+                    </a:solidFill>
+                  </a:tcPr>
+                </a:tc>
+                <a:tc>
+                  <a:txBody>
+                    <a:bodyPr/>
+                    <a:lstStyle/>
+                    <a:p>
+                      <a:pPr indent="0" marL="0">
+                        <a:buNone/>
+                      </a:pPr>
+                      <a:r>
+                        <a:rPr lang="en-US" sz="1000" b="1" dirty="0">
+                          <a:solidFill>
+                            <a:srgbClr val="AAB4D4"/>
+                          </a:solidFill>
+                          <a:latin typeface="Calibri" pitchFamily="34" charset="0"/>
+                          <a:ea typeface="Calibri" pitchFamily="34" charset="-122"/>
+                          <a:cs typeface="Calibri" pitchFamily="34" charset="-120"/>
+                        </a:rPr>
+                        <a:t>COSTO</a:t>
+                      </a:r>
+                      <a:endParaRPr lang="en-US" sz="1000" dirty="0">
+                        <a:latin typeface="Calibri" charset="0"/>
+                        <a:ea typeface="Calibri" charset="0"/>
+                        <a:cs typeface="Calibri" charset="0"/>
+                      </a:endParaRPr>
+                    </a:p>
+                  </a:txBody>
+                  <a:tcPr marL="76200" marR="76200" marT="50800" marB="50800" anchor="ctr">
+                    <a:lnL w="12700" cap="flat" cmpd="sng" algn="ctr">
+                      <a:solidFill>
+                        <a:srgbClr val="172A5E"/>
+                      </a:solidFill>
+                      <a:prstDash val="solid"/>
+                      <a:round/>
+                      <a:headEnd type="none" w="med" len="med"/>
+                      <a:tailEnd type="none" w="med" len="med"/>
+                    </a:lnL>
+                    <a:lnR w="12700" cap="flat" cmpd="sng" algn="ctr">
+                      <a:solidFill>
+                        <a:srgbClr val="172A5E"/>
+                      </a:solidFill>
+                      <a:prstDash val="solid"/>
+                      <a:round/>
+                      <a:headEnd type="none" w="med" len="med"/>
+                      <a:tailEnd type="none" w="med" len="med"/>
+                    </a:lnR>
+                    <a:lnT w="12700" cap="flat" cmpd="sng" algn="ctr">
+                      <a:solidFill>
+                        <a:srgbClr val="172A5E"/>
+                      </a:solidFill>
+                      <a:prstDash val="solid"/>
+                      <a:round/>
+                      <a:headEnd type="none" w="med" len="med"/>
+                      <a:tailEnd type="none" w="med" len="med"/>
+                    </a:lnT>
+                    <a:lnB w="12700" cap="flat" cmpd="sng" algn="ctr">
+                      <a:solidFill>
+                        <a:srgbClr val="172A5E"/>
+                      </a:solidFill>
+                      <a:prstDash val="solid"/>
+                      <a:round/>
+                      <a:headEnd type="none" w="med" len="med"/>
+                      <a:tailEnd type="none" w="med" len="med"/>
+                    </a:lnB>
+                    <a:solidFill>
+                      <a:srgbClr val="0B1C57"/>
+                    </a:solidFill>
+                  </a:tcPr>
+                </a:tc>
+              </a:tr>
+              <a:tr h="329184">
+                <a:tc>
+                  <a:txBody>
+                    <a:bodyPr/>
+                    <a:lstStyle/>
+                    <a:p>
+                      <a:pPr indent="0" marL="0">
+                        <a:buNone/>
+                      </a:pPr>
+                      <a:r>
+                        <a:rPr lang="en-US" sz="1000" dirty="0">
+                          <a:solidFill>
+                            <a:srgbClr val="AAB4D4"/>
+                          </a:solidFill>
+                          <a:latin typeface="Calibri" pitchFamily="34" charset="0"/>
+                          <a:ea typeface="Calibri" pitchFamily="34" charset="-122"/>
+                          <a:cs typeface="Calibri" pitchFamily="34" charset="-120"/>
+                        </a:rPr>
+                        <a:t>CRM (tier gratis: HubSpot o Notion)</a:t>
+                      </a:r>
+                      <a:endParaRPr lang="en-US" sz="1000" dirty="0">
+                        <a:latin typeface="Calibri" charset="0"/>
+                        <a:ea typeface="Calibri" charset="0"/>
+                        <a:cs typeface="Calibri" charset="0"/>
+                      </a:endParaRPr>
+                    </a:p>
+                  </a:txBody>
+                  <a:tcPr marL="76200" marR="76200" marT="50800" marB="50800" anchor="ctr">
+                    <a:lnL w="12700" cap="flat" cmpd="sng" algn="ctr">
+                      <a:solidFill>
+                        <a:srgbClr val="172A5E"/>
+                      </a:solidFill>
+                      <a:prstDash val="solid"/>
+                      <a:round/>
+                      <a:headEnd type="none" w="med" len="med"/>
+                      <a:tailEnd type="none" w="med" len="med"/>
+                    </a:lnL>
+                    <a:lnR w="12700" cap="flat" cmpd="sng" algn="ctr">
+                      <a:solidFill>
+                        <a:srgbClr val="172A5E"/>
+                      </a:solidFill>
+                      <a:prstDash val="solid"/>
+                      <a:round/>
+                      <a:headEnd type="none" w="med" len="med"/>
+                      <a:tailEnd type="none" w="med" len="med"/>
+                    </a:lnR>
+                    <a:lnT w="12700" cap="flat" cmpd="sng" algn="ctr">
+                      <a:solidFill>
+                        <a:srgbClr val="172A5E"/>
+                      </a:solidFill>
+                      <a:prstDash val="solid"/>
+                      <a:round/>
+                      <a:headEnd type="none" w="med" len="med"/>
+                      <a:tailEnd type="none" w="med" len="med"/>
+                    </a:lnT>
+                    <a:lnB w="12700" cap="flat" cmpd="sng" algn="ctr">
+                      <a:solidFill>
+                        <a:srgbClr val="172A5E"/>
+                      </a:solidFill>
+                      <a:prstDash val="solid"/>
+                      <a:round/>
+                      <a:headEnd type="none" w="med" len="med"/>
+                      <a:tailEnd type="none" w="med" len="med"/>
+                    </a:lnB>
+                    <a:solidFill>
+                      <a:srgbClr val="0B1C57"/>
+                    </a:solidFill>
+                  </a:tcPr>
+                </a:tc>
+                <a:tc>
+                  <a:txBody>
+                    <a:bodyPr/>
+                    <a:lstStyle/>
+                    <a:p>
+                      <a:pPr indent="0" marL="0">
+                        <a:buNone/>
+                      </a:pPr>
+                      <a:r>
+                        <a:rPr lang="en-US" sz="1000" dirty="0">
+                          <a:solidFill>
+                            <a:srgbClr val="AAB4D4"/>
+                          </a:solidFill>
+                          <a:latin typeface="Calibri" pitchFamily="34" charset="0"/>
+                          <a:ea typeface="Calibri" pitchFamily="34" charset="-122"/>
+                          <a:cs typeface="Calibri" pitchFamily="34" charset="-120"/>
+                        </a:rPr>
+                        <a:t>$0</a:t>
+                      </a:r>
+                      <a:endParaRPr lang="en-US" sz="1000" dirty="0">
+                        <a:latin typeface="Calibri" charset="0"/>
+                        <a:ea typeface="Calibri" charset="0"/>
+                        <a:cs typeface="Calibri" charset="0"/>
+                      </a:endParaRPr>
+                    </a:p>
+                  </a:txBody>
+                  <a:tcPr marL="76200" marR="76200" marT="50800" marB="50800" anchor="ctr">
+                    <a:lnL w="12700" cap="flat" cmpd="sng" algn="ctr">
+                      <a:solidFill>
+                        <a:srgbClr val="172A5E"/>
+                      </a:solidFill>
+                      <a:prstDash val="solid"/>
+                      <a:round/>
+                      <a:headEnd type="none" w="med" len="med"/>
+                      <a:tailEnd type="none" w="med" len="med"/>
+                    </a:lnL>
+                    <a:lnR w="12700" cap="flat" cmpd="sng" algn="ctr">
+                      <a:solidFill>
+                        <a:srgbClr val="172A5E"/>
+                      </a:solidFill>
+                      <a:prstDash val="solid"/>
+                      <a:round/>
+                      <a:headEnd type="none" w="med" len="med"/>
+                      <a:tailEnd type="none" w="med" len="med"/>
+                    </a:lnR>
+                    <a:lnT w="12700" cap="flat" cmpd="sng" algn="ctr">
+                      <a:solidFill>
+                        <a:srgbClr val="172A5E"/>
+                      </a:solidFill>
+                      <a:prstDash val="solid"/>
+                      <a:round/>
+                      <a:headEnd type="none" w="med" len="med"/>
+                      <a:tailEnd type="none" w="med" len="med"/>
+                    </a:lnT>
+                    <a:lnB w="12700" cap="flat" cmpd="sng" algn="ctr">
+                      <a:solidFill>
+                        <a:srgbClr val="172A5E"/>
+                      </a:solidFill>
+                      <a:prstDash val="solid"/>
+                      <a:round/>
+                      <a:headEnd type="none" w="med" len="med"/>
+                      <a:tailEnd type="none" w="med" len="med"/>
+                    </a:lnB>
+                    <a:solidFill>
+                      <a:srgbClr val="0B1C57"/>
+                    </a:solidFill>
+                  </a:tcPr>
+                </a:tc>
+              </a:tr>
+              <a:tr h="329184">
+                <a:tc>
+                  <a:txBody>
+                    <a:bodyPr/>
+                    <a:lstStyle/>
+                    <a:p>
+                      <a:pPr indent="0" marL="0">
+                        <a:buNone/>
+                      </a:pPr>
+                      <a:r>
+                        <a:rPr lang="en-US" sz="1000" dirty="0">
+                          <a:solidFill>
+                            <a:srgbClr val="AAB4D4"/>
+                          </a:solidFill>
+                          <a:latin typeface="Calibri" pitchFamily="34" charset="0"/>
+                          <a:ea typeface="Calibri" pitchFamily="34" charset="-122"/>
+                          <a:cs typeface="Calibri" pitchFamily="34" charset="-120"/>
+                        </a:rPr>
+                        <a:t>Registro APN, MAICPP, Google Partner Network</a:t>
+                      </a:r>
+                      <a:endParaRPr lang="en-US" sz="1000" dirty="0">
+                        <a:latin typeface="Calibri" charset="0"/>
+                        <a:ea typeface="Calibri" charset="0"/>
+                        <a:cs typeface="Calibri" charset="0"/>
+                      </a:endParaRPr>
+                    </a:p>
+                  </a:txBody>
+                  <a:tcPr marL="76200" marR="76200" marT="50800" marB="50800" anchor="ctr">
+                    <a:lnL w="12700" cap="flat" cmpd="sng" algn="ctr">
+                      <a:solidFill>
+                        <a:srgbClr val="172A5E"/>
+                      </a:solidFill>
+                      <a:prstDash val="solid"/>
+                      <a:round/>
+                      <a:headEnd type="none" w="med" len="med"/>
+                      <a:tailEnd type="none" w="med" len="med"/>
+                    </a:lnL>
+                    <a:lnR w="12700" cap="flat" cmpd="sng" algn="ctr">
+                      <a:solidFill>
+                        <a:srgbClr val="172A5E"/>
+                      </a:solidFill>
+                      <a:prstDash val="solid"/>
+                      <a:round/>
+                      <a:headEnd type="none" w="med" len="med"/>
+                      <a:tailEnd type="none" w="med" len="med"/>
+                    </a:lnR>
+                    <a:lnT w="12700" cap="flat" cmpd="sng" algn="ctr">
+                      <a:solidFill>
+                        <a:srgbClr val="172A5E"/>
+                      </a:solidFill>
+                      <a:prstDash val="solid"/>
+                      <a:round/>
+                      <a:headEnd type="none" w="med" len="med"/>
+                      <a:tailEnd type="none" w="med" len="med"/>
+                    </a:lnT>
+                    <a:lnB w="12700" cap="flat" cmpd="sng" algn="ctr">
+                      <a:solidFill>
+                        <a:srgbClr val="172A5E"/>
+                      </a:solidFill>
+                      <a:prstDash val="solid"/>
+                      <a:round/>
+                      <a:headEnd type="none" w="med" len="med"/>
+                      <a:tailEnd type="none" w="med" len="med"/>
+                    </a:lnB>
+                    <a:solidFill>
+                      <a:srgbClr val="0B1C57"/>
+                    </a:solidFill>
+                  </a:tcPr>
+                </a:tc>
+                <a:tc>
+                  <a:txBody>
+                    <a:bodyPr/>
+                    <a:lstStyle/>
+                    <a:p>
+                      <a:pPr indent="0" marL="0">
+                        <a:buNone/>
+                      </a:pPr>
+                      <a:r>
+                        <a:rPr lang="en-US" sz="1000" dirty="0">
+                          <a:solidFill>
+                            <a:srgbClr val="AAB4D4"/>
+                          </a:solidFill>
+                          <a:latin typeface="Calibri" pitchFamily="34" charset="0"/>
+                          <a:ea typeface="Calibri" pitchFamily="34" charset="-122"/>
+                          <a:cs typeface="Calibri" pitchFamily="34" charset="-120"/>
+                        </a:rPr>
+                        <a:t>$0</a:t>
+                      </a:r>
+                      <a:endParaRPr lang="en-US" sz="1000" dirty="0">
+                        <a:latin typeface="Calibri" charset="0"/>
+                        <a:ea typeface="Calibri" charset="0"/>
+                        <a:cs typeface="Calibri" charset="0"/>
+                      </a:endParaRPr>
+                    </a:p>
+                  </a:txBody>
+                  <a:tcPr marL="76200" marR="76200" marT="50800" marB="50800" anchor="ctr">
+                    <a:lnL w="12700" cap="flat" cmpd="sng" algn="ctr">
+                      <a:solidFill>
+                        <a:srgbClr val="172A5E"/>
+                      </a:solidFill>
+                      <a:prstDash val="solid"/>
+                      <a:round/>
+                      <a:headEnd type="none" w="med" len="med"/>
+                      <a:tailEnd type="none" w="med" len="med"/>
+                    </a:lnL>
+                    <a:lnR w="12700" cap="flat" cmpd="sng" algn="ctr">
+                      <a:solidFill>
+                        <a:srgbClr val="172A5E"/>
+                      </a:solidFill>
+                      <a:prstDash val="solid"/>
+                      <a:round/>
+                      <a:headEnd type="none" w="med" len="med"/>
+                      <a:tailEnd type="none" w="med" len="med"/>
+                    </a:lnR>
+                    <a:lnT w="12700" cap="flat" cmpd="sng" algn="ctr">
+                      <a:solidFill>
+                        <a:srgbClr val="172A5E"/>
+                      </a:solidFill>
+                      <a:prstDash val="solid"/>
+                      <a:round/>
+                      <a:headEnd type="none" w="med" len="med"/>
+                      <a:tailEnd type="none" w="med" len="med"/>
+                    </a:lnT>
+                    <a:lnB w="12700" cap="flat" cmpd="sng" algn="ctr">
+                      <a:solidFill>
+                        <a:srgbClr val="172A5E"/>
+                      </a:solidFill>
+                      <a:prstDash val="solid"/>
+                      <a:round/>
+                      <a:headEnd type="none" w="med" len="med"/>
+                      <a:tailEnd type="none" w="med" len="med"/>
+                    </a:lnB>
+                    <a:solidFill>
+                      <a:srgbClr val="0B1C57"/>
+                    </a:solidFill>
+                  </a:tcPr>
+                </a:tc>
+              </a:tr>
+              <a:tr h="329184">
+                <a:tc>
+                  <a:txBody>
+                    <a:bodyPr/>
+                    <a:lstStyle/>
+                    <a:p>
+                      <a:pPr indent="0" marL="0">
+                        <a:buNone/>
+                      </a:pPr>
+                      <a:r>
+                        <a:rPr lang="en-US" sz="1000" dirty="0">
+                          <a:solidFill>
+                            <a:srgbClr val="AAB4D4"/>
+                          </a:solidFill>
+                          <a:latin typeface="Calibri" pitchFamily="34" charset="0"/>
+                          <a:ea typeface="Calibri" pitchFamily="34" charset="-122"/>
+                          <a:cs typeface="Calibri" pitchFamily="34" charset="-120"/>
+                        </a:rPr>
+                        <a:t>Casos, ofertas y contenido LinkedIn (trabajo interno)</a:t>
+                      </a:r>
+                      <a:endParaRPr lang="en-US" sz="1000" dirty="0">
+                        <a:latin typeface="Calibri" charset="0"/>
+                        <a:ea typeface="Calibri" charset="0"/>
+                        <a:cs typeface="Calibri" charset="0"/>
+                      </a:endParaRPr>
+                    </a:p>
+                  </a:txBody>
+                  <a:tcPr marL="76200" marR="76200" marT="50800" marB="50800" anchor="ctr">
+                    <a:lnL w="12700" cap="flat" cmpd="sng" algn="ctr">
+                      <a:solidFill>
+                        <a:srgbClr val="172A5E"/>
+                      </a:solidFill>
+                      <a:prstDash val="solid"/>
+                      <a:round/>
+                      <a:headEnd type="none" w="med" len="med"/>
+                      <a:tailEnd type="none" w="med" len="med"/>
+                    </a:lnL>
+                    <a:lnR w="12700" cap="flat" cmpd="sng" algn="ctr">
+                      <a:solidFill>
+                        <a:srgbClr val="172A5E"/>
+                      </a:solidFill>
+                      <a:prstDash val="solid"/>
+                      <a:round/>
+                      <a:headEnd type="none" w="med" len="med"/>
+                      <a:tailEnd type="none" w="med" len="med"/>
+                    </a:lnR>
+                    <a:lnT w="12700" cap="flat" cmpd="sng" algn="ctr">
+                      <a:solidFill>
+                        <a:srgbClr val="172A5E"/>
+                      </a:solidFill>
+                      <a:prstDash val="solid"/>
+                      <a:round/>
+                      <a:headEnd type="none" w="med" len="med"/>
+                      <a:tailEnd type="none" w="med" len="med"/>
+                    </a:lnT>
+                    <a:lnB w="12700" cap="flat" cmpd="sng" algn="ctr">
+                      <a:solidFill>
+                        <a:srgbClr val="172A5E"/>
+                      </a:solidFill>
+                      <a:prstDash val="solid"/>
+                      <a:round/>
+                      <a:headEnd type="none" w="med" len="med"/>
+                      <a:tailEnd type="none" w="med" len="med"/>
+                    </a:lnB>
+                    <a:solidFill>
+                      <a:srgbClr val="0B1C57"/>
+                    </a:solidFill>
+                  </a:tcPr>
+                </a:tc>
+                <a:tc>
+                  <a:txBody>
+                    <a:bodyPr/>
+                    <a:lstStyle/>
+                    <a:p>
+                      <a:pPr indent="0" marL="0">
+                        <a:buNone/>
+                      </a:pPr>
+                      <a:r>
+                        <a:rPr lang="en-US" sz="1000" dirty="0">
+                          <a:solidFill>
+                            <a:srgbClr val="AAB4D4"/>
+                          </a:solidFill>
+                          <a:latin typeface="Calibri" pitchFamily="34" charset="0"/>
+                          <a:ea typeface="Calibri" pitchFamily="34" charset="-122"/>
+                          <a:cs typeface="Calibri" pitchFamily="34" charset="-120"/>
+                        </a:rPr>
+                        <a:t>$0</a:t>
+                      </a:r>
+                      <a:endParaRPr lang="en-US" sz="1000" dirty="0">
+                        <a:latin typeface="Calibri" charset="0"/>
+                        <a:ea typeface="Calibri" charset="0"/>
+                        <a:cs typeface="Calibri" charset="0"/>
+                      </a:endParaRPr>
+                    </a:p>
+                  </a:txBody>
+                  <a:tcPr marL="76200" marR="76200" marT="50800" marB="50800" anchor="ctr">
+                    <a:lnL w="12700" cap="flat" cmpd="sng" algn="ctr">
+                      <a:solidFill>
+                        <a:srgbClr val="172A5E"/>
+                      </a:solidFill>
+                      <a:prstDash val="solid"/>
+                      <a:round/>
+                      <a:headEnd type="none" w="med" len="med"/>
+                      <a:tailEnd type="none" w="med" len="med"/>
+                    </a:lnL>
+                    <a:lnR w="12700" cap="flat" cmpd="sng" algn="ctr">
+                      <a:solidFill>
+                        <a:srgbClr val="172A5E"/>
+                      </a:solidFill>
+                      <a:prstDash val="solid"/>
+                      <a:round/>
+                      <a:headEnd type="none" w="med" len="med"/>
+                      <a:tailEnd type="none" w="med" len="med"/>
+                    </a:lnR>
+                    <a:lnT w="12700" cap="flat" cmpd="sng" algn="ctr">
+                      <a:solidFill>
+                        <a:srgbClr val="172A5E"/>
+                      </a:solidFill>
+                      <a:prstDash val="solid"/>
+                      <a:round/>
+                      <a:headEnd type="none" w="med" len="med"/>
+                      <a:tailEnd type="none" w="med" len="med"/>
+                    </a:lnT>
+                    <a:lnB w="12700" cap="flat" cmpd="sng" algn="ctr">
+                      <a:solidFill>
+                        <a:srgbClr val="172A5E"/>
+                      </a:solidFill>
+                      <a:prstDash val="solid"/>
+                      <a:round/>
+                      <a:headEnd type="none" w="med" len="med"/>
+                      <a:tailEnd type="none" w="med" len="med"/>
+                    </a:lnB>
+                    <a:solidFill>
+                      <a:srgbClr val="0B1C57"/>
+                    </a:solidFill>
+                  </a:tcPr>
+                </a:tc>
+              </a:tr>
+              <a:tr h="329184">
+                <a:tc>
+                  <a:txBody>
+                    <a:bodyPr/>
+                    <a:lstStyle/>
+                    <a:p>
+                      <a:pPr indent="0" marL="0">
+                        <a:buNone/>
+                      </a:pPr>
+                      <a:r>
+                        <a:rPr lang="en-US" sz="1000" dirty="0">
+                          <a:solidFill>
+                            <a:srgbClr val="AAB4D4"/>
+                          </a:solidFill>
+                          <a:latin typeface="Calibri" pitchFamily="34" charset="0"/>
+                          <a:ea typeface="Calibri" pitchFamily="34" charset="-122"/>
+                          <a:cs typeface="Calibri" pitchFamily="34" charset="-120"/>
+                        </a:rPr>
+                        <a:t>Estudio de madurez: usa el diagnóstico ya construido</a:t>
+                      </a:r>
+                      <a:endParaRPr lang="en-US" sz="1000" dirty="0">
+                        <a:latin typeface="Calibri" charset="0"/>
+                        <a:ea typeface="Calibri" charset="0"/>
+                        <a:cs typeface="Calibri" charset="0"/>
+                      </a:endParaRPr>
+                    </a:p>
+                  </a:txBody>
+                  <a:tcPr marL="76200" marR="76200" marT="50800" marB="50800" anchor="ctr">
+                    <a:lnL w="12700" cap="flat" cmpd="sng" algn="ctr">
+                      <a:solidFill>
+                        <a:srgbClr val="172A5E"/>
+                      </a:solidFill>
+                      <a:prstDash val="solid"/>
+                      <a:round/>
+                      <a:headEnd type="none" w="med" len="med"/>
+                      <a:tailEnd type="none" w="med" len="med"/>
+                    </a:lnL>
+                    <a:lnR w="12700" cap="flat" cmpd="sng" algn="ctr">
+                      <a:solidFill>
+                        <a:srgbClr val="172A5E"/>
+                      </a:solidFill>
+                      <a:prstDash val="solid"/>
+                      <a:round/>
+                      <a:headEnd type="none" w="med" len="med"/>
+                      <a:tailEnd type="none" w="med" len="med"/>
+                    </a:lnR>
+                    <a:lnT w="12700" cap="flat" cmpd="sng" algn="ctr">
+                      <a:solidFill>
+                        <a:srgbClr val="172A5E"/>
+                      </a:solidFill>
+                      <a:prstDash val="solid"/>
+                      <a:round/>
+                      <a:headEnd type="none" w="med" len="med"/>
+                      <a:tailEnd type="none" w="med" len="med"/>
+                    </a:lnT>
+                    <a:lnB w="12700" cap="flat" cmpd="sng" algn="ctr">
+                      <a:solidFill>
+                        <a:srgbClr val="172A5E"/>
+                      </a:solidFill>
+                      <a:prstDash val="solid"/>
+                      <a:round/>
+                      <a:headEnd type="none" w="med" len="med"/>
+                      <a:tailEnd type="none" w="med" len="med"/>
+                    </a:lnB>
+                    <a:solidFill>
+                      <a:srgbClr val="0B1C57"/>
+                    </a:solidFill>
+                  </a:tcPr>
+                </a:tc>
+                <a:tc>
+                  <a:txBody>
+                    <a:bodyPr/>
+                    <a:lstStyle/>
+                    <a:p>
+                      <a:pPr indent="0" marL="0">
+                        <a:buNone/>
+                      </a:pPr>
+                      <a:r>
+                        <a:rPr lang="en-US" sz="1000" dirty="0">
+                          <a:solidFill>
+                            <a:srgbClr val="AAB4D4"/>
+                          </a:solidFill>
+                          <a:latin typeface="Calibri" pitchFamily="34" charset="0"/>
+                          <a:ea typeface="Calibri" pitchFamily="34" charset="-122"/>
+                          <a:cs typeface="Calibri" pitchFamily="34" charset="-120"/>
+                        </a:rPr>
+                        <a:t>$0</a:t>
+                      </a:r>
+                      <a:endParaRPr lang="en-US" sz="1000" dirty="0">
+                        <a:latin typeface="Calibri" charset="0"/>
+                        <a:ea typeface="Calibri" charset="0"/>
+                        <a:cs typeface="Calibri" charset="0"/>
+                      </a:endParaRPr>
+                    </a:p>
+                  </a:txBody>
+                  <a:tcPr marL="76200" marR="76200" marT="50800" marB="50800" anchor="ctr">
+                    <a:lnL w="12700" cap="flat" cmpd="sng" algn="ctr">
+                      <a:solidFill>
+                        <a:srgbClr val="172A5E"/>
+                      </a:solidFill>
+                      <a:prstDash val="solid"/>
+                      <a:round/>
+                      <a:headEnd type="none" w="med" len="med"/>
+                      <a:tailEnd type="none" w="med" len="med"/>
+                    </a:lnL>
+                    <a:lnR w="12700" cap="flat" cmpd="sng" algn="ctr">
+                      <a:solidFill>
+                        <a:srgbClr val="172A5E"/>
+                      </a:solidFill>
+                      <a:prstDash val="solid"/>
+                      <a:round/>
+                      <a:headEnd type="none" w="med" len="med"/>
+                      <a:tailEnd type="none" w="med" len="med"/>
+                    </a:lnR>
+                    <a:lnT w="12700" cap="flat" cmpd="sng" algn="ctr">
+                      <a:solidFill>
+                        <a:srgbClr val="172A5E"/>
+                      </a:solidFill>
+                      <a:prstDash val="solid"/>
+                      <a:round/>
+                      <a:headEnd type="none" w="med" len="med"/>
+                      <a:tailEnd type="none" w="med" len="med"/>
+                    </a:lnT>
+                    <a:lnB w="12700" cap="flat" cmpd="sng" algn="ctr">
+                      <a:solidFill>
+                        <a:srgbClr val="172A5E"/>
+                      </a:solidFill>
+                      <a:prstDash val="solid"/>
+                      <a:round/>
+                      <a:headEnd type="none" w="med" len="med"/>
+                      <a:tailEnd type="none" w="med" len="med"/>
+                    </a:lnB>
+                    <a:solidFill>
+                      <a:srgbClr val="0B1C57"/>
+                    </a:solidFill>
+                  </a:tcPr>
+                </a:tc>
+              </a:tr>
+              <a:tr h="329184">
+                <a:tc>
+                  <a:txBody>
+                    <a:bodyPr/>
+                    <a:lstStyle/>
+                    <a:p>
+                      <a:pPr indent="0" marL="0">
+                        <a:buNone/>
+                      </a:pPr>
+                      <a:r>
+                        <a:rPr lang="en-US" sz="1000" dirty="0">
+                          <a:solidFill>
+                            <a:srgbClr val="AAB4D4"/>
+                          </a:solidFill>
+                          <a:latin typeface="Calibri" pitchFamily="34" charset="0"/>
+                          <a:ea typeface="Calibri" pitchFamily="34" charset="-122"/>
+                          <a:cs typeface="Calibri" pitchFamily="34" charset="-120"/>
+                        </a:rPr>
+                        <a:t>4 certificaciones fundacionales (2 AWS + 2 Azure)</a:t>
+                      </a:r>
+                      <a:endParaRPr lang="en-US" sz="1000" dirty="0">
+                        <a:latin typeface="Calibri" charset="0"/>
+                        <a:ea typeface="Calibri" charset="0"/>
+                        <a:cs typeface="Calibri" charset="0"/>
+                      </a:endParaRPr>
+                    </a:p>
+                  </a:txBody>
+                  <a:tcPr marL="76200" marR="76200" marT="50800" marB="50800" anchor="ctr">
+                    <a:lnL w="12700" cap="flat" cmpd="sng" algn="ctr">
+                      <a:solidFill>
+                        <a:srgbClr val="172A5E"/>
+                      </a:solidFill>
+                      <a:prstDash val="solid"/>
+                      <a:round/>
+                      <a:headEnd type="none" w="med" len="med"/>
+                      <a:tailEnd type="none" w="med" len="med"/>
+                    </a:lnL>
+                    <a:lnR w="12700" cap="flat" cmpd="sng" algn="ctr">
+                      <a:solidFill>
+                        <a:srgbClr val="172A5E"/>
+                      </a:solidFill>
+                      <a:prstDash val="solid"/>
+                      <a:round/>
+                      <a:headEnd type="none" w="med" len="med"/>
+                      <a:tailEnd type="none" w="med" len="med"/>
+                    </a:lnR>
+                    <a:lnT w="12700" cap="flat" cmpd="sng" algn="ctr">
+                      <a:solidFill>
+                        <a:srgbClr val="172A5E"/>
+                      </a:solidFill>
+                      <a:prstDash val="solid"/>
+                      <a:round/>
+                      <a:headEnd type="none" w="med" len="med"/>
+                      <a:tailEnd type="none" w="med" len="med"/>
+                    </a:lnT>
+                    <a:lnB w="12700" cap="flat" cmpd="sng" algn="ctr">
+                      <a:solidFill>
+                        <a:srgbClr val="172A5E"/>
+                      </a:solidFill>
+                      <a:prstDash val="solid"/>
+                      <a:round/>
+                      <a:headEnd type="none" w="med" len="med"/>
+                      <a:tailEnd type="none" w="med" len="med"/>
+                    </a:lnB>
+                    <a:solidFill>
+                      <a:srgbClr val="0B1C57"/>
+                    </a:solidFill>
+                  </a:tcPr>
+                </a:tc>
+                <a:tc>
+                  <a:txBody>
+                    <a:bodyPr/>
+                    <a:lstStyle/>
+                    <a:p>
+                      <a:pPr indent="0" marL="0">
+                        <a:buNone/>
+                      </a:pPr>
+                      <a:r>
+                        <a:rPr lang="en-US" sz="1000" dirty="0">
+                          <a:solidFill>
+                            <a:srgbClr val="AAB4D4"/>
+                          </a:solidFill>
+                          <a:latin typeface="Calibri" pitchFamily="34" charset="0"/>
+                          <a:ea typeface="Calibri" pitchFamily="34" charset="-122"/>
+                          <a:cs typeface="Calibri" pitchFamily="34" charset="-120"/>
+                        </a:rPr>
+                        <a:t>660–1,320 · única vez</a:t>
+                      </a:r>
+                      <a:endParaRPr lang="en-US" sz="1000" dirty="0">
+                        <a:latin typeface="Calibri" charset="0"/>
+                        <a:ea typeface="Calibri" charset="0"/>
+                        <a:cs typeface="Calibri" charset="0"/>
+                      </a:endParaRPr>
+                    </a:p>
+                  </a:txBody>
+                  <a:tcPr marL="76200" marR="76200" marT="50800" marB="50800" anchor="ctr">
+                    <a:lnL w="12700" cap="flat" cmpd="sng" algn="ctr">
+                      <a:solidFill>
+                        <a:srgbClr val="172A5E"/>
+                      </a:solidFill>
+                      <a:prstDash val="solid"/>
+                      <a:round/>
+                      <a:headEnd type="none" w="med" len="med"/>
+                      <a:tailEnd type="none" w="med" len="med"/>
+                    </a:lnL>
+                    <a:lnR w="12700" cap="flat" cmpd="sng" algn="ctr">
+                      <a:solidFill>
+                        <a:srgbClr val="172A5E"/>
+                      </a:solidFill>
+                      <a:prstDash val="solid"/>
+                      <a:round/>
+                      <a:headEnd type="none" w="med" len="med"/>
+                      <a:tailEnd type="none" w="med" len="med"/>
+                    </a:lnR>
+                    <a:lnT w="12700" cap="flat" cmpd="sng" algn="ctr">
+                      <a:solidFill>
+                        <a:srgbClr val="172A5E"/>
+                      </a:solidFill>
+                      <a:prstDash val="solid"/>
+                      <a:round/>
+                      <a:headEnd type="none" w="med" len="med"/>
+                      <a:tailEnd type="none" w="med" len="med"/>
+                    </a:lnT>
+                    <a:lnB w="12700" cap="flat" cmpd="sng" algn="ctr">
+                      <a:solidFill>
+                        <a:srgbClr val="172A5E"/>
+                      </a:solidFill>
+                      <a:prstDash val="solid"/>
+                      <a:round/>
+                      <a:headEnd type="none" w="med" len="med"/>
+                      <a:tailEnd type="none" w="med" len="med"/>
+                    </a:lnB>
+                    <a:solidFill>
+                      <a:srgbClr val="0B1C57"/>
+                    </a:solidFill>
+                  </a:tcPr>
+                </a:tc>
+              </a:tr>
+            </a:tbl>
+          </a:graphicData>
+        </a:graphic>
+      </p:graphicFrame>
+      <p:sp>
+        <p:nvSpPr>
+          <p:cNvPr id="7" name="Shape 4"/>
+          <p:cNvSpPr/>
+          <p:nvPr/>
+        </p:nvSpPr>
+        <p:spPr>
+          <a:xfrm>
+            <a:off x="566928" y="4261104"/>
+            <a:ext cx="5349240" cy="786384"/>
+          </a:xfrm>
+          <a:prstGeom prst="roundRect">
+            <a:avLst>
+              <a:gd name="adj" fmla="val 11628"/>
+            </a:avLst>
+          </a:prstGeom>
+          <a:solidFill>
+            <a:srgbClr val="0B1C57"/>
+          </a:solidFill>
+          <a:ln w="15875">
+            <a:solidFill>
+              <a:srgbClr val="00C2FF"/>
+            </a:solidFill>
+            <a:prstDash val="solid"/>
+          </a:ln>
+        </p:spPr>
+      </p:sp>
+      <p:sp>
+        <p:nvSpPr>
+          <p:cNvPr id="8" name="Text 5"/>
+          <p:cNvSpPr/>
+          <p:nvPr/>
+        </p:nvSpPr>
+        <p:spPr>
+          <a:xfrm>
+            <a:off x="768096" y="4370832"/>
+            <a:ext cx="2743200" cy="365760"/>
+          </a:xfrm>
+          <a:prstGeom prst="rect">
+            <a:avLst/>
+          </a:prstGeom>
+          <a:noFill/>
+          <a:ln/>
+        </p:spPr>
+        <p:txBody>
+          <a:bodyPr wrap="square" lIns="0" tIns="0" rIns="0" bIns="0" rtlCol="0" anchor="ctr"/>
+          <a:lstStyle/>
+          <a:p>
+            <a:pPr indent="0" marL="0">
+              <a:buNone/>
+            </a:pPr>
+            <a:r>
+              <a:rPr lang="en-US" sz="2200" b="1" dirty="0">
+                <a:solidFill>
+                  <a:srgbClr val="00C2FF"/>
+                </a:solidFill>
+                <a:latin typeface="Calibri" pitchFamily="34" charset="0"/>
+                <a:ea typeface="Calibri" pitchFamily="34" charset="-122"/>
+                <a:cs typeface="Calibri" pitchFamily="34" charset="-120"/>
+              </a:rPr>
+              <a:t>~$0–100/mes</a:t>
+            </a:r>
+            <a:endParaRPr lang="en-US" sz="2200" dirty="0"/>
+          </a:p>
+        </p:txBody>
+      </p:sp>
+      <p:sp>
+        <p:nvSpPr>
+          <p:cNvPr id="9" name="Text 6"/>
+          <p:cNvSpPr/>
+          <p:nvPr/>
+        </p:nvSpPr>
+        <p:spPr>
+          <a:xfrm>
+            <a:off x="768096" y="4791456"/>
+            <a:ext cx="4846320" cy="219456"/>
+          </a:xfrm>
+          <a:prstGeom prst="rect">
+            <a:avLst/>
+          </a:prstGeom>
+          <a:noFill/>
+          <a:ln/>
+        </p:spPr>
+        <p:txBody>
+          <a:bodyPr wrap="square" lIns="0" tIns="0" rIns="0" bIns="0" rtlCol="0" anchor="ctr"/>
+          <a:lstStyle/>
+          <a:p>
+            <a:pPr indent="0" marL="0">
+              <a:buNone/>
+            </a:pPr>
+            <a:r>
+              <a:rPr lang="en-US" sz="950" dirty="0">
+                <a:solidFill>
+                  <a:srgbClr val="7B87AD"/>
+                </a:solidFill>
+                <a:latin typeface="Calibri" pitchFamily="34" charset="0"/>
+                <a:ea typeface="Calibri" pitchFamily="34" charset="-122"/>
+                <a:cs typeface="Calibri" pitchFamily="34" charset="-120"/>
+              </a:rPr>
+              <a:t>+ ~$700–1,300 una sola vez, en exámenes</a:t>
+            </a:r>
+            <a:endParaRPr lang="en-US" sz="950" dirty="0"/>
+          </a:p>
+        </p:txBody>
+      </p:sp>
+      <p:sp>
+        <p:nvSpPr>
+          <p:cNvPr id="10" name="Text 7"/>
+          <p:cNvSpPr/>
+          <p:nvPr/>
+        </p:nvSpPr>
+        <p:spPr>
+          <a:xfrm>
+            <a:off x="6245352" y="1956816"/>
+            <a:ext cx="5486400" cy="237744"/>
+          </a:xfrm>
+          <a:prstGeom prst="rect">
+            <a:avLst/>
+          </a:prstGeom>
+          <a:noFill/>
+          <a:ln/>
+        </p:spPr>
+        <p:txBody>
+          <a:bodyPr wrap="square" lIns="0" tIns="0" rIns="0" bIns="0" rtlCol="0" anchor="ctr"/>
+          <a:lstStyle/>
+          <a:p>
+            <a:pPr indent="0" marL="0">
+              <a:buNone/>
+            </a:pPr>
+            <a:r>
+              <a:rPr lang="en-US" sz="1050" b="1" spc="110" kern="0" dirty="0">
+                <a:solidFill>
+                  <a:srgbClr val="7B87AD"/>
+                </a:solidFill>
+                <a:latin typeface="Calibri" pitchFamily="34" charset="0"/>
+                <a:ea typeface="Calibri" pitchFamily="34" charset="-122"/>
+                <a:cs typeface="Calibri" pitchFamily="34" charset="-120"/>
+              </a:rPr>
+              <a:t>DESPUÉS · SÓLO SI HAY TRACCIÓN · FASES 2–3</a:t>
+            </a:r>
+            <a:endParaRPr lang="en-US" sz="1050" dirty="0"/>
+          </a:p>
+        </p:txBody>
+      </p:sp>
+      <p:graphicFrame>
+        <p:nvGraphicFramePr>
+          <p:cNvPr id="29" name="Table 1"/>
+          <p:cNvGraphicFramePr>
+            <a:graphicFrameLocks noGrp="1"/>
+          </p:cNvGraphicFramePr>
+          <p:nvPr>
+            <p:extLst>
+              <p:ext uri="{D42A27DB-BD31-4B8C-83A1-F6EECF244321}">
+                <p14:modId xmlns:p14="http://schemas.microsoft.com/office/powerpoint/2010/main" val="1579011935"/>
+              </p:ext>
+            </p:extLst>
+          </p:nvPr>
+        </p:nvGraphicFramePr>
+        <p:xfrm>
+          <a:off x="6245352" y="2231136"/>
+          <a:ext cx="5349240" cy="914400"/>
+        </p:xfrm>
+        <a:graphic>
+          <a:graphicData uri="http://schemas.openxmlformats.org/drawingml/2006/table">
+            <a:tbl>
+              <a:tblPr/>
+              <a:tblGrid>
+                <a:gridCol w="3611880"/>
+                <a:gridCol w="1737360"/>
+              </a:tblGrid>
+              <a:tr h="329184">
+                <a:tc>
+                  <a:txBody>
+                    <a:bodyPr/>
+                    <a:lstStyle/>
+                    <a:p>
+                      <a:pPr indent="0" marL="0">
+                        <a:buNone/>
+                      </a:pPr>
+                      <a:r>
+                        <a:rPr lang="en-US" sz="1000" b="1" dirty="0">
+                          <a:solidFill>
+                            <a:srgbClr val="7B87AD"/>
+                          </a:solidFill>
+                          <a:latin typeface="Calibri" pitchFamily="34" charset="0"/>
+                          <a:ea typeface="Calibri" pitchFamily="34" charset="-122"/>
+                          <a:cs typeface="Calibri" pitchFamily="34" charset="-120"/>
+                        </a:rPr>
+                        <a:t>CONCEPTO</a:t>
+                      </a:r>
+                      <a:endParaRPr lang="en-US" sz="1000" dirty="0">
+                        <a:latin typeface="Calibri" charset="0"/>
+                        <a:ea typeface="Calibri" charset="0"/>
+                        <a:cs typeface="Calibri" charset="0"/>
+                      </a:endParaRPr>
+                    </a:p>
+                  </a:txBody>
+                  <a:tcPr marL="76200" marR="76200" marT="50800" marB="50800" anchor="ctr">
                     <a:lnL w="12700" cap="flat" cmpd="sng" algn="ctr">
                       <a:solidFill>
                         <a:srgbClr val="172A5E"/>
@@ -9621,24 +10791,94 @@
                         <a:buNone/>
                       </a:pPr>
                       <a:r>
-                        <a:rPr lang="en-US" sz="1050" b="1" dirty="0">
+                        <a:rPr lang="en-US" sz="1000" b="1" dirty="0">
                           <a:solidFill>
-                            <a:srgbClr val="AAB4D4"/>
+                            <a:srgbClr val="7B87AD"/>
                           </a:solidFill>
                           <a:latin typeface="Calibri" pitchFamily="34" charset="0"/>
                           <a:ea typeface="Calibri" pitchFamily="34" charset="-122"/>
                           <a:cs typeface="Calibri" pitchFamily="34" charset="-120"/>
                         </a:rPr>
-                        <a:t>FASE</a:t>
+                        <a:t>COSTO DIFERIDO</a:t>
                       </a:r>
-                      <a:endParaRPr lang="en-US" sz="1050" dirty="0">
+                      <a:endParaRPr lang="en-US" sz="1000" dirty="0">
                         <a:latin typeface="Calibri" charset="0"/>
                         <a:ea typeface="Calibri" charset="0"/>
                         <a:cs typeface="Calibri" charset="0"/>
                       </a:endParaRPr>
                     </a:p>
                   </a:txBody>
-                  <a:tcPr marL="76200" marR="76200" marT="38100" marB="38100" anchor="ctr">
+                  <a:tcPr marL="76200" marR="76200" marT="50800" marB="50800" anchor="ctr">
+                    <a:lnL w="12700" cap="flat" cmpd="sng" algn="ctr">
+                      <a:solidFill>
+                        <a:srgbClr val="172A5E"/>
+                      </a:solidFill>
+                      <a:prstDash val="solid"/>
+                      <a:round/>
+                      <a:headEnd type="none" w="med" len="med"/>
+                      <a:tailEnd type="none" w="med" len="med"/>
+                    </a:lnL>
+                    <a:lnR w="12700" cap="flat" cmpd="sng" algn="ctr">
+                      <a:solidFill>
+                        <a:srgbClr val="172A5E"/>
+                      </a:solidFill>
+                      <a:prstDash val="solid"/>
+                      <a:round/>
+                      <a:headEnd type="none" w="med" len="med"/>
+                      <a:tailEnd type="none" w="med" len="med"/>
+                    </a:lnR>
+                    <a:lnT w="12700" cap="flat" cmpd="sng" algn="ctr">
+                      <a:solidFill>
+                        <a:srgbClr val="172A5E"/>
+                      </a:solidFill>
+                      <a:prstDash val="solid"/>
+                      <a:round/>
+                      <a:headEnd type="none" w="med" len="med"/>
+                      <a:tailEnd type="none" w="med" len="med"/>
+                    </a:lnT>
+                    <a:lnB w="12700" cap="flat" cmpd="sng" algn="ctr">
+                      <a:solidFill>
+                        <a:srgbClr val="172A5E"/>
+                      </a:solidFill>
+                      <a:prstDash val="solid"/>
+                      <a:round/>
+                      <a:headEnd type="none" w="med" len="med"/>
+                      <a:tailEnd type="none" w="med" len="med"/>
+                    </a:lnB>
+                    <a:solidFill>
+                      <a:srgbClr val="04081F"/>
+                    </a:solidFill>
+                  </a:tcPr>
+                </a:tc>
+              </a:tr>
+              <a:tr h="329184">
+                <a:tc>
+                  <a:txBody>
+                    <a:bodyPr/>
+                    <a:lstStyle/>
+                    <a:p>
+                      <a:pPr indent="0" marL="0">
+                        <a:buNone/>
+                      </a:pPr>
+                      <a:r>
+                        <a:rPr lang="en-US" sz="1000" dirty="0">
+                          <a:solidFill>
+                            <a:srgbClr val="7B87AD"/>
+                          </a:solidFill>
+                          <a:latin typeface="Calibri" pitchFamily="34" charset="0"/>
+                          <a:ea typeface="Calibri" pitchFamily="34" charset="-122"/>
+                          <a:cs typeface="Calibri" pitchFamily="34" charset="-120"/>
+                        </a:rPr>
+                        <a:t>Cuota anual AWS APN, tier Select</a:t>
+                      </a:r>
+                      <a:endParaRPr lang="en-US" sz="1000" dirty="0">
+                        <a:latin typeface="Calibri" charset="0"/>
+                        <a:ea typeface="Calibri" charset="0"/>
+                        <a:cs typeface="Calibri" charset="0"/>
+                      </a:endParaRPr>
+                    </a:p>
+                  </a:txBody>
+                  <a:tcPr marL="76200" marR="76200" marT="50800" marB="50800" anchor="ctr">
                     <a:lnL w="12700" cap="flat" cmpd="sng" algn="ctr">
                       <a:solidFill>
                         <a:srgbClr val="172A5E"/>
@@ -9689,24 +10929,94 @@
                         <a:buNone/>
                       </a:pPr>
                       <a:r>
-                        <a:rPr lang="en-US" sz="1050" b="1" dirty="0">
+                        <a:rPr lang="en-US" sz="1000" dirty="0">
                           <a:solidFill>
-                            <a:srgbClr val="AAB4D4"/>
+                            <a:srgbClr val="7B87AD"/>
                           </a:solidFill>
                           <a:latin typeface="Calibri" pitchFamily="34" charset="0"/>
                           <a:ea typeface="Calibri" pitchFamily="34" charset="-122"/>
                           <a:cs typeface="Calibri" pitchFamily="34" charset="-120"/>
                         </a:rPr>
-                        <a:t>USD/MES</a:t>
+                        <a:t>2,500 / año</a:t>
                       </a:r>
-                      <a:endParaRPr lang="en-US" sz="1050" dirty="0">
+                      <a:endParaRPr lang="en-US" sz="1000" dirty="0">
                         <a:latin typeface="Calibri" charset="0"/>
                         <a:ea typeface="Calibri" charset="0"/>
                         <a:cs typeface="Calibri" charset="0"/>
                       </a:endParaRPr>
                     </a:p>
                   </a:txBody>
-                  <a:tcPr marL="76200" marR="76200" marT="38100" marB="38100" anchor="ctr">
+                  <a:tcPr marL="76200" marR="76200" marT="50800" marB="50800" anchor="ctr">
+                    <a:lnL w="12700" cap="flat" cmpd="sng" algn="ctr">
+                      <a:solidFill>
+                        <a:srgbClr val="172A5E"/>
+                      </a:solidFill>
+                      <a:prstDash val="solid"/>
+                      <a:round/>
+                      <a:headEnd type="none" w="med" len="med"/>
+                      <a:tailEnd type="none" w="med" len="med"/>
+                    </a:lnL>
+                    <a:lnR w="12700" cap="flat" cmpd="sng" algn="ctr">
+                      <a:solidFill>
+                        <a:srgbClr val="172A5E"/>
+                      </a:solidFill>
+                      <a:prstDash val="solid"/>
+                      <a:round/>
+                      <a:headEnd type="none" w="med" len="med"/>
+                      <a:tailEnd type="none" w="med" len="med"/>
+                    </a:lnR>
+                    <a:lnT w="12700" cap="flat" cmpd="sng" algn="ctr">
+                      <a:solidFill>
+                        <a:srgbClr val="172A5E"/>
+                      </a:solidFill>
+                      <a:prstDash val="solid"/>
+                      <a:round/>
+                      <a:headEnd type="none" w="med" len="med"/>
+                      <a:tailEnd type="none" w="med" len="med"/>
+                    </a:lnT>
+                    <a:lnB w="12700" cap="flat" cmpd="sng" algn="ctr">
+                      <a:solidFill>
+                        <a:srgbClr val="172A5E"/>
+                      </a:solidFill>
+                      <a:prstDash val="solid"/>
+                      <a:round/>
+                      <a:headEnd type="none" w="med" len="med"/>
+                      <a:tailEnd type="none" w="med" len="med"/>
+                    </a:lnB>
+                    <a:solidFill>
+                      <a:srgbClr val="04081F"/>
+                    </a:solidFill>
+                  </a:tcPr>
+                </a:tc>
+              </a:tr>
+              <a:tr h="329184">
+                <a:tc>
+                  <a:txBody>
+                    <a:bodyPr/>
+                    <a:lstStyle/>
+                    <a:p>
+                      <a:pPr indent="0" marL="0">
+                        <a:buNone/>
+                      </a:pPr>
+                      <a:r>
+                        <a:rPr lang="en-US" sz="1000" dirty="0">
+                          <a:solidFill>
+                            <a:srgbClr val="7B87AD"/>
+                          </a:solidFill>
+                          <a:latin typeface="Calibri" pitchFamily="34" charset="0"/>
+                          <a:ea typeface="Calibri" pitchFamily="34" charset="-122"/>
+                          <a:cs typeface="Calibri" pitchFamily="34" charset="-120"/>
+                        </a:rPr>
+                        <a:t>Evento propio (60–80 asistentes)</a:t>
+                      </a:r>
+                      <a:endParaRPr lang="en-US" sz="1000" dirty="0">
+                        <a:latin typeface="Calibri" charset="0"/>
+                        <a:ea typeface="Calibri" charset="0"/>
+                        <a:cs typeface="Calibri" charset="0"/>
+                      </a:endParaRPr>
+                    </a:p>
+                  </a:txBody>
+                  <a:tcPr marL="76200" marR="76200" marT="50800" marB="50800" anchor="ctr">
                     <a:lnL w="12700" cap="flat" cmpd="sng" algn="ctr">
                       <a:solidFill>
                         <a:srgbClr val="172A5E"/>
@@ -9757,24 +11067,24 @@
                         <a:buNone/>
                       </a:pPr>
                       <a:r>
-                        <a:rPr lang="en-US" sz="1050" b="1" dirty="0">
+                        <a:rPr lang="en-US" sz="1000" dirty="0">
                           <a:solidFill>
-                            <a:srgbClr val="AAB4D4"/>
+                            <a:srgbClr val="7B87AD"/>
                           </a:solidFill>
                           <a:latin typeface="Calibri" pitchFamily="34" charset="0"/>
                           <a:ea typeface="Calibri" pitchFamily="34" charset="-122"/>
                           <a:cs typeface="Calibri" pitchFamily="34" charset="-120"/>
                         </a:rPr>
-                        <a:t>UNA VEZ</a:t>
+                        <a:t>5,000–9,000</a:t>
                       </a:r>
-                      <a:endParaRPr lang="en-US" sz="1050" dirty="0">
+                      <a:endParaRPr lang="en-US" sz="1000" dirty="0">
                         <a:latin typeface="Calibri" charset="0"/>
                         <a:ea typeface="Calibri" charset="0"/>
                         <a:cs typeface="Calibri" charset="0"/>
                       </a:endParaRPr>
                     </a:p>
                   </a:txBody>
-                  <a:tcPr marL="76200" marR="76200" marT="38100" marB="38100" anchor="ctr">
+                  <a:tcPr marL="76200" marR="76200" marT="50800" marB="50800" anchor="ctr">
                     <a:lnL w="12700" cap="flat" cmpd="sng" algn="ctr">
                       <a:solidFill>
                         <a:srgbClr val="172A5E"/>
@@ -9817,7 +11127,7 @@
                   </a:tcPr>
                 </a:tc>
               </a:tr>
-              <a:tr h="272491">
+              <a:tr h="329184">
                 <a:tc>
                   <a:txBody>
                     <a:bodyPr/>
@@ -9827,24 +11137,24 @@
                         <a:buNone/>
                       </a:pPr>
                       <a:r>
-                        <a:rPr lang="en-US" sz="1050" dirty="0">
+                        <a:rPr lang="en-US" sz="1000" dirty="0">
                           <a:solidFill>
-                            <a:srgbClr val="AAB4D4"/>
+                            <a:srgbClr val="7B87AD"/>
                           </a:solidFill>
                           <a:latin typeface="Calibri" pitchFamily="34" charset="0"/>
                           <a:ea typeface="Calibri" pitchFamily="34" charset="-122"/>
                           <a:cs typeface="Calibri" pitchFamily="34" charset="-120"/>
                         </a:rPr>
-                        <a:t>CRM + datos de contacto</a:t>
+                        <a:t>Conferencias de industria (3)</a:t>
                       </a:r>
-                      <a:endParaRPr lang="en-US" sz="1050" dirty="0">
+                      <a:endParaRPr lang="en-US" sz="1000" dirty="0">
                         <a:latin typeface="Calibri" charset="0"/>
                         <a:ea typeface="Calibri" charset="0"/>
                         <a:cs typeface="Calibri" charset="0"/>
                       </a:endParaRPr>
                     </a:p>
                   </a:txBody>
-                  <a:tcPr marL="76200" marR="76200" marT="38100" marB="38100" anchor="ctr">
+                  <a:tcPr marL="76200" marR="76200" marT="50800" marB="50800" anchor="ctr">
                     <a:lnL w="12700" cap="flat" cmpd="sng" algn="ctr">
                       <a:solidFill>
                         <a:srgbClr val="172A5E"/>
@@ -9895,24 +11205,94 @@
                         <a:buNone/>
                       </a:pPr>
                       <a:r>
-                        <a:rPr lang="en-US" sz="1050" dirty="0">
+                        <a:rPr lang="en-US" sz="1000" dirty="0">
                           <a:solidFill>
-                            <a:srgbClr val="AAB4D4"/>
+                            <a:srgbClr val="7B87AD"/>
                           </a:solidFill>
                           <a:latin typeface="Calibri" pitchFamily="34" charset="0"/>
                           <a:ea typeface="Calibri" pitchFamily="34" charset="-122"/>
                           <a:cs typeface="Calibri" pitchFamily="34" charset="-120"/>
                         </a:rPr>
-                        <a:t>0–3</a:t>
+                        <a:t>4,000–7,000</a:t>
                       </a:r>
-                      <a:endParaRPr lang="en-US" sz="1050" dirty="0">
+                      <a:endParaRPr lang="en-US" sz="1000" dirty="0">
                         <a:latin typeface="Calibri" charset="0"/>
                         <a:ea typeface="Calibri" charset="0"/>
                         <a:cs typeface="Calibri" charset="0"/>
                       </a:endParaRPr>
                     </a:p>
                   </a:txBody>
-                  <a:tcPr marL="76200" marR="76200" marT="38100" marB="38100" anchor="ctr">
+                  <a:tcPr marL="76200" marR="76200" marT="50800" marB="50800" anchor="ctr">
+                    <a:lnL w="12700" cap="flat" cmpd="sng" algn="ctr">
+                      <a:solidFill>
+                        <a:srgbClr val="172A5E"/>
+                      </a:solidFill>
+                      <a:prstDash val="solid"/>
+                      <a:round/>
+                      <a:headEnd type="none" w="med" len="med"/>
+                      <a:tailEnd type="none" w="med" len="med"/>
+                    </a:lnL>
+                    <a:lnR w="12700" cap="flat" cmpd="sng" algn="ctr">
+                      <a:solidFill>
+                        <a:srgbClr val="172A5E"/>
+                      </a:solidFill>
+                      <a:prstDash val="solid"/>
+                      <a:round/>
+                      <a:headEnd type="none" w="med" len="med"/>
+                      <a:tailEnd type="none" w="med" len="med"/>
+                    </a:lnR>
+                    <a:lnT w="12700" cap="flat" cmpd="sng" algn="ctr">
+                      <a:solidFill>
+                        <a:srgbClr val="172A5E"/>
+                      </a:solidFill>
+                      <a:prstDash val="solid"/>
+                      <a:round/>
+                      <a:headEnd type="none" w="med" len="med"/>
+                      <a:tailEnd type="none" w="med" len="med"/>
+                    </a:lnT>
+                    <a:lnB w="12700" cap="flat" cmpd="sng" algn="ctr">
+                      <a:solidFill>
+                        <a:srgbClr val="172A5E"/>
+                      </a:solidFill>
+                      <a:prstDash val="solid"/>
+                      <a:round/>
+                      <a:headEnd type="none" w="med" len="med"/>
+                      <a:tailEnd type="none" w="med" len="med"/>
+                    </a:lnB>
+                    <a:solidFill>
+                      <a:srgbClr val="04081F"/>
+                    </a:solidFill>
+                  </a:tcPr>
+                </a:tc>
+              </a:tr>
+              <a:tr h="329184">
+                <a:tc>
+                  <a:txBody>
+                    <a:bodyPr/>
+                    <a:lstStyle/>
+                    <a:p>
+                      <a:pPr indent="0" marL="0">
+                        <a:buNone/>
+                      </a:pPr>
+                      <a:r>
+                        <a:rPr lang="en-US" sz="1000" dirty="0">
+                          <a:solidFill>
+                            <a:srgbClr val="7B87AD"/>
+                          </a:solidFill>
+                          <a:latin typeface="Calibri" pitchFamily="34" charset="0"/>
+                          <a:ea typeface="Calibri" pitchFamily="34" charset="-122"/>
+                          <a:cs typeface="Calibri" pitchFamily="34" charset="-120"/>
+                        </a:rPr>
+                        <a:t>Pauta LinkedIn (retargeting del estudio)</a:t>
+                      </a:r>
+                      <a:endParaRPr lang="en-US" sz="1000" dirty="0">
+                        <a:latin typeface="Calibri" charset="0"/>
+                        <a:ea typeface="Calibri" charset="0"/>
+                        <a:cs typeface="Calibri" charset="0"/>
+                      </a:endParaRPr>
+                    </a:p>
+                  </a:txBody>
+                  <a:tcPr marL="76200" marR="76200" marT="50800" marB="50800" anchor="ctr">
                     <a:lnL w="12700" cap="flat" cmpd="sng" algn="ctr">
                       <a:solidFill>
                         <a:srgbClr val="172A5E"/>
@@ -9963,24 +11343,94 @@
                         <a:buNone/>
                       </a:pPr>
                       <a:r>
-                        <a:rPr lang="en-US" sz="1050" dirty="0">
+                        <a:rPr lang="en-US" sz="1000" dirty="0">
                           <a:solidFill>
-                            <a:srgbClr val="AAB4D4"/>
+                            <a:srgbClr val="7B87AD"/>
                           </a:solidFill>
                           <a:latin typeface="Calibri" pitchFamily="34" charset="0"/>
                           <a:ea typeface="Calibri" pitchFamily="34" charset="-122"/>
                           <a:cs typeface="Calibri" pitchFamily="34" charset="-120"/>
                         </a:rPr>
-                        <a:t>150–400</a:t>
+                        <a:t>1,000–2,500 /mes</a:t>
                       </a:r>
-                      <a:endParaRPr lang="en-US" sz="1050" dirty="0">
+                      <a:endParaRPr lang="en-US" sz="1000" dirty="0">
                         <a:latin typeface="Calibri" charset="0"/>
                         <a:ea typeface="Calibri" charset="0"/>
                         <a:cs typeface="Calibri" charset="0"/>
                       </a:endParaRPr>
                     </a:p>
                   </a:txBody>
-                  <a:tcPr marL="76200" marR="76200" marT="38100" marB="38100" anchor="ctr">
+                  <a:tcPr marL="76200" marR="76200" marT="50800" marB="50800" anchor="ctr">
+                    <a:lnL w="12700" cap="flat" cmpd="sng" algn="ctr">
+                      <a:solidFill>
+                        <a:srgbClr val="172A5E"/>
+                      </a:solidFill>
+                      <a:prstDash val="solid"/>
+                      <a:round/>
+                      <a:headEnd type="none" w="med" len="med"/>
+                      <a:tailEnd type="none" w="med" len="med"/>
+                    </a:lnL>
+                    <a:lnR w="12700" cap="flat" cmpd="sng" algn="ctr">
+                      <a:solidFill>
+                        <a:srgbClr val="172A5E"/>
+                      </a:solidFill>
+                      <a:prstDash val="solid"/>
+                      <a:round/>
+                      <a:headEnd type="none" w="med" len="med"/>
+                      <a:tailEnd type="none" w="med" len="med"/>
+                    </a:lnR>
+                    <a:lnT w="12700" cap="flat" cmpd="sng" algn="ctr">
+                      <a:solidFill>
+                        <a:srgbClr val="172A5E"/>
+                      </a:solidFill>
+                      <a:prstDash val="solid"/>
+                      <a:round/>
+                      <a:headEnd type="none" w="med" len="med"/>
+                      <a:tailEnd type="none" w="med" len="med"/>
+                    </a:lnT>
+                    <a:lnB w="12700" cap="flat" cmpd="sng" algn="ctr">
+                      <a:solidFill>
+                        <a:srgbClr val="172A5E"/>
+                      </a:solidFill>
+                      <a:prstDash val="solid"/>
+                      <a:round/>
+                      <a:headEnd type="none" w="med" len="med"/>
+                      <a:tailEnd type="none" w="med" len="med"/>
+                    </a:lnB>
+                    <a:solidFill>
+                      <a:srgbClr val="04081F"/>
+                    </a:solidFill>
+                  </a:tcPr>
+                </a:tc>
+              </a:tr>
+              <a:tr h="329184">
+                <a:tc>
+                  <a:txBody>
+                    <a:bodyPr/>
+                    <a:lstStyle/>
+                    <a:p>
+                      <a:pPr indent="0" marL="0">
+                        <a:buNone/>
+                      </a:pPr>
+                      <a:r>
+                        <a:rPr lang="en-US" sz="1000" dirty="0">
+                          <a:solidFill>
+                            <a:srgbClr val="7B87AD"/>
+                          </a:solidFill>
+                          <a:latin typeface="Calibri" pitchFamily="34" charset="0"/>
+                          <a:ea typeface="Calibri" pitchFamily="34" charset="-122"/>
+                          <a:cs typeface="Calibri" pitchFamily="34" charset="-120"/>
+                        </a:rPr>
+                        <a:t>SDR de tiempo completo</a:t>
+                      </a:r>
+                      <a:endParaRPr lang="en-US" sz="1000" dirty="0">
+                        <a:latin typeface="Calibri" charset="0"/>
+                        <a:ea typeface="Calibri" charset="0"/>
+                        <a:cs typeface="Calibri" charset="0"/>
+                      </a:endParaRPr>
+                    </a:p>
+                  </a:txBody>
+                  <a:tcPr marL="76200" marR="76200" marT="50800" marB="50800" anchor="ctr">
                     <a:lnL w="12700" cap="flat" cmpd="sng" algn="ctr">
                       <a:solidFill>
                         <a:srgbClr val="172A5E"/>
@@ -10031,2490 +11481,24 @@
                         <a:buNone/>
                       </a:pPr>
                       <a:r>
-                        <a:rPr lang="en-US" sz="1050" dirty="0">
+                        <a:rPr lang="en-US" sz="1000" dirty="0">
                           <a:solidFill>
-                            <a:srgbClr val="AAB4D4"/>
+                            <a:srgbClr val="7B87AD"/>
                           </a:solidFill>
                           <a:latin typeface="Calibri" pitchFamily="34" charset="0"/>
                           <a:ea typeface="Calibri" pitchFamily="34" charset="-122"/>
                           <a:cs typeface="Calibri" pitchFamily="34" charset="-120"/>
                         </a:rPr>
-                        <a:t>—</a:t>
+                        <a:t>1,800–3,000 /mes</a:t>
                       </a:r>
-                      <a:endParaRPr lang="en-US" sz="1050" dirty="0">
+                      <a:endParaRPr lang="en-US" sz="1000" dirty="0">
                         <a:latin typeface="Calibri" charset="0"/>
                         <a:ea typeface="Calibri" charset="0"/>
                         <a:cs typeface="Calibri" charset="0"/>
                       </a:endParaRPr>
                     </a:p>
                   </a:txBody>
-                  <a:tcPr marL="76200" marR="76200" marT="38100" marB="38100" anchor="ctr">
-                    <a:lnL w="12700" cap="flat" cmpd="sng" algn="ctr">
-                      <a:solidFill>
-                        <a:srgbClr val="172A5E"/>
-                      </a:solidFill>
-                      <a:prstDash val="solid"/>
-                      <a:round/>
-                      <a:headEnd type="none" w="med" len="med"/>
-                      <a:tailEnd type="none" w="med" len="med"/>
-                    </a:lnL>
-                    <a:lnR w="12700" cap="flat" cmpd="sng" algn="ctr">
-                      <a:solidFill>
-                        <a:srgbClr val="172A5E"/>
-                      </a:solidFill>
-                      <a:prstDash val="solid"/>
-                      <a:round/>
-                      <a:headEnd type="none" w="med" len="med"/>
-                      <a:tailEnd type="none" w="med" len="med"/>
-                    </a:lnR>
-                    <a:lnT w="12700" cap="flat" cmpd="sng" algn="ctr">
-                      <a:solidFill>
-                        <a:srgbClr val="172A5E"/>
-                      </a:solidFill>
-                      <a:prstDash val="solid"/>
-                      <a:round/>
-                      <a:headEnd type="none" w="med" len="med"/>
-                      <a:tailEnd type="none" w="med" len="med"/>
-                    </a:lnT>
-                    <a:lnB w="12700" cap="flat" cmpd="sng" algn="ctr">
-                      <a:solidFill>
-                        <a:srgbClr val="172A5E"/>
-                      </a:solidFill>
-                      <a:prstDash val="solid"/>
-                      <a:round/>
-                      <a:headEnd type="none" w="med" len="med"/>
-                      <a:tailEnd type="none" w="med" len="med"/>
-                    </a:lnB>
-                    <a:solidFill>
-                      <a:srgbClr val="04081F"/>
-                    </a:solidFill>
-                  </a:tcPr>
-                </a:tc>
-              </a:tr>
-              <a:tr h="272491">
-                <a:tc>
-                  <a:txBody>
-                    <a:bodyPr/>
-                    <a:lstStyle/>
-                    <a:p>
-                      <a:pPr indent="0" marL="0">
-                        <a:buNone/>
-                      </a:pPr>
-                      <a:r>
-                        <a:rPr lang="en-US" sz="1050" dirty="0">
-                          <a:solidFill>
-                            <a:srgbClr val="AAB4D4"/>
-                          </a:solidFill>
-                          <a:latin typeface="Calibri" pitchFamily="34" charset="0"/>
-                          <a:ea typeface="Calibri" pitchFamily="34" charset="-122"/>
-                          <a:cs typeface="Calibri" pitchFamily="34" charset="-120"/>
-                        </a:rPr>
-                        <a:t>Diseño de casos y ofertas</a:t>
-                      </a:r>
-                      <a:endParaRPr lang="en-US" sz="1050" dirty="0">
-                        <a:latin typeface="Calibri" charset="0"/>
-                        <a:ea typeface="Calibri" charset="0"/>
-                        <a:cs typeface="Calibri" charset="0"/>
-                      </a:endParaRPr>
-                    </a:p>
-                  </a:txBody>
-                  <a:tcPr marL="76200" marR="76200" marT="38100" marB="38100" anchor="ctr">
-                    <a:lnL w="12700" cap="flat" cmpd="sng" algn="ctr">
-                      <a:solidFill>
-                        <a:srgbClr val="172A5E"/>
-                      </a:solidFill>
-                      <a:prstDash val="solid"/>
-                      <a:round/>
-                      <a:headEnd type="none" w="med" len="med"/>
-                      <a:tailEnd type="none" w="med" len="med"/>
-                    </a:lnL>
-                    <a:lnR w="12700" cap="flat" cmpd="sng" algn="ctr">
-                      <a:solidFill>
-                        <a:srgbClr val="172A5E"/>
-                      </a:solidFill>
-                      <a:prstDash val="solid"/>
-                      <a:round/>
-                      <a:headEnd type="none" w="med" len="med"/>
-                      <a:tailEnd type="none" w="med" len="med"/>
-                    </a:lnR>
-                    <a:lnT w="12700" cap="flat" cmpd="sng" algn="ctr">
-                      <a:solidFill>
-                        <a:srgbClr val="172A5E"/>
-                      </a:solidFill>
-                      <a:prstDash val="solid"/>
-                      <a:round/>
-                      <a:headEnd type="none" w="med" len="med"/>
-                      <a:tailEnd type="none" w="med" len="med"/>
-                    </a:lnT>
-                    <a:lnB w="12700" cap="flat" cmpd="sng" algn="ctr">
-                      <a:solidFill>
-                        <a:srgbClr val="172A5E"/>
-                      </a:solidFill>
-                      <a:prstDash val="solid"/>
-                      <a:round/>
-                      <a:headEnd type="none" w="med" len="med"/>
-                      <a:tailEnd type="none" w="med" len="med"/>
-                    </a:lnB>
-                    <a:solidFill>
-                      <a:srgbClr val="04081F"/>
-                    </a:solidFill>
-                  </a:tcPr>
-                </a:tc>
-                <a:tc>
-                  <a:txBody>
-                    <a:bodyPr/>
-                    <a:lstStyle/>
-                    <a:p>
-                      <a:pPr indent="0" marL="0">
-                        <a:buNone/>
-                      </a:pPr>
-                      <a:r>
-                        <a:rPr lang="en-US" sz="1050" dirty="0">
-                          <a:solidFill>
-                            <a:srgbClr val="AAB4D4"/>
-                          </a:solidFill>
-                          <a:latin typeface="Calibri" pitchFamily="34" charset="0"/>
-                          <a:ea typeface="Calibri" pitchFamily="34" charset="-122"/>
-                          <a:cs typeface="Calibri" pitchFamily="34" charset="-120"/>
-                        </a:rPr>
-                        <a:t>0</a:t>
-                      </a:r>
-                      <a:endParaRPr lang="en-US" sz="1050" dirty="0">
-                        <a:latin typeface="Calibri" charset="0"/>
-                        <a:ea typeface="Calibri" charset="0"/>
-                        <a:cs typeface="Calibri" charset="0"/>
-                      </a:endParaRPr>
-                    </a:p>
-                  </a:txBody>
-                  <a:tcPr marL="76200" marR="76200" marT="38100" marB="38100" anchor="ctr">
-                    <a:lnL w="12700" cap="flat" cmpd="sng" algn="ctr">
-                      <a:solidFill>
-                        <a:srgbClr val="172A5E"/>
-                      </a:solidFill>
-                      <a:prstDash val="solid"/>
-                      <a:round/>
-                      <a:headEnd type="none" w="med" len="med"/>
-                      <a:tailEnd type="none" w="med" len="med"/>
-                    </a:lnL>
-                    <a:lnR w="12700" cap="flat" cmpd="sng" algn="ctr">
-                      <a:solidFill>
-                        <a:srgbClr val="172A5E"/>
-                      </a:solidFill>
-                      <a:prstDash val="solid"/>
-                      <a:round/>
-                      <a:headEnd type="none" w="med" len="med"/>
-                      <a:tailEnd type="none" w="med" len="med"/>
-                    </a:lnR>
-                    <a:lnT w="12700" cap="flat" cmpd="sng" algn="ctr">
-                      <a:solidFill>
-                        <a:srgbClr val="172A5E"/>
-                      </a:solidFill>
-                      <a:prstDash val="solid"/>
-                      <a:round/>
-                      <a:headEnd type="none" w="med" len="med"/>
-                      <a:tailEnd type="none" w="med" len="med"/>
-                    </a:lnT>
-                    <a:lnB w="12700" cap="flat" cmpd="sng" algn="ctr">
-                      <a:solidFill>
-                        <a:srgbClr val="172A5E"/>
-                      </a:solidFill>
-                      <a:prstDash val="solid"/>
-                      <a:round/>
-                      <a:headEnd type="none" w="med" len="med"/>
-                      <a:tailEnd type="none" w="med" len="med"/>
-                    </a:lnB>
-                    <a:solidFill>
-                      <a:srgbClr val="04081F"/>
-                    </a:solidFill>
-                  </a:tcPr>
-                </a:tc>
-                <a:tc>
-                  <a:txBody>
-                    <a:bodyPr/>
-                    <a:lstStyle/>
-                    <a:p>
-                      <a:pPr indent="0" marL="0">
-                        <a:buNone/>
-                      </a:pPr>
-                      <a:r>
-                        <a:rPr lang="en-US" sz="1050" dirty="0">
-                          <a:solidFill>
-                            <a:srgbClr val="AAB4D4"/>
-                          </a:solidFill>
-                          <a:latin typeface="Calibri" pitchFamily="34" charset="0"/>
-                          <a:ea typeface="Calibri" pitchFamily="34" charset="-122"/>
-                          <a:cs typeface="Calibri" pitchFamily="34" charset="-120"/>
-                        </a:rPr>
-                        <a:t>—</a:t>
-                      </a:r>
-                      <a:endParaRPr lang="en-US" sz="1050" dirty="0">
-                        <a:latin typeface="Calibri" charset="0"/>
-                        <a:ea typeface="Calibri" charset="0"/>
-                        <a:cs typeface="Calibri" charset="0"/>
-                      </a:endParaRPr>
-                    </a:p>
-                  </a:txBody>
-                  <a:tcPr marL="76200" marR="76200" marT="38100" marB="38100" anchor="ctr">
-                    <a:lnL w="12700" cap="flat" cmpd="sng" algn="ctr">
-                      <a:solidFill>
-                        <a:srgbClr val="172A5E"/>
-                      </a:solidFill>
-                      <a:prstDash val="solid"/>
-                      <a:round/>
-                      <a:headEnd type="none" w="med" len="med"/>
-                      <a:tailEnd type="none" w="med" len="med"/>
-                    </a:lnL>
-                    <a:lnR w="12700" cap="flat" cmpd="sng" algn="ctr">
-                      <a:solidFill>
-                        <a:srgbClr val="172A5E"/>
-                      </a:solidFill>
-                      <a:prstDash val="solid"/>
-                      <a:round/>
-                      <a:headEnd type="none" w="med" len="med"/>
-                      <a:tailEnd type="none" w="med" len="med"/>
-                    </a:lnR>
-                    <a:lnT w="12700" cap="flat" cmpd="sng" algn="ctr">
-                      <a:solidFill>
-                        <a:srgbClr val="172A5E"/>
-                      </a:solidFill>
-                      <a:prstDash val="solid"/>
-                      <a:round/>
-                      <a:headEnd type="none" w="med" len="med"/>
-                      <a:tailEnd type="none" w="med" len="med"/>
-                    </a:lnT>
-                    <a:lnB w="12700" cap="flat" cmpd="sng" algn="ctr">
-                      <a:solidFill>
-                        <a:srgbClr val="172A5E"/>
-                      </a:solidFill>
-                      <a:prstDash val="solid"/>
-                      <a:round/>
-                      <a:headEnd type="none" w="med" len="med"/>
-                      <a:tailEnd type="none" w="med" len="med"/>
-                    </a:lnB>
-                    <a:solidFill>
-                      <a:srgbClr val="04081F"/>
-                    </a:solidFill>
-                  </a:tcPr>
-                </a:tc>
-                <a:tc>
-                  <a:txBody>
-                    <a:bodyPr/>
-                    <a:lstStyle/>
-                    <a:p>
-                      <a:pPr indent="0" marL="0">
-                        <a:buNone/>
-                      </a:pPr>
-                      <a:r>
-                        <a:rPr lang="en-US" sz="1050" dirty="0">
-                          <a:solidFill>
-                            <a:srgbClr val="AAB4D4"/>
-                          </a:solidFill>
-                          <a:latin typeface="Calibri" pitchFamily="34" charset="0"/>
-                          <a:ea typeface="Calibri" pitchFamily="34" charset="-122"/>
-                          <a:cs typeface="Calibri" pitchFamily="34" charset="-120"/>
-                        </a:rPr>
-                        <a:t>1,500–3,000</a:t>
-                      </a:r>
-                      <a:endParaRPr lang="en-US" sz="1050" dirty="0">
-                        <a:latin typeface="Calibri" charset="0"/>
-                        <a:ea typeface="Calibri" charset="0"/>
-                        <a:cs typeface="Calibri" charset="0"/>
-                      </a:endParaRPr>
-                    </a:p>
-                  </a:txBody>
-                  <a:tcPr marL="76200" marR="76200" marT="38100" marB="38100" anchor="ctr">
-                    <a:lnL w="12700" cap="flat" cmpd="sng" algn="ctr">
-                      <a:solidFill>
-                        <a:srgbClr val="172A5E"/>
-                      </a:solidFill>
-                      <a:prstDash val="solid"/>
-                      <a:round/>
-                      <a:headEnd type="none" w="med" len="med"/>
-                      <a:tailEnd type="none" w="med" len="med"/>
-                    </a:lnL>
-                    <a:lnR w="12700" cap="flat" cmpd="sng" algn="ctr">
-                      <a:solidFill>
-                        <a:srgbClr val="172A5E"/>
-                      </a:solidFill>
-                      <a:prstDash val="solid"/>
-                      <a:round/>
-                      <a:headEnd type="none" w="med" len="med"/>
-                      <a:tailEnd type="none" w="med" len="med"/>
-                    </a:lnR>
-                    <a:lnT w="12700" cap="flat" cmpd="sng" algn="ctr">
-                      <a:solidFill>
-                        <a:srgbClr val="172A5E"/>
-                      </a:solidFill>
-                      <a:prstDash val="solid"/>
-                      <a:round/>
-                      <a:headEnd type="none" w="med" len="med"/>
-                      <a:tailEnd type="none" w="med" len="med"/>
-                    </a:lnT>
-                    <a:lnB w="12700" cap="flat" cmpd="sng" algn="ctr">
-                      <a:solidFill>
-                        <a:srgbClr val="172A5E"/>
-                      </a:solidFill>
-                      <a:prstDash val="solid"/>
-                      <a:round/>
-                      <a:headEnd type="none" w="med" len="med"/>
-                      <a:tailEnd type="none" w="med" len="med"/>
-                    </a:lnB>
-                    <a:solidFill>
-                      <a:srgbClr val="04081F"/>
-                    </a:solidFill>
-                  </a:tcPr>
-                </a:tc>
-              </a:tr>
-              <a:tr h="272491">
-                <a:tc>
-                  <a:txBody>
-                    <a:bodyPr/>
-                    <a:lstStyle/>
-                    <a:p>
-                      <a:pPr indent="0" marL="0">
-                        <a:buNone/>
-                      </a:pPr>
-                      <a:r>
-                        <a:rPr lang="en-US" sz="1050" dirty="0">
-                          <a:solidFill>
-                            <a:srgbClr val="AAB4D4"/>
-                          </a:solidFill>
-                          <a:latin typeface="Calibri" pitchFamily="34" charset="0"/>
-                          <a:ea typeface="Calibri" pitchFamily="34" charset="-122"/>
-                          <a:cs typeface="Calibri" pitchFamily="34" charset="-120"/>
-                        </a:rPr>
-                        <a:t>Cuota anual AWS Partner Network</a:t>
-                      </a:r>
-                      <a:endParaRPr lang="en-US" sz="1050" dirty="0">
-                        <a:latin typeface="Calibri" charset="0"/>
-                        <a:ea typeface="Calibri" charset="0"/>
-                        <a:cs typeface="Calibri" charset="0"/>
-                      </a:endParaRPr>
-                    </a:p>
-                  </a:txBody>
-                  <a:tcPr marL="76200" marR="76200" marT="38100" marB="38100" anchor="ctr">
-                    <a:lnL w="12700" cap="flat" cmpd="sng" algn="ctr">
-                      <a:solidFill>
-                        <a:srgbClr val="172A5E"/>
-                      </a:solidFill>
-                      <a:prstDash val="solid"/>
-                      <a:round/>
-                      <a:headEnd type="none" w="med" len="med"/>
-                      <a:tailEnd type="none" w="med" len="med"/>
-                    </a:lnL>
-                    <a:lnR w="12700" cap="flat" cmpd="sng" algn="ctr">
-                      <a:solidFill>
-                        <a:srgbClr val="172A5E"/>
-                      </a:solidFill>
-                      <a:prstDash val="solid"/>
-                      <a:round/>
-                      <a:headEnd type="none" w="med" len="med"/>
-                      <a:tailEnd type="none" w="med" len="med"/>
-                    </a:lnR>
-                    <a:lnT w="12700" cap="flat" cmpd="sng" algn="ctr">
-                      <a:solidFill>
-                        <a:srgbClr val="172A5E"/>
-                      </a:solidFill>
-                      <a:prstDash val="solid"/>
-                      <a:round/>
-                      <a:headEnd type="none" w="med" len="med"/>
-                      <a:tailEnd type="none" w="med" len="med"/>
-                    </a:lnT>
-                    <a:lnB w="12700" cap="flat" cmpd="sng" algn="ctr">
-                      <a:solidFill>
-                        <a:srgbClr val="172A5E"/>
-                      </a:solidFill>
-                      <a:prstDash val="solid"/>
-                      <a:round/>
-                      <a:headEnd type="none" w="med" len="med"/>
-                      <a:tailEnd type="none" w="med" len="med"/>
-                    </a:lnB>
-                    <a:solidFill>
-                      <a:srgbClr val="04081F"/>
-                    </a:solidFill>
-                  </a:tcPr>
-                </a:tc>
-                <a:tc>
-                  <a:txBody>
-                    <a:bodyPr/>
-                    <a:lstStyle/>
-                    <a:p>
-                      <a:pPr indent="0" marL="0">
-                        <a:buNone/>
-                      </a:pPr>
-                      <a:r>
-                        <a:rPr lang="en-US" sz="1050" dirty="0">
-                          <a:solidFill>
-                            <a:srgbClr val="AAB4D4"/>
-                          </a:solidFill>
-                          <a:latin typeface="Calibri" pitchFamily="34" charset="0"/>
-                          <a:ea typeface="Calibri" pitchFamily="34" charset="-122"/>
-                          <a:cs typeface="Calibri" pitchFamily="34" charset="-120"/>
-                        </a:rPr>
-                        <a:t>0–3</a:t>
-                      </a:r>
-                      <a:endParaRPr lang="en-US" sz="1050" dirty="0">
-                        <a:latin typeface="Calibri" charset="0"/>
-                        <a:ea typeface="Calibri" charset="0"/>
-                        <a:cs typeface="Calibri" charset="0"/>
-                      </a:endParaRPr>
-                    </a:p>
-                  </a:txBody>
-                  <a:tcPr marL="76200" marR="76200" marT="38100" marB="38100" anchor="ctr">
-                    <a:lnL w="12700" cap="flat" cmpd="sng" algn="ctr">
-                      <a:solidFill>
-                        <a:srgbClr val="172A5E"/>
-                      </a:solidFill>
-                      <a:prstDash val="solid"/>
-                      <a:round/>
-                      <a:headEnd type="none" w="med" len="med"/>
-                      <a:tailEnd type="none" w="med" len="med"/>
-                    </a:lnL>
-                    <a:lnR w="12700" cap="flat" cmpd="sng" algn="ctr">
-                      <a:solidFill>
-                        <a:srgbClr val="172A5E"/>
-                      </a:solidFill>
-                      <a:prstDash val="solid"/>
-                      <a:round/>
-                      <a:headEnd type="none" w="med" len="med"/>
-                      <a:tailEnd type="none" w="med" len="med"/>
-                    </a:lnR>
-                    <a:lnT w="12700" cap="flat" cmpd="sng" algn="ctr">
-                      <a:solidFill>
-                        <a:srgbClr val="172A5E"/>
-                      </a:solidFill>
-                      <a:prstDash val="solid"/>
-                      <a:round/>
-                      <a:headEnd type="none" w="med" len="med"/>
-                      <a:tailEnd type="none" w="med" len="med"/>
-                    </a:lnT>
-                    <a:lnB w="12700" cap="flat" cmpd="sng" algn="ctr">
-                      <a:solidFill>
-                        <a:srgbClr val="172A5E"/>
-                      </a:solidFill>
-                      <a:prstDash val="solid"/>
-                      <a:round/>
-                      <a:headEnd type="none" w="med" len="med"/>
-                      <a:tailEnd type="none" w="med" len="med"/>
-                    </a:lnB>
-                    <a:solidFill>
-                      <a:srgbClr val="04081F"/>
-                    </a:solidFill>
-                  </a:tcPr>
-                </a:tc>
-                <a:tc>
-                  <a:txBody>
-                    <a:bodyPr/>
-                    <a:lstStyle/>
-                    <a:p>
-                      <a:pPr indent="0" marL="0">
-                        <a:buNone/>
-                      </a:pPr>
-                      <a:r>
-                        <a:rPr lang="en-US" sz="1050" dirty="0">
-                          <a:solidFill>
-                            <a:srgbClr val="AAB4D4"/>
-                          </a:solidFill>
-                          <a:latin typeface="Calibri" pitchFamily="34" charset="0"/>
-                          <a:ea typeface="Calibri" pitchFamily="34" charset="-122"/>
-                          <a:cs typeface="Calibri" pitchFamily="34" charset="-120"/>
-                        </a:rPr>
-                        <a:t>—</a:t>
-                      </a:r>
-                      <a:endParaRPr lang="en-US" sz="1050" dirty="0">
-                        <a:latin typeface="Calibri" charset="0"/>
-                        <a:ea typeface="Calibri" charset="0"/>
-                        <a:cs typeface="Calibri" charset="0"/>
-                      </a:endParaRPr>
-                    </a:p>
-                  </a:txBody>
-                  <a:tcPr marL="76200" marR="76200" marT="38100" marB="38100" anchor="ctr">
-                    <a:lnL w="12700" cap="flat" cmpd="sng" algn="ctr">
-                      <a:solidFill>
-                        <a:srgbClr val="172A5E"/>
-                      </a:solidFill>
-                      <a:prstDash val="solid"/>
-                      <a:round/>
-                      <a:headEnd type="none" w="med" len="med"/>
-                      <a:tailEnd type="none" w="med" len="med"/>
-                    </a:lnL>
-                    <a:lnR w="12700" cap="flat" cmpd="sng" algn="ctr">
-                      <a:solidFill>
-                        <a:srgbClr val="172A5E"/>
-                      </a:solidFill>
-                      <a:prstDash val="solid"/>
-                      <a:round/>
-                      <a:headEnd type="none" w="med" len="med"/>
-                      <a:tailEnd type="none" w="med" len="med"/>
-                    </a:lnR>
-                    <a:lnT w="12700" cap="flat" cmpd="sng" algn="ctr">
-                      <a:solidFill>
-                        <a:srgbClr val="172A5E"/>
-                      </a:solidFill>
-                      <a:prstDash val="solid"/>
-                      <a:round/>
-                      <a:headEnd type="none" w="med" len="med"/>
-                      <a:tailEnd type="none" w="med" len="med"/>
-                    </a:lnT>
-                    <a:lnB w="12700" cap="flat" cmpd="sng" algn="ctr">
-                      <a:solidFill>
-                        <a:srgbClr val="172A5E"/>
-                      </a:solidFill>
-                      <a:prstDash val="solid"/>
-                      <a:round/>
-                      <a:headEnd type="none" w="med" len="med"/>
-                      <a:tailEnd type="none" w="med" len="med"/>
-                    </a:lnB>
-                    <a:solidFill>
-                      <a:srgbClr val="04081F"/>
-                    </a:solidFill>
-                  </a:tcPr>
-                </a:tc>
-                <a:tc>
-                  <a:txBody>
-                    <a:bodyPr/>
-                    <a:lstStyle/>
-                    <a:p>
-                      <a:pPr indent="0" marL="0">
-                        <a:buNone/>
-                      </a:pPr>
-                      <a:r>
-                        <a:rPr lang="en-US" sz="1050" dirty="0">
-                          <a:solidFill>
-                            <a:srgbClr val="AAB4D4"/>
-                          </a:solidFill>
-                          <a:latin typeface="Calibri" pitchFamily="34" charset="0"/>
-                          <a:ea typeface="Calibri" pitchFamily="34" charset="-122"/>
-                          <a:cs typeface="Calibri" pitchFamily="34" charset="-120"/>
-                        </a:rPr>
-                        <a:t>2,500 / año</a:t>
-                      </a:r>
-                      <a:endParaRPr lang="en-US" sz="1050" dirty="0">
-                        <a:latin typeface="Calibri" charset="0"/>
-                        <a:ea typeface="Calibri" charset="0"/>
-                        <a:cs typeface="Calibri" charset="0"/>
-                      </a:endParaRPr>
-                    </a:p>
-                  </a:txBody>
-                  <a:tcPr marL="76200" marR="76200" marT="38100" marB="38100" anchor="ctr">
-                    <a:lnL w="12700" cap="flat" cmpd="sng" algn="ctr">
-                      <a:solidFill>
-                        <a:srgbClr val="172A5E"/>
-                      </a:solidFill>
-                      <a:prstDash val="solid"/>
-                      <a:round/>
-                      <a:headEnd type="none" w="med" len="med"/>
-                      <a:tailEnd type="none" w="med" len="med"/>
-                    </a:lnL>
-                    <a:lnR w="12700" cap="flat" cmpd="sng" algn="ctr">
-                      <a:solidFill>
-                        <a:srgbClr val="172A5E"/>
-                      </a:solidFill>
-                      <a:prstDash val="solid"/>
-                      <a:round/>
-                      <a:headEnd type="none" w="med" len="med"/>
-                      <a:tailEnd type="none" w="med" len="med"/>
-                    </a:lnR>
-                    <a:lnT w="12700" cap="flat" cmpd="sng" algn="ctr">
-                      <a:solidFill>
-                        <a:srgbClr val="172A5E"/>
-                      </a:solidFill>
-                      <a:prstDash val="solid"/>
-                      <a:round/>
-                      <a:headEnd type="none" w="med" len="med"/>
-                      <a:tailEnd type="none" w="med" len="med"/>
-                    </a:lnT>
-                    <a:lnB w="12700" cap="flat" cmpd="sng" algn="ctr">
-                      <a:solidFill>
-                        <a:srgbClr val="172A5E"/>
-                      </a:solidFill>
-                      <a:prstDash val="solid"/>
-                      <a:round/>
-                      <a:headEnd type="none" w="med" len="med"/>
-                      <a:tailEnd type="none" w="med" len="med"/>
-                    </a:lnB>
-                    <a:solidFill>
-                      <a:srgbClr val="04081F"/>
-                    </a:solidFill>
-                  </a:tcPr>
-                </a:tc>
-              </a:tr>
-              <a:tr h="272491">
-                <a:tc>
-                  <a:txBody>
-                    <a:bodyPr/>
-                    <a:lstStyle/>
-                    <a:p>
-                      <a:pPr indent="0" marL="0">
-                        <a:buNone/>
-                      </a:pPr>
-                      <a:r>
-                        <a:rPr lang="en-US" sz="1050" dirty="0">
-                          <a:solidFill>
-                            <a:srgbClr val="AAB4D4"/>
-                          </a:solidFill>
-                          <a:latin typeface="Calibri" pitchFamily="34" charset="0"/>
-                          <a:ea typeface="Calibri" pitchFamily="34" charset="-122"/>
-                          <a:cs typeface="Calibri" pitchFamily="34" charset="-120"/>
-                        </a:rPr>
-                        <a:t>Certificaciones (12–16 exámenes)</a:t>
-                      </a:r>
-                      <a:endParaRPr lang="en-US" sz="1050" dirty="0">
-                        <a:latin typeface="Calibri" charset="0"/>
-                        <a:ea typeface="Calibri" charset="0"/>
-                        <a:cs typeface="Calibri" charset="0"/>
-                      </a:endParaRPr>
-                    </a:p>
-                  </a:txBody>
-                  <a:tcPr marL="76200" marR="76200" marT="38100" marB="38100" anchor="ctr">
-                    <a:lnL w="12700" cap="flat" cmpd="sng" algn="ctr">
-                      <a:solidFill>
-                        <a:srgbClr val="172A5E"/>
-                      </a:solidFill>
-                      <a:prstDash val="solid"/>
-                      <a:round/>
-                      <a:headEnd type="none" w="med" len="med"/>
-                      <a:tailEnd type="none" w="med" len="med"/>
-                    </a:lnL>
-                    <a:lnR w="12700" cap="flat" cmpd="sng" algn="ctr">
-                      <a:solidFill>
-                        <a:srgbClr val="172A5E"/>
-                      </a:solidFill>
-                      <a:prstDash val="solid"/>
-                      <a:round/>
-                      <a:headEnd type="none" w="med" len="med"/>
-                      <a:tailEnd type="none" w="med" len="med"/>
-                    </a:lnR>
-                    <a:lnT w="12700" cap="flat" cmpd="sng" algn="ctr">
-                      <a:solidFill>
-                        <a:srgbClr val="172A5E"/>
-                      </a:solidFill>
-                      <a:prstDash val="solid"/>
-                      <a:round/>
-                      <a:headEnd type="none" w="med" len="med"/>
-                      <a:tailEnd type="none" w="med" len="med"/>
-                    </a:lnT>
-                    <a:lnB w="12700" cap="flat" cmpd="sng" algn="ctr">
-                      <a:solidFill>
-                        <a:srgbClr val="172A5E"/>
-                      </a:solidFill>
-                      <a:prstDash val="solid"/>
-                      <a:round/>
-                      <a:headEnd type="none" w="med" len="med"/>
-                      <a:tailEnd type="none" w="med" len="med"/>
-                    </a:lnB>
-                    <a:solidFill>
-                      <a:srgbClr val="04081F"/>
-                    </a:solidFill>
-                  </a:tcPr>
-                </a:tc>
-                <a:tc>
-                  <a:txBody>
-                    <a:bodyPr/>
-                    <a:lstStyle/>
-                    <a:p>
-                      <a:pPr indent="0" marL="0">
-                        <a:buNone/>
-                      </a:pPr>
-                      <a:r>
-                        <a:rPr lang="en-US" sz="1050" dirty="0">
-                          <a:solidFill>
-                            <a:srgbClr val="AAB4D4"/>
-                          </a:solidFill>
-                          <a:latin typeface="Calibri" pitchFamily="34" charset="0"/>
-                          <a:ea typeface="Calibri" pitchFamily="34" charset="-122"/>
-                          <a:cs typeface="Calibri" pitchFamily="34" charset="-120"/>
-                        </a:rPr>
-                        <a:t>0–2</a:t>
-                      </a:r>
-                      <a:endParaRPr lang="en-US" sz="1050" dirty="0">
-                        <a:latin typeface="Calibri" charset="0"/>
-                        <a:ea typeface="Calibri" charset="0"/>
-                        <a:cs typeface="Calibri" charset="0"/>
-                      </a:endParaRPr>
-                    </a:p>
-                  </a:txBody>
-                  <a:tcPr marL="76200" marR="76200" marT="38100" marB="38100" anchor="ctr">
-                    <a:lnL w="12700" cap="flat" cmpd="sng" algn="ctr">
-                      <a:solidFill>
-                        <a:srgbClr val="172A5E"/>
-                      </a:solidFill>
-                      <a:prstDash val="solid"/>
-                      <a:round/>
-                      <a:headEnd type="none" w="med" len="med"/>
-                      <a:tailEnd type="none" w="med" len="med"/>
-                    </a:lnL>
-                    <a:lnR w="12700" cap="flat" cmpd="sng" algn="ctr">
-                      <a:solidFill>
-                        <a:srgbClr val="172A5E"/>
-                      </a:solidFill>
-                      <a:prstDash val="solid"/>
-                      <a:round/>
-                      <a:headEnd type="none" w="med" len="med"/>
-                      <a:tailEnd type="none" w="med" len="med"/>
-                    </a:lnR>
-                    <a:lnT w="12700" cap="flat" cmpd="sng" algn="ctr">
-                      <a:solidFill>
-                        <a:srgbClr val="172A5E"/>
-                      </a:solidFill>
-                      <a:prstDash val="solid"/>
-                      <a:round/>
-                      <a:headEnd type="none" w="med" len="med"/>
-                      <a:tailEnd type="none" w="med" len="med"/>
-                    </a:lnT>
-                    <a:lnB w="12700" cap="flat" cmpd="sng" algn="ctr">
-                      <a:solidFill>
-                        <a:srgbClr val="172A5E"/>
-                      </a:solidFill>
-                      <a:prstDash val="solid"/>
-                      <a:round/>
-                      <a:headEnd type="none" w="med" len="med"/>
-                      <a:tailEnd type="none" w="med" len="med"/>
-                    </a:lnB>
-                    <a:solidFill>
-                      <a:srgbClr val="04081F"/>
-                    </a:solidFill>
-                  </a:tcPr>
-                </a:tc>
-                <a:tc>
-                  <a:txBody>
-                    <a:bodyPr/>
-                    <a:lstStyle/>
-                    <a:p>
-                      <a:pPr indent="0" marL="0">
-                        <a:buNone/>
-                      </a:pPr>
-                      <a:r>
-                        <a:rPr lang="en-US" sz="1050" dirty="0">
-                          <a:solidFill>
-                            <a:srgbClr val="AAB4D4"/>
-                          </a:solidFill>
-                          <a:latin typeface="Calibri" pitchFamily="34" charset="0"/>
-                          <a:ea typeface="Calibri" pitchFamily="34" charset="-122"/>
-                          <a:cs typeface="Calibri" pitchFamily="34" charset="-120"/>
-                        </a:rPr>
-                        <a:t>—</a:t>
-                      </a:r>
-                      <a:endParaRPr lang="en-US" sz="1050" dirty="0">
-                        <a:latin typeface="Calibri" charset="0"/>
-                        <a:ea typeface="Calibri" charset="0"/>
-                        <a:cs typeface="Calibri" charset="0"/>
-                      </a:endParaRPr>
-                    </a:p>
-                  </a:txBody>
-                  <a:tcPr marL="76200" marR="76200" marT="38100" marB="38100" anchor="ctr">
-                    <a:lnL w="12700" cap="flat" cmpd="sng" algn="ctr">
-                      <a:solidFill>
-                        <a:srgbClr val="172A5E"/>
-                      </a:solidFill>
-                      <a:prstDash val="solid"/>
-                      <a:round/>
-                      <a:headEnd type="none" w="med" len="med"/>
-                      <a:tailEnd type="none" w="med" len="med"/>
-                    </a:lnL>
-                    <a:lnR w="12700" cap="flat" cmpd="sng" algn="ctr">
-                      <a:solidFill>
-                        <a:srgbClr val="172A5E"/>
-                      </a:solidFill>
-                      <a:prstDash val="solid"/>
-                      <a:round/>
-                      <a:headEnd type="none" w="med" len="med"/>
-                      <a:tailEnd type="none" w="med" len="med"/>
-                    </a:lnR>
-                    <a:lnT w="12700" cap="flat" cmpd="sng" algn="ctr">
-                      <a:solidFill>
-                        <a:srgbClr val="172A5E"/>
-                      </a:solidFill>
-                      <a:prstDash val="solid"/>
-                      <a:round/>
-                      <a:headEnd type="none" w="med" len="med"/>
-                      <a:tailEnd type="none" w="med" len="med"/>
-                    </a:lnT>
-                    <a:lnB w="12700" cap="flat" cmpd="sng" algn="ctr">
-                      <a:solidFill>
-                        <a:srgbClr val="172A5E"/>
-                      </a:solidFill>
-                      <a:prstDash val="solid"/>
-                      <a:round/>
-                      <a:headEnd type="none" w="med" len="med"/>
-                      <a:tailEnd type="none" w="med" len="med"/>
-                    </a:lnB>
-                    <a:solidFill>
-                      <a:srgbClr val="04081F"/>
-                    </a:solidFill>
-                  </a:tcPr>
-                </a:tc>
-                <a:tc>
-                  <a:txBody>
-                    <a:bodyPr/>
-                    <a:lstStyle/>
-                    <a:p>
-                      <a:pPr indent="0" marL="0">
-                        <a:buNone/>
-                      </a:pPr>
-                      <a:r>
-                        <a:rPr lang="en-US" sz="1050" dirty="0">
-                          <a:solidFill>
-                            <a:srgbClr val="AAB4D4"/>
-                          </a:solidFill>
-                          <a:latin typeface="Calibri" pitchFamily="34" charset="0"/>
-                          <a:ea typeface="Calibri" pitchFamily="34" charset="-122"/>
-                          <a:cs typeface="Calibri" pitchFamily="34" charset="-120"/>
-                        </a:rPr>
-                        <a:t>2,000–5,300</a:t>
-                      </a:r>
-                      <a:endParaRPr lang="en-US" sz="1050" dirty="0">
-                        <a:latin typeface="Calibri" charset="0"/>
-                        <a:ea typeface="Calibri" charset="0"/>
-                        <a:cs typeface="Calibri" charset="0"/>
-                      </a:endParaRPr>
-                    </a:p>
-                  </a:txBody>
-                  <a:tcPr marL="76200" marR="76200" marT="38100" marB="38100" anchor="ctr">
-                    <a:lnL w="12700" cap="flat" cmpd="sng" algn="ctr">
-                      <a:solidFill>
-                        <a:srgbClr val="172A5E"/>
-                      </a:solidFill>
-                      <a:prstDash val="solid"/>
-                      <a:round/>
-                      <a:headEnd type="none" w="med" len="med"/>
-                      <a:tailEnd type="none" w="med" len="med"/>
-                    </a:lnL>
-                    <a:lnR w="12700" cap="flat" cmpd="sng" algn="ctr">
-                      <a:solidFill>
-                        <a:srgbClr val="172A5E"/>
-                      </a:solidFill>
-                      <a:prstDash val="solid"/>
-                      <a:round/>
-                      <a:headEnd type="none" w="med" len="med"/>
-                      <a:tailEnd type="none" w="med" len="med"/>
-                    </a:lnR>
-                    <a:lnT w="12700" cap="flat" cmpd="sng" algn="ctr">
-                      <a:solidFill>
-                        <a:srgbClr val="172A5E"/>
-                      </a:solidFill>
-                      <a:prstDash val="solid"/>
-                      <a:round/>
-                      <a:headEnd type="none" w="med" len="med"/>
-                      <a:tailEnd type="none" w="med" len="med"/>
-                    </a:lnT>
-                    <a:lnB w="12700" cap="flat" cmpd="sng" algn="ctr">
-                      <a:solidFill>
-                        <a:srgbClr val="172A5E"/>
-                      </a:solidFill>
-                      <a:prstDash val="solid"/>
-                      <a:round/>
-                      <a:headEnd type="none" w="med" len="med"/>
-                      <a:tailEnd type="none" w="med" len="med"/>
-                    </a:lnB>
-                    <a:solidFill>
-                      <a:srgbClr val="04081F"/>
-                    </a:solidFill>
-                  </a:tcPr>
-                </a:tc>
-              </a:tr>
-              <a:tr h="272491">
-                <a:tc>
-                  <a:txBody>
-                    <a:bodyPr/>
-                    <a:lstStyle/>
-                    <a:p>
-                      <a:pPr indent="0" marL="0">
-                        <a:buNone/>
-                      </a:pPr>
-                      <a:r>
-                        <a:rPr lang="en-US" sz="1050" dirty="0">
-                          <a:solidFill>
-                            <a:srgbClr val="AAB4D4"/>
-                          </a:solidFill>
-                          <a:latin typeface="Calibri" pitchFamily="34" charset="0"/>
-                          <a:ea typeface="Calibri" pitchFamily="34" charset="-122"/>
-                          <a:cs typeface="Calibri" pitchFamily="34" charset="-120"/>
-                        </a:rPr>
-                        <a:t>Contenido y edición de video</a:t>
-                      </a:r>
-                      <a:endParaRPr lang="en-US" sz="1050" dirty="0">
-                        <a:latin typeface="Calibri" charset="0"/>
-                        <a:ea typeface="Calibri" charset="0"/>
-                        <a:cs typeface="Calibri" charset="0"/>
-                      </a:endParaRPr>
-                    </a:p>
-                  </a:txBody>
-                  <a:tcPr marL="76200" marR="76200" marT="38100" marB="38100" anchor="ctr">
-                    <a:lnL w="12700" cap="flat" cmpd="sng" algn="ctr">
-                      <a:solidFill>
-                        <a:srgbClr val="172A5E"/>
-                      </a:solidFill>
-                      <a:prstDash val="solid"/>
-                      <a:round/>
-                      <a:headEnd type="none" w="med" len="med"/>
-                      <a:tailEnd type="none" w="med" len="med"/>
-                    </a:lnL>
-                    <a:lnR w="12700" cap="flat" cmpd="sng" algn="ctr">
-                      <a:solidFill>
-                        <a:srgbClr val="172A5E"/>
-                      </a:solidFill>
-                      <a:prstDash val="solid"/>
-                      <a:round/>
-                      <a:headEnd type="none" w="med" len="med"/>
-                      <a:tailEnd type="none" w="med" len="med"/>
-                    </a:lnR>
-                    <a:lnT w="12700" cap="flat" cmpd="sng" algn="ctr">
-                      <a:solidFill>
-                        <a:srgbClr val="172A5E"/>
-                      </a:solidFill>
-                      <a:prstDash val="solid"/>
-                      <a:round/>
-                      <a:headEnd type="none" w="med" len="med"/>
-                      <a:tailEnd type="none" w="med" len="med"/>
-                    </a:lnT>
-                    <a:lnB w="12700" cap="flat" cmpd="sng" algn="ctr">
-                      <a:solidFill>
-                        <a:srgbClr val="172A5E"/>
-                      </a:solidFill>
-                      <a:prstDash val="solid"/>
-                      <a:round/>
-                      <a:headEnd type="none" w="med" len="med"/>
-                      <a:tailEnd type="none" w="med" len="med"/>
-                    </a:lnB>
-                    <a:solidFill>
-                      <a:srgbClr val="04081F"/>
-                    </a:solidFill>
-                  </a:tcPr>
-                </a:tc>
-                <a:tc>
-                  <a:txBody>
-                    <a:bodyPr/>
-                    <a:lstStyle/>
-                    <a:p>
-                      <a:pPr indent="0" marL="0">
-                        <a:buNone/>
-                      </a:pPr>
-                      <a:r>
-                        <a:rPr lang="en-US" sz="1050" dirty="0">
-                          <a:solidFill>
-                            <a:srgbClr val="AAB4D4"/>
-                          </a:solidFill>
-                          <a:latin typeface="Calibri" pitchFamily="34" charset="0"/>
-                          <a:ea typeface="Calibri" pitchFamily="34" charset="-122"/>
-                          <a:cs typeface="Calibri" pitchFamily="34" charset="-120"/>
-                        </a:rPr>
-                        <a:t>1–3</a:t>
-                      </a:r>
-                      <a:endParaRPr lang="en-US" sz="1050" dirty="0">
-                        <a:latin typeface="Calibri" charset="0"/>
-                        <a:ea typeface="Calibri" charset="0"/>
-                        <a:cs typeface="Calibri" charset="0"/>
-                      </a:endParaRPr>
-                    </a:p>
-                  </a:txBody>
-                  <a:tcPr marL="76200" marR="76200" marT="38100" marB="38100" anchor="ctr">
-                    <a:lnL w="12700" cap="flat" cmpd="sng" algn="ctr">
-                      <a:solidFill>
-                        <a:srgbClr val="172A5E"/>
-                      </a:solidFill>
-                      <a:prstDash val="solid"/>
-                      <a:round/>
-                      <a:headEnd type="none" w="med" len="med"/>
-                      <a:tailEnd type="none" w="med" len="med"/>
-                    </a:lnL>
-                    <a:lnR w="12700" cap="flat" cmpd="sng" algn="ctr">
-                      <a:solidFill>
-                        <a:srgbClr val="172A5E"/>
-                      </a:solidFill>
-                      <a:prstDash val="solid"/>
-                      <a:round/>
-                      <a:headEnd type="none" w="med" len="med"/>
-                      <a:tailEnd type="none" w="med" len="med"/>
-                    </a:lnR>
-                    <a:lnT w="12700" cap="flat" cmpd="sng" algn="ctr">
-                      <a:solidFill>
-                        <a:srgbClr val="172A5E"/>
-                      </a:solidFill>
-                      <a:prstDash val="solid"/>
-                      <a:round/>
-                      <a:headEnd type="none" w="med" len="med"/>
-                      <a:tailEnd type="none" w="med" len="med"/>
-                    </a:lnT>
-                    <a:lnB w="12700" cap="flat" cmpd="sng" algn="ctr">
-                      <a:solidFill>
-                        <a:srgbClr val="172A5E"/>
-                      </a:solidFill>
-                      <a:prstDash val="solid"/>
-                      <a:round/>
-                      <a:headEnd type="none" w="med" len="med"/>
-                      <a:tailEnd type="none" w="med" len="med"/>
-                    </a:lnB>
-                    <a:solidFill>
-                      <a:srgbClr val="04081F"/>
-                    </a:solidFill>
-                  </a:tcPr>
-                </a:tc>
-                <a:tc>
-                  <a:txBody>
-                    <a:bodyPr/>
-                    <a:lstStyle/>
-                    <a:p>
-                      <a:pPr indent="0" marL="0">
-                        <a:buNone/>
-                      </a:pPr>
-                      <a:r>
-                        <a:rPr lang="en-US" sz="1050" dirty="0">
-                          <a:solidFill>
-                            <a:srgbClr val="AAB4D4"/>
-                          </a:solidFill>
-                          <a:latin typeface="Calibri" pitchFamily="34" charset="0"/>
-                          <a:ea typeface="Calibri" pitchFamily="34" charset="-122"/>
-                          <a:cs typeface="Calibri" pitchFamily="34" charset="-120"/>
-                        </a:rPr>
-                        <a:t>800–1,500</a:t>
-                      </a:r>
-                      <a:endParaRPr lang="en-US" sz="1050" dirty="0">
-                        <a:latin typeface="Calibri" charset="0"/>
-                        <a:ea typeface="Calibri" charset="0"/>
-                        <a:cs typeface="Calibri" charset="0"/>
-                      </a:endParaRPr>
-                    </a:p>
-                  </a:txBody>
-                  <a:tcPr marL="76200" marR="76200" marT="38100" marB="38100" anchor="ctr">
-                    <a:lnL w="12700" cap="flat" cmpd="sng" algn="ctr">
-                      <a:solidFill>
-                        <a:srgbClr val="172A5E"/>
-                      </a:solidFill>
-                      <a:prstDash val="solid"/>
-                      <a:round/>
-                      <a:headEnd type="none" w="med" len="med"/>
-                      <a:tailEnd type="none" w="med" len="med"/>
-                    </a:lnL>
-                    <a:lnR w="12700" cap="flat" cmpd="sng" algn="ctr">
-                      <a:solidFill>
-                        <a:srgbClr val="172A5E"/>
-                      </a:solidFill>
-                      <a:prstDash val="solid"/>
-                      <a:round/>
-                      <a:headEnd type="none" w="med" len="med"/>
-                      <a:tailEnd type="none" w="med" len="med"/>
-                    </a:lnR>
-                    <a:lnT w="12700" cap="flat" cmpd="sng" algn="ctr">
-                      <a:solidFill>
-                        <a:srgbClr val="172A5E"/>
-                      </a:solidFill>
-                      <a:prstDash val="solid"/>
-                      <a:round/>
-                      <a:headEnd type="none" w="med" len="med"/>
-                      <a:tailEnd type="none" w="med" len="med"/>
-                    </a:lnT>
-                    <a:lnB w="12700" cap="flat" cmpd="sng" algn="ctr">
-                      <a:solidFill>
-                        <a:srgbClr val="172A5E"/>
-                      </a:solidFill>
-                      <a:prstDash val="solid"/>
-                      <a:round/>
-                      <a:headEnd type="none" w="med" len="med"/>
-                      <a:tailEnd type="none" w="med" len="med"/>
-                    </a:lnB>
-                    <a:solidFill>
-                      <a:srgbClr val="04081F"/>
-                    </a:solidFill>
-                  </a:tcPr>
-                </a:tc>
-                <a:tc>
-                  <a:txBody>
-                    <a:bodyPr/>
-                    <a:lstStyle/>
-                    <a:p>
-                      <a:pPr indent="0" marL="0">
-                        <a:buNone/>
-                      </a:pPr>
-                      <a:r>
-                        <a:rPr lang="en-US" sz="1050" dirty="0">
-                          <a:solidFill>
-                            <a:srgbClr val="AAB4D4"/>
-                          </a:solidFill>
-                          <a:latin typeface="Calibri" pitchFamily="34" charset="0"/>
-                          <a:ea typeface="Calibri" pitchFamily="34" charset="-122"/>
-                          <a:cs typeface="Calibri" pitchFamily="34" charset="-120"/>
-                        </a:rPr>
-                        <a:t>—</a:t>
-                      </a:r>
-                      <a:endParaRPr lang="en-US" sz="1050" dirty="0">
-                        <a:latin typeface="Calibri" charset="0"/>
-                        <a:ea typeface="Calibri" charset="0"/>
-                        <a:cs typeface="Calibri" charset="0"/>
-                      </a:endParaRPr>
-                    </a:p>
-                  </a:txBody>
-                  <a:tcPr marL="76200" marR="76200" marT="38100" marB="38100" anchor="ctr">
-                    <a:lnL w="12700" cap="flat" cmpd="sng" algn="ctr">
-                      <a:solidFill>
-                        <a:srgbClr val="172A5E"/>
-                      </a:solidFill>
-                      <a:prstDash val="solid"/>
-                      <a:round/>
-                      <a:headEnd type="none" w="med" len="med"/>
-                      <a:tailEnd type="none" w="med" len="med"/>
-                    </a:lnL>
-                    <a:lnR w="12700" cap="flat" cmpd="sng" algn="ctr">
-                      <a:solidFill>
-                        <a:srgbClr val="172A5E"/>
-                      </a:solidFill>
-                      <a:prstDash val="solid"/>
-                      <a:round/>
-                      <a:headEnd type="none" w="med" len="med"/>
-                      <a:tailEnd type="none" w="med" len="med"/>
-                    </a:lnR>
-                    <a:lnT w="12700" cap="flat" cmpd="sng" algn="ctr">
-                      <a:solidFill>
-                        <a:srgbClr val="172A5E"/>
-                      </a:solidFill>
-                      <a:prstDash val="solid"/>
-                      <a:round/>
-                      <a:headEnd type="none" w="med" len="med"/>
-                      <a:tailEnd type="none" w="med" len="med"/>
-                    </a:lnT>
-                    <a:lnB w="12700" cap="flat" cmpd="sng" algn="ctr">
-                      <a:solidFill>
-                        <a:srgbClr val="172A5E"/>
-                      </a:solidFill>
-                      <a:prstDash val="solid"/>
-                      <a:round/>
-                      <a:headEnd type="none" w="med" len="med"/>
-                      <a:tailEnd type="none" w="med" len="med"/>
-                    </a:lnB>
-                    <a:solidFill>
-                      <a:srgbClr val="04081F"/>
-                    </a:solidFill>
-                  </a:tcPr>
-                </a:tc>
-              </a:tr>
-              <a:tr h="272491">
-                <a:tc>
-                  <a:txBody>
-                    <a:bodyPr/>
-                    <a:lstStyle/>
-                    <a:p>
-                      <a:pPr indent="0" marL="0">
-                        <a:buNone/>
-                      </a:pPr>
-                      <a:r>
-                        <a:rPr lang="en-US" sz="1050" dirty="0">
-                          <a:solidFill>
-                            <a:srgbClr val="AAB4D4"/>
-                          </a:solidFill>
-                          <a:latin typeface="Calibri" pitchFamily="34" charset="0"/>
-                          <a:ea typeface="Calibri" pitchFamily="34" charset="-122"/>
-                          <a:cs typeface="Calibri" pitchFamily="34" charset="-120"/>
-                        </a:rPr>
-                        <a:t>Estudio de madurez (campo + diseño)</a:t>
-                      </a:r>
-                      <a:endParaRPr lang="en-US" sz="1050" dirty="0">
-                        <a:latin typeface="Calibri" charset="0"/>
-                        <a:ea typeface="Calibri" charset="0"/>
-                        <a:cs typeface="Calibri" charset="0"/>
-                      </a:endParaRPr>
-                    </a:p>
-                  </a:txBody>
-                  <a:tcPr marL="76200" marR="76200" marT="38100" marB="38100" anchor="ctr">
-                    <a:lnL w="12700" cap="flat" cmpd="sng" algn="ctr">
-                      <a:solidFill>
-                        <a:srgbClr val="172A5E"/>
-                      </a:solidFill>
-                      <a:prstDash val="solid"/>
-                      <a:round/>
-                      <a:headEnd type="none" w="med" len="med"/>
-                      <a:tailEnd type="none" w="med" len="med"/>
-                    </a:lnL>
-                    <a:lnR w="12700" cap="flat" cmpd="sng" algn="ctr">
-                      <a:solidFill>
-                        <a:srgbClr val="172A5E"/>
-                      </a:solidFill>
-                      <a:prstDash val="solid"/>
-                      <a:round/>
-                      <a:headEnd type="none" w="med" len="med"/>
-                      <a:tailEnd type="none" w="med" len="med"/>
-                    </a:lnR>
-                    <a:lnT w="12700" cap="flat" cmpd="sng" algn="ctr">
-                      <a:solidFill>
-                        <a:srgbClr val="172A5E"/>
-                      </a:solidFill>
-                      <a:prstDash val="solid"/>
-                      <a:round/>
-                      <a:headEnd type="none" w="med" len="med"/>
-                      <a:tailEnd type="none" w="med" len="med"/>
-                    </a:lnT>
-                    <a:lnB w="12700" cap="flat" cmpd="sng" algn="ctr">
-                      <a:solidFill>
-                        <a:srgbClr val="172A5E"/>
-                      </a:solidFill>
-                      <a:prstDash val="solid"/>
-                      <a:round/>
-                      <a:headEnd type="none" w="med" len="med"/>
-                      <a:tailEnd type="none" w="med" len="med"/>
-                    </a:lnB>
-                    <a:solidFill>
-                      <a:srgbClr val="04081F"/>
-                    </a:solidFill>
-                  </a:tcPr>
-                </a:tc>
-                <a:tc>
-                  <a:txBody>
-                    <a:bodyPr/>
-                    <a:lstStyle/>
-                    <a:p>
-                      <a:pPr indent="0" marL="0">
-                        <a:buNone/>
-                      </a:pPr>
-                      <a:r>
-                        <a:rPr lang="en-US" sz="1050" dirty="0">
-                          <a:solidFill>
-                            <a:srgbClr val="AAB4D4"/>
-                          </a:solidFill>
-                          <a:latin typeface="Calibri" pitchFamily="34" charset="0"/>
-                          <a:ea typeface="Calibri" pitchFamily="34" charset="-122"/>
-                          <a:cs typeface="Calibri" pitchFamily="34" charset="-120"/>
-                        </a:rPr>
-                        <a:t>2</a:t>
-                      </a:r>
-                      <a:endParaRPr lang="en-US" sz="1050" dirty="0">
-                        <a:latin typeface="Calibri" charset="0"/>
-                        <a:ea typeface="Calibri" charset="0"/>
-                        <a:cs typeface="Calibri" charset="0"/>
-                      </a:endParaRPr>
-                    </a:p>
-                  </a:txBody>
-                  <a:tcPr marL="76200" marR="76200" marT="38100" marB="38100" anchor="ctr">
-                    <a:lnL w="12700" cap="flat" cmpd="sng" algn="ctr">
-                      <a:solidFill>
-                        <a:srgbClr val="172A5E"/>
-                      </a:solidFill>
-                      <a:prstDash val="solid"/>
-                      <a:round/>
-                      <a:headEnd type="none" w="med" len="med"/>
-                      <a:tailEnd type="none" w="med" len="med"/>
-                    </a:lnL>
-                    <a:lnR w="12700" cap="flat" cmpd="sng" algn="ctr">
-                      <a:solidFill>
-                        <a:srgbClr val="172A5E"/>
-                      </a:solidFill>
-                      <a:prstDash val="solid"/>
-                      <a:round/>
-                      <a:headEnd type="none" w="med" len="med"/>
-                      <a:tailEnd type="none" w="med" len="med"/>
-                    </a:lnR>
-                    <a:lnT w="12700" cap="flat" cmpd="sng" algn="ctr">
-                      <a:solidFill>
-                        <a:srgbClr val="172A5E"/>
-                      </a:solidFill>
-                      <a:prstDash val="solid"/>
-                      <a:round/>
-                      <a:headEnd type="none" w="med" len="med"/>
-                      <a:tailEnd type="none" w="med" len="med"/>
-                    </a:lnT>
-                    <a:lnB w="12700" cap="flat" cmpd="sng" algn="ctr">
-                      <a:solidFill>
-                        <a:srgbClr val="172A5E"/>
-                      </a:solidFill>
-                      <a:prstDash val="solid"/>
-                      <a:round/>
-                      <a:headEnd type="none" w="med" len="med"/>
-                      <a:tailEnd type="none" w="med" len="med"/>
-                    </a:lnB>
-                    <a:solidFill>
-                      <a:srgbClr val="04081F"/>
-                    </a:solidFill>
-                  </a:tcPr>
-                </a:tc>
-                <a:tc>
-                  <a:txBody>
-                    <a:bodyPr/>
-                    <a:lstStyle/>
-                    <a:p>
-                      <a:pPr indent="0" marL="0">
-                        <a:buNone/>
-                      </a:pPr>
-                      <a:r>
-                        <a:rPr lang="en-US" sz="1050" dirty="0">
-                          <a:solidFill>
-                            <a:srgbClr val="AAB4D4"/>
-                          </a:solidFill>
-                          <a:latin typeface="Calibri" pitchFamily="34" charset="0"/>
-                          <a:ea typeface="Calibri" pitchFamily="34" charset="-122"/>
-                          <a:cs typeface="Calibri" pitchFamily="34" charset="-120"/>
-                        </a:rPr>
-                        <a:t>—</a:t>
-                      </a:r>
-                      <a:endParaRPr lang="en-US" sz="1050" dirty="0">
-                        <a:latin typeface="Calibri" charset="0"/>
-                        <a:ea typeface="Calibri" charset="0"/>
-                        <a:cs typeface="Calibri" charset="0"/>
-                      </a:endParaRPr>
-                    </a:p>
-                  </a:txBody>
-                  <a:tcPr marL="76200" marR="76200" marT="38100" marB="38100" anchor="ctr">
-                    <a:lnL w="12700" cap="flat" cmpd="sng" algn="ctr">
-                      <a:solidFill>
-                        <a:srgbClr val="172A5E"/>
-                      </a:solidFill>
-                      <a:prstDash val="solid"/>
-                      <a:round/>
-                      <a:headEnd type="none" w="med" len="med"/>
-                      <a:tailEnd type="none" w="med" len="med"/>
-                    </a:lnL>
-                    <a:lnR w="12700" cap="flat" cmpd="sng" algn="ctr">
-                      <a:solidFill>
-                        <a:srgbClr val="172A5E"/>
-                      </a:solidFill>
-                      <a:prstDash val="solid"/>
-                      <a:round/>
-                      <a:headEnd type="none" w="med" len="med"/>
-                      <a:tailEnd type="none" w="med" len="med"/>
-                    </a:lnR>
-                    <a:lnT w="12700" cap="flat" cmpd="sng" algn="ctr">
-                      <a:solidFill>
-                        <a:srgbClr val="172A5E"/>
-                      </a:solidFill>
-                      <a:prstDash val="solid"/>
-                      <a:round/>
-                      <a:headEnd type="none" w="med" len="med"/>
-                      <a:tailEnd type="none" w="med" len="med"/>
-                    </a:lnT>
-                    <a:lnB w="12700" cap="flat" cmpd="sng" algn="ctr">
-                      <a:solidFill>
-                        <a:srgbClr val="172A5E"/>
-                      </a:solidFill>
-                      <a:prstDash val="solid"/>
-                      <a:round/>
-                      <a:headEnd type="none" w="med" len="med"/>
-                      <a:tailEnd type="none" w="med" len="med"/>
-                    </a:lnB>
-                    <a:solidFill>
-                      <a:srgbClr val="04081F"/>
-                    </a:solidFill>
-                  </a:tcPr>
-                </a:tc>
-                <a:tc>
-                  <a:txBody>
-                    <a:bodyPr/>
-                    <a:lstStyle/>
-                    <a:p>
-                      <a:pPr indent="0" marL="0">
-                        <a:buNone/>
-                      </a:pPr>
-                      <a:r>
-                        <a:rPr lang="en-US" sz="1050" dirty="0">
-                          <a:solidFill>
-                            <a:srgbClr val="AAB4D4"/>
-                          </a:solidFill>
-                          <a:latin typeface="Calibri" pitchFamily="34" charset="0"/>
-                          <a:ea typeface="Calibri" pitchFamily="34" charset="-122"/>
-                          <a:cs typeface="Calibri" pitchFamily="34" charset="-120"/>
-                        </a:rPr>
-                        <a:t>4,000–8,000</a:t>
-                      </a:r>
-                      <a:endParaRPr lang="en-US" sz="1050" dirty="0">
-                        <a:latin typeface="Calibri" charset="0"/>
-                        <a:ea typeface="Calibri" charset="0"/>
-                        <a:cs typeface="Calibri" charset="0"/>
-                      </a:endParaRPr>
-                    </a:p>
-                  </a:txBody>
-                  <a:tcPr marL="76200" marR="76200" marT="38100" marB="38100" anchor="ctr">
-                    <a:lnL w="12700" cap="flat" cmpd="sng" algn="ctr">
-                      <a:solidFill>
-                        <a:srgbClr val="172A5E"/>
-                      </a:solidFill>
-                      <a:prstDash val="solid"/>
-                      <a:round/>
-                      <a:headEnd type="none" w="med" len="med"/>
-                      <a:tailEnd type="none" w="med" len="med"/>
-                    </a:lnL>
-                    <a:lnR w="12700" cap="flat" cmpd="sng" algn="ctr">
-                      <a:solidFill>
-                        <a:srgbClr val="172A5E"/>
-                      </a:solidFill>
-                      <a:prstDash val="solid"/>
-                      <a:round/>
-                      <a:headEnd type="none" w="med" len="med"/>
-                      <a:tailEnd type="none" w="med" len="med"/>
-                    </a:lnR>
-                    <a:lnT w="12700" cap="flat" cmpd="sng" algn="ctr">
-                      <a:solidFill>
-                        <a:srgbClr val="172A5E"/>
-                      </a:solidFill>
-                      <a:prstDash val="solid"/>
-                      <a:round/>
-                      <a:headEnd type="none" w="med" len="med"/>
-                      <a:tailEnd type="none" w="med" len="med"/>
-                    </a:lnT>
-                    <a:lnB w="12700" cap="flat" cmpd="sng" algn="ctr">
-                      <a:solidFill>
-                        <a:srgbClr val="172A5E"/>
-                      </a:solidFill>
-                      <a:prstDash val="solid"/>
-                      <a:round/>
-                      <a:headEnd type="none" w="med" len="med"/>
-                      <a:tailEnd type="none" w="med" len="med"/>
-                    </a:lnB>
-                    <a:solidFill>
-                      <a:srgbClr val="04081F"/>
-                    </a:solidFill>
-                  </a:tcPr>
-                </a:tc>
-              </a:tr>
-              <a:tr h="272491">
-                <a:tc>
-                  <a:txBody>
-                    <a:bodyPr/>
-                    <a:lstStyle/>
-                    <a:p>
-                      <a:pPr indent="0" marL="0">
-                        <a:buNone/>
-                      </a:pPr>
-                      <a:r>
-                        <a:rPr lang="en-US" sz="1050" dirty="0">
-                          <a:solidFill>
-                            <a:srgbClr val="AAB4D4"/>
-                          </a:solidFill>
-                          <a:latin typeface="Calibri" pitchFamily="34" charset="0"/>
-                          <a:ea typeface="Calibri" pitchFamily="34" charset="-122"/>
-                          <a:cs typeface="Calibri" pitchFamily="34" charset="-120"/>
-                        </a:rPr>
-                        <a:t>Evento propio (60–80 asistentes)</a:t>
-                      </a:r>
-                      <a:endParaRPr lang="en-US" sz="1050" dirty="0">
-                        <a:latin typeface="Calibri" charset="0"/>
-                        <a:ea typeface="Calibri" charset="0"/>
-                        <a:cs typeface="Calibri" charset="0"/>
-                      </a:endParaRPr>
-                    </a:p>
-                  </a:txBody>
-                  <a:tcPr marL="76200" marR="76200" marT="38100" marB="38100" anchor="ctr">
-                    <a:lnL w="12700" cap="flat" cmpd="sng" algn="ctr">
-                      <a:solidFill>
-                        <a:srgbClr val="172A5E"/>
-                      </a:solidFill>
-                      <a:prstDash val="solid"/>
-                      <a:round/>
-                      <a:headEnd type="none" w="med" len="med"/>
-                      <a:tailEnd type="none" w="med" len="med"/>
-                    </a:lnL>
-                    <a:lnR w="12700" cap="flat" cmpd="sng" algn="ctr">
-                      <a:solidFill>
-                        <a:srgbClr val="172A5E"/>
-                      </a:solidFill>
-                      <a:prstDash val="solid"/>
-                      <a:round/>
-                      <a:headEnd type="none" w="med" len="med"/>
-                      <a:tailEnd type="none" w="med" len="med"/>
-                    </a:lnR>
-                    <a:lnT w="12700" cap="flat" cmpd="sng" algn="ctr">
-                      <a:solidFill>
-                        <a:srgbClr val="172A5E"/>
-                      </a:solidFill>
-                      <a:prstDash val="solid"/>
-                      <a:round/>
-                      <a:headEnd type="none" w="med" len="med"/>
-                      <a:tailEnd type="none" w="med" len="med"/>
-                    </a:lnT>
-                    <a:lnB w="12700" cap="flat" cmpd="sng" algn="ctr">
-                      <a:solidFill>
-                        <a:srgbClr val="172A5E"/>
-                      </a:solidFill>
-                      <a:prstDash val="solid"/>
-                      <a:round/>
-                      <a:headEnd type="none" w="med" len="med"/>
-                      <a:tailEnd type="none" w="med" len="med"/>
-                    </a:lnB>
-                    <a:solidFill>
-                      <a:srgbClr val="04081F"/>
-                    </a:solidFill>
-                  </a:tcPr>
-                </a:tc>
-                <a:tc>
-                  <a:txBody>
-                    <a:bodyPr/>
-                    <a:lstStyle/>
-                    <a:p>
-                      <a:pPr indent="0" marL="0">
-                        <a:buNone/>
-                      </a:pPr>
-                      <a:r>
-                        <a:rPr lang="en-US" sz="1050" dirty="0">
-                          <a:solidFill>
-                            <a:srgbClr val="AAB4D4"/>
-                          </a:solidFill>
-                          <a:latin typeface="Calibri" pitchFamily="34" charset="0"/>
-                          <a:ea typeface="Calibri" pitchFamily="34" charset="-122"/>
-                          <a:cs typeface="Calibri" pitchFamily="34" charset="-120"/>
-                        </a:rPr>
-                        <a:t>2</a:t>
-                      </a:r>
-                      <a:endParaRPr lang="en-US" sz="1050" dirty="0">
-                        <a:latin typeface="Calibri" charset="0"/>
-                        <a:ea typeface="Calibri" charset="0"/>
-                        <a:cs typeface="Calibri" charset="0"/>
-                      </a:endParaRPr>
-                    </a:p>
-                  </a:txBody>
-                  <a:tcPr marL="76200" marR="76200" marT="38100" marB="38100" anchor="ctr">
-                    <a:lnL w="12700" cap="flat" cmpd="sng" algn="ctr">
-                      <a:solidFill>
-                        <a:srgbClr val="172A5E"/>
-                      </a:solidFill>
-                      <a:prstDash val="solid"/>
-                      <a:round/>
-                      <a:headEnd type="none" w="med" len="med"/>
-                      <a:tailEnd type="none" w="med" len="med"/>
-                    </a:lnL>
-                    <a:lnR w="12700" cap="flat" cmpd="sng" algn="ctr">
-                      <a:solidFill>
-                        <a:srgbClr val="172A5E"/>
-                      </a:solidFill>
-                      <a:prstDash val="solid"/>
-                      <a:round/>
-                      <a:headEnd type="none" w="med" len="med"/>
-                      <a:tailEnd type="none" w="med" len="med"/>
-                    </a:lnR>
-                    <a:lnT w="12700" cap="flat" cmpd="sng" algn="ctr">
-                      <a:solidFill>
-                        <a:srgbClr val="172A5E"/>
-                      </a:solidFill>
-                      <a:prstDash val="solid"/>
-                      <a:round/>
-                      <a:headEnd type="none" w="med" len="med"/>
-                      <a:tailEnd type="none" w="med" len="med"/>
-                    </a:lnT>
-                    <a:lnB w="12700" cap="flat" cmpd="sng" algn="ctr">
-                      <a:solidFill>
-                        <a:srgbClr val="172A5E"/>
-                      </a:solidFill>
-                      <a:prstDash val="solid"/>
-                      <a:round/>
-                      <a:headEnd type="none" w="med" len="med"/>
-                      <a:tailEnd type="none" w="med" len="med"/>
-                    </a:lnB>
-                    <a:solidFill>
-                      <a:srgbClr val="04081F"/>
-                    </a:solidFill>
-                  </a:tcPr>
-                </a:tc>
-                <a:tc>
-                  <a:txBody>
-                    <a:bodyPr/>
-                    <a:lstStyle/>
-                    <a:p>
-                      <a:pPr indent="0" marL="0">
-                        <a:buNone/>
-                      </a:pPr>
-                      <a:r>
-                        <a:rPr lang="en-US" sz="1050" dirty="0">
-                          <a:solidFill>
-                            <a:srgbClr val="AAB4D4"/>
-                          </a:solidFill>
-                          <a:latin typeface="Calibri" pitchFamily="34" charset="0"/>
-                          <a:ea typeface="Calibri" pitchFamily="34" charset="-122"/>
-                          <a:cs typeface="Calibri" pitchFamily="34" charset="-120"/>
-                        </a:rPr>
-                        <a:t>—</a:t>
-                      </a:r>
-                      <a:endParaRPr lang="en-US" sz="1050" dirty="0">
-                        <a:latin typeface="Calibri" charset="0"/>
-                        <a:ea typeface="Calibri" charset="0"/>
-                        <a:cs typeface="Calibri" charset="0"/>
-                      </a:endParaRPr>
-                    </a:p>
-                  </a:txBody>
-                  <a:tcPr marL="76200" marR="76200" marT="38100" marB="38100" anchor="ctr">
-                    <a:lnL w="12700" cap="flat" cmpd="sng" algn="ctr">
-                      <a:solidFill>
-                        <a:srgbClr val="172A5E"/>
-                      </a:solidFill>
-                      <a:prstDash val="solid"/>
-                      <a:round/>
-                      <a:headEnd type="none" w="med" len="med"/>
-                      <a:tailEnd type="none" w="med" len="med"/>
-                    </a:lnL>
-                    <a:lnR w="12700" cap="flat" cmpd="sng" algn="ctr">
-                      <a:solidFill>
-                        <a:srgbClr val="172A5E"/>
-                      </a:solidFill>
-                      <a:prstDash val="solid"/>
-                      <a:round/>
-                      <a:headEnd type="none" w="med" len="med"/>
-                      <a:tailEnd type="none" w="med" len="med"/>
-                    </a:lnR>
-                    <a:lnT w="12700" cap="flat" cmpd="sng" algn="ctr">
-                      <a:solidFill>
-                        <a:srgbClr val="172A5E"/>
-                      </a:solidFill>
-                      <a:prstDash val="solid"/>
-                      <a:round/>
-                      <a:headEnd type="none" w="med" len="med"/>
-                      <a:tailEnd type="none" w="med" len="med"/>
-                    </a:lnT>
-                    <a:lnB w="12700" cap="flat" cmpd="sng" algn="ctr">
-                      <a:solidFill>
-                        <a:srgbClr val="172A5E"/>
-                      </a:solidFill>
-                      <a:prstDash val="solid"/>
-                      <a:round/>
-                      <a:headEnd type="none" w="med" len="med"/>
-                      <a:tailEnd type="none" w="med" len="med"/>
-                    </a:lnB>
-                    <a:solidFill>
-                      <a:srgbClr val="04081F"/>
-                    </a:solidFill>
-                  </a:tcPr>
-                </a:tc>
-                <a:tc>
-                  <a:txBody>
-                    <a:bodyPr/>
-                    <a:lstStyle/>
-                    <a:p>
-                      <a:pPr indent="0" marL="0">
-                        <a:buNone/>
-                      </a:pPr>
-                      <a:r>
-                        <a:rPr lang="en-US" sz="1050" dirty="0">
-                          <a:solidFill>
-                            <a:srgbClr val="AAB4D4"/>
-                          </a:solidFill>
-                          <a:latin typeface="Calibri" pitchFamily="34" charset="0"/>
-                          <a:ea typeface="Calibri" pitchFamily="34" charset="-122"/>
-                          <a:cs typeface="Calibri" pitchFamily="34" charset="-120"/>
-                        </a:rPr>
-                        <a:t>5,000–9,000</a:t>
-                      </a:r>
-                      <a:endParaRPr lang="en-US" sz="1050" dirty="0">
-                        <a:latin typeface="Calibri" charset="0"/>
-                        <a:ea typeface="Calibri" charset="0"/>
-                        <a:cs typeface="Calibri" charset="0"/>
-                      </a:endParaRPr>
-                    </a:p>
-                  </a:txBody>
-                  <a:tcPr marL="76200" marR="76200" marT="38100" marB="38100" anchor="ctr">
-                    <a:lnL w="12700" cap="flat" cmpd="sng" algn="ctr">
-                      <a:solidFill>
-                        <a:srgbClr val="172A5E"/>
-                      </a:solidFill>
-                      <a:prstDash val="solid"/>
-                      <a:round/>
-                      <a:headEnd type="none" w="med" len="med"/>
-                      <a:tailEnd type="none" w="med" len="med"/>
-                    </a:lnL>
-                    <a:lnR w="12700" cap="flat" cmpd="sng" algn="ctr">
-                      <a:solidFill>
-                        <a:srgbClr val="172A5E"/>
-                      </a:solidFill>
-                      <a:prstDash val="solid"/>
-                      <a:round/>
-                      <a:headEnd type="none" w="med" len="med"/>
-                      <a:tailEnd type="none" w="med" len="med"/>
-                    </a:lnR>
-                    <a:lnT w="12700" cap="flat" cmpd="sng" algn="ctr">
-                      <a:solidFill>
-                        <a:srgbClr val="172A5E"/>
-                      </a:solidFill>
-                      <a:prstDash val="solid"/>
-                      <a:round/>
-                      <a:headEnd type="none" w="med" len="med"/>
-                      <a:tailEnd type="none" w="med" len="med"/>
-                    </a:lnT>
-                    <a:lnB w="12700" cap="flat" cmpd="sng" algn="ctr">
-                      <a:solidFill>
-                        <a:srgbClr val="172A5E"/>
-                      </a:solidFill>
-                      <a:prstDash val="solid"/>
-                      <a:round/>
-                      <a:headEnd type="none" w="med" len="med"/>
-                      <a:tailEnd type="none" w="med" len="med"/>
-                    </a:lnB>
-                    <a:solidFill>
-                      <a:srgbClr val="04081F"/>
-                    </a:solidFill>
-                  </a:tcPr>
-                </a:tc>
-              </a:tr>
-              <a:tr h="272491">
-                <a:tc>
-                  <a:txBody>
-                    <a:bodyPr/>
-                    <a:lstStyle/>
-                    <a:p>
-                      <a:pPr indent="0" marL="0">
-                        <a:buNone/>
-                      </a:pPr>
-                      <a:r>
-                        <a:rPr lang="en-US" sz="1050" dirty="0">
-                          <a:solidFill>
-                            <a:srgbClr val="AAB4D4"/>
-                          </a:solidFill>
-                          <a:latin typeface="Calibri" pitchFamily="34" charset="0"/>
-                          <a:ea typeface="Calibri" pitchFamily="34" charset="-122"/>
-                          <a:cs typeface="Calibri" pitchFamily="34" charset="-120"/>
-                        </a:rPr>
-                        <a:t>Conferencias de industria (3)</a:t>
-                      </a:r>
-                      <a:endParaRPr lang="en-US" sz="1050" dirty="0">
-                        <a:latin typeface="Calibri" charset="0"/>
-                        <a:ea typeface="Calibri" charset="0"/>
-                        <a:cs typeface="Calibri" charset="0"/>
-                      </a:endParaRPr>
-                    </a:p>
-                  </a:txBody>
-                  <a:tcPr marL="76200" marR="76200" marT="38100" marB="38100" anchor="ctr">
-                    <a:lnL w="12700" cap="flat" cmpd="sng" algn="ctr">
-                      <a:solidFill>
-                        <a:srgbClr val="172A5E"/>
-                      </a:solidFill>
-                      <a:prstDash val="solid"/>
-                      <a:round/>
-                      <a:headEnd type="none" w="med" len="med"/>
-                      <a:tailEnd type="none" w="med" len="med"/>
-                    </a:lnL>
-                    <a:lnR w="12700" cap="flat" cmpd="sng" algn="ctr">
-                      <a:solidFill>
-                        <a:srgbClr val="172A5E"/>
-                      </a:solidFill>
-                      <a:prstDash val="solid"/>
-                      <a:round/>
-                      <a:headEnd type="none" w="med" len="med"/>
-                      <a:tailEnd type="none" w="med" len="med"/>
-                    </a:lnR>
-                    <a:lnT w="12700" cap="flat" cmpd="sng" algn="ctr">
-                      <a:solidFill>
-                        <a:srgbClr val="172A5E"/>
-                      </a:solidFill>
-                      <a:prstDash val="solid"/>
-                      <a:round/>
-                      <a:headEnd type="none" w="med" len="med"/>
-                      <a:tailEnd type="none" w="med" len="med"/>
-                    </a:lnT>
-                    <a:lnB w="12700" cap="flat" cmpd="sng" algn="ctr">
-                      <a:solidFill>
-                        <a:srgbClr val="172A5E"/>
-                      </a:solidFill>
-                      <a:prstDash val="solid"/>
-                      <a:round/>
-                      <a:headEnd type="none" w="med" len="med"/>
-                      <a:tailEnd type="none" w="med" len="med"/>
-                    </a:lnB>
-                    <a:solidFill>
-                      <a:srgbClr val="04081F"/>
-                    </a:solidFill>
-                  </a:tcPr>
-                </a:tc>
-                <a:tc>
-                  <a:txBody>
-                    <a:bodyPr/>
-                    <a:lstStyle/>
-                    <a:p>
-                      <a:pPr indent="0" marL="0">
-                        <a:buNone/>
-                      </a:pPr>
-                      <a:r>
-                        <a:rPr lang="en-US" sz="1050" dirty="0">
-                          <a:solidFill>
-                            <a:srgbClr val="AAB4D4"/>
-                          </a:solidFill>
-                          <a:latin typeface="Calibri" pitchFamily="34" charset="0"/>
-                          <a:ea typeface="Calibri" pitchFamily="34" charset="-122"/>
-                          <a:cs typeface="Calibri" pitchFamily="34" charset="-120"/>
-                        </a:rPr>
-                        <a:t>2–3</a:t>
-                      </a:r>
-                      <a:endParaRPr lang="en-US" sz="1050" dirty="0">
-                        <a:latin typeface="Calibri" charset="0"/>
-                        <a:ea typeface="Calibri" charset="0"/>
-                        <a:cs typeface="Calibri" charset="0"/>
-                      </a:endParaRPr>
-                    </a:p>
-                  </a:txBody>
-                  <a:tcPr marL="76200" marR="76200" marT="38100" marB="38100" anchor="ctr">
-                    <a:lnL w="12700" cap="flat" cmpd="sng" algn="ctr">
-                      <a:solidFill>
-                        <a:srgbClr val="172A5E"/>
-                      </a:solidFill>
-                      <a:prstDash val="solid"/>
-                      <a:round/>
-                      <a:headEnd type="none" w="med" len="med"/>
-                      <a:tailEnd type="none" w="med" len="med"/>
-                    </a:lnL>
-                    <a:lnR w="12700" cap="flat" cmpd="sng" algn="ctr">
-                      <a:solidFill>
-                        <a:srgbClr val="172A5E"/>
-                      </a:solidFill>
-                      <a:prstDash val="solid"/>
-                      <a:round/>
-                      <a:headEnd type="none" w="med" len="med"/>
-                      <a:tailEnd type="none" w="med" len="med"/>
-                    </a:lnR>
-                    <a:lnT w="12700" cap="flat" cmpd="sng" algn="ctr">
-                      <a:solidFill>
-                        <a:srgbClr val="172A5E"/>
-                      </a:solidFill>
-                      <a:prstDash val="solid"/>
-                      <a:round/>
-                      <a:headEnd type="none" w="med" len="med"/>
-                      <a:tailEnd type="none" w="med" len="med"/>
-                    </a:lnT>
-                    <a:lnB w="12700" cap="flat" cmpd="sng" algn="ctr">
-                      <a:solidFill>
-                        <a:srgbClr val="172A5E"/>
-                      </a:solidFill>
-                      <a:prstDash val="solid"/>
-                      <a:round/>
-                      <a:headEnd type="none" w="med" len="med"/>
-                      <a:tailEnd type="none" w="med" len="med"/>
-                    </a:lnB>
-                    <a:solidFill>
-                      <a:srgbClr val="04081F"/>
-                    </a:solidFill>
-                  </a:tcPr>
-                </a:tc>
-                <a:tc>
-                  <a:txBody>
-                    <a:bodyPr/>
-                    <a:lstStyle/>
-                    <a:p>
-                      <a:pPr indent="0" marL="0">
-                        <a:buNone/>
-                      </a:pPr>
-                      <a:r>
-                        <a:rPr lang="en-US" sz="1050" dirty="0">
-                          <a:solidFill>
-                            <a:srgbClr val="AAB4D4"/>
-                          </a:solidFill>
-                          <a:latin typeface="Calibri" pitchFamily="34" charset="0"/>
-                          <a:ea typeface="Calibri" pitchFamily="34" charset="-122"/>
-                          <a:cs typeface="Calibri" pitchFamily="34" charset="-120"/>
-                        </a:rPr>
-                        <a:t>—</a:t>
-                      </a:r>
-                      <a:endParaRPr lang="en-US" sz="1050" dirty="0">
-                        <a:latin typeface="Calibri" charset="0"/>
-                        <a:ea typeface="Calibri" charset="0"/>
-                        <a:cs typeface="Calibri" charset="0"/>
-                      </a:endParaRPr>
-                    </a:p>
-                  </a:txBody>
-                  <a:tcPr marL="76200" marR="76200" marT="38100" marB="38100" anchor="ctr">
-                    <a:lnL w="12700" cap="flat" cmpd="sng" algn="ctr">
-                      <a:solidFill>
-                        <a:srgbClr val="172A5E"/>
-                      </a:solidFill>
-                      <a:prstDash val="solid"/>
-                      <a:round/>
-                      <a:headEnd type="none" w="med" len="med"/>
-                      <a:tailEnd type="none" w="med" len="med"/>
-                    </a:lnL>
-                    <a:lnR w="12700" cap="flat" cmpd="sng" algn="ctr">
-                      <a:solidFill>
-                        <a:srgbClr val="172A5E"/>
-                      </a:solidFill>
-                      <a:prstDash val="solid"/>
-                      <a:round/>
-                      <a:headEnd type="none" w="med" len="med"/>
-                      <a:tailEnd type="none" w="med" len="med"/>
-                    </a:lnR>
-                    <a:lnT w="12700" cap="flat" cmpd="sng" algn="ctr">
-                      <a:solidFill>
-                        <a:srgbClr val="172A5E"/>
-                      </a:solidFill>
-                      <a:prstDash val="solid"/>
-                      <a:round/>
-                      <a:headEnd type="none" w="med" len="med"/>
-                      <a:tailEnd type="none" w="med" len="med"/>
-                    </a:lnT>
-                    <a:lnB w="12700" cap="flat" cmpd="sng" algn="ctr">
-                      <a:solidFill>
-                        <a:srgbClr val="172A5E"/>
-                      </a:solidFill>
-                      <a:prstDash val="solid"/>
-                      <a:round/>
-                      <a:headEnd type="none" w="med" len="med"/>
-                      <a:tailEnd type="none" w="med" len="med"/>
-                    </a:lnB>
-                    <a:solidFill>
-                      <a:srgbClr val="04081F"/>
-                    </a:solidFill>
-                  </a:tcPr>
-                </a:tc>
-                <a:tc>
-                  <a:txBody>
-                    <a:bodyPr/>
-                    <a:lstStyle/>
-                    <a:p>
-                      <a:pPr indent="0" marL="0">
-                        <a:buNone/>
-                      </a:pPr>
-                      <a:r>
-                        <a:rPr lang="en-US" sz="1050" dirty="0">
-                          <a:solidFill>
-                            <a:srgbClr val="AAB4D4"/>
-                          </a:solidFill>
-                          <a:latin typeface="Calibri" pitchFamily="34" charset="0"/>
-                          <a:ea typeface="Calibri" pitchFamily="34" charset="-122"/>
-                          <a:cs typeface="Calibri" pitchFamily="34" charset="-120"/>
-                        </a:rPr>
-                        <a:t>4,000–7,000</a:t>
-                      </a:r>
-                      <a:endParaRPr lang="en-US" sz="1050" dirty="0">
-                        <a:latin typeface="Calibri" charset="0"/>
-                        <a:ea typeface="Calibri" charset="0"/>
-                        <a:cs typeface="Calibri" charset="0"/>
-                      </a:endParaRPr>
-                    </a:p>
-                  </a:txBody>
-                  <a:tcPr marL="76200" marR="76200" marT="38100" marB="38100" anchor="ctr">
-                    <a:lnL w="12700" cap="flat" cmpd="sng" algn="ctr">
-                      <a:solidFill>
-                        <a:srgbClr val="172A5E"/>
-                      </a:solidFill>
-                      <a:prstDash val="solid"/>
-                      <a:round/>
-                      <a:headEnd type="none" w="med" len="med"/>
-                      <a:tailEnd type="none" w="med" len="med"/>
-                    </a:lnL>
-                    <a:lnR w="12700" cap="flat" cmpd="sng" algn="ctr">
-                      <a:solidFill>
-                        <a:srgbClr val="172A5E"/>
-                      </a:solidFill>
-                      <a:prstDash val="solid"/>
-                      <a:round/>
-                      <a:headEnd type="none" w="med" len="med"/>
-                      <a:tailEnd type="none" w="med" len="med"/>
-                    </a:lnR>
-                    <a:lnT w="12700" cap="flat" cmpd="sng" algn="ctr">
-                      <a:solidFill>
-                        <a:srgbClr val="172A5E"/>
-                      </a:solidFill>
-                      <a:prstDash val="solid"/>
-                      <a:round/>
-                      <a:headEnd type="none" w="med" len="med"/>
-                      <a:tailEnd type="none" w="med" len="med"/>
-                    </a:lnT>
-                    <a:lnB w="12700" cap="flat" cmpd="sng" algn="ctr">
-                      <a:solidFill>
-                        <a:srgbClr val="172A5E"/>
-                      </a:solidFill>
-                      <a:prstDash val="solid"/>
-                      <a:round/>
-                      <a:headEnd type="none" w="med" len="med"/>
-                      <a:tailEnd type="none" w="med" len="med"/>
-                    </a:lnB>
-                    <a:solidFill>
-                      <a:srgbClr val="04081F"/>
-                    </a:solidFill>
-                  </a:tcPr>
-                </a:tc>
-              </a:tr>
-              <a:tr h="272491">
-                <a:tc>
-                  <a:txBody>
-                    <a:bodyPr/>
-                    <a:lstStyle/>
-                    <a:p>
-                      <a:pPr indent="0" marL="0">
-                        <a:buNone/>
-                      </a:pPr>
-                      <a:r>
-                        <a:rPr lang="en-US" sz="1050" dirty="0">
-                          <a:solidFill>
-                            <a:srgbClr val="AAB4D4"/>
-                          </a:solidFill>
-                          <a:latin typeface="Calibri" pitchFamily="34" charset="0"/>
-                          <a:ea typeface="Calibri" pitchFamily="34" charset="-122"/>
-                          <a:cs typeface="Calibri" pitchFamily="34" charset="-120"/>
-                        </a:rPr>
-                        <a:t>Pauta LinkedIn (retargeting del estudio)</a:t>
-                      </a:r>
-                      <a:endParaRPr lang="en-US" sz="1050" dirty="0">
-                        <a:latin typeface="Calibri" charset="0"/>
-                        <a:ea typeface="Calibri" charset="0"/>
-                        <a:cs typeface="Calibri" charset="0"/>
-                      </a:endParaRPr>
-                    </a:p>
-                  </a:txBody>
-                  <a:tcPr marL="76200" marR="76200" marT="38100" marB="38100" anchor="ctr">
-                    <a:lnL w="12700" cap="flat" cmpd="sng" algn="ctr">
-                      <a:solidFill>
-                        <a:srgbClr val="172A5E"/>
-                      </a:solidFill>
-                      <a:prstDash val="solid"/>
-                      <a:round/>
-                      <a:headEnd type="none" w="med" len="med"/>
-                      <a:tailEnd type="none" w="med" len="med"/>
-                    </a:lnL>
-                    <a:lnR w="12700" cap="flat" cmpd="sng" algn="ctr">
-                      <a:solidFill>
-                        <a:srgbClr val="172A5E"/>
-                      </a:solidFill>
-                      <a:prstDash val="solid"/>
-                      <a:round/>
-                      <a:headEnd type="none" w="med" len="med"/>
-                      <a:tailEnd type="none" w="med" len="med"/>
-                    </a:lnR>
-                    <a:lnT w="12700" cap="flat" cmpd="sng" algn="ctr">
-                      <a:solidFill>
-                        <a:srgbClr val="172A5E"/>
-                      </a:solidFill>
-                      <a:prstDash val="solid"/>
-                      <a:round/>
-                      <a:headEnd type="none" w="med" len="med"/>
-                      <a:tailEnd type="none" w="med" len="med"/>
-                    </a:lnT>
-                    <a:lnB w="12700" cap="flat" cmpd="sng" algn="ctr">
-                      <a:solidFill>
-                        <a:srgbClr val="172A5E"/>
-                      </a:solidFill>
-                      <a:prstDash val="solid"/>
-                      <a:round/>
-                      <a:headEnd type="none" w="med" len="med"/>
-                      <a:tailEnd type="none" w="med" len="med"/>
-                    </a:lnB>
-                    <a:solidFill>
-                      <a:srgbClr val="04081F"/>
-                    </a:solidFill>
-                  </a:tcPr>
-                </a:tc>
-                <a:tc>
-                  <a:txBody>
-                    <a:bodyPr/>
-                    <a:lstStyle/>
-                    <a:p>
-                      <a:pPr indent="0" marL="0">
-                        <a:buNone/>
-                      </a:pPr>
-                      <a:r>
-                        <a:rPr lang="en-US" sz="1050" dirty="0">
-                          <a:solidFill>
-                            <a:srgbClr val="AAB4D4"/>
-                          </a:solidFill>
-                          <a:latin typeface="Calibri" pitchFamily="34" charset="0"/>
-                          <a:ea typeface="Calibri" pitchFamily="34" charset="-122"/>
-                          <a:cs typeface="Calibri" pitchFamily="34" charset="-120"/>
-                        </a:rPr>
-                        <a:t>2–3</a:t>
-                      </a:r>
-                      <a:endParaRPr lang="en-US" sz="1050" dirty="0">
-                        <a:latin typeface="Calibri" charset="0"/>
-                        <a:ea typeface="Calibri" charset="0"/>
-                        <a:cs typeface="Calibri" charset="0"/>
-                      </a:endParaRPr>
-                    </a:p>
-                  </a:txBody>
-                  <a:tcPr marL="76200" marR="76200" marT="38100" marB="38100" anchor="ctr">
-                    <a:lnL w="12700" cap="flat" cmpd="sng" algn="ctr">
-                      <a:solidFill>
-                        <a:srgbClr val="172A5E"/>
-                      </a:solidFill>
-                      <a:prstDash val="solid"/>
-                      <a:round/>
-                      <a:headEnd type="none" w="med" len="med"/>
-                      <a:tailEnd type="none" w="med" len="med"/>
-                    </a:lnL>
-                    <a:lnR w="12700" cap="flat" cmpd="sng" algn="ctr">
-                      <a:solidFill>
-                        <a:srgbClr val="172A5E"/>
-                      </a:solidFill>
-                      <a:prstDash val="solid"/>
-                      <a:round/>
-                      <a:headEnd type="none" w="med" len="med"/>
-                      <a:tailEnd type="none" w="med" len="med"/>
-                    </a:lnR>
-                    <a:lnT w="12700" cap="flat" cmpd="sng" algn="ctr">
-                      <a:solidFill>
-                        <a:srgbClr val="172A5E"/>
-                      </a:solidFill>
-                      <a:prstDash val="solid"/>
-                      <a:round/>
-                      <a:headEnd type="none" w="med" len="med"/>
-                      <a:tailEnd type="none" w="med" len="med"/>
-                    </a:lnT>
-                    <a:lnB w="12700" cap="flat" cmpd="sng" algn="ctr">
-                      <a:solidFill>
-                        <a:srgbClr val="172A5E"/>
-                      </a:solidFill>
-                      <a:prstDash val="solid"/>
-                      <a:round/>
-                      <a:headEnd type="none" w="med" len="med"/>
-                      <a:tailEnd type="none" w="med" len="med"/>
-                    </a:lnB>
-                    <a:solidFill>
-                      <a:srgbClr val="04081F"/>
-                    </a:solidFill>
-                  </a:tcPr>
-                </a:tc>
-                <a:tc>
-                  <a:txBody>
-                    <a:bodyPr/>
-                    <a:lstStyle/>
-                    <a:p>
-                      <a:pPr indent="0" marL="0">
-                        <a:buNone/>
-                      </a:pPr>
-                      <a:r>
-                        <a:rPr lang="en-US" sz="1050" dirty="0">
-                          <a:solidFill>
-                            <a:srgbClr val="AAB4D4"/>
-                          </a:solidFill>
-                          <a:latin typeface="Calibri" pitchFamily="34" charset="0"/>
-                          <a:ea typeface="Calibri" pitchFamily="34" charset="-122"/>
-                          <a:cs typeface="Calibri" pitchFamily="34" charset="-120"/>
-                        </a:rPr>
-                        <a:t>1,000–2,500</a:t>
-                      </a:r>
-                      <a:endParaRPr lang="en-US" sz="1050" dirty="0">
-                        <a:latin typeface="Calibri" charset="0"/>
-                        <a:ea typeface="Calibri" charset="0"/>
-                        <a:cs typeface="Calibri" charset="0"/>
-                      </a:endParaRPr>
-                    </a:p>
-                  </a:txBody>
-                  <a:tcPr marL="76200" marR="76200" marT="38100" marB="38100" anchor="ctr">
-                    <a:lnL w="12700" cap="flat" cmpd="sng" algn="ctr">
-                      <a:solidFill>
-                        <a:srgbClr val="172A5E"/>
-                      </a:solidFill>
-                      <a:prstDash val="solid"/>
-                      <a:round/>
-                      <a:headEnd type="none" w="med" len="med"/>
-                      <a:tailEnd type="none" w="med" len="med"/>
-                    </a:lnL>
-                    <a:lnR w="12700" cap="flat" cmpd="sng" algn="ctr">
-                      <a:solidFill>
-                        <a:srgbClr val="172A5E"/>
-                      </a:solidFill>
-                      <a:prstDash val="solid"/>
-                      <a:round/>
-                      <a:headEnd type="none" w="med" len="med"/>
-                      <a:tailEnd type="none" w="med" len="med"/>
-                    </a:lnR>
-                    <a:lnT w="12700" cap="flat" cmpd="sng" algn="ctr">
-                      <a:solidFill>
-                        <a:srgbClr val="172A5E"/>
-                      </a:solidFill>
-                      <a:prstDash val="solid"/>
-                      <a:round/>
-                      <a:headEnd type="none" w="med" len="med"/>
-                      <a:tailEnd type="none" w="med" len="med"/>
-                    </a:lnT>
-                    <a:lnB w="12700" cap="flat" cmpd="sng" algn="ctr">
-                      <a:solidFill>
-                        <a:srgbClr val="172A5E"/>
-                      </a:solidFill>
-                      <a:prstDash val="solid"/>
-                      <a:round/>
-                      <a:headEnd type="none" w="med" len="med"/>
-                      <a:tailEnd type="none" w="med" len="med"/>
-                    </a:lnB>
-                    <a:solidFill>
-                      <a:srgbClr val="04081F"/>
-                    </a:solidFill>
-                  </a:tcPr>
-                </a:tc>
-                <a:tc>
-                  <a:txBody>
-                    <a:bodyPr/>
-                    <a:lstStyle/>
-                    <a:p>
-                      <a:pPr indent="0" marL="0">
-                        <a:buNone/>
-                      </a:pPr>
-                      <a:r>
-                        <a:rPr lang="en-US" sz="1050" dirty="0">
-                          <a:solidFill>
-                            <a:srgbClr val="AAB4D4"/>
-                          </a:solidFill>
-                          <a:latin typeface="Calibri" pitchFamily="34" charset="0"/>
-                          <a:ea typeface="Calibri" pitchFamily="34" charset="-122"/>
-                          <a:cs typeface="Calibri" pitchFamily="34" charset="-120"/>
-                        </a:rPr>
-                        <a:t>—</a:t>
-                      </a:r>
-                      <a:endParaRPr lang="en-US" sz="1050" dirty="0">
-                        <a:latin typeface="Calibri" charset="0"/>
-                        <a:ea typeface="Calibri" charset="0"/>
-                        <a:cs typeface="Calibri" charset="0"/>
-                      </a:endParaRPr>
-                    </a:p>
-                  </a:txBody>
-                  <a:tcPr marL="76200" marR="76200" marT="38100" marB="38100" anchor="ctr">
-                    <a:lnL w="12700" cap="flat" cmpd="sng" algn="ctr">
-                      <a:solidFill>
-                        <a:srgbClr val="172A5E"/>
-                      </a:solidFill>
-                      <a:prstDash val="solid"/>
-                      <a:round/>
-                      <a:headEnd type="none" w="med" len="med"/>
-                      <a:tailEnd type="none" w="med" len="med"/>
-                    </a:lnL>
-                    <a:lnR w="12700" cap="flat" cmpd="sng" algn="ctr">
-                      <a:solidFill>
-                        <a:srgbClr val="172A5E"/>
-                      </a:solidFill>
-                      <a:prstDash val="solid"/>
-                      <a:round/>
-                      <a:headEnd type="none" w="med" len="med"/>
-                      <a:tailEnd type="none" w="med" len="med"/>
-                    </a:lnR>
-                    <a:lnT w="12700" cap="flat" cmpd="sng" algn="ctr">
-                      <a:solidFill>
-                        <a:srgbClr val="172A5E"/>
-                      </a:solidFill>
-                      <a:prstDash val="solid"/>
-                      <a:round/>
-                      <a:headEnd type="none" w="med" len="med"/>
-                      <a:tailEnd type="none" w="med" len="med"/>
-                    </a:lnT>
-                    <a:lnB w="12700" cap="flat" cmpd="sng" algn="ctr">
-                      <a:solidFill>
-                        <a:srgbClr val="172A5E"/>
-                      </a:solidFill>
-                      <a:prstDash val="solid"/>
-                      <a:round/>
-                      <a:headEnd type="none" w="med" len="med"/>
-                      <a:tailEnd type="none" w="med" len="med"/>
-                    </a:lnB>
-                    <a:solidFill>
-                      <a:srgbClr val="04081F"/>
-                    </a:solidFill>
-                  </a:tcPr>
-                </a:tc>
-              </a:tr>
-              <a:tr h="272491">
-                <a:tc>
-                  <a:txBody>
-                    <a:bodyPr/>
-                    <a:lstStyle/>
-                    <a:p>
-                      <a:pPr indent="0" marL="0">
-                        <a:buNone/>
-                      </a:pPr>
-                      <a:r>
-                        <a:rPr lang="en-US" sz="1050" dirty="0">
-                          <a:solidFill>
-                            <a:srgbClr val="AAB4D4"/>
-                          </a:solidFill>
-                          <a:latin typeface="Calibri" pitchFamily="34" charset="0"/>
-                          <a:ea typeface="Calibri" pitchFamily="34" charset="-122"/>
-                          <a:cs typeface="Calibri" pitchFamily="34" charset="-120"/>
-                        </a:rPr>
-                        <a:t>SDR de tiempo completo (México)</a:t>
-                      </a:r>
-                      <a:endParaRPr lang="en-US" sz="1050" dirty="0">
-                        <a:latin typeface="Calibri" charset="0"/>
-                        <a:ea typeface="Calibri" charset="0"/>
-                        <a:cs typeface="Calibri" charset="0"/>
-                      </a:endParaRPr>
-                    </a:p>
-                  </a:txBody>
-                  <a:tcPr marL="76200" marR="76200" marT="38100" marB="38100" anchor="ctr">
-                    <a:lnL w="12700" cap="flat" cmpd="sng" algn="ctr">
-                      <a:solidFill>
-                        <a:srgbClr val="172A5E"/>
-                      </a:solidFill>
-                      <a:prstDash val="solid"/>
-                      <a:round/>
-                      <a:headEnd type="none" w="med" len="med"/>
-                      <a:tailEnd type="none" w="med" len="med"/>
-                    </a:lnL>
-                    <a:lnR w="12700" cap="flat" cmpd="sng" algn="ctr">
-                      <a:solidFill>
-                        <a:srgbClr val="172A5E"/>
-                      </a:solidFill>
-                      <a:prstDash val="solid"/>
-                      <a:round/>
-                      <a:headEnd type="none" w="med" len="med"/>
-                      <a:tailEnd type="none" w="med" len="med"/>
-                    </a:lnR>
-                    <a:lnT w="12700" cap="flat" cmpd="sng" algn="ctr">
-                      <a:solidFill>
-                        <a:srgbClr val="172A5E"/>
-                      </a:solidFill>
-                      <a:prstDash val="solid"/>
-                      <a:round/>
-                      <a:headEnd type="none" w="med" len="med"/>
-                      <a:tailEnd type="none" w="med" len="med"/>
-                    </a:lnT>
-                    <a:lnB w="12700" cap="flat" cmpd="sng" algn="ctr">
-                      <a:solidFill>
-                        <a:srgbClr val="172A5E"/>
-                      </a:solidFill>
-                      <a:prstDash val="solid"/>
-                      <a:round/>
-                      <a:headEnd type="none" w="med" len="med"/>
-                      <a:tailEnd type="none" w="med" len="med"/>
-                    </a:lnB>
-                    <a:solidFill>
-                      <a:srgbClr val="04081F"/>
-                    </a:solidFill>
-                  </a:tcPr>
-                </a:tc>
-                <a:tc>
-                  <a:txBody>
-                    <a:bodyPr/>
-                    <a:lstStyle/>
-                    <a:p>
-                      <a:pPr indent="0" marL="0">
-                        <a:buNone/>
-                      </a:pPr>
-                      <a:r>
-                        <a:rPr lang="en-US" sz="1050" dirty="0">
-                          <a:solidFill>
-                            <a:srgbClr val="AAB4D4"/>
-                          </a:solidFill>
-                          <a:latin typeface="Calibri" pitchFamily="34" charset="0"/>
-                          <a:ea typeface="Calibri" pitchFamily="34" charset="-122"/>
-                          <a:cs typeface="Calibri" pitchFamily="34" charset="-120"/>
-                        </a:rPr>
-                        <a:t>3</a:t>
-                      </a:r>
-                      <a:endParaRPr lang="en-US" sz="1050" dirty="0">
-                        <a:latin typeface="Calibri" charset="0"/>
-                        <a:ea typeface="Calibri" charset="0"/>
-                        <a:cs typeface="Calibri" charset="0"/>
-                      </a:endParaRPr>
-                    </a:p>
-                  </a:txBody>
-                  <a:tcPr marL="76200" marR="76200" marT="38100" marB="38100" anchor="ctr">
-                    <a:lnL w="12700" cap="flat" cmpd="sng" algn="ctr">
-                      <a:solidFill>
-                        <a:srgbClr val="172A5E"/>
-                      </a:solidFill>
-                      <a:prstDash val="solid"/>
-                      <a:round/>
-                      <a:headEnd type="none" w="med" len="med"/>
-                      <a:tailEnd type="none" w="med" len="med"/>
-                    </a:lnL>
-                    <a:lnR w="12700" cap="flat" cmpd="sng" algn="ctr">
-                      <a:solidFill>
-                        <a:srgbClr val="172A5E"/>
-                      </a:solidFill>
-                      <a:prstDash val="solid"/>
-                      <a:round/>
-                      <a:headEnd type="none" w="med" len="med"/>
-                      <a:tailEnd type="none" w="med" len="med"/>
-                    </a:lnR>
-                    <a:lnT w="12700" cap="flat" cmpd="sng" algn="ctr">
-                      <a:solidFill>
-                        <a:srgbClr val="172A5E"/>
-                      </a:solidFill>
-                      <a:prstDash val="solid"/>
-                      <a:round/>
-                      <a:headEnd type="none" w="med" len="med"/>
-                      <a:tailEnd type="none" w="med" len="med"/>
-                    </a:lnT>
-                    <a:lnB w="12700" cap="flat" cmpd="sng" algn="ctr">
-                      <a:solidFill>
-                        <a:srgbClr val="172A5E"/>
-                      </a:solidFill>
-                      <a:prstDash val="solid"/>
-                      <a:round/>
-                      <a:headEnd type="none" w="med" len="med"/>
-                      <a:tailEnd type="none" w="med" len="med"/>
-                    </a:lnB>
-                    <a:solidFill>
-                      <a:srgbClr val="04081F"/>
-                    </a:solidFill>
-                  </a:tcPr>
-                </a:tc>
-                <a:tc>
-                  <a:txBody>
-                    <a:bodyPr/>
-                    <a:lstStyle/>
-                    <a:p>
-                      <a:pPr indent="0" marL="0">
-                        <a:buNone/>
-                      </a:pPr>
-                      <a:r>
-                        <a:rPr lang="en-US" sz="1050" dirty="0">
-                          <a:solidFill>
-                            <a:srgbClr val="AAB4D4"/>
-                          </a:solidFill>
-                          <a:latin typeface="Calibri" pitchFamily="34" charset="0"/>
-                          <a:ea typeface="Calibri" pitchFamily="34" charset="-122"/>
-                          <a:cs typeface="Calibri" pitchFamily="34" charset="-120"/>
-                        </a:rPr>
-                        <a:t>1,800–3,000</a:t>
-                      </a:r>
-                      <a:endParaRPr lang="en-US" sz="1050" dirty="0">
-                        <a:latin typeface="Calibri" charset="0"/>
-                        <a:ea typeface="Calibri" charset="0"/>
-                        <a:cs typeface="Calibri" charset="0"/>
-                      </a:endParaRPr>
-                    </a:p>
-                  </a:txBody>
-                  <a:tcPr marL="76200" marR="76200" marT="38100" marB="38100" anchor="ctr">
-                    <a:lnL w="12700" cap="flat" cmpd="sng" algn="ctr">
-                      <a:solidFill>
-                        <a:srgbClr val="172A5E"/>
-                      </a:solidFill>
-                      <a:prstDash val="solid"/>
-                      <a:round/>
-                      <a:headEnd type="none" w="med" len="med"/>
-                      <a:tailEnd type="none" w="med" len="med"/>
-                    </a:lnL>
-                    <a:lnR w="12700" cap="flat" cmpd="sng" algn="ctr">
-                      <a:solidFill>
-                        <a:srgbClr val="172A5E"/>
-                      </a:solidFill>
-                      <a:prstDash val="solid"/>
-                      <a:round/>
-                      <a:headEnd type="none" w="med" len="med"/>
-                      <a:tailEnd type="none" w="med" len="med"/>
-                    </a:lnR>
-                    <a:lnT w="12700" cap="flat" cmpd="sng" algn="ctr">
-                      <a:solidFill>
-                        <a:srgbClr val="172A5E"/>
-                      </a:solidFill>
-                      <a:prstDash val="solid"/>
-                      <a:round/>
-                      <a:headEnd type="none" w="med" len="med"/>
-                      <a:tailEnd type="none" w="med" len="med"/>
-                    </a:lnT>
-                    <a:lnB w="12700" cap="flat" cmpd="sng" algn="ctr">
-                      <a:solidFill>
-                        <a:srgbClr val="172A5E"/>
-                      </a:solidFill>
-                      <a:prstDash val="solid"/>
-                      <a:round/>
-                      <a:headEnd type="none" w="med" len="med"/>
-                      <a:tailEnd type="none" w="med" len="med"/>
-                    </a:lnB>
-                    <a:solidFill>
-                      <a:srgbClr val="04081F"/>
-                    </a:solidFill>
-                  </a:tcPr>
-                </a:tc>
-                <a:tc>
-                  <a:txBody>
-                    <a:bodyPr/>
-                    <a:lstStyle/>
-                    <a:p>
-                      <a:pPr indent="0" marL="0">
-                        <a:buNone/>
-                      </a:pPr>
-                      <a:r>
-                        <a:rPr lang="en-US" sz="1050" dirty="0">
-                          <a:solidFill>
-                            <a:srgbClr val="AAB4D4"/>
-                          </a:solidFill>
-                          <a:latin typeface="Calibri" pitchFamily="34" charset="0"/>
-                          <a:ea typeface="Calibri" pitchFamily="34" charset="-122"/>
-                          <a:cs typeface="Calibri" pitchFamily="34" charset="-120"/>
-                        </a:rPr>
-                        <a:t>—</a:t>
-                      </a:r>
-                      <a:endParaRPr lang="en-US" sz="1050" dirty="0">
-                        <a:latin typeface="Calibri" charset="0"/>
-                        <a:ea typeface="Calibri" charset="0"/>
-                        <a:cs typeface="Calibri" charset="0"/>
-                      </a:endParaRPr>
-                    </a:p>
-                  </a:txBody>
-                  <a:tcPr marL="76200" marR="76200" marT="38100" marB="38100" anchor="ctr">
+                  <a:tcPr marL="76200" marR="76200" marT="50800" marB="50800" anchor="ctr">
                     <a:lnL w="12700" cap="flat" cmpd="sng" algn="ctr">
                       <a:solidFill>
                         <a:srgbClr val="172A5E"/>
@@ -12563,18 +11547,18 @@
       </p:graphicFrame>
       <p:sp>
         <p:nvSpPr>
-          <p:cNvPr id="5" name="Shape 2"/>
-          <p:cNvSpPr/>
-          <p:nvPr/>
-        </p:nvSpPr>
-        <p:spPr>
-          <a:xfrm>
-            <a:off x="566928" y="5029200"/>
-            <a:ext cx="3493008" cy="1024128"/>
+          <p:cNvPr id="12" name="Shape 8"/>
+          <p:cNvSpPr/>
+          <p:nvPr/>
+        </p:nvSpPr>
+        <p:spPr>
+          <a:xfrm>
+            <a:off x="6245352" y="4261104"/>
+            <a:ext cx="5349240" cy="786384"/>
           </a:xfrm>
           <a:prstGeom prst="roundRect">
             <a:avLst>
-              <a:gd name="adj" fmla="val 8929"/>
+              <a:gd name="adj" fmla="val 11628"/>
             </a:avLst>
           </a:prstGeom>
           <a:solidFill>
@@ -12590,14 +11574,14 @@
       </p:sp>
       <p:sp>
         <p:nvSpPr>
-          <p:cNvPr id="6" name="Text 3"/>
-          <p:cNvSpPr/>
-          <p:nvPr/>
-        </p:nvSpPr>
-        <p:spPr>
-          <a:xfrm>
-            <a:off x="786384" y="5138928"/>
-            <a:ext cx="2194560" cy="237744"/>
+          <p:cNvPr id="13" name="Text 9"/>
+          <p:cNvSpPr/>
+          <p:nvPr/>
+        </p:nvSpPr>
+        <p:spPr>
+          <a:xfrm>
+            <a:off x="6446520" y="4370832"/>
+            <a:ext cx="2743200" cy="365760"/>
           </a:xfrm>
           <a:prstGeom prst="rect">
             <a:avLst/>
@@ -12613,69 +11597,30 @@
               <a:buNone/>
             </a:pPr>
             <a:r>
-              <a:rPr lang="en-US" sz="1200" b="1" dirty="0">
+              <a:rPr lang="en-US" sz="2200" b="1" dirty="0">
                 <a:solidFill>
-                  <a:srgbClr val="EAF1FF"/>
+                  <a:srgbClr val="AAB4D4"/>
                 </a:solidFill>
                 <a:latin typeface="Calibri" pitchFamily="34" charset="0"/>
                 <a:ea typeface="Calibri" pitchFamily="34" charset="-122"/>
                 <a:cs typeface="Calibri" pitchFamily="34" charset="-120"/>
               </a:rPr>
-              <a:t>Fases 0–1</a:t>
-            </a:r>
-            <a:endParaRPr lang="en-US" sz="1200" dirty="0"/>
+              <a:t>$0 hoy</a:t>
+            </a:r>
+            <a:endParaRPr lang="en-US" sz="2200" dirty="0"/>
           </a:p>
         </p:txBody>
       </p:sp>
       <p:sp>
         <p:nvSpPr>
-          <p:cNvPr id="7" name="Text 4"/>
-          <p:cNvSpPr/>
-          <p:nvPr/>
-        </p:nvSpPr>
-        <p:spPr>
-          <a:xfrm>
-            <a:off x="786384" y="5376672"/>
-            <a:ext cx="2194560" cy="384048"/>
-          </a:xfrm>
-          <a:prstGeom prst="rect">
-            <a:avLst/>
-          </a:prstGeom>
-          <a:noFill/>
-          <a:ln/>
-        </p:spPr>
-        <p:txBody>
-          <a:bodyPr wrap="square" lIns="0" tIns="0" rIns="0" bIns="0" rtlCol="0" anchor="ctr"/>
-          <a:lstStyle/>
-          <a:p>
-            <a:pPr indent="0" marL="0">
-              <a:buNone/>
-            </a:pPr>
-            <a:r>
-              <a:rPr lang="en-US" sz="2400" b="1" dirty="0">
-                <a:solidFill>
-                  <a:srgbClr val="3D8BFF"/>
-                </a:solidFill>
-                <a:latin typeface="Calibri" pitchFamily="34" charset="0"/>
-                <a:ea typeface="Calibri" pitchFamily="34" charset="-122"/>
-                <a:cs typeface="Calibri" pitchFamily="34" charset="-120"/>
-              </a:rPr>
-              <a:t>~$1.5K</a:t>
-            </a:r>
-            <a:endParaRPr lang="en-US" sz="2400" dirty="0"/>
-          </a:p>
-        </p:txBody>
-      </p:sp>
-      <p:sp>
-        <p:nvSpPr>
-          <p:cNvPr id="8" name="Text 5"/>
-          <p:cNvSpPr/>
-          <p:nvPr/>
-        </p:nvSpPr>
-        <p:spPr>
-          <a:xfrm>
-            <a:off x="786384" y="5779008"/>
-            <a:ext cx="3108960" cy="219456"/>
+          <p:cNvPr id="14" name="Text 10"/>
+          <p:cNvSpPr/>
+          <p:nvPr/>
+        </p:nvSpPr>
+        <p:spPr>
+          <a:xfrm>
+            <a:off x="6446520" y="4791456"/>
+            <a:ext cx="4937760" cy="219456"/>
           </a:xfrm>
           <a:prstGeom prst="rect">
             <a:avLst/>
@@ -12699,7 +11644,7 @@
                 <a:ea typeface="Calibri" pitchFamily="34" charset="-122"/>
                 <a:cs typeface="Calibri" pitchFamily="34" charset="-120"/>
               </a:rPr>
-              <a:t>USD/mes + ~$8–11K de arranque</a:t>
+              <a:t>Se activa por hito, no por calendario — ver siguiente lámina.</a:t>
             </a:r>
             <a:endParaRPr lang="en-US" sz="950" dirty="0"/>
           </a:p>
@@ -12707,18 +11652,18 @@
       </p:sp>
       <p:sp>
         <p:nvSpPr>
-          <p:cNvPr id="9" name="Shape 6"/>
-          <p:cNvSpPr/>
-          <p:nvPr/>
-        </p:nvSpPr>
-        <p:spPr>
-          <a:xfrm>
-            <a:off x="4279392" y="5029200"/>
-            <a:ext cx="3493008" cy="1024128"/>
+          <p:cNvPr id="15" name="Shape 11"/>
+          <p:cNvSpPr/>
+          <p:nvPr/>
+        </p:nvSpPr>
+        <p:spPr>
+          <a:xfrm>
+            <a:off x="566928" y="5230368"/>
+            <a:ext cx="11027664" cy="960120"/>
           </a:xfrm>
           <a:prstGeom prst="roundRect">
             <a:avLst>
-              <a:gd name="adj" fmla="val 8929"/>
+              <a:gd name="adj" fmla="val 9524"/>
             </a:avLst>
           </a:prstGeom>
           <a:solidFill>
@@ -12734,14 +11679,14 @@
       </p:sp>
       <p:sp>
         <p:nvSpPr>
-          <p:cNvPr id="10" name="Text 7"/>
-          <p:cNvSpPr/>
-          <p:nvPr/>
-        </p:nvSpPr>
-        <p:spPr>
-          <a:xfrm>
-            <a:off x="4498848" y="5138928"/>
-            <a:ext cx="2194560" cy="237744"/>
+          <p:cNvPr id="16" name="Text 12"/>
+          <p:cNvSpPr/>
+          <p:nvPr/>
+        </p:nvSpPr>
+        <p:spPr>
+          <a:xfrm>
+            <a:off x="841248" y="5394960"/>
+            <a:ext cx="10424160" cy="685800"/>
           </a:xfrm>
           <a:prstGeom prst="rect">
             <a:avLst/>
@@ -12765,270 +11710,23 @@
                 <a:ea typeface="Calibri" pitchFamily="34" charset="-122"/>
                 <a:cs typeface="Calibri" pitchFamily="34" charset="-120"/>
               </a:rPr>
-              <a:t>Fase 2</a:t>
-            </a:r>
-            <a:endParaRPr lang="en-US" sz="1200" dirty="0"/>
-          </a:p>
-        </p:txBody>
-      </p:sp>
-      <p:sp>
-        <p:nvSpPr>
-          <p:cNvPr id="11" name="Text 8"/>
-          <p:cNvSpPr/>
-          <p:nvPr/>
-        </p:nvSpPr>
-        <p:spPr>
-          <a:xfrm>
-            <a:off x="4498848" y="5376672"/>
-            <a:ext cx="2194560" cy="384048"/>
-          </a:xfrm>
-          <a:prstGeom prst="rect">
-            <a:avLst/>
-          </a:prstGeom>
-          <a:noFill/>
-          <a:ln/>
-        </p:spPr>
-        <p:txBody>
-          <a:bodyPr wrap="square" lIns="0" tIns="0" rIns="0" bIns="0" rtlCol="0" anchor="ctr"/>
-          <a:lstStyle/>
-          <a:p>
+              <a:t>Por qué esto es estratégico, no sólo barato: </a:t>
+            </a:r>
             <a:pPr indent="0" marL="0">
               <a:buNone/>
             </a:pPr>
             <a:r>
-              <a:rPr lang="en-US" sz="2400" b="1" dirty="0">
+              <a:rPr lang="en-US" sz="1200" dirty="0">
                 <a:solidFill>
-                  <a:srgbClr val="3D8BFF"/>
+                  <a:srgbClr val="AAB4D4"/>
                 </a:solidFill>
                 <a:latin typeface="Calibri" pitchFamily="34" charset="0"/>
                 <a:ea typeface="Calibri" pitchFamily="34" charset="-122"/>
                 <a:cs typeface="Calibri" pitchFamily="34" charset="-120"/>
               </a:rPr>
-              <a:t>~$3.5K</a:t>
-            </a:r>
-            <a:endParaRPr lang="en-US" sz="2400" dirty="0"/>
-          </a:p>
-        </p:txBody>
-      </p:sp>
-      <p:sp>
-        <p:nvSpPr>
-          <p:cNvPr id="12" name="Text 9"/>
-          <p:cNvSpPr/>
-          <p:nvPr/>
-        </p:nvSpPr>
-        <p:spPr>
-          <a:xfrm>
-            <a:off x="4498848" y="5779008"/>
-            <a:ext cx="3108960" cy="219456"/>
-          </a:xfrm>
-          <a:prstGeom prst="rect">
-            <a:avLst/>
-          </a:prstGeom>
-          <a:noFill/>
-          <a:ln/>
-        </p:spPr>
-        <p:txBody>
-          <a:bodyPr wrap="square" lIns="0" tIns="0" rIns="0" bIns="0" rtlCol="0" anchor="ctr"/>
-          <a:lstStyle/>
-          <a:p>
-            <a:pPr indent="0" marL="0">
-              <a:buNone/>
-            </a:pPr>
-            <a:r>
-              <a:rPr lang="en-US" sz="950" dirty="0">
-                <a:solidFill>
-                  <a:srgbClr val="7B87AD"/>
-                </a:solidFill>
-                <a:latin typeface="Calibri" pitchFamily="34" charset="0"/>
-                <a:ea typeface="Calibri" pitchFamily="34" charset="-122"/>
-                <a:cs typeface="Calibri" pitchFamily="34" charset="-120"/>
-              </a:rPr>
-              <a:t>USD/mes + ~$20K de eventos y estudio</a:t>
-            </a:r>
-            <a:endParaRPr lang="en-US" sz="950" dirty="0"/>
-          </a:p>
-        </p:txBody>
-      </p:sp>
-      <p:sp>
-        <p:nvSpPr>
-          <p:cNvPr id="13" name="Shape 10"/>
-          <p:cNvSpPr/>
-          <p:nvPr/>
-        </p:nvSpPr>
-        <p:spPr>
-          <a:xfrm>
-            <a:off x="7991856" y="5029200"/>
-            <a:ext cx="3493008" cy="1024128"/>
-          </a:xfrm>
-          <a:prstGeom prst="roundRect">
-            <a:avLst>
-              <a:gd name="adj" fmla="val 8929"/>
-            </a:avLst>
-          </a:prstGeom>
-          <a:solidFill>
-            <a:srgbClr val="0B1C57"/>
-          </a:solidFill>
-          <a:ln w="15875">
-            <a:solidFill>
-              <a:srgbClr val="00C2FF"/>
-            </a:solidFill>
-            <a:prstDash val="solid"/>
-          </a:ln>
-        </p:spPr>
-      </p:sp>
-      <p:sp>
-        <p:nvSpPr>
-          <p:cNvPr id="14" name="Text 11"/>
-          <p:cNvSpPr/>
-          <p:nvPr/>
-        </p:nvSpPr>
-        <p:spPr>
-          <a:xfrm>
-            <a:off x="8211312" y="5138928"/>
-            <a:ext cx="2194560" cy="237744"/>
-          </a:xfrm>
-          <a:prstGeom prst="rect">
-            <a:avLst/>
-          </a:prstGeom>
-          <a:noFill/>
-          <a:ln/>
-        </p:spPr>
-        <p:txBody>
-          <a:bodyPr wrap="square" lIns="0" tIns="0" rIns="0" bIns="0" rtlCol="0" anchor="ctr"/>
-          <a:lstStyle/>
-          <a:p>
-            <a:pPr indent="0" marL="0">
-              <a:buNone/>
-            </a:pPr>
-            <a:r>
-              <a:rPr lang="en-US" sz="1200" b="1" dirty="0">
-                <a:solidFill>
-                  <a:srgbClr val="EAF1FF"/>
-                </a:solidFill>
-                <a:latin typeface="Calibri" pitchFamily="34" charset="0"/>
-                <a:ea typeface="Calibri" pitchFamily="34" charset="-122"/>
-                <a:cs typeface="Calibri" pitchFamily="34" charset="-120"/>
-              </a:rPr>
-              <a:t>Fase 3</a:t>
+              <a:t>el estudio, el evento y el SDR sólo generan retorno si ya hay expertise visible, referencias y casos certificados detrás. Gastar en eso antes sería pagar por audiencia que la consultora todavía no puede atender ni convertir.</a:t>
             </a:r>
             <a:endParaRPr lang="en-US" sz="1200" dirty="0"/>
-          </a:p>
-        </p:txBody>
-      </p:sp>
-      <p:sp>
-        <p:nvSpPr>
-          <p:cNvPr id="15" name="Text 12"/>
-          <p:cNvSpPr/>
-          <p:nvPr/>
-        </p:nvSpPr>
-        <p:spPr>
-          <a:xfrm>
-            <a:off x="8211312" y="5376672"/>
-            <a:ext cx="2194560" cy="384048"/>
-          </a:xfrm>
-          <a:prstGeom prst="rect">
-            <a:avLst/>
-          </a:prstGeom>
-          <a:noFill/>
-          <a:ln/>
-        </p:spPr>
-        <p:txBody>
-          <a:bodyPr wrap="square" lIns="0" tIns="0" rIns="0" bIns="0" rtlCol="0" anchor="ctr"/>
-          <a:lstStyle/>
-          <a:p>
-            <a:pPr indent="0" marL="0">
-              <a:buNone/>
-            </a:pPr>
-            <a:r>
-              <a:rPr lang="en-US" sz="2400" b="1" dirty="0">
-                <a:solidFill>
-                  <a:srgbClr val="00C2FF"/>
-                </a:solidFill>
-                <a:latin typeface="Calibri" pitchFamily="34" charset="0"/>
-                <a:ea typeface="Calibri" pitchFamily="34" charset="-122"/>
-                <a:cs typeface="Calibri" pitchFamily="34" charset="-120"/>
-              </a:rPr>
-              <a:t>~$7K</a:t>
-            </a:r>
-            <a:endParaRPr lang="en-US" sz="2400" dirty="0"/>
-          </a:p>
-        </p:txBody>
-      </p:sp>
-      <p:sp>
-        <p:nvSpPr>
-          <p:cNvPr id="16" name="Text 13"/>
-          <p:cNvSpPr/>
-          <p:nvPr/>
-        </p:nvSpPr>
-        <p:spPr>
-          <a:xfrm>
-            <a:off x="8211312" y="5779008"/>
-            <a:ext cx="3108960" cy="219456"/>
-          </a:xfrm>
-          <a:prstGeom prst="rect">
-            <a:avLst/>
-          </a:prstGeom>
-          <a:noFill/>
-          <a:ln/>
-        </p:spPr>
-        <p:txBody>
-          <a:bodyPr wrap="square" lIns="0" tIns="0" rIns="0" bIns="0" rtlCol="0" anchor="ctr"/>
-          <a:lstStyle/>
-          <a:p>
-            <a:pPr indent="0" marL="0">
-              <a:buNone/>
-            </a:pPr>
-            <a:r>
-              <a:rPr lang="en-US" sz="950" dirty="0">
-                <a:solidFill>
-                  <a:srgbClr val="7B87AD"/>
-                </a:solidFill>
-                <a:latin typeface="Calibri" pitchFamily="34" charset="0"/>
-                <a:ea typeface="Calibri" pitchFamily="34" charset="-122"/>
-                <a:cs typeface="Calibri" pitchFamily="34" charset="-120"/>
-              </a:rPr>
-              <a:t>USD/mes con SDR y pauta</a:t>
-            </a:r>
-            <a:endParaRPr lang="en-US" sz="950" dirty="0"/>
-          </a:p>
-        </p:txBody>
-      </p:sp>
-      <p:sp>
-        <p:nvSpPr>
-          <p:cNvPr id="17" name="Text 14"/>
-          <p:cNvSpPr/>
-          <p:nvPr/>
-        </p:nvSpPr>
-        <p:spPr>
-          <a:xfrm>
-            <a:off x="566928" y="6199632"/>
-            <a:ext cx="11027664" cy="274320"/>
-          </a:xfrm>
-          <a:prstGeom prst="rect">
-            <a:avLst/>
-          </a:prstGeom>
-          <a:noFill/>
-          <a:ln/>
-        </p:spPr>
-        <p:txBody>
-          <a:bodyPr wrap="square" lIns="0" tIns="0" rIns="0" bIns="0" rtlCol="0" anchor="ctr"/>
-          <a:lstStyle/>
-          <a:p>
-            <a:pPr indent="0" marL="0">
-              <a:buNone/>
-            </a:pPr>
-            <a:r>
-              <a:rPr lang="en-US" sz="950" i="1" dirty="0">
-                <a:solidFill>
-                  <a:srgbClr val="7B87AD"/>
-                </a:solidFill>
-                <a:latin typeface="Calibri" pitchFamily="34" charset="0"/>
-                <a:ea typeface="Calibri" pitchFamily="34" charset="-122"/>
-                <a:cs typeface="Calibri" pitchFamily="34" charset="-120"/>
-              </a:rPr>
-              <a:t>Referencia de Hinge 2026: las firmas de alto crecimiento invierten 12% de su facturación en marketing; las que no crecen, 5%.</a:t>
-            </a:r>
-            <a:endParaRPr lang="en-US" sz="950" dirty="0"/>
           </a:p>
         </p:txBody>
       </p:sp>
@@ -13097,6 +11795,1541 @@
                 <a:ea typeface="Calibri" pitchFamily="34" charset="-122"/>
                 <a:cs typeface="Calibri" pitchFamily="34" charset="-120"/>
               </a:rPr>
+              <a:t>PRESUPUESTO</a:t>
+            </a:r>
+            <a:endParaRPr lang="en-US" sz="1100" dirty="0"/>
+          </a:p>
+        </p:txBody>
+      </p:sp>
+      <p:sp>
+        <p:nvSpPr>
+          <p:cNvPr id="3" name="Text 1"/>
+          <p:cNvSpPr/>
+          <p:nvPr/>
+        </p:nvSpPr>
+        <p:spPr>
+          <a:xfrm>
+            <a:off x="566928" y="658368"/>
+            <a:ext cx="11027664" cy="658368"/>
+          </a:xfrm>
+          <a:prstGeom prst="rect">
+            <a:avLst/>
+          </a:prstGeom>
+          <a:noFill/>
+          <a:ln/>
+        </p:spPr>
+        <p:txBody>
+          <a:bodyPr wrap="square" lIns="0" tIns="0" rIns="0" bIns="0" rtlCol="0" anchor="ctr"/>
+          <a:lstStyle/>
+          <a:p>
+            <a:pPr indent="0" marL="0">
+              <a:buNone/>
+            </a:pPr>
+            <a:r>
+              <a:rPr lang="en-US" sz="3400" b="1" dirty="0">
+                <a:solidFill>
+                  <a:srgbClr val="EAF1FF"/>
+                </a:solidFill>
+                <a:latin typeface="Calibri" pitchFamily="34" charset="0"/>
+                <a:ea typeface="Calibri" pitchFamily="34" charset="-122"/>
+                <a:cs typeface="Calibri" pitchFamily="34" charset="-120"/>
+              </a:rPr>
+              <a:t>Cuándo se activa cada gasto diferido</a:t>
+            </a:r>
+            <a:endParaRPr lang="en-US" sz="3400" dirty="0"/>
+          </a:p>
+        </p:txBody>
+      </p:sp>
+      <p:sp>
+        <p:nvSpPr>
+          <p:cNvPr id="4" name="Text 2"/>
+          <p:cNvSpPr/>
+          <p:nvPr/>
+        </p:nvSpPr>
+        <p:spPr>
+          <a:xfrm>
+            <a:off x="566928" y="1444752"/>
+            <a:ext cx="11027664" cy="310896"/>
+          </a:xfrm>
+          <a:prstGeom prst="rect">
+            <a:avLst/>
+          </a:prstGeom>
+          <a:noFill/>
+          <a:ln/>
+        </p:spPr>
+        <p:txBody>
+          <a:bodyPr wrap="square" lIns="0" tIns="0" rIns="0" bIns="0" rtlCol="0" anchor="ctr"/>
+          <a:lstStyle/>
+          <a:p>
+            <a:pPr indent="0" marL="0">
+              <a:buNone/>
+            </a:pPr>
+            <a:r>
+              <a:rPr lang="en-US" sz="1300" dirty="0">
+                <a:solidFill>
+                  <a:srgbClr val="AAB4D4"/>
+                </a:solidFill>
+                <a:latin typeface="Calibri" pitchFamily="34" charset="0"/>
+                <a:ea typeface="Calibri" pitchFamily="34" charset="-122"/>
+                <a:cs typeface="Calibri" pitchFamily="34" charset="-120"/>
+              </a:rPr>
+              <a:t>Cada partida se paga la primera vez que el hito que la justifica ya existe — nunca antes.</a:t>
+            </a:r>
+            <a:endParaRPr lang="en-US" sz="1300" dirty="0"/>
+          </a:p>
+        </p:txBody>
+      </p:sp>
+      <p:graphicFrame>
+        <p:nvGraphicFramePr>
+          <p:cNvPr id="16" name="Table 0"/>
+          <p:cNvGraphicFramePr>
+            <a:graphicFrameLocks noGrp="1"/>
+          </p:cNvGraphicFramePr>
+          <p:nvPr>
+            <p:extLst>
+              <p:ext uri="{D42A27DB-BD31-4B8C-83A1-F6EECF244321}">
+                <p14:modId xmlns:p14="http://schemas.microsoft.com/office/powerpoint/2010/main" val="1579011935"/>
+              </p:ext>
+            </p:extLst>
+          </p:nvPr>
+        </p:nvGraphicFramePr>
+        <p:xfrm>
+          <a:off x="566928" y="1920240"/>
+          <a:ext cx="11027664" cy="914400"/>
+        </p:xfrm>
+        <a:graphic>
+          <a:graphicData uri="http://schemas.openxmlformats.org/drawingml/2006/table">
+            <a:tbl>
+              <a:tblPr/>
+              <a:tblGrid>
+                <a:gridCol w="2743200"/>
+                <a:gridCol w="6272784"/>
+                <a:gridCol w="2011680"/>
+              </a:tblGrid>
+              <a:tr h="566928">
+                <a:tc>
+                  <a:txBody>
+                    <a:bodyPr/>
+                    <a:lstStyle/>
+                    <a:p>
+                      <a:pPr indent="0" marL="0">
+                        <a:buNone/>
+                      </a:pPr>
+                      <a:r>
+                        <a:rPr lang="en-US" sz="1100" b="1" dirty="0">
+                          <a:solidFill>
+                            <a:srgbClr val="AAB4D4"/>
+                          </a:solidFill>
+                          <a:latin typeface="Calibri" pitchFamily="34" charset="0"/>
+                          <a:ea typeface="Calibri" pitchFamily="34" charset="-122"/>
+                          <a:cs typeface="Calibri" pitchFamily="34" charset="-120"/>
+                        </a:rPr>
+                        <a:t>GASTO</a:t>
+                      </a:r>
+                      <a:endParaRPr lang="en-US" sz="1100" dirty="0">
+                        <a:latin typeface="Calibri" charset="0"/>
+                        <a:ea typeface="Calibri" charset="0"/>
+                        <a:cs typeface="Calibri" charset="0"/>
+                      </a:endParaRPr>
+                    </a:p>
+                  </a:txBody>
+                  <a:tcPr marL="101600" marR="101600" marT="50800" marB="50800" anchor="ctr">
+                    <a:lnL w="12700" cap="flat" cmpd="sng" algn="ctr">
+                      <a:solidFill>
+                        <a:srgbClr val="172A5E"/>
+                      </a:solidFill>
+                      <a:prstDash val="solid"/>
+                      <a:round/>
+                      <a:headEnd type="none" w="med" len="med"/>
+                      <a:tailEnd type="none" w="med" len="med"/>
+                    </a:lnL>
+                    <a:lnR w="12700" cap="flat" cmpd="sng" algn="ctr">
+                      <a:solidFill>
+                        <a:srgbClr val="172A5E"/>
+                      </a:solidFill>
+                      <a:prstDash val="solid"/>
+                      <a:round/>
+                      <a:headEnd type="none" w="med" len="med"/>
+                      <a:tailEnd type="none" w="med" len="med"/>
+                    </a:lnR>
+                    <a:lnT w="12700" cap="flat" cmpd="sng" algn="ctr">
+                      <a:solidFill>
+                        <a:srgbClr val="172A5E"/>
+                      </a:solidFill>
+                      <a:prstDash val="solid"/>
+                      <a:round/>
+                      <a:headEnd type="none" w="med" len="med"/>
+                      <a:tailEnd type="none" w="med" len="med"/>
+                    </a:lnT>
+                    <a:lnB w="12700" cap="flat" cmpd="sng" algn="ctr">
+                      <a:solidFill>
+                        <a:srgbClr val="172A5E"/>
+                      </a:solidFill>
+                      <a:prstDash val="solid"/>
+                      <a:round/>
+                      <a:headEnd type="none" w="med" len="med"/>
+                      <a:tailEnd type="none" w="med" len="med"/>
+                    </a:lnB>
+                    <a:solidFill>
+                      <a:srgbClr val="04081F"/>
+                    </a:solidFill>
+                  </a:tcPr>
+                </a:tc>
+                <a:tc>
+                  <a:txBody>
+                    <a:bodyPr/>
+                    <a:lstStyle/>
+                    <a:p>
+                      <a:pPr indent="0" marL="0">
+                        <a:buNone/>
+                      </a:pPr>
+                      <a:r>
+                        <a:rPr lang="en-US" sz="1100" b="1" dirty="0">
+                          <a:solidFill>
+                            <a:srgbClr val="AAB4D4"/>
+                          </a:solidFill>
+                          <a:latin typeface="Calibri" pitchFamily="34" charset="0"/>
+                          <a:ea typeface="Calibri" pitchFamily="34" charset="-122"/>
+                          <a:cs typeface="Calibri" pitchFamily="34" charset="-120"/>
+                        </a:rPr>
+                        <a:t>SE ACTIVA CUANDO...</a:t>
+                      </a:r>
+                      <a:endParaRPr lang="en-US" sz="1100" dirty="0">
+                        <a:latin typeface="Calibri" charset="0"/>
+                        <a:ea typeface="Calibri" charset="0"/>
+                        <a:cs typeface="Calibri" charset="0"/>
+                      </a:endParaRPr>
+                    </a:p>
+                  </a:txBody>
+                  <a:tcPr marL="101600" marR="101600" marT="50800" marB="50800" anchor="ctr">
+                    <a:lnL w="12700" cap="flat" cmpd="sng" algn="ctr">
+                      <a:solidFill>
+                        <a:srgbClr val="172A5E"/>
+                      </a:solidFill>
+                      <a:prstDash val="solid"/>
+                      <a:round/>
+                      <a:headEnd type="none" w="med" len="med"/>
+                      <a:tailEnd type="none" w="med" len="med"/>
+                    </a:lnL>
+                    <a:lnR w="12700" cap="flat" cmpd="sng" algn="ctr">
+                      <a:solidFill>
+                        <a:srgbClr val="172A5E"/>
+                      </a:solidFill>
+                      <a:prstDash val="solid"/>
+                      <a:round/>
+                      <a:headEnd type="none" w="med" len="med"/>
+                      <a:tailEnd type="none" w="med" len="med"/>
+                    </a:lnR>
+                    <a:lnT w="12700" cap="flat" cmpd="sng" algn="ctr">
+                      <a:solidFill>
+                        <a:srgbClr val="172A5E"/>
+                      </a:solidFill>
+                      <a:prstDash val="solid"/>
+                      <a:round/>
+                      <a:headEnd type="none" w="med" len="med"/>
+                      <a:tailEnd type="none" w="med" len="med"/>
+                    </a:lnT>
+                    <a:lnB w="12700" cap="flat" cmpd="sng" algn="ctr">
+                      <a:solidFill>
+                        <a:srgbClr val="172A5E"/>
+                      </a:solidFill>
+                      <a:prstDash val="solid"/>
+                      <a:round/>
+                      <a:headEnd type="none" w="med" len="med"/>
+                      <a:tailEnd type="none" w="med" len="med"/>
+                    </a:lnB>
+                    <a:solidFill>
+                      <a:srgbClr val="04081F"/>
+                    </a:solidFill>
+                  </a:tcPr>
+                </a:tc>
+                <a:tc>
+                  <a:txBody>
+                    <a:bodyPr/>
+                    <a:lstStyle/>
+                    <a:p>
+                      <a:pPr indent="0" marL="0">
+                        <a:buNone/>
+                      </a:pPr>
+                      <a:r>
+                        <a:rPr lang="en-US" sz="1100" b="1" dirty="0">
+                          <a:solidFill>
+                            <a:srgbClr val="AAB4D4"/>
+                          </a:solidFill>
+                          <a:latin typeface="Calibri" pitchFamily="34" charset="0"/>
+                          <a:ea typeface="Calibri" pitchFamily="34" charset="-122"/>
+                          <a:cs typeface="Calibri" pitchFamily="34" charset="-120"/>
+                        </a:rPr>
+                        <a:t>COSTO</a:t>
+                      </a:r>
+                      <a:endParaRPr lang="en-US" sz="1100" dirty="0">
+                        <a:latin typeface="Calibri" charset="0"/>
+                        <a:ea typeface="Calibri" charset="0"/>
+                        <a:cs typeface="Calibri" charset="0"/>
+                      </a:endParaRPr>
+                    </a:p>
+                  </a:txBody>
+                  <a:tcPr marL="101600" marR="101600" marT="50800" marB="50800" anchor="ctr">
+                    <a:lnL w="12700" cap="flat" cmpd="sng" algn="ctr">
+                      <a:solidFill>
+                        <a:srgbClr val="172A5E"/>
+                      </a:solidFill>
+                      <a:prstDash val="solid"/>
+                      <a:round/>
+                      <a:headEnd type="none" w="med" len="med"/>
+                      <a:tailEnd type="none" w="med" len="med"/>
+                    </a:lnL>
+                    <a:lnR w="12700" cap="flat" cmpd="sng" algn="ctr">
+                      <a:solidFill>
+                        <a:srgbClr val="172A5E"/>
+                      </a:solidFill>
+                      <a:prstDash val="solid"/>
+                      <a:round/>
+                      <a:headEnd type="none" w="med" len="med"/>
+                      <a:tailEnd type="none" w="med" len="med"/>
+                    </a:lnR>
+                    <a:lnT w="12700" cap="flat" cmpd="sng" algn="ctr">
+                      <a:solidFill>
+                        <a:srgbClr val="172A5E"/>
+                      </a:solidFill>
+                      <a:prstDash val="solid"/>
+                      <a:round/>
+                      <a:headEnd type="none" w="med" len="med"/>
+                      <a:tailEnd type="none" w="med" len="med"/>
+                    </a:lnT>
+                    <a:lnB w="12700" cap="flat" cmpd="sng" algn="ctr">
+                      <a:solidFill>
+                        <a:srgbClr val="172A5E"/>
+                      </a:solidFill>
+                      <a:prstDash val="solid"/>
+                      <a:round/>
+                      <a:headEnd type="none" w="med" len="med"/>
+                      <a:tailEnd type="none" w="med" len="med"/>
+                    </a:lnB>
+                    <a:solidFill>
+                      <a:srgbClr val="04081F"/>
+                    </a:solidFill>
+                  </a:tcPr>
+                </a:tc>
+              </a:tr>
+              <a:tr h="566928">
+                <a:tc>
+                  <a:txBody>
+                    <a:bodyPr/>
+                    <a:lstStyle/>
+                    <a:p>
+                      <a:pPr indent="0" marL="0">
+                        <a:buNone/>
+                      </a:pPr>
+                      <a:r>
+                        <a:rPr lang="en-US" sz="1100" dirty="0">
+                          <a:solidFill>
+                            <a:srgbClr val="AAB4D4"/>
+                          </a:solidFill>
+                          <a:latin typeface="Calibri" pitchFamily="34" charset="0"/>
+                          <a:ea typeface="Calibri" pitchFamily="34" charset="-122"/>
+                          <a:cs typeface="Calibri" pitchFamily="34" charset="-120"/>
+                        </a:rPr>
+                        <a:t>Cuota AWS APN Select</a:t>
+                      </a:r>
+                      <a:endParaRPr lang="en-US" sz="1100" dirty="0">
+                        <a:latin typeface="Calibri" charset="0"/>
+                        <a:ea typeface="Calibri" charset="0"/>
+                        <a:cs typeface="Calibri" charset="0"/>
+                      </a:endParaRPr>
+                    </a:p>
+                  </a:txBody>
+                  <a:tcPr marL="101600" marR="101600" marT="50800" marB="50800" anchor="ctr">
+                    <a:lnL w="12700" cap="flat" cmpd="sng" algn="ctr">
+                      <a:solidFill>
+                        <a:srgbClr val="172A5E"/>
+                      </a:solidFill>
+                      <a:prstDash val="solid"/>
+                      <a:round/>
+                      <a:headEnd type="none" w="med" len="med"/>
+                      <a:tailEnd type="none" w="med" len="med"/>
+                    </a:lnL>
+                    <a:lnR w="12700" cap="flat" cmpd="sng" algn="ctr">
+                      <a:solidFill>
+                        <a:srgbClr val="172A5E"/>
+                      </a:solidFill>
+                      <a:prstDash val="solid"/>
+                      <a:round/>
+                      <a:headEnd type="none" w="med" len="med"/>
+                      <a:tailEnd type="none" w="med" len="med"/>
+                    </a:lnR>
+                    <a:lnT w="12700" cap="flat" cmpd="sng" algn="ctr">
+                      <a:solidFill>
+                        <a:srgbClr val="172A5E"/>
+                      </a:solidFill>
+                      <a:prstDash val="solid"/>
+                      <a:round/>
+                      <a:headEnd type="none" w="med" len="med"/>
+                      <a:tailEnd type="none" w="med" len="med"/>
+                    </a:lnT>
+                    <a:lnB w="12700" cap="flat" cmpd="sng" algn="ctr">
+                      <a:solidFill>
+                        <a:srgbClr val="172A5E"/>
+                      </a:solidFill>
+                      <a:prstDash val="solid"/>
+                      <a:round/>
+                      <a:headEnd type="none" w="med" len="med"/>
+                      <a:tailEnd type="none" w="med" len="med"/>
+                    </a:lnB>
+                    <a:solidFill>
+                      <a:srgbClr val="04081F"/>
+                    </a:solidFill>
+                  </a:tcPr>
+                </a:tc>
+                <a:tc>
+                  <a:txBody>
+                    <a:bodyPr/>
+                    <a:lstStyle/>
+                    <a:p>
+                      <a:pPr indent="0" marL="0">
+                        <a:buNone/>
+                      </a:pPr>
+                      <a:r>
+                        <a:rPr lang="en-US" sz="1100" dirty="0">
+                          <a:solidFill>
+                            <a:srgbClr val="AAB4D4"/>
+                          </a:solidFill>
+                          <a:latin typeface="Calibri" pitchFamily="34" charset="0"/>
+                          <a:ea typeface="Calibri" pitchFamily="34" charset="-122"/>
+                          <a:cs typeface="Calibri" pitchFamily="34" charset="-120"/>
+                        </a:rPr>
+                        <a:t>hay 3 oportunidades lanzadas con MRR ≥ USD 1,500 (requisito del propio tier)</a:t>
+                      </a:r>
+                      <a:endParaRPr lang="en-US" sz="1100" dirty="0">
+                        <a:latin typeface="Calibri" charset="0"/>
+                        <a:ea typeface="Calibri" charset="0"/>
+                        <a:cs typeface="Calibri" charset="0"/>
+                      </a:endParaRPr>
+                    </a:p>
+                  </a:txBody>
+                  <a:tcPr marL="101600" marR="101600" marT="50800" marB="50800" anchor="ctr">
+                    <a:lnL w="12700" cap="flat" cmpd="sng" algn="ctr">
+                      <a:solidFill>
+                        <a:srgbClr val="172A5E"/>
+                      </a:solidFill>
+                      <a:prstDash val="solid"/>
+                      <a:round/>
+                      <a:headEnd type="none" w="med" len="med"/>
+                      <a:tailEnd type="none" w="med" len="med"/>
+                    </a:lnL>
+                    <a:lnR w="12700" cap="flat" cmpd="sng" algn="ctr">
+                      <a:solidFill>
+                        <a:srgbClr val="172A5E"/>
+                      </a:solidFill>
+                      <a:prstDash val="solid"/>
+                      <a:round/>
+                      <a:headEnd type="none" w="med" len="med"/>
+                      <a:tailEnd type="none" w="med" len="med"/>
+                    </a:lnR>
+                    <a:lnT w="12700" cap="flat" cmpd="sng" algn="ctr">
+                      <a:solidFill>
+                        <a:srgbClr val="172A5E"/>
+                      </a:solidFill>
+                      <a:prstDash val="solid"/>
+                      <a:round/>
+                      <a:headEnd type="none" w="med" len="med"/>
+                      <a:tailEnd type="none" w="med" len="med"/>
+                    </a:lnT>
+                    <a:lnB w="12700" cap="flat" cmpd="sng" algn="ctr">
+                      <a:solidFill>
+                        <a:srgbClr val="172A5E"/>
+                      </a:solidFill>
+                      <a:prstDash val="solid"/>
+                      <a:round/>
+                      <a:headEnd type="none" w="med" len="med"/>
+                      <a:tailEnd type="none" w="med" len="med"/>
+                    </a:lnB>
+                    <a:solidFill>
+                      <a:srgbClr val="04081F"/>
+                    </a:solidFill>
+                  </a:tcPr>
+                </a:tc>
+                <a:tc>
+                  <a:txBody>
+                    <a:bodyPr/>
+                    <a:lstStyle/>
+                    <a:p>
+                      <a:pPr indent="0" marL="0">
+                        <a:buNone/>
+                      </a:pPr>
+                      <a:r>
+                        <a:rPr lang="en-US" sz="1100" dirty="0">
+                          <a:solidFill>
+                            <a:srgbClr val="AAB4D4"/>
+                          </a:solidFill>
+                          <a:latin typeface="Calibri" pitchFamily="34" charset="0"/>
+                          <a:ea typeface="Calibri" pitchFamily="34" charset="-122"/>
+                          <a:cs typeface="Calibri" pitchFamily="34" charset="-120"/>
+                        </a:rPr>
+                        <a:t>2,500/año</a:t>
+                      </a:r>
+                      <a:endParaRPr lang="en-US" sz="1100" dirty="0">
+                        <a:latin typeface="Calibri" charset="0"/>
+                        <a:ea typeface="Calibri" charset="0"/>
+                        <a:cs typeface="Calibri" charset="0"/>
+                      </a:endParaRPr>
+                    </a:p>
+                  </a:txBody>
+                  <a:tcPr marL="101600" marR="101600" marT="50800" marB="50800" anchor="ctr">
+                    <a:lnL w="12700" cap="flat" cmpd="sng" algn="ctr">
+                      <a:solidFill>
+                        <a:srgbClr val="172A5E"/>
+                      </a:solidFill>
+                      <a:prstDash val="solid"/>
+                      <a:round/>
+                      <a:headEnd type="none" w="med" len="med"/>
+                      <a:tailEnd type="none" w="med" len="med"/>
+                    </a:lnL>
+                    <a:lnR w="12700" cap="flat" cmpd="sng" algn="ctr">
+                      <a:solidFill>
+                        <a:srgbClr val="172A5E"/>
+                      </a:solidFill>
+                      <a:prstDash val="solid"/>
+                      <a:round/>
+                      <a:headEnd type="none" w="med" len="med"/>
+                      <a:tailEnd type="none" w="med" len="med"/>
+                    </a:lnR>
+                    <a:lnT w="12700" cap="flat" cmpd="sng" algn="ctr">
+                      <a:solidFill>
+                        <a:srgbClr val="172A5E"/>
+                      </a:solidFill>
+                      <a:prstDash val="solid"/>
+                      <a:round/>
+                      <a:headEnd type="none" w="med" len="med"/>
+                      <a:tailEnd type="none" w="med" len="med"/>
+                    </a:lnT>
+                    <a:lnB w="12700" cap="flat" cmpd="sng" algn="ctr">
+                      <a:solidFill>
+                        <a:srgbClr val="172A5E"/>
+                      </a:solidFill>
+                      <a:prstDash val="solid"/>
+                      <a:round/>
+                      <a:headEnd type="none" w="med" len="med"/>
+                      <a:tailEnd type="none" w="med" len="med"/>
+                    </a:lnB>
+                    <a:solidFill>
+                      <a:srgbClr val="04081F"/>
+                    </a:solidFill>
+                  </a:tcPr>
+                </a:tc>
+              </a:tr>
+              <a:tr h="566928">
+                <a:tc>
+                  <a:txBody>
+                    <a:bodyPr/>
+                    <a:lstStyle/>
+                    <a:p>
+                      <a:pPr indent="0" marL="0">
+                        <a:buNone/>
+                      </a:pPr>
+                      <a:r>
+                        <a:rPr lang="en-US" sz="1100" dirty="0">
+                          <a:solidFill>
+                            <a:srgbClr val="AAB4D4"/>
+                          </a:solidFill>
+                          <a:latin typeface="Calibri" pitchFamily="34" charset="0"/>
+                          <a:ea typeface="Calibri" pitchFamily="34" charset="-122"/>
+                          <a:cs typeface="Calibri" pitchFamily="34" charset="-120"/>
+                        </a:rPr>
+                        <a:t>Evento propio</a:t>
+                      </a:r>
+                      <a:endParaRPr lang="en-US" sz="1100" dirty="0">
+                        <a:latin typeface="Calibri" charset="0"/>
+                        <a:ea typeface="Calibri" charset="0"/>
+                        <a:cs typeface="Calibri" charset="0"/>
+                      </a:endParaRPr>
+                    </a:p>
+                  </a:txBody>
+                  <a:tcPr marL="101600" marR="101600" marT="50800" marB="50800" anchor="ctr">
+                    <a:lnL w="12700" cap="flat" cmpd="sng" algn="ctr">
+                      <a:solidFill>
+                        <a:srgbClr val="172A5E"/>
+                      </a:solidFill>
+                      <a:prstDash val="solid"/>
+                      <a:round/>
+                      <a:headEnd type="none" w="med" len="med"/>
+                      <a:tailEnd type="none" w="med" len="med"/>
+                    </a:lnL>
+                    <a:lnR w="12700" cap="flat" cmpd="sng" algn="ctr">
+                      <a:solidFill>
+                        <a:srgbClr val="172A5E"/>
+                      </a:solidFill>
+                      <a:prstDash val="solid"/>
+                      <a:round/>
+                      <a:headEnd type="none" w="med" len="med"/>
+                      <a:tailEnd type="none" w="med" len="med"/>
+                    </a:lnR>
+                    <a:lnT w="12700" cap="flat" cmpd="sng" algn="ctr">
+                      <a:solidFill>
+                        <a:srgbClr val="172A5E"/>
+                      </a:solidFill>
+                      <a:prstDash val="solid"/>
+                      <a:round/>
+                      <a:headEnd type="none" w="med" len="med"/>
+                      <a:tailEnd type="none" w="med" len="med"/>
+                    </a:lnT>
+                    <a:lnB w="12700" cap="flat" cmpd="sng" algn="ctr">
+                      <a:solidFill>
+                        <a:srgbClr val="172A5E"/>
+                      </a:solidFill>
+                      <a:prstDash val="solid"/>
+                      <a:round/>
+                      <a:headEnd type="none" w="med" len="med"/>
+                      <a:tailEnd type="none" w="med" len="med"/>
+                    </a:lnB>
+                    <a:solidFill>
+                      <a:srgbClr val="04081F"/>
+                    </a:solidFill>
+                  </a:tcPr>
+                </a:tc>
+                <a:tc>
+                  <a:txBody>
+                    <a:bodyPr/>
+                    <a:lstStyle/>
+                    <a:p>
+                      <a:pPr indent="0" marL="0">
+                        <a:buNone/>
+                      </a:pPr>
+                      <a:r>
+                        <a:rPr lang="en-US" sz="1100" dirty="0">
+                          <a:solidFill>
+                            <a:srgbClr val="AAB4D4"/>
+                          </a:solidFill>
+                          <a:latin typeface="Calibri" pitchFamily="34" charset="0"/>
+                          <a:ea typeface="Calibri" pitchFamily="34" charset="-122"/>
+                          <a:cs typeface="Calibri" pitchFamily="34" charset="-120"/>
+                        </a:rPr>
+                        <a:t>el estudio de madurez tiene 150+ respuestas listas para presentar</a:t>
+                      </a:r>
+                      <a:endParaRPr lang="en-US" sz="1100" dirty="0">
+                        <a:latin typeface="Calibri" charset="0"/>
+                        <a:ea typeface="Calibri" charset="0"/>
+                        <a:cs typeface="Calibri" charset="0"/>
+                      </a:endParaRPr>
+                    </a:p>
+                  </a:txBody>
+                  <a:tcPr marL="101600" marR="101600" marT="50800" marB="50800" anchor="ctr">
+                    <a:lnL w="12700" cap="flat" cmpd="sng" algn="ctr">
+                      <a:solidFill>
+                        <a:srgbClr val="172A5E"/>
+                      </a:solidFill>
+                      <a:prstDash val="solid"/>
+                      <a:round/>
+                      <a:headEnd type="none" w="med" len="med"/>
+                      <a:tailEnd type="none" w="med" len="med"/>
+                    </a:lnL>
+                    <a:lnR w="12700" cap="flat" cmpd="sng" algn="ctr">
+                      <a:solidFill>
+                        <a:srgbClr val="172A5E"/>
+                      </a:solidFill>
+                      <a:prstDash val="solid"/>
+                      <a:round/>
+                      <a:headEnd type="none" w="med" len="med"/>
+                      <a:tailEnd type="none" w="med" len="med"/>
+                    </a:lnR>
+                    <a:lnT w="12700" cap="flat" cmpd="sng" algn="ctr">
+                      <a:solidFill>
+                        <a:srgbClr val="172A5E"/>
+                      </a:solidFill>
+                      <a:prstDash val="solid"/>
+                      <a:round/>
+                      <a:headEnd type="none" w="med" len="med"/>
+                      <a:tailEnd type="none" w="med" len="med"/>
+                    </a:lnT>
+                    <a:lnB w="12700" cap="flat" cmpd="sng" algn="ctr">
+                      <a:solidFill>
+                        <a:srgbClr val="172A5E"/>
+                      </a:solidFill>
+                      <a:prstDash val="solid"/>
+                      <a:round/>
+                      <a:headEnd type="none" w="med" len="med"/>
+                      <a:tailEnd type="none" w="med" len="med"/>
+                    </a:lnB>
+                    <a:solidFill>
+                      <a:srgbClr val="04081F"/>
+                    </a:solidFill>
+                  </a:tcPr>
+                </a:tc>
+                <a:tc>
+                  <a:txBody>
+                    <a:bodyPr/>
+                    <a:lstStyle/>
+                    <a:p>
+                      <a:pPr indent="0" marL="0">
+                        <a:buNone/>
+                      </a:pPr>
+                      <a:r>
+                        <a:rPr lang="en-US" sz="1100" dirty="0">
+                          <a:solidFill>
+                            <a:srgbClr val="AAB4D4"/>
+                          </a:solidFill>
+                          <a:latin typeface="Calibri" pitchFamily="34" charset="0"/>
+                          <a:ea typeface="Calibri" pitchFamily="34" charset="-122"/>
+                          <a:cs typeface="Calibri" pitchFamily="34" charset="-120"/>
+                        </a:rPr>
+                        <a:t>5,000–9,000</a:t>
+                      </a:r>
+                      <a:endParaRPr lang="en-US" sz="1100" dirty="0">
+                        <a:latin typeface="Calibri" charset="0"/>
+                        <a:ea typeface="Calibri" charset="0"/>
+                        <a:cs typeface="Calibri" charset="0"/>
+                      </a:endParaRPr>
+                    </a:p>
+                  </a:txBody>
+                  <a:tcPr marL="101600" marR="101600" marT="50800" marB="50800" anchor="ctr">
+                    <a:lnL w="12700" cap="flat" cmpd="sng" algn="ctr">
+                      <a:solidFill>
+                        <a:srgbClr val="172A5E"/>
+                      </a:solidFill>
+                      <a:prstDash val="solid"/>
+                      <a:round/>
+                      <a:headEnd type="none" w="med" len="med"/>
+                      <a:tailEnd type="none" w="med" len="med"/>
+                    </a:lnL>
+                    <a:lnR w="12700" cap="flat" cmpd="sng" algn="ctr">
+                      <a:solidFill>
+                        <a:srgbClr val="172A5E"/>
+                      </a:solidFill>
+                      <a:prstDash val="solid"/>
+                      <a:round/>
+                      <a:headEnd type="none" w="med" len="med"/>
+                      <a:tailEnd type="none" w="med" len="med"/>
+                    </a:lnR>
+                    <a:lnT w="12700" cap="flat" cmpd="sng" algn="ctr">
+                      <a:solidFill>
+                        <a:srgbClr val="172A5E"/>
+                      </a:solidFill>
+                      <a:prstDash val="solid"/>
+                      <a:round/>
+                      <a:headEnd type="none" w="med" len="med"/>
+                      <a:tailEnd type="none" w="med" len="med"/>
+                    </a:lnT>
+                    <a:lnB w="12700" cap="flat" cmpd="sng" algn="ctr">
+                      <a:solidFill>
+                        <a:srgbClr val="172A5E"/>
+                      </a:solidFill>
+                      <a:prstDash val="solid"/>
+                      <a:round/>
+                      <a:headEnd type="none" w="med" len="med"/>
+                      <a:tailEnd type="none" w="med" len="med"/>
+                    </a:lnB>
+                    <a:solidFill>
+                      <a:srgbClr val="04081F"/>
+                    </a:solidFill>
+                  </a:tcPr>
+                </a:tc>
+              </a:tr>
+              <a:tr h="566928">
+                <a:tc>
+                  <a:txBody>
+                    <a:bodyPr/>
+                    <a:lstStyle/>
+                    <a:p>
+                      <a:pPr indent="0" marL="0">
+                        <a:buNone/>
+                      </a:pPr>
+                      <a:r>
+                        <a:rPr lang="en-US" sz="1100" dirty="0">
+                          <a:solidFill>
+                            <a:srgbClr val="AAB4D4"/>
+                          </a:solidFill>
+                          <a:latin typeface="Calibri" pitchFamily="34" charset="0"/>
+                          <a:ea typeface="Calibri" pitchFamily="34" charset="-122"/>
+                          <a:cs typeface="Calibri" pitchFamily="34" charset="-120"/>
+                        </a:rPr>
+                        <a:t>Conferencias de industria</a:t>
+                      </a:r>
+                      <a:endParaRPr lang="en-US" sz="1100" dirty="0">
+                        <a:latin typeface="Calibri" charset="0"/>
+                        <a:ea typeface="Calibri" charset="0"/>
+                        <a:cs typeface="Calibri" charset="0"/>
+                      </a:endParaRPr>
+                    </a:p>
+                  </a:txBody>
+                  <a:tcPr marL="101600" marR="101600" marT="50800" marB="50800" anchor="ctr">
+                    <a:lnL w="12700" cap="flat" cmpd="sng" algn="ctr">
+                      <a:solidFill>
+                        <a:srgbClr val="172A5E"/>
+                      </a:solidFill>
+                      <a:prstDash val="solid"/>
+                      <a:round/>
+                      <a:headEnd type="none" w="med" len="med"/>
+                      <a:tailEnd type="none" w="med" len="med"/>
+                    </a:lnL>
+                    <a:lnR w="12700" cap="flat" cmpd="sng" algn="ctr">
+                      <a:solidFill>
+                        <a:srgbClr val="172A5E"/>
+                      </a:solidFill>
+                      <a:prstDash val="solid"/>
+                      <a:round/>
+                      <a:headEnd type="none" w="med" len="med"/>
+                      <a:tailEnd type="none" w="med" len="med"/>
+                    </a:lnR>
+                    <a:lnT w="12700" cap="flat" cmpd="sng" algn="ctr">
+                      <a:solidFill>
+                        <a:srgbClr val="172A5E"/>
+                      </a:solidFill>
+                      <a:prstDash val="solid"/>
+                      <a:round/>
+                      <a:headEnd type="none" w="med" len="med"/>
+                      <a:tailEnd type="none" w="med" len="med"/>
+                    </a:lnT>
+                    <a:lnB w="12700" cap="flat" cmpd="sng" algn="ctr">
+                      <a:solidFill>
+                        <a:srgbClr val="172A5E"/>
+                      </a:solidFill>
+                      <a:prstDash val="solid"/>
+                      <a:round/>
+                      <a:headEnd type="none" w="med" len="med"/>
+                      <a:tailEnd type="none" w="med" len="med"/>
+                    </a:lnB>
+                    <a:solidFill>
+                      <a:srgbClr val="04081F"/>
+                    </a:solidFill>
+                  </a:tcPr>
+                </a:tc>
+                <a:tc>
+                  <a:txBody>
+                    <a:bodyPr/>
+                    <a:lstStyle/>
+                    <a:p>
+                      <a:pPr indent="0" marL="0">
+                        <a:buNone/>
+                      </a:pPr>
+                      <a:r>
+                        <a:rPr lang="en-US" sz="1100" dirty="0">
+                          <a:solidFill>
+                            <a:srgbClr val="AAB4D4"/>
+                          </a:solidFill>
+                          <a:latin typeface="Calibri" pitchFamily="34" charset="0"/>
+                          <a:ea typeface="Calibri" pitchFamily="34" charset="-122"/>
+                          <a:cs typeface="Calibri" pitchFamily="34" charset="-120"/>
+                        </a:rPr>
+                        <a:t>hay 3 casos publicables con cifras para mostrar en el stand</a:t>
+                      </a:r>
+                      <a:endParaRPr lang="en-US" sz="1100" dirty="0">
+                        <a:latin typeface="Calibri" charset="0"/>
+                        <a:ea typeface="Calibri" charset="0"/>
+                        <a:cs typeface="Calibri" charset="0"/>
+                      </a:endParaRPr>
+                    </a:p>
+                  </a:txBody>
+                  <a:tcPr marL="101600" marR="101600" marT="50800" marB="50800" anchor="ctr">
+                    <a:lnL w="12700" cap="flat" cmpd="sng" algn="ctr">
+                      <a:solidFill>
+                        <a:srgbClr val="172A5E"/>
+                      </a:solidFill>
+                      <a:prstDash val="solid"/>
+                      <a:round/>
+                      <a:headEnd type="none" w="med" len="med"/>
+                      <a:tailEnd type="none" w="med" len="med"/>
+                    </a:lnL>
+                    <a:lnR w="12700" cap="flat" cmpd="sng" algn="ctr">
+                      <a:solidFill>
+                        <a:srgbClr val="172A5E"/>
+                      </a:solidFill>
+                      <a:prstDash val="solid"/>
+                      <a:round/>
+                      <a:headEnd type="none" w="med" len="med"/>
+                      <a:tailEnd type="none" w="med" len="med"/>
+                    </a:lnR>
+                    <a:lnT w="12700" cap="flat" cmpd="sng" algn="ctr">
+                      <a:solidFill>
+                        <a:srgbClr val="172A5E"/>
+                      </a:solidFill>
+                      <a:prstDash val="solid"/>
+                      <a:round/>
+                      <a:headEnd type="none" w="med" len="med"/>
+                      <a:tailEnd type="none" w="med" len="med"/>
+                    </a:lnT>
+                    <a:lnB w="12700" cap="flat" cmpd="sng" algn="ctr">
+                      <a:solidFill>
+                        <a:srgbClr val="172A5E"/>
+                      </a:solidFill>
+                      <a:prstDash val="solid"/>
+                      <a:round/>
+                      <a:headEnd type="none" w="med" len="med"/>
+                      <a:tailEnd type="none" w="med" len="med"/>
+                    </a:lnB>
+                    <a:solidFill>
+                      <a:srgbClr val="04081F"/>
+                    </a:solidFill>
+                  </a:tcPr>
+                </a:tc>
+                <a:tc>
+                  <a:txBody>
+                    <a:bodyPr/>
+                    <a:lstStyle/>
+                    <a:p>
+                      <a:pPr indent="0" marL="0">
+                        <a:buNone/>
+                      </a:pPr>
+                      <a:r>
+                        <a:rPr lang="en-US" sz="1100" dirty="0">
+                          <a:solidFill>
+                            <a:srgbClr val="AAB4D4"/>
+                          </a:solidFill>
+                          <a:latin typeface="Calibri" pitchFamily="34" charset="0"/>
+                          <a:ea typeface="Calibri" pitchFamily="34" charset="-122"/>
+                          <a:cs typeface="Calibri" pitchFamily="34" charset="-120"/>
+                        </a:rPr>
+                        <a:t>4,000–7,000</a:t>
+                      </a:r>
+                      <a:endParaRPr lang="en-US" sz="1100" dirty="0">
+                        <a:latin typeface="Calibri" charset="0"/>
+                        <a:ea typeface="Calibri" charset="0"/>
+                        <a:cs typeface="Calibri" charset="0"/>
+                      </a:endParaRPr>
+                    </a:p>
+                  </a:txBody>
+                  <a:tcPr marL="101600" marR="101600" marT="50800" marB="50800" anchor="ctr">
+                    <a:lnL w="12700" cap="flat" cmpd="sng" algn="ctr">
+                      <a:solidFill>
+                        <a:srgbClr val="172A5E"/>
+                      </a:solidFill>
+                      <a:prstDash val="solid"/>
+                      <a:round/>
+                      <a:headEnd type="none" w="med" len="med"/>
+                      <a:tailEnd type="none" w="med" len="med"/>
+                    </a:lnL>
+                    <a:lnR w="12700" cap="flat" cmpd="sng" algn="ctr">
+                      <a:solidFill>
+                        <a:srgbClr val="172A5E"/>
+                      </a:solidFill>
+                      <a:prstDash val="solid"/>
+                      <a:round/>
+                      <a:headEnd type="none" w="med" len="med"/>
+                      <a:tailEnd type="none" w="med" len="med"/>
+                    </a:lnR>
+                    <a:lnT w="12700" cap="flat" cmpd="sng" algn="ctr">
+                      <a:solidFill>
+                        <a:srgbClr val="172A5E"/>
+                      </a:solidFill>
+                      <a:prstDash val="solid"/>
+                      <a:round/>
+                      <a:headEnd type="none" w="med" len="med"/>
+                      <a:tailEnd type="none" w="med" len="med"/>
+                    </a:lnT>
+                    <a:lnB w="12700" cap="flat" cmpd="sng" algn="ctr">
+                      <a:solidFill>
+                        <a:srgbClr val="172A5E"/>
+                      </a:solidFill>
+                      <a:prstDash val="solid"/>
+                      <a:round/>
+                      <a:headEnd type="none" w="med" len="med"/>
+                      <a:tailEnd type="none" w="med" len="med"/>
+                    </a:lnB>
+                    <a:solidFill>
+                      <a:srgbClr val="04081F"/>
+                    </a:solidFill>
+                  </a:tcPr>
+                </a:tc>
+              </a:tr>
+              <a:tr h="566928">
+                <a:tc>
+                  <a:txBody>
+                    <a:bodyPr/>
+                    <a:lstStyle/>
+                    <a:p>
+                      <a:pPr indent="0" marL="0">
+                        <a:buNone/>
+                      </a:pPr>
+                      <a:r>
+                        <a:rPr lang="en-US" sz="1100" dirty="0">
+                          <a:solidFill>
+                            <a:srgbClr val="AAB4D4"/>
+                          </a:solidFill>
+                          <a:latin typeface="Calibri" pitchFamily="34" charset="0"/>
+                          <a:ea typeface="Calibri" pitchFamily="34" charset="-122"/>
+                          <a:cs typeface="Calibri" pitchFamily="34" charset="-120"/>
+                        </a:rPr>
+                        <a:t>Pauta LinkedIn</a:t>
+                      </a:r>
+                      <a:endParaRPr lang="en-US" sz="1100" dirty="0">
+                        <a:latin typeface="Calibri" charset="0"/>
+                        <a:ea typeface="Calibri" charset="0"/>
+                        <a:cs typeface="Calibri" charset="0"/>
+                      </a:endParaRPr>
+                    </a:p>
+                  </a:txBody>
+                  <a:tcPr marL="101600" marR="101600" marT="50800" marB="50800" anchor="ctr">
+                    <a:lnL w="12700" cap="flat" cmpd="sng" algn="ctr">
+                      <a:solidFill>
+                        <a:srgbClr val="172A5E"/>
+                      </a:solidFill>
+                      <a:prstDash val="solid"/>
+                      <a:round/>
+                      <a:headEnd type="none" w="med" len="med"/>
+                      <a:tailEnd type="none" w="med" len="med"/>
+                    </a:lnL>
+                    <a:lnR w="12700" cap="flat" cmpd="sng" algn="ctr">
+                      <a:solidFill>
+                        <a:srgbClr val="172A5E"/>
+                      </a:solidFill>
+                      <a:prstDash val="solid"/>
+                      <a:round/>
+                      <a:headEnd type="none" w="med" len="med"/>
+                      <a:tailEnd type="none" w="med" len="med"/>
+                    </a:lnR>
+                    <a:lnT w="12700" cap="flat" cmpd="sng" algn="ctr">
+                      <a:solidFill>
+                        <a:srgbClr val="172A5E"/>
+                      </a:solidFill>
+                      <a:prstDash val="solid"/>
+                      <a:round/>
+                      <a:headEnd type="none" w="med" len="med"/>
+                      <a:tailEnd type="none" w="med" len="med"/>
+                    </a:lnT>
+                    <a:lnB w="12700" cap="flat" cmpd="sng" algn="ctr">
+                      <a:solidFill>
+                        <a:srgbClr val="172A5E"/>
+                      </a:solidFill>
+                      <a:prstDash val="solid"/>
+                      <a:round/>
+                      <a:headEnd type="none" w="med" len="med"/>
+                      <a:tailEnd type="none" w="med" len="med"/>
+                    </a:lnB>
+                    <a:solidFill>
+                      <a:srgbClr val="04081F"/>
+                    </a:solidFill>
+                  </a:tcPr>
+                </a:tc>
+                <a:tc>
+                  <a:txBody>
+                    <a:bodyPr/>
+                    <a:lstStyle/>
+                    <a:p>
+                      <a:pPr indent="0" marL="0">
+                        <a:buNone/>
+                      </a:pPr>
+                      <a:r>
+                        <a:rPr lang="en-US" sz="1100" dirty="0">
+                          <a:solidFill>
+                            <a:srgbClr val="AAB4D4"/>
+                          </a:solidFill>
+                          <a:latin typeface="Calibri" pitchFamily="34" charset="0"/>
+                          <a:ea typeface="Calibri" pitchFamily="34" charset="-122"/>
+                          <a:cs typeface="Calibri" pitchFamily="34" charset="-120"/>
+                        </a:rPr>
+                        <a:t>el estudio ya está publicado y hay algo que promocionar</a:t>
+                      </a:r>
+                      <a:endParaRPr lang="en-US" sz="1100" dirty="0">
+                        <a:latin typeface="Calibri" charset="0"/>
+                        <a:ea typeface="Calibri" charset="0"/>
+                        <a:cs typeface="Calibri" charset="0"/>
+                      </a:endParaRPr>
+                    </a:p>
+                  </a:txBody>
+                  <a:tcPr marL="101600" marR="101600" marT="50800" marB="50800" anchor="ctr">
+                    <a:lnL w="12700" cap="flat" cmpd="sng" algn="ctr">
+                      <a:solidFill>
+                        <a:srgbClr val="172A5E"/>
+                      </a:solidFill>
+                      <a:prstDash val="solid"/>
+                      <a:round/>
+                      <a:headEnd type="none" w="med" len="med"/>
+                      <a:tailEnd type="none" w="med" len="med"/>
+                    </a:lnL>
+                    <a:lnR w="12700" cap="flat" cmpd="sng" algn="ctr">
+                      <a:solidFill>
+                        <a:srgbClr val="172A5E"/>
+                      </a:solidFill>
+                      <a:prstDash val="solid"/>
+                      <a:round/>
+                      <a:headEnd type="none" w="med" len="med"/>
+                      <a:tailEnd type="none" w="med" len="med"/>
+                    </a:lnR>
+                    <a:lnT w="12700" cap="flat" cmpd="sng" algn="ctr">
+                      <a:solidFill>
+                        <a:srgbClr val="172A5E"/>
+                      </a:solidFill>
+                      <a:prstDash val="solid"/>
+                      <a:round/>
+                      <a:headEnd type="none" w="med" len="med"/>
+                      <a:tailEnd type="none" w="med" len="med"/>
+                    </a:lnT>
+                    <a:lnB w="12700" cap="flat" cmpd="sng" algn="ctr">
+                      <a:solidFill>
+                        <a:srgbClr val="172A5E"/>
+                      </a:solidFill>
+                      <a:prstDash val="solid"/>
+                      <a:round/>
+                      <a:headEnd type="none" w="med" len="med"/>
+                      <a:tailEnd type="none" w="med" len="med"/>
+                    </a:lnB>
+                    <a:solidFill>
+                      <a:srgbClr val="04081F"/>
+                    </a:solidFill>
+                  </a:tcPr>
+                </a:tc>
+                <a:tc>
+                  <a:txBody>
+                    <a:bodyPr/>
+                    <a:lstStyle/>
+                    <a:p>
+                      <a:pPr indent="0" marL="0">
+                        <a:buNone/>
+                      </a:pPr>
+                      <a:r>
+                        <a:rPr lang="en-US" sz="1100" dirty="0">
+                          <a:solidFill>
+                            <a:srgbClr val="AAB4D4"/>
+                          </a:solidFill>
+                          <a:latin typeface="Calibri" pitchFamily="34" charset="0"/>
+                          <a:ea typeface="Calibri" pitchFamily="34" charset="-122"/>
+                          <a:cs typeface="Calibri" pitchFamily="34" charset="-120"/>
+                        </a:rPr>
+                        <a:t>1,000–2,500/mes</a:t>
+                      </a:r>
+                      <a:endParaRPr lang="en-US" sz="1100" dirty="0">
+                        <a:latin typeface="Calibri" charset="0"/>
+                        <a:ea typeface="Calibri" charset="0"/>
+                        <a:cs typeface="Calibri" charset="0"/>
+                      </a:endParaRPr>
+                    </a:p>
+                  </a:txBody>
+                  <a:tcPr marL="101600" marR="101600" marT="50800" marB="50800" anchor="ctr">
+                    <a:lnL w="12700" cap="flat" cmpd="sng" algn="ctr">
+                      <a:solidFill>
+                        <a:srgbClr val="172A5E"/>
+                      </a:solidFill>
+                      <a:prstDash val="solid"/>
+                      <a:round/>
+                      <a:headEnd type="none" w="med" len="med"/>
+                      <a:tailEnd type="none" w="med" len="med"/>
+                    </a:lnL>
+                    <a:lnR w="12700" cap="flat" cmpd="sng" algn="ctr">
+                      <a:solidFill>
+                        <a:srgbClr val="172A5E"/>
+                      </a:solidFill>
+                      <a:prstDash val="solid"/>
+                      <a:round/>
+                      <a:headEnd type="none" w="med" len="med"/>
+                      <a:tailEnd type="none" w="med" len="med"/>
+                    </a:lnR>
+                    <a:lnT w="12700" cap="flat" cmpd="sng" algn="ctr">
+                      <a:solidFill>
+                        <a:srgbClr val="172A5E"/>
+                      </a:solidFill>
+                      <a:prstDash val="solid"/>
+                      <a:round/>
+                      <a:headEnd type="none" w="med" len="med"/>
+                      <a:tailEnd type="none" w="med" len="med"/>
+                    </a:lnT>
+                    <a:lnB w="12700" cap="flat" cmpd="sng" algn="ctr">
+                      <a:solidFill>
+                        <a:srgbClr val="172A5E"/>
+                      </a:solidFill>
+                      <a:prstDash val="solid"/>
+                      <a:round/>
+                      <a:headEnd type="none" w="med" len="med"/>
+                      <a:tailEnd type="none" w="med" len="med"/>
+                    </a:lnB>
+                    <a:solidFill>
+                      <a:srgbClr val="04081F"/>
+                    </a:solidFill>
+                  </a:tcPr>
+                </a:tc>
+              </a:tr>
+              <a:tr h="566928">
+                <a:tc>
+                  <a:txBody>
+                    <a:bodyPr/>
+                    <a:lstStyle/>
+                    <a:p>
+                      <a:pPr indent="0" marL="0">
+                        <a:buNone/>
+                      </a:pPr>
+                      <a:r>
+                        <a:rPr lang="en-US" sz="1100" dirty="0">
+                          <a:solidFill>
+                            <a:srgbClr val="AAB4D4"/>
+                          </a:solidFill>
+                          <a:latin typeface="Calibri" pitchFamily="34" charset="0"/>
+                          <a:ea typeface="Calibri" pitchFamily="34" charset="-122"/>
+                          <a:cs typeface="Calibri" pitchFamily="34" charset="-120"/>
+                        </a:rPr>
+                        <a:t>Primer SDR</a:t>
+                      </a:r>
+                      <a:endParaRPr lang="en-US" sz="1100" dirty="0">
+                        <a:latin typeface="Calibri" charset="0"/>
+                        <a:ea typeface="Calibri" charset="0"/>
+                        <a:cs typeface="Calibri" charset="0"/>
+                      </a:endParaRPr>
+                    </a:p>
+                  </a:txBody>
+                  <a:tcPr marL="101600" marR="101600" marT="50800" marB="50800" anchor="ctr">
+                    <a:lnL w="12700" cap="flat" cmpd="sng" algn="ctr">
+                      <a:solidFill>
+                        <a:srgbClr val="172A5E"/>
+                      </a:solidFill>
+                      <a:prstDash val="solid"/>
+                      <a:round/>
+                      <a:headEnd type="none" w="med" len="med"/>
+                      <a:tailEnd type="none" w="med" len="med"/>
+                    </a:lnL>
+                    <a:lnR w="12700" cap="flat" cmpd="sng" algn="ctr">
+                      <a:solidFill>
+                        <a:srgbClr val="172A5E"/>
+                      </a:solidFill>
+                      <a:prstDash val="solid"/>
+                      <a:round/>
+                      <a:headEnd type="none" w="med" len="med"/>
+                      <a:tailEnd type="none" w="med" len="med"/>
+                    </a:lnR>
+                    <a:lnT w="12700" cap="flat" cmpd="sng" algn="ctr">
+                      <a:solidFill>
+                        <a:srgbClr val="172A5E"/>
+                      </a:solidFill>
+                      <a:prstDash val="solid"/>
+                      <a:round/>
+                      <a:headEnd type="none" w="med" len="med"/>
+                      <a:tailEnd type="none" w="med" len="med"/>
+                    </a:lnT>
+                    <a:lnB w="12700" cap="flat" cmpd="sng" algn="ctr">
+                      <a:solidFill>
+                        <a:srgbClr val="172A5E"/>
+                      </a:solidFill>
+                      <a:prstDash val="solid"/>
+                      <a:round/>
+                      <a:headEnd type="none" w="med" len="med"/>
+                      <a:tailEnd type="none" w="med" len="med"/>
+                    </a:lnB>
+                    <a:solidFill>
+                      <a:srgbClr val="04081F"/>
+                    </a:solidFill>
+                  </a:tcPr>
+                </a:tc>
+                <a:tc>
+                  <a:txBody>
+                    <a:bodyPr/>
+                    <a:lstStyle/>
+                    <a:p>
+                      <a:pPr indent="0" marL="0">
+                        <a:buNone/>
+                      </a:pPr>
+                      <a:r>
+                        <a:rPr lang="en-US" sz="1100" dirty="0">
+                          <a:solidFill>
+                            <a:srgbClr val="AAB4D4"/>
+                          </a:solidFill>
+                          <a:latin typeface="Calibri" pitchFamily="34" charset="0"/>
+                          <a:ea typeface="Calibri" pitchFamily="34" charset="-122"/>
+                          <a:cs typeface="Calibri" pitchFamily="34" charset="-120"/>
+                        </a:rPr>
+                        <a:t>el pipeline de referencias + partner cloud supera lo que los socios atienden</a:t>
+                      </a:r>
+                      <a:endParaRPr lang="en-US" sz="1100" dirty="0">
+                        <a:latin typeface="Calibri" charset="0"/>
+                        <a:ea typeface="Calibri" charset="0"/>
+                        <a:cs typeface="Calibri" charset="0"/>
+                      </a:endParaRPr>
+                    </a:p>
+                  </a:txBody>
+                  <a:tcPr marL="101600" marR="101600" marT="50800" marB="50800" anchor="ctr">
+                    <a:lnL w="12700" cap="flat" cmpd="sng" algn="ctr">
+                      <a:solidFill>
+                        <a:srgbClr val="172A5E"/>
+                      </a:solidFill>
+                      <a:prstDash val="solid"/>
+                      <a:round/>
+                      <a:headEnd type="none" w="med" len="med"/>
+                      <a:tailEnd type="none" w="med" len="med"/>
+                    </a:lnL>
+                    <a:lnR w="12700" cap="flat" cmpd="sng" algn="ctr">
+                      <a:solidFill>
+                        <a:srgbClr val="172A5E"/>
+                      </a:solidFill>
+                      <a:prstDash val="solid"/>
+                      <a:round/>
+                      <a:headEnd type="none" w="med" len="med"/>
+                      <a:tailEnd type="none" w="med" len="med"/>
+                    </a:lnR>
+                    <a:lnT w="12700" cap="flat" cmpd="sng" algn="ctr">
+                      <a:solidFill>
+                        <a:srgbClr val="172A5E"/>
+                      </a:solidFill>
+                      <a:prstDash val="solid"/>
+                      <a:round/>
+                      <a:headEnd type="none" w="med" len="med"/>
+                      <a:tailEnd type="none" w="med" len="med"/>
+                    </a:lnT>
+                    <a:lnB w="12700" cap="flat" cmpd="sng" algn="ctr">
+                      <a:solidFill>
+                        <a:srgbClr val="172A5E"/>
+                      </a:solidFill>
+                      <a:prstDash val="solid"/>
+                      <a:round/>
+                      <a:headEnd type="none" w="med" len="med"/>
+                      <a:tailEnd type="none" w="med" len="med"/>
+                    </a:lnB>
+                    <a:solidFill>
+                      <a:srgbClr val="04081F"/>
+                    </a:solidFill>
+                  </a:tcPr>
+                </a:tc>
+                <a:tc>
+                  <a:txBody>
+                    <a:bodyPr/>
+                    <a:lstStyle/>
+                    <a:p>
+                      <a:pPr indent="0" marL="0">
+                        <a:buNone/>
+                      </a:pPr>
+                      <a:r>
+                        <a:rPr lang="en-US" sz="1100" dirty="0">
+                          <a:solidFill>
+                            <a:srgbClr val="AAB4D4"/>
+                          </a:solidFill>
+                          <a:latin typeface="Calibri" pitchFamily="34" charset="0"/>
+                          <a:ea typeface="Calibri" pitchFamily="34" charset="-122"/>
+                          <a:cs typeface="Calibri" pitchFamily="34" charset="-120"/>
+                        </a:rPr>
+                        <a:t>1,800–3,000/mes</a:t>
+                      </a:r>
+                      <a:endParaRPr lang="en-US" sz="1100" dirty="0">
+                        <a:latin typeface="Calibri" charset="0"/>
+                        <a:ea typeface="Calibri" charset="0"/>
+                        <a:cs typeface="Calibri" charset="0"/>
+                      </a:endParaRPr>
+                    </a:p>
+                  </a:txBody>
+                  <a:tcPr marL="101600" marR="101600" marT="50800" marB="50800" anchor="ctr">
+                    <a:lnL w="12700" cap="flat" cmpd="sng" algn="ctr">
+                      <a:solidFill>
+                        <a:srgbClr val="172A5E"/>
+                      </a:solidFill>
+                      <a:prstDash val="solid"/>
+                      <a:round/>
+                      <a:headEnd type="none" w="med" len="med"/>
+                      <a:tailEnd type="none" w="med" len="med"/>
+                    </a:lnL>
+                    <a:lnR w="12700" cap="flat" cmpd="sng" algn="ctr">
+                      <a:solidFill>
+                        <a:srgbClr val="172A5E"/>
+                      </a:solidFill>
+                      <a:prstDash val="solid"/>
+                      <a:round/>
+                      <a:headEnd type="none" w="med" len="med"/>
+                      <a:tailEnd type="none" w="med" len="med"/>
+                    </a:lnR>
+                    <a:lnT w="12700" cap="flat" cmpd="sng" algn="ctr">
+                      <a:solidFill>
+                        <a:srgbClr val="172A5E"/>
+                      </a:solidFill>
+                      <a:prstDash val="solid"/>
+                      <a:round/>
+                      <a:headEnd type="none" w="med" len="med"/>
+                      <a:tailEnd type="none" w="med" len="med"/>
+                    </a:lnT>
+                    <a:lnB w="12700" cap="flat" cmpd="sng" algn="ctr">
+                      <a:solidFill>
+                        <a:srgbClr val="172A5E"/>
+                      </a:solidFill>
+                      <a:prstDash val="solid"/>
+                      <a:round/>
+                      <a:headEnd type="none" w="med" len="med"/>
+                      <a:tailEnd type="none" w="med" len="med"/>
+                    </a:lnB>
+                    <a:solidFill>
+                      <a:srgbClr val="04081F"/>
+                    </a:solidFill>
+                  </a:tcPr>
+                </a:tc>
+              </a:tr>
+            </a:tbl>
+          </a:graphicData>
+        </a:graphic>
+      </p:graphicFrame>
+      <p:sp>
+        <p:nvSpPr>
+          <p:cNvPr id="6" name="Shape 3"/>
+          <p:cNvSpPr/>
+          <p:nvPr/>
+        </p:nvSpPr>
+        <p:spPr>
+          <a:xfrm>
+            <a:off x="566928" y="5394960"/>
+            <a:ext cx="11027664" cy="822960"/>
+          </a:xfrm>
+          <a:prstGeom prst="roundRect">
+            <a:avLst>
+              <a:gd name="adj" fmla="val 11111"/>
+            </a:avLst>
+          </a:prstGeom>
+          <a:solidFill>
+            <a:srgbClr val="0B1C57"/>
+          </a:solidFill>
+          <a:ln w="15875">
+            <a:solidFill>
+              <a:srgbClr val="00C2FF"/>
+            </a:solidFill>
+            <a:prstDash val="solid"/>
+          </a:ln>
+        </p:spPr>
+      </p:sp>
+      <p:sp>
+        <p:nvSpPr>
+          <p:cNvPr id="7" name="Text 4"/>
+          <p:cNvSpPr/>
+          <p:nvPr/>
+        </p:nvSpPr>
+        <p:spPr>
+          <a:xfrm>
+            <a:off x="841248" y="5559552"/>
+            <a:ext cx="10424160" cy="566928"/>
+          </a:xfrm>
+          <a:prstGeom prst="rect">
+            <a:avLst/>
+          </a:prstGeom>
+          <a:noFill/>
+          <a:ln/>
+        </p:spPr>
+        <p:txBody>
+          <a:bodyPr wrap="square" lIns="0" tIns="0" rIns="0" bIns="0" rtlCol="0" anchor="ctr"/>
+          <a:lstStyle/>
+          <a:p>
+            <a:pPr indent="0" marL="0">
+              <a:buNone/>
+            </a:pPr>
+            <a:r>
+              <a:rPr lang="en-US" sz="1250" b="1" dirty="0">
+                <a:solidFill>
+                  <a:srgbClr val="00C2FF"/>
+                </a:solidFill>
+                <a:latin typeface="Calibri" pitchFamily="34" charset="0"/>
+                <a:ea typeface="Calibri" pitchFamily="34" charset="-122"/>
+                <a:cs typeface="Calibri" pitchFamily="34" charset="-120"/>
+              </a:rPr>
+              <a:t>Nada se compromete por calendario. </a:t>
+            </a:r>
+            <a:pPr indent="0" marL="0">
+              <a:buNone/>
+            </a:pPr>
+            <a:r>
+              <a:rPr lang="en-US" sz="1250" dirty="0">
+                <a:solidFill>
+                  <a:srgbClr val="EAF1FF"/>
+                </a:solidFill>
+                <a:latin typeface="Calibri" pitchFamily="34" charset="0"/>
+                <a:ea typeface="Calibri" pitchFamily="34" charset="-122"/>
+                <a:cs typeface="Calibri" pitchFamily="34" charset="-120"/>
+              </a:rPr>
+              <a:t>Si un hito no se cumple, el gasto correspondiente sigue en $0 — el plan no obliga a gastar para "cumplir la Fase 2", obliga a ganarse el derecho a gastar.</a:t>
+            </a:r>
+            <a:endParaRPr lang="en-US" sz="1250" dirty="0"/>
+          </a:p>
+        </p:txBody>
+      </p:sp>
+      <p:sp>
+        <p:nvSpPr>
+          <p:cNvPr id="8" name="Text 5"/>
+          <p:cNvSpPr/>
+          <p:nvPr/>
+        </p:nvSpPr>
+        <p:spPr>
+          <a:xfrm>
+            <a:off x="566928" y="6199632"/>
+            <a:ext cx="11027664" cy="310896"/>
+          </a:xfrm>
+          <a:prstGeom prst="rect">
+            <a:avLst/>
+          </a:prstGeom>
+          <a:noFill/>
+          <a:ln/>
+        </p:spPr>
+        <p:txBody>
+          <a:bodyPr wrap="square" lIns="0" tIns="0" rIns="0" bIns="0" rtlCol="0" anchor="ctr"/>
+          <a:lstStyle/>
+          <a:p>
+            <a:pPr indent="0" marL="0">
+              <a:buNone/>
+            </a:pPr>
+            <a:r>
+              <a:rPr lang="en-US" sz="1050" i="1" dirty="0">
+                <a:solidFill>
+                  <a:srgbClr val="7B87AD"/>
+                </a:solidFill>
+                <a:latin typeface="Calibri" pitchFamily="34" charset="0"/>
+                <a:ea typeface="Calibri" pitchFamily="34" charset="-122"/>
+                <a:cs typeface="Calibri" pitchFamily="34" charset="-120"/>
+              </a:rPr>
+              <a:t>Referencia de Hinge 2026: las firmas de alto crecimiento invierten 12% de su facturación en marketing — aplicable una vez que exista facturación que medir.</a:t>
+            </a:r>
+            <a:endParaRPr lang="en-US" sz="1050" dirty="0"/>
+          </a:p>
+        </p:txBody>
+      </p:sp>
+    </p:spTree>
+  </p:cSld>
+  <p:clrMapOvr>
+    <a:masterClrMapping/>
+  </p:clrMapOvr>
+</p:sld>
+</file>
+
+<file path=ppt/slides/slide16.xml><?xml version="1.0" encoding="utf-8"?>
+<p:sld xmlns:a="http://schemas.openxmlformats.org/drawingml/2006/main" xmlns:r="http://schemas.openxmlformats.org/officeDocument/2006/relationships" xmlns:p="http://schemas.openxmlformats.org/presentationml/2006/main">
+  <p:cSld name="Slide 16">
+    <p:bg>
+      <p:bgPr>
+        <a:solidFill>
+          <a:srgbClr val="04081F"/>
+        </a:solidFill>
+      </p:bgPr>
+    </p:bg>
+    <p:spTree>
+      <p:nvGrpSpPr>
+        <p:cNvPr id="1" name=""/>
+        <p:cNvGrpSpPr/>
+        <p:nvPr/>
+      </p:nvGrpSpPr>
+      <p:grpSpPr>
+        <a:xfrm>
+          <a:off x="0" y="0"/>
+          <a:ext cx="0" cy="0"/>
+          <a:chOff x="0" y="0"/>
+          <a:chExt cx="0" cy="0"/>
+        </a:xfrm>
+      </p:grpSpPr>
+      <p:sp>
+        <p:nvSpPr>
+          <p:cNvPr id="2" name="Text 0"/>
+          <p:cNvSpPr/>
+          <p:nvPr/>
+        </p:nvSpPr>
+        <p:spPr>
+          <a:xfrm>
+            <a:off x="566928" y="384048"/>
+            <a:ext cx="11027664" cy="237744"/>
+          </a:xfrm>
+          <a:prstGeom prst="rect">
+            <a:avLst/>
+          </a:prstGeom>
+          <a:noFill/>
+          <a:ln/>
+        </p:spPr>
+        <p:txBody>
+          <a:bodyPr wrap="square" lIns="0" tIns="0" rIns="0" bIns="0" rtlCol="0" anchor="ctr"/>
+          <a:lstStyle/>
+          <a:p>
+            <a:pPr indent="0" marL="0">
+              <a:buNone/>
+            </a:pPr>
+            <a:r>
+              <a:rPr lang="en-US" sz="1100" b="1" spc="160" kern="0" dirty="0">
+                <a:solidFill>
+                  <a:srgbClr val="00C2FF"/>
+                </a:solidFill>
+                <a:latin typeface="Calibri" pitchFamily="34" charset="0"/>
+                <a:ea typeface="Calibri" pitchFamily="34" charset="-122"/>
+                <a:cs typeface="Calibri" pitchFamily="34" charset="-120"/>
+              </a:rPr>
               <a:t>CÓMO SABREMOS SI FUNCIONA</a:t>
             </a:r>
             <a:endParaRPr lang="en-US" sz="1100" dirty="0"/>
@@ -13144,7 +13377,7 @@
       </p:sp>
       <p:graphicFrame>
         <p:nvGraphicFramePr>
-          <p:cNvPr id="16" name="Table 0"/>
+          <p:cNvPr id="17" name="Table 0"/>
           <p:cNvGraphicFramePr>
             <a:graphicFrameLocks noGrp="1"/>
           </p:cNvGraphicFramePr>
@@ -15767,9 +16000,9 @@
 </p:sld>
 </file>
 
-<file path=ppt/slides/slide16.xml><?xml version="1.0" encoding="utf-8"?>
+<file path=ppt/slides/slide17.xml><?xml version="1.0" encoding="utf-8"?>
 <p:sld xmlns:a="http://schemas.openxmlformats.org/drawingml/2006/main" xmlns:r="http://schemas.openxmlformats.org/officeDocument/2006/relationships" xmlns:p="http://schemas.openxmlformats.org/presentationml/2006/main">
-  <p:cSld name="Slide 16">
+  <p:cSld name="Slide 17">
     <p:bg>
       <p:bgPr>
         <a:solidFill>
@@ -16509,9 +16742,9 @@
 </p:sld>
 </file>
 
-<file path=ppt/slides/slide17.xml><?xml version="1.0" encoding="utf-8"?>
+<file path=ppt/slides/slide18.xml><?xml version="1.0" encoding="utf-8"?>
 <p:sld xmlns:a="http://schemas.openxmlformats.org/drawingml/2006/main" xmlns:r="http://schemas.openxmlformats.org/officeDocument/2006/relationships" xmlns:p="http://schemas.openxmlformats.org/presentationml/2006/main">
-  <p:cSld name="Slide 17">
+  <p:cSld name="Slide 18">
     <p:bg>
       <p:bgPr>
         <a:solidFill>
